--- a/output/Unilever_Pasta_Noodles_Jun2026.pptx
+++ b/output/Unilever_Pasta_Noodles_Jun2026.pptx
@@ -504,7 +504,7 @@
           <a:lstStyle/>
           <a:p>
             <a:r>
-              <a:t>Pasta June 2026 value R1,239,227; volume 1,568.0 kg; estimated 25,236 pots. Price is value/volume, i.e. R/kg. Pack price = R/kg × pack weight.</a:t>
+              <a:t>Pasta MAT 3289604029 vs YA 3127415433. Noodles MAT 2117632516. Retailer set as in the extract header (Clicks, Massmart, Spar, Shoprite, PnP, etc.).</a:t>
             </a:r>
           </a:p>
         </p:txBody>
@@ -574,7 +574,7 @@
           <a:lstStyle/>
           <a:p>
             <a:r>
-              <a:t>Do not present Chicken Noodle soup as the Noodles category. Instant noodle cup rows: 4 months, all zero. Chicken Noodle soup value Mar–Jun: R0.66m → R1.01m → R1.29m → R2.12m.</a:t>
+              <a:t>Sachet price uses brand R/kg × typical unit grams (Kellogg's 70g, Maggi 68g, Indomie 80g, Roka 85g, Samyang 130g, Knorr 63g). 86% of noodles value is in the R5–8 unit-pack band. Knorr Pasta Pots are not in the file before Jun 26.</a:t>
             </a:r>
           </a:p>
         </p:txBody>
@@ -644,7 +644,7 @@
           <a:lstStyle/>
           <a:p>
             <a:r>
-              <a:t>Ask the analyst / Nielsen owner for a category extract, not a Unilever brand extract. Same 12mm monthly grouping is fine if all manufacturers are included.</a:t>
+              <a:t>Unilever MAT share of noodles is ~0.06% because the SKUs have one month of sales. Do not read June share as a 12-month position.</a:t>
             </a:r>
           </a:p>
         </p:txBody>
@@ -3659,7 +3659,7 @@
         <p:spPr>
           <a:xfrm>
             <a:off x="0" y="0"/>
-            <a:ext cx="12191695" cy="841248"/>
+            <a:ext cx="12191695" cy="804672"/>
           </a:xfrm>
           <a:prstGeom prst="rect">
             <a:avLst/>
@@ -3701,8 +3701,8 @@
         </p:nvSpPr>
         <p:spPr>
           <a:xfrm>
-            <a:off x="365760" y="109728"/>
-            <a:ext cx="9601200" cy="384048"/>
+            <a:off x="347472" y="91440"/>
+            <a:ext cx="11430000" cy="365760"/>
           </a:xfrm>
           <a:prstGeom prst="rect">
             <a:avLst/>
@@ -3717,13 +3717,13 @@
           <a:p>
             <a:pPr algn="l"/>
             <a:r>
-              <a:rPr sz="2400" b="1">
+              <a:rPr sz="2200" b="1">
                 <a:solidFill>
                   <a:srgbClr val="FFFFFF"/>
                 </a:solidFill>
                 <a:latin typeface="Calibri"/>
               </a:rPr>
-              <a:t>Pasta: Unilever snapshot (June 2026)</a:t>
+              <a:t>Pasta category: noodles now run the shop</a:t>
             </a:r>
           </a:p>
         </p:txBody>
@@ -3736,8 +3736,8 @@
         </p:nvSpPr>
         <p:spPr>
           <a:xfrm>
-            <a:off x="365760" y="475488"/>
-            <a:ext cx="11338560" cy="292608"/>
+            <a:off x="347472" y="457200"/>
+            <a:ext cx="11430000" cy="274320"/>
           </a:xfrm>
           <a:prstGeom prst="rect">
             <a:avLst/>
@@ -3752,13 +3752,13 @@
           <a:p>
             <a:pPr algn="l"/>
             <a:r>
-              <a:rPr sz="1200" b="0">
+              <a:rPr sz="1100" b="0">
                 <a:solidFill>
                   <a:srgbClr val="C9D6E3"/>
                 </a:solidFill>
                 <a:latin typeface="Calibri"/>
               </a:rPr>
-              <a:t>Knorr Pasta Pots only  ·  No competitor manufacturers in this file  ·  Pasta does not appear in Jul 2025–May 2026</a:t>
+              <a:t>South Africa  ·  12 months to Jun 26  ·  All manufacturers</a:t>
             </a:r>
           </a:p>
         </p:txBody>
@@ -3814,8 +3814,8 @@
         </p:nvSpPr>
         <p:spPr>
           <a:xfrm>
-            <a:off x="365760" y="6620256"/>
-            <a:ext cx="11430000" cy="201168"/>
+            <a:off x="347472" y="6620256"/>
+            <a:ext cx="11521440" cy="201168"/>
           </a:xfrm>
           <a:prstGeom prst="rect">
             <a:avLst/>
@@ -3836,7 +3836,7 @@
                 </a:solidFill>
                 <a:latin typeface="Calibri"/>
               </a:rPr>
-              <a:t>Source: Monthly Time Groupings Export, South Africa  ·  Period in file: Jul 2025–Jun 2026  ·  Measures: 12mm CY Value, Volume, Ave Price (Value/Volume)</a:t>
+              <a:t>Source: Monthly Trended Export, South Africa Pasta, multi-retailer  ·  12 months = Jul 25–Jun 26 vs YA Jul 24–Jun 25  ·  Price = value ÷ volume (R/kg)  ·  Latest month = Jun 26</a:t>
             </a:r>
           </a:p>
         </p:txBody>
@@ -3849,8 +3849,8 @@
         </p:nvSpPr>
         <p:spPr>
           <a:xfrm>
-            <a:off x="365760" y="1024128"/>
-            <a:ext cx="2788920" cy="896112"/>
+            <a:off x="347472" y="950976"/>
+            <a:ext cx="2834640" cy="804672"/>
           </a:xfrm>
           <a:prstGeom prst="rect">
             <a:avLst/>
@@ -3894,8 +3894,8 @@
         </p:nvSpPr>
         <p:spPr>
           <a:xfrm>
-            <a:off x="365760" y="1024128"/>
-            <a:ext cx="64008" cy="896112"/>
+            <a:off x="347472" y="950976"/>
+            <a:ext cx="64008" cy="804672"/>
           </a:xfrm>
           <a:prstGeom prst="rect">
             <a:avLst/>
@@ -3937,78 +3937,8 @@
         </p:nvSpPr>
         <p:spPr>
           <a:xfrm>
-            <a:off x="512064" y="1097280"/>
-            <a:ext cx="2587752" cy="219456"/>
-          </a:xfrm>
-          <a:prstGeom prst="rect">
-            <a:avLst/>
-          </a:prstGeom>
-          <a:noFill/>
-        </p:spPr>
-        <p:txBody>
-          <a:bodyPr wrap="square">
-            <a:spAutoFit/>
-          </a:bodyPr>
-          <a:lstStyle/>
-          <a:p>
-            <a:pPr algn="l"/>
-            <a:r>
-              <a:rPr sz="1100" b="0">
-                <a:solidFill>
-                  <a:srgbClr val="5C6B73"/>
-                </a:solidFill>
-                <a:latin typeface="Calibri"/>
-              </a:rPr>
-              <a:t>VALUE</a:t>
-            </a:r>
-          </a:p>
-        </p:txBody>
-      </p:sp>
-      <p:sp>
-        <p:nvSpPr>
-          <p:cNvPr id="10" name="TextBox 9"/>
-          <p:cNvSpPr txBox="1"/>
-          <p:nvPr/>
-        </p:nvSpPr>
-        <p:spPr>
-          <a:xfrm>
-            <a:off x="512064" y="1298448"/>
-            <a:ext cx="2587752" cy="329184"/>
-          </a:xfrm>
-          <a:prstGeom prst="rect">
-            <a:avLst/>
-          </a:prstGeom>
-          <a:noFill/>
-        </p:spPr>
-        <p:txBody>
-          <a:bodyPr wrap="square">
-            <a:spAutoFit/>
-          </a:bodyPr>
-          <a:lstStyle/>
-          <a:p>
-            <a:pPr algn="l"/>
-            <a:r>
-              <a:rPr sz="2000" b="1">
-                <a:solidFill>
-                  <a:srgbClr val="0B2545"/>
-                </a:solidFill>
-                <a:latin typeface="Calibri"/>
-              </a:rPr>
-              <a:t>R1.24m</a:t>
-            </a:r>
-          </a:p>
-        </p:txBody>
-      </p:sp>
-      <p:sp>
-        <p:nvSpPr>
-          <p:cNvPr id="11" name="TextBox 10"/>
-          <p:cNvSpPr txBox="1"/>
-          <p:nvPr/>
-        </p:nvSpPr>
-        <p:spPr>
-          <a:xfrm>
-            <a:off x="512064" y="1627632"/>
-            <a:ext cx="2587752" cy="219456"/>
+            <a:off x="493776" y="1005840"/>
+            <a:ext cx="2633472" cy="201168"/>
           </a:xfrm>
           <a:prstGeom prst="rect">
             <a:avLst/>
@@ -4029,7 +3959,77 @@
                 </a:solidFill>
                 <a:latin typeface="Calibri"/>
               </a:rPr>
-              <a:t>June 2026 only</a:t>
+              <a:t>12-MONTH VALUE</a:t>
+            </a:r>
+          </a:p>
+        </p:txBody>
+      </p:sp>
+      <p:sp>
+        <p:nvSpPr>
+          <p:cNvPr id="10" name="TextBox 9"/>
+          <p:cNvSpPr txBox="1"/>
+          <p:nvPr/>
+        </p:nvSpPr>
+        <p:spPr>
+          <a:xfrm>
+            <a:off x="493776" y="1188720"/>
+            <a:ext cx="2633472" cy="292608"/>
+          </a:xfrm>
+          <a:prstGeom prst="rect">
+            <a:avLst/>
+          </a:prstGeom>
+          <a:noFill/>
+        </p:spPr>
+        <p:txBody>
+          <a:bodyPr wrap="square">
+            <a:spAutoFit/>
+          </a:bodyPr>
+          <a:lstStyle/>
+          <a:p>
+            <a:pPr algn="l"/>
+            <a:r>
+              <a:rPr sz="1800" b="1">
+                <a:solidFill>
+                  <a:srgbClr val="0B2545"/>
+                </a:solidFill>
+                <a:latin typeface="Calibri"/>
+              </a:rPr>
+              <a:t>R3.3bn</a:t>
+            </a:r>
+          </a:p>
+        </p:txBody>
+      </p:sp>
+      <p:sp>
+        <p:nvSpPr>
+          <p:cNvPr id="11" name="TextBox 10"/>
+          <p:cNvSpPr txBox="1"/>
+          <p:nvPr/>
+        </p:nvSpPr>
+        <p:spPr>
+          <a:xfrm>
+            <a:off x="493776" y="1481328"/>
+            <a:ext cx="2633472" cy="201168"/>
+          </a:xfrm>
+          <a:prstGeom prst="rect">
+            <a:avLst/>
+          </a:prstGeom>
+          <a:noFill/>
+        </p:spPr>
+        <p:txBody>
+          <a:bodyPr wrap="square">
+            <a:spAutoFit/>
+          </a:bodyPr>
+          <a:lstStyle/>
+          <a:p>
+            <a:pPr algn="l"/>
+            <a:r>
+              <a:rPr sz="1000" b="0">
+                <a:solidFill>
+                  <a:srgbClr val="5C6B73"/>
+                </a:solidFill>
+                <a:latin typeface="Calibri"/>
+              </a:rPr>
+              <a:t>+5.2% vs YA  ·  vol -0.7%</a:t>
             </a:r>
           </a:p>
         </p:txBody>
@@ -4042,8 +4042,8 @@
         </p:nvSpPr>
         <p:spPr>
           <a:xfrm>
-            <a:off x="3291840" y="1024128"/>
-            <a:ext cx="2788920" cy="896112"/>
+            <a:off x="3273552" y="950976"/>
+            <a:ext cx="2834640" cy="804672"/>
           </a:xfrm>
           <a:prstGeom prst="rect">
             <a:avLst/>
@@ -4087,8 +4087,8 @@
         </p:nvSpPr>
         <p:spPr>
           <a:xfrm>
-            <a:off x="3291840" y="1024128"/>
-            <a:ext cx="64008" cy="896112"/>
+            <a:off x="3273552" y="950976"/>
+            <a:ext cx="64008" cy="804672"/>
           </a:xfrm>
           <a:prstGeom prst="rect">
             <a:avLst/>
@@ -4130,78 +4130,8 @@
         </p:nvSpPr>
         <p:spPr>
           <a:xfrm>
-            <a:off x="3438144" y="1097280"/>
-            <a:ext cx="2587752" cy="219456"/>
-          </a:xfrm>
-          <a:prstGeom prst="rect">
-            <a:avLst/>
-          </a:prstGeom>
-          <a:noFill/>
-        </p:spPr>
-        <p:txBody>
-          <a:bodyPr wrap="square">
-            <a:spAutoFit/>
-          </a:bodyPr>
-          <a:lstStyle/>
-          <a:p>
-            <a:pPr algn="l"/>
-            <a:r>
-              <a:rPr sz="1100" b="0">
-                <a:solidFill>
-                  <a:srgbClr val="5C6B73"/>
-                </a:solidFill>
-                <a:latin typeface="Calibri"/>
-              </a:rPr>
-              <a:t>VOLUME</a:t>
-            </a:r>
-          </a:p>
-        </p:txBody>
-      </p:sp>
-      <p:sp>
-        <p:nvSpPr>
-          <p:cNvPr id="15" name="TextBox 14"/>
-          <p:cNvSpPr txBox="1"/>
-          <p:nvPr/>
-        </p:nvSpPr>
-        <p:spPr>
-          <a:xfrm>
-            <a:off x="3438144" y="1298448"/>
-            <a:ext cx="2587752" cy="329184"/>
-          </a:xfrm>
-          <a:prstGeom prst="rect">
-            <a:avLst/>
-          </a:prstGeom>
-          <a:noFill/>
-        </p:spPr>
-        <p:txBody>
-          <a:bodyPr wrap="square">
-            <a:spAutoFit/>
-          </a:bodyPr>
-          <a:lstStyle/>
-          <a:p>
-            <a:pPr algn="l"/>
-            <a:r>
-              <a:rPr sz="2000" b="1">
-                <a:solidFill>
-                  <a:srgbClr val="0B2545"/>
-                </a:solidFill>
-                <a:latin typeface="Calibri"/>
-              </a:rPr>
-              <a:t>1.57 tonnes</a:t>
-            </a:r>
-          </a:p>
-        </p:txBody>
-      </p:sp>
-      <p:sp>
-        <p:nvSpPr>
-          <p:cNvPr id="16" name="TextBox 15"/>
-          <p:cNvSpPr txBox="1"/>
-          <p:nvPr/>
-        </p:nvSpPr>
-        <p:spPr>
-          <a:xfrm>
-            <a:off x="3438144" y="1627632"/>
-            <a:ext cx="2587752" cy="219456"/>
+            <a:off x="3419856" y="1005840"/>
+            <a:ext cx="2633472" cy="201168"/>
           </a:xfrm>
           <a:prstGeom prst="rect">
             <a:avLst/>
@@ -4222,7 +4152,77 @@
                 </a:solidFill>
                 <a:latin typeface="Calibri"/>
               </a:rPr>
-              <a:t>25.2k pots</a:t>
+              <a:t>JUNE 2026</a:t>
+            </a:r>
+          </a:p>
+        </p:txBody>
+      </p:sp>
+      <p:sp>
+        <p:nvSpPr>
+          <p:cNvPr id="15" name="TextBox 14"/>
+          <p:cNvSpPr txBox="1"/>
+          <p:nvPr/>
+        </p:nvSpPr>
+        <p:spPr>
+          <a:xfrm>
+            <a:off x="3419856" y="1188720"/>
+            <a:ext cx="2633472" cy="292608"/>
+          </a:xfrm>
+          <a:prstGeom prst="rect">
+            <a:avLst/>
+          </a:prstGeom>
+          <a:noFill/>
+        </p:spPr>
+        <p:txBody>
+          <a:bodyPr wrap="square">
+            <a:spAutoFit/>
+          </a:bodyPr>
+          <a:lstStyle/>
+          <a:p>
+            <a:pPr algn="l"/>
+            <a:r>
+              <a:rPr sz="1800" b="1">
+                <a:solidFill>
+                  <a:srgbClr val="0B2545"/>
+                </a:solidFill>
+                <a:latin typeface="Calibri"/>
+              </a:rPr>
+              <a:t>R337.1m</a:t>
+            </a:r>
+          </a:p>
+        </p:txBody>
+      </p:sp>
+      <p:sp>
+        <p:nvSpPr>
+          <p:cNvPr id="16" name="TextBox 15"/>
+          <p:cNvSpPr txBox="1"/>
+          <p:nvPr/>
+        </p:nvSpPr>
+        <p:spPr>
+          <a:xfrm>
+            <a:off x="3419856" y="1481328"/>
+            <a:ext cx="2633472" cy="201168"/>
+          </a:xfrm>
+          <a:prstGeom prst="rect">
+            <a:avLst/>
+          </a:prstGeom>
+          <a:noFill/>
+        </p:spPr>
+        <p:txBody>
+          <a:bodyPr wrap="square">
+            <a:spAutoFit/>
+          </a:bodyPr>
+          <a:lstStyle/>
+          <a:p>
+            <a:pPr algn="l"/>
+            <a:r>
+              <a:rPr sz="1000" b="0">
+                <a:solidFill>
+                  <a:srgbClr val="5C6B73"/>
+                </a:solidFill>
+                <a:latin typeface="Calibri"/>
+              </a:rPr>
+              <a:t>+7.7% vs Jun 25</a:t>
             </a:r>
           </a:p>
         </p:txBody>
@@ -4235,8 +4235,8 @@
         </p:nvSpPr>
         <p:spPr>
           <a:xfrm>
-            <a:off x="6217920" y="1024128"/>
-            <a:ext cx="2788920" cy="896112"/>
+            <a:off x="6199632" y="950976"/>
+            <a:ext cx="2834640" cy="804672"/>
           </a:xfrm>
           <a:prstGeom prst="rect">
             <a:avLst/>
@@ -4280,8 +4280,8 @@
         </p:nvSpPr>
         <p:spPr>
           <a:xfrm>
-            <a:off x="6217920" y="1024128"/>
-            <a:ext cx="64008" cy="896112"/>
+            <a:off x="6199632" y="950976"/>
+            <a:ext cx="64008" cy="804672"/>
           </a:xfrm>
           <a:prstGeom prst="rect">
             <a:avLst/>
@@ -4323,78 +4323,8 @@
         </p:nvSpPr>
         <p:spPr>
           <a:xfrm>
-            <a:off x="6364224" y="1097280"/>
-            <a:ext cx="2587752" cy="219456"/>
-          </a:xfrm>
-          <a:prstGeom prst="rect">
-            <a:avLst/>
-          </a:prstGeom>
-          <a:noFill/>
-        </p:spPr>
-        <p:txBody>
-          <a:bodyPr wrap="square">
-            <a:spAutoFit/>
-          </a:bodyPr>
-          <a:lstStyle/>
-          <a:p>
-            <a:pPr algn="l"/>
-            <a:r>
-              <a:rPr sz="1100" b="0">
-                <a:solidFill>
-                  <a:srgbClr val="5C6B73"/>
-                </a:solidFill>
-                <a:latin typeface="Calibri"/>
-              </a:rPr>
-              <a:t>PRICE POINT</a:t>
-            </a:r>
-          </a:p>
-        </p:txBody>
-      </p:sp>
-      <p:sp>
-        <p:nvSpPr>
-          <p:cNvPr id="20" name="TextBox 19"/>
-          <p:cNvSpPr txBox="1"/>
-          <p:nvPr/>
-        </p:nvSpPr>
-        <p:spPr>
-          <a:xfrm>
-            <a:off x="6364224" y="1298448"/>
-            <a:ext cx="2587752" cy="329184"/>
-          </a:xfrm>
-          <a:prstGeom prst="rect">
-            <a:avLst/>
-          </a:prstGeom>
-          <a:noFill/>
-        </p:spPr>
-        <p:txBody>
-          <a:bodyPr wrap="square">
-            <a:spAutoFit/>
-          </a:bodyPr>
-          <a:lstStyle/>
-          <a:p>
-            <a:pPr algn="l"/>
-            <a:r>
-              <a:rPr sz="2000" b="1">
-                <a:solidFill>
-                  <a:srgbClr val="0B2545"/>
-                </a:solidFill>
-                <a:latin typeface="Calibri"/>
-              </a:rPr>
-              <a:t>R49 / pot</a:t>
-            </a:r>
-          </a:p>
-        </p:txBody>
-      </p:sp>
-      <p:sp>
-        <p:nvSpPr>
-          <p:cNvPr id="21" name="TextBox 20"/>
-          <p:cNvSpPr txBox="1"/>
-          <p:nvPr/>
-        </p:nvSpPr>
-        <p:spPr>
-          <a:xfrm>
-            <a:off x="6364224" y="1627632"/>
-            <a:ext cx="2587752" cy="219456"/>
+            <a:off x="6345936" y="1005840"/>
+            <a:ext cx="2633472" cy="201168"/>
           </a:xfrm>
           <a:prstGeom prst="rect">
             <a:avLst/>
@@ -4415,7 +4345,77 @@
                 </a:solidFill>
                 <a:latin typeface="Calibri"/>
               </a:rPr>
-              <a:t>R779–832 / kg</a:t>
+              <a:t>NOODLES SHARE</a:t>
+            </a:r>
+          </a:p>
+        </p:txBody>
+      </p:sp>
+      <p:sp>
+        <p:nvSpPr>
+          <p:cNvPr id="20" name="TextBox 19"/>
+          <p:cNvSpPr txBox="1"/>
+          <p:nvPr/>
+        </p:nvSpPr>
+        <p:spPr>
+          <a:xfrm>
+            <a:off x="6345936" y="1188720"/>
+            <a:ext cx="2633472" cy="292608"/>
+          </a:xfrm>
+          <a:prstGeom prst="rect">
+            <a:avLst/>
+          </a:prstGeom>
+          <a:noFill/>
+        </p:spPr>
+        <p:txBody>
+          <a:bodyPr wrap="square">
+            <a:spAutoFit/>
+          </a:bodyPr>
+          <a:lstStyle/>
+          <a:p>
+            <a:pPr algn="l"/>
+            <a:r>
+              <a:rPr sz="1800" b="1">
+                <a:solidFill>
+                  <a:srgbClr val="0B2545"/>
+                </a:solidFill>
+                <a:latin typeface="Calibri"/>
+              </a:rPr>
+              <a:t>64% of Pasta</a:t>
+            </a:r>
+          </a:p>
+        </p:txBody>
+      </p:sp>
+      <p:sp>
+        <p:nvSpPr>
+          <p:cNvPr id="21" name="TextBox 20"/>
+          <p:cNvSpPr txBox="1"/>
+          <p:nvPr/>
+        </p:nvSpPr>
+        <p:spPr>
+          <a:xfrm>
+            <a:off x="6345936" y="1481328"/>
+            <a:ext cx="2633472" cy="201168"/>
+          </a:xfrm>
+          <a:prstGeom prst="rect">
+            <a:avLst/>
+          </a:prstGeom>
+          <a:noFill/>
+        </p:spPr>
+        <p:txBody>
+          <a:bodyPr wrap="square">
+            <a:spAutoFit/>
+          </a:bodyPr>
+          <a:lstStyle/>
+          <a:p>
+            <a:pPr algn="l"/>
+            <a:r>
+              <a:rPr sz="1000" b="0">
+                <a:solidFill>
+                  <a:srgbClr val="5C6B73"/>
+                </a:solidFill>
+                <a:latin typeface="Calibri"/>
+              </a:rPr>
+              <a:t>+1.8pp vs YA</a:t>
             </a:r>
           </a:p>
         </p:txBody>
@@ -4428,8 +4428,8 @@
         </p:nvSpPr>
         <p:spPr>
           <a:xfrm>
-            <a:off x="9144000" y="1024128"/>
-            <a:ext cx="2679192" cy="896112"/>
+            <a:off x="9125712" y="950976"/>
+            <a:ext cx="2706624" cy="804672"/>
           </a:xfrm>
           <a:prstGeom prst="rect">
             <a:avLst/>
@@ -4473,8 +4473,8 @@
         </p:nvSpPr>
         <p:spPr>
           <a:xfrm>
-            <a:off x="9144000" y="1024128"/>
-            <a:ext cx="64008" cy="896112"/>
+            <a:off x="9125712" y="950976"/>
+            <a:ext cx="64008" cy="804672"/>
           </a:xfrm>
           <a:prstGeom prst="rect">
             <a:avLst/>
@@ -4516,78 +4516,8 @@
         </p:nvSpPr>
         <p:spPr>
           <a:xfrm>
-            <a:off x="9290304" y="1097280"/>
-            <a:ext cx="2478024" cy="219456"/>
-          </a:xfrm>
-          <a:prstGeom prst="rect">
-            <a:avLst/>
-          </a:prstGeom>
-          <a:noFill/>
-        </p:spPr>
-        <p:txBody>
-          <a:bodyPr wrap="square">
-            <a:spAutoFit/>
-          </a:bodyPr>
-          <a:lstStyle/>
-          <a:p>
-            <a:pPr algn="l"/>
-            <a:r>
-              <a:rPr sz="1100" b="0">
-                <a:solidFill>
-                  <a:srgbClr val="5C6B73"/>
-                </a:solidFill>
-                <a:latin typeface="Calibri"/>
-              </a:rPr>
-              <a:t>PLAYERS IN FILE</a:t>
-            </a:r>
-          </a:p>
-        </p:txBody>
-      </p:sp>
-      <p:sp>
-        <p:nvSpPr>
-          <p:cNvPr id="25" name="TextBox 24"/>
-          <p:cNvSpPr txBox="1"/>
-          <p:nvPr/>
-        </p:nvSpPr>
-        <p:spPr>
-          <a:xfrm>
-            <a:off x="9290304" y="1298448"/>
-            <a:ext cx="2478024" cy="329184"/>
-          </a:xfrm>
-          <a:prstGeom prst="rect">
-            <a:avLst/>
-          </a:prstGeom>
-          <a:noFill/>
-        </p:spPr>
-        <p:txBody>
-          <a:bodyPr wrap="square">
-            <a:spAutoFit/>
-          </a:bodyPr>
-          <a:lstStyle/>
-          <a:p>
-            <a:pPr algn="l"/>
-            <a:r>
-              <a:rPr sz="2000" b="1">
-                <a:solidFill>
-                  <a:srgbClr val="0B2545"/>
-                </a:solidFill>
-                <a:latin typeface="Calibri"/>
-              </a:rPr>
-              <a:t>Knorr only</a:t>
-            </a:r>
-          </a:p>
-        </p:txBody>
-      </p:sp>
-      <p:sp>
-        <p:nvSpPr>
-          <p:cNvPr id="26" name="TextBox 25"/>
-          <p:cNvSpPr txBox="1"/>
-          <p:nvPr/>
-        </p:nvSpPr>
-        <p:spPr>
-          <a:xfrm>
-            <a:off x="9290304" y="1627632"/>
-            <a:ext cx="2478024" cy="219456"/>
+            <a:off x="9272016" y="1005840"/>
+            <a:ext cx="2505456" cy="201168"/>
           </a:xfrm>
           <a:prstGeom prst="rect">
             <a:avLst/>
@@ -4608,604 +4538,119 @@
                 </a:solidFill>
                 <a:latin typeface="Calibri"/>
               </a:rPr>
-              <a:t>Unilever, 3 SKUs</a:t>
-            </a:r>
-          </a:p>
-        </p:txBody>
-      </p:sp>
-      <p:graphicFrame>
-        <p:nvGraphicFramePr>
-          <p:cNvPr id="27" name="Table 26"/>
-          <p:cNvGraphicFramePr>
-            <a:graphicFrameLocks noGrp="1"/>
-          </p:cNvGraphicFramePr>
+              <a:t>CATEGORY PRICE</a:t>
+            </a:r>
+          </a:p>
+        </p:txBody>
+      </p:sp>
+      <p:sp>
+        <p:nvSpPr>
+          <p:cNvPr id="25" name="TextBox 24"/>
+          <p:cNvSpPr txBox="1"/>
           <p:nvPr/>
-        </p:nvGraphicFramePr>
-        <p:xfrm>
-          <a:off x="365760" y="2084831"/>
-          <a:ext cx="6903720" cy="1965960"/>
-        </p:xfrm>
-        <a:graphic>
-          <a:graphicData uri="http://schemas.openxmlformats.org/drawingml/2006/table">
-            <a:tbl>
-              <a:tblPr firstRow="1" bandRow="1">
-                <a:tableStyleId>{5C22544A-7EE6-4342-B048-85BDC9FD1C3A}</a:tableStyleId>
-              </a:tblPr>
-              <a:tblGrid>
-                <a:gridCol w="1965960"/>
-                <a:gridCol w="960120"/>
-                <a:gridCol w="822960"/>
-                <a:gridCol w="1051560"/>
-                <a:gridCol w="960120"/>
-                <a:gridCol w="1143000"/>
-              </a:tblGrid>
-              <a:tr h="491490">
-                <a:tc>
-                  <a:txBody>
-                    <a:bodyPr/>
-                    <a:lstStyle/>
-                    <a:p>
-                      <a:pPr algn="l"/>
-                      <a:r>
-                        <a:rPr sz="1100" b="1">
-                          <a:solidFill>
-                            <a:srgbClr val="FFFFFF"/>
-                          </a:solidFill>
-                          <a:latin typeface="Calibri"/>
-                        </a:rPr>
-                        <a:t>SKU</a:t>
-                      </a:r>
-                    </a:p>
-                  </a:txBody>
-                  <a:tcPr>
-                    <a:solidFill>
-                      <a:srgbClr val="0B2545"/>
-                    </a:solidFill>
-                  </a:tcPr>
-                </a:tc>
-                <a:tc>
-                  <a:txBody>
-                    <a:bodyPr/>
-                    <a:lstStyle/>
-                    <a:p>
-                      <a:pPr algn="r"/>
-                      <a:r>
-                        <a:rPr sz="1100" b="1">
-                          <a:solidFill>
-                            <a:srgbClr val="FFFFFF"/>
-                          </a:solidFill>
-                          <a:latin typeface="Calibri"/>
-                        </a:rPr>
-                        <a:t>Value</a:t>
-                      </a:r>
-                    </a:p>
-                  </a:txBody>
-                  <a:tcPr>
-                    <a:solidFill>
-                      <a:srgbClr val="0B2545"/>
-                    </a:solidFill>
-                  </a:tcPr>
-                </a:tc>
-                <a:tc>
-                  <a:txBody>
-                    <a:bodyPr/>
-                    <a:lstStyle/>
-                    <a:p>
-                      <a:pPr algn="r"/>
-                      <a:r>
-                        <a:rPr sz="1100" b="1">
-                          <a:solidFill>
-                            <a:srgbClr val="FFFFFF"/>
-                          </a:solidFill>
-                          <a:latin typeface="Calibri"/>
-                        </a:rPr>
-                        <a:t>Share</a:t>
-                      </a:r>
-                    </a:p>
-                  </a:txBody>
-                  <a:tcPr>
-                    <a:solidFill>
-                      <a:srgbClr val="0B2545"/>
-                    </a:solidFill>
-                  </a:tcPr>
-                </a:tc>
-                <a:tc>
-                  <a:txBody>
-                    <a:bodyPr/>
-                    <a:lstStyle/>
-                    <a:p>
-                      <a:pPr algn="r"/>
-                      <a:r>
-                        <a:rPr sz="1100" b="1">
-                          <a:solidFill>
-                            <a:srgbClr val="FFFFFF"/>
-                          </a:solidFill>
-                          <a:latin typeface="Calibri"/>
-                        </a:rPr>
-                        <a:t>Volume</a:t>
-                      </a:r>
-                    </a:p>
-                  </a:txBody>
-                  <a:tcPr>
-                    <a:solidFill>
-                      <a:srgbClr val="0B2545"/>
-                    </a:solidFill>
-                  </a:tcPr>
-                </a:tc>
-                <a:tc>
-                  <a:txBody>
-                    <a:bodyPr/>
-                    <a:lstStyle/>
-                    <a:p>
-                      <a:pPr algn="r"/>
-                      <a:r>
-                        <a:rPr sz="1100" b="1">
-                          <a:solidFill>
-                            <a:srgbClr val="FFFFFF"/>
-                          </a:solidFill>
-                          <a:latin typeface="Calibri"/>
-                        </a:rPr>
-                        <a:t>R/kg</a:t>
-                      </a:r>
-                    </a:p>
-                  </a:txBody>
-                  <a:tcPr>
-                    <a:solidFill>
-                      <a:srgbClr val="0B2545"/>
-                    </a:solidFill>
-                  </a:tcPr>
-                </a:tc>
-                <a:tc>
-                  <a:txBody>
-                    <a:bodyPr/>
-                    <a:lstStyle/>
-                    <a:p>
-                      <a:pPr algn="r"/>
-                      <a:r>
-                        <a:rPr sz="1100" b="1">
-                          <a:solidFill>
-                            <a:srgbClr val="FFFFFF"/>
-                          </a:solidFill>
-                          <a:latin typeface="Calibri"/>
-                        </a:rPr>
-                        <a:t>R/pack</a:t>
-                      </a:r>
-                    </a:p>
-                  </a:txBody>
-                  <a:tcPr>
-                    <a:solidFill>
-                      <a:srgbClr val="0B2545"/>
-                    </a:solidFill>
-                  </a:tcPr>
-                </a:tc>
-              </a:tr>
-              <a:tr h="491490">
-                <a:tc>
-                  <a:txBody>
-                    <a:bodyPr/>
-                    <a:lstStyle/>
-                    <a:p>
-                      <a:pPr algn="l"/>
-                      <a:r>
-                        <a:rPr sz="1200" b="1">
-                          <a:solidFill>
-                            <a:srgbClr val="1A1A1A"/>
-                          </a:solidFill>
-                          <a:latin typeface="Calibri"/>
-                        </a:rPr>
-                        <a:t>Carbonara</a:t>
-                      </a:r>
-                    </a:p>
-                  </a:txBody>
-                  <a:tcPr>
-                    <a:solidFill>
-                      <a:srgbClr val="F4F6F8"/>
-                    </a:solidFill>
-                  </a:tcPr>
-                </a:tc>
-                <a:tc>
-                  <a:txBody>
-                    <a:bodyPr/>
-                    <a:lstStyle/>
-                    <a:p>
-                      <a:pPr algn="r"/>
-                      <a:r>
-                        <a:rPr sz="1200" b="0">
-                          <a:solidFill>
-                            <a:srgbClr val="1A1A1A"/>
-                          </a:solidFill>
-                          <a:latin typeface="Calibri"/>
-                        </a:rPr>
-                        <a:t>R603k</a:t>
-                      </a:r>
-                    </a:p>
-                  </a:txBody>
-                  <a:tcPr>
-                    <a:solidFill>
-                      <a:srgbClr val="F4F6F8"/>
-                    </a:solidFill>
-                  </a:tcPr>
-                </a:tc>
-                <a:tc>
-                  <a:txBody>
-                    <a:bodyPr/>
-                    <a:lstStyle/>
-                    <a:p>
-                      <a:pPr algn="r"/>
-                      <a:r>
-                        <a:rPr sz="1200" b="0">
-                          <a:solidFill>
-                            <a:srgbClr val="1A1A1A"/>
-                          </a:solidFill>
-                          <a:latin typeface="Calibri"/>
-                        </a:rPr>
-                        <a:t>49%</a:t>
-                      </a:r>
-                    </a:p>
-                  </a:txBody>
-                  <a:tcPr>
-                    <a:solidFill>
-                      <a:srgbClr val="F4F6F8"/>
-                    </a:solidFill>
-                  </a:tcPr>
-                </a:tc>
-                <a:tc>
-                  <a:txBody>
-                    <a:bodyPr/>
-                    <a:lstStyle/>
-                    <a:p>
-                      <a:pPr algn="r"/>
-                      <a:r>
-                        <a:rPr sz="1200" b="0">
-                          <a:solidFill>
-                            <a:srgbClr val="1A1A1A"/>
-                          </a:solidFill>
-                          <a:latin typeface="Calibri"/>
-                        </a:rPr>
-                        <a:t>774 kg</a:t>
-                      </a:r>
-                    </a:p>
-                  </a:txBody>
-                  <a:tcPr>
-                    <a:solidFill>
-                      <a:srgbClr val="F4F6F8"/>
-                    </a:solidFill>
-                  </a:tcPr>
-                </a:tc>
-                <a:tc>
-                  <a:txBody>
-                    <a:bodyPr/>
-                    <a:lstStyle/>
-                    <a:p>
-                      <a:pPr algn="r"/>
-                      <a:r>
-                        <a:rPr sz="1200" b="0">
-                          <a:solidFill>
-                            <a:srgbClr val="1A1A1A"/>
-                          </a:solidFill>
-                          <a:latin typeface="Calibri"/>
-                        </a:rPr>
-                        <a:t>R779</a:t>
-                      </a:r>
-                    </a:p>
-                  </a:txBody>
-                  <a:tcPr>
-                    <a:solidFill>
-                      <a:srgbClr val="F4F6F8"/>
-                    </a:solidFill>
-                  </a:tcPr>
-                </a:tc>
-                <a:tc>
-                  <a:txBody>
-                    <a:bodyPr/>
-                    <a:lstStyle/>
-                    <a:p>
-                      <a:pPr algn="r"/>
-                      <a:r>
-                        <a:rPr sz="1200" b="0">
-                          <a:solidFill>
-                            <a:srgbClr val="1A1A1A"/>
-                          </a:solidFill>
-                          <a:latin typeface="Calibri"/>
-                        </a:rPr>
-                        <a:t>R49.05</a:t>
-                      </a:r>
-                    </a:p>
-                  </a:txBody>
-                  <a:tcPr>
-                    <a:solidFill>
-                      <a:srgbClr val="F4F6F8"/>
-                    </a:solidFill>
-                  </a:tcPr>
-                </a:tc>
-              </a:tr>
-              <a:tr h="491490">
-                <a:tc>
-                  <a:txBody>
-                    <a:bodyPr/>
-                    <a:lstStyle/>
-                    <a:p>
-                      <a:pPr algn="l"/>
-                      <a:r>
-                        <a:rPr sz="1200" b="1">
-                          <a:solidFill>
-                            <a:srgbClr val="1A1A1A"/>
-                          </a:solidFill>
-                          <a:latin typeface="Calibri"/>
-                        </a:rPr>
-                        <a:t>Tomato &amp; Mozzarella</a:t>
-                      </a:r>
-                    </a:p>
-                  </a:txBody>
-                  <a:tcPr>
-                    <a:solidFill>
-                      <a:srgbClr val="FFFFFF"/>
-                    </a:solidFill>
-                  </a:tcPr>
-                </a:tc>
-                <a:tc>
-                  <a:txBody>
-                    <a:bodyPr/>
-                    <a:lstStyle/>
-                    <a:p>
-                      <a:pPr algn="r"/>
-                      <a:r>
-                        <a:rPr sz="1200" b="0">
-                          <a:solidFill>
-                            <a:srgbClr val="1A1A1A"/>
-                          </a:solidFill>
-                          <a:latin typeface="Calibri"/>
-                        </a:rPr>
-                        <a:t>R368k</a:t>
-                      </a:r>
-                    </a:p>
-                  </a:txBody>
-                  <a:tcPr>
-                    <a:solidFill>
-                      <a:srgbClr val="FFFFFF"/>
-                    </a:solidFill>
-                  </a:tcPr>
-                </a:tc>
-                <a:tc>
-                  <a:txBody>
-                    <a:bodyPr/>
-                    <a:lstStyle/>
-                    <a:p>
-                      <a:pPr algn="r"/>
-                      <a:r>
-                        <a:rPr sz="1200" b="0">
-                          <a:solidFill>
-                            <a:srgbClr val="1A1A1A"/>
-                          </a:solidFill>
-                          <a:latin typeface="Calibri"/>
-                        </a:rPr>
-                        <a:t>30%</a:t>
-                      </a:r>
-                    </a:p>
-                  </a:txBody>
-                  <a:tcPr>
-                    <a:solidFill>
-                      <a:srgbClr val="FFFFFF"/>
-                    </a:solidFill>
-                  </a:tcPr>
-                </a:tc>
-                <a:tc>
-                  <a:txBody>
-                    <a:bodyPr/>
-                    <a:lstStyle/>
-                    <a:p>
-                      <a:pPr algn="r"/>
-                      <a:r>
-                        <a:rPr sz="1200" b="0">
-                          <a:solidFill>
-                            <a:srgbClr val="1A1A1A"/>
-                          </a:solidFill>
-                          <a:latin typeface="Calibri"/>
-                        </a:rPr>
-                        <a:t>471 kg</a:t>
-                      </a:r>
-                    </a:p>
-                  </a:txBody>
-                  <a:tcPr>
-                    <a:solidFill>
-                      <a:srgbClr val="FFFFFF"/>
-                    </a:solidFill>
-                  </a:tcPr>
-                </a:tc>
-                <a:tc>
-                  <a:txBody>
-                    <a:bodyPr/>
-                    <a:lstStyle/>
-                    <a:p>
-                      <a:pPr algn="r"/>
-                      <a:r>
-                        <a:rPr sz="1200" b="0">
-                          <a:solidFill>
-                            <a:srgbClr val="1A1A1A"/>
-                          </a:solidFill>
-                          <a:latin typeface="Calibri"/>
-                        </a:rPr>
-                        <a:t>R781</a:t>
-                      </a:r>
-                    </a:p>
-                  </a:txBody>
-                  <a:tcPr>
-                    <a:solidFill>
-                      <a:srgbClr val="FFFFFF"/>
-                    </a:solidFill>
-                  </a:tcPr>
-                </a:tc>
-                <a:tc>
-                  <a:txBody>
-                    <a:bodyPr/>
-                    <a:lstStyle/>
-                    <a:p>
-                      <a:pPr algn="r"/>
-                      <a:r>
-                        <a:rPr sz="1200" b="0">
-                          <a:solidFill>
-                            <a:srgbClr val="1A1A1A"/>
-                          </a:solidFill>
-                          <a:latin typeface="Calibri"/>
-                        </a:rPr>
-                        <a:t>R49.22</a:t>
-                      </a:r>
-                    </a:p>
-                  </a:txBody>
-                  <a:tcPr>
-                    <a:solidFill>
-                      <a:srgbClr val="FFFFFF"/>
-                    </a:solidFill>
-                  </a:tcPr>
-                </a:tc>
-              </a:tr>
-              <a:tr h="491490">
-                <a:tc>
-                  <a:txBody>
-                    <a:bodyPr/>
-                    <a:lstStyle/>
-                    <a:p>
-                      <a:pPr algn="l"/>
-                      <a:r>
-                        <a:rPr sz="1200" b="1">
-                          <a:solidFill>
-                            <a:srgbClr val="1A1A1A"/>
-                          </a:solidFill>
-                          <a:latin typeface="Calibri"/>
-                        </a:rPr>
-                        <a:t>Mushroom</a:t>
-                      </a:r>
-                    </a:p>
-                  </a:txBody>
-                  <a:tcPr>
-                    <a:solidFill>
-                      <a:srgbClr val="F4F6F8"/>
-                    </a:solidFill>
-                  </a:tcPr>
-                </a:tc>
-                <a:tc>
-                  <a:txBody>
-                    <a:bodyPr/>
-                    <a:lstStyle/>
-                    <a:p>
-                      <a:pPr algn="r"/>
-                      <a:r>
-                        <a:rPr sz="1200" b="0">
-                          <a:solidFill>
-                            <a:srgbClr val="1A1A1A"/>
-                          </a:solidFill>
-                          <a:latin typeface="Calibri"/>
-                        </a:rPr>
-                        <a:t>R269k</a:t>
-                      </a:r>
-                    </a:p>
-                  </a:txBody>
-                  <a:tcPr>
-                    <a:solidFill>
-                      <a:srgbClr val="F4F6F8"/>
-                    </a:solidFill>
-                  </a:tcPr>
-                </a:tc>
-                <a:tc>
-                  <a:txBody>
-                    <a:bodyPr/>
-                    <a:lstStyle/>
-                    <a:p>
-                      <a:pPr algn="r"/>
-                      <a:r>
-                        <a:rPr sz="1200" b="0">
-                          <a:solidFill>
-                            <a:srgbClr val="1A1A1A"/>
-                          </a:solidFill>
-                          <a:latin typeface="Calibri"/>
-                        </a:rPr>
-                        <a:t>22%</a:t>
-                      </a:r>
-                    </a:p>
-                  </a:txBody>
-                  <a:tcPr>
-                    <a:solidFill>
-                      <a:srgbClr val="F4F6F8"/>
-                    </a:solidFill>
-                  </a:tcPr>
-                </a:tc>
-                <a:tc>
-                  <a:txBody>
-                    <a:bodyPr/>
-                    <a:lstStyle/>
-                    <a:p>
-                      <a:pPr algn="r"/>
-                      <a:r>
-                        <a:rPr sz="1200" b="0">
-                          <a:solidFill>
-                            <a:srgbClr val="1A1A1A"/>
-                          </a:solidFill>
-                          <a:latin typeface="Calibri"/>
-                        </a:rPr>
-                        <a:t>323 kg</a:t>
-                      </a:r>
-                    </a:p>
-                  </a:txBody>
-                  <a:tcPr>
-                    <a:solidFill>
-                      <a:srgbClr val="F4F6F8"/>
-                    </a:solidFill>
-                  </a:tcPr>
-                </a:tc>
-                <a:tc>
-                  <a:txBody>
-                    <a:bodyPr/>
-                    <a:lstStyle/>
-                    <a:p>
-                      <a:pPr algn="r"/>
-                      <a:r>
-                        <a:rPr sz="1200" b="0">
-                          <a:solidFill>
-                            <a:srgbClr val="1A1A1A"/>
-                          </a:solidFill>
-                          <a:latin typeface="Calibri"/>
-                        </a:rPr>
-                        <a:t>R832</a:t>
-                      </a:r>
-                    </a:p>
-                  </a:txBody>
-                  <a:tcPr>
-                    <a:solidFill>
-                      <a:srgbClr val="F4F6F8"/>
-                    </a:solidFill>
-                  </a:tcPr>
-                </a:tc>
-                <a:tc>
-                  <a:txBody>
-                    <a:bodyPr/>
-                    <a:lstStyle/>
-                    <a:p>
-                      <a:pPr algn="r"/>
-                      <a:r>
-                        <a:rPr sz="1200" b="0">
-                          <a:solidFill>
-                            <a:srgbClr val="1A1A1A"/>
-                          </a:solidFill>
-                          <a:latin typeface="Calibri"/>
-                        </a:rPr>
-                        <a:t>R49.08</a:t>
-                      </a:r>
-                    </a:p>
-                  </a:txBody>
-                  <a:tcPr>
-                    <a:solidFill>
-                      <a:srgbClr val="F4F6F8"/>
-                    </a:solidFill>
-                  </a:tcPr>
-                </a:tc>
-              </a:tr>
-            </a:tbl>
-          </a:graphicData>
-        </a:graphic>
-      </p:graphicFrame>
+        </p:nvSpPr>
+        <p:spPr>
+          <a:xfrm>
+            <a:off x="9272016" y="1188720"/>
+            <a:ext cx="2505456" cy="292608"/>
+          </a:xfrm>
+          <a:prstGeom prst="rect">
+            <a:avLst/>
+          </a:prstGeom>
+          <a:noFill/>
+        </p:spPr>
+        <p:txBody>
+          <a:bodyPr wrap="square">
+            <a:spAutoFit/>
+          </a:bodyPr>
+          <a:lstStyle/>
+          <a:p>
+            <a:pPr algn="l"/>
+            <a:r>
+              <a:rPr sz="1800" b="1">
+                <a:solidFill>
+                  <a:srgbClr val="0B2545"/>
+                </a:solidFill>
+                <a:latin typeface="Calibri"/>
+              </a:rPr>
+              <a:t>R58/kg</a:t>
+            </a:r>
+          </a:p>
+        </p:txBody>
+      </p:sp>
+      <p:sp>
+        <p:nvSpPr>
+          <p:cNvPr id="26" name="TextBox 25"/>
+          <p:cNvSpPr txBox="1"/>
+          <p:nvPr/>
+        </p:nvSpPr>
+        <p:spPr>
+          <a:xfrm>
+            <a:off x="9272016" y="1481328"/>
+            <a:ext cx="2505456" cy="201168"/>
+          </a:xfrm>
+          <a:prstGeom prst="rect">
+            <a:avLst/>
+          </a:prstGeom>
+          <a:noFill/>
+        </p:spPr>
+        <p:txBody>
+          <a:bodyPr wrap="square">
+            <a:spAutoFit/>
+          </a:bodyPr>
+          <a:lstStyle/>
+          <a:p>
+            <a:pPr algn="l"/>
+            <a:r>
+              <a:rPr sz="1000" b="0">
+                <a:solidFill>
+                  <a:srgbClr val="5C6B73"/>
+                </a:solidFill>
+                <a:latin typeface="Calibri"/>
+              </a:rPr>
+              <a:t>Noodles R96  ·  dry ~R32–35</a:t>
+            </a:r>
+          </a:p>
+        </p:txBody>
+      </p:sp>
+      <p:sp>
+        <p:nvSpPr>
+          <p:cNvPr id="27" name="TextBox 26"/>
+          <p:cNvSpPr txBox="1"/>
+          <p:nvPr/>
+        </p:nvSpPr>
+        <p:spPr>
+          <a:xfrm>
+            <a:off x="347472" y="1847088"/>
+            <a:ext cx="5669280" cy="237744"/>
+          </a:xfrm>
+          <a:prstGeom prst="rect">
+            <a:avLst/>
+          </a:prstGeom>
+          <a:noFill/>
+        </p:spPr>
+        <p:txBody>
+          <a:bodyPr wrap="square">
+            <a:spAutoFit/>
+          </a:bodyPr>
+          <a:lstStyle/>
+          <a:p>
+            <a:pPr algn="l"/>
+            <a:r>
+              <a:rPr sz="1200" b="1">
+                <a:solidFill>
+                  <a:srgbClr val="0B2545"/>
+                </a:solidFill>
+                <a:latin typeface="Calibri"/>
+              </a:rPr>
+              <a:t>Value mix by subcategory (12 months)</a:t>
+            </a:r>
+          </a:p>
+        </p:txBody>
+      </p:sp>
       <p:pic>
         <p:nvPicPr>
-          <p:cNvPr id="28" name="Picture 27" descr="pasta_sku_value.png"/>
+          <p:cNvPr id="28" name="Picture 27" descr="pasta_subcat_share.png"/>
           <p:cNvPicPr>
             <a:picLocks noChangeAspect="1"/>
           </p:cNvPicPr>
@@ -5219,8 +4664,8 @@
         </p:blipFill>
         <p:spPr>
           <a:xfrm>
-            <a:off x="7452360" y="2084831"/>
-            <a:ext cx="4343400" cy="1965960"/>
+            <a:off x="292608" y="2084831"/>
+            <a:ext cx="5806440" cy="2240280"/>
           </a:xfrm>
           <a:prstGeom prst="rect">
             <a:avLst/>
@@ -5229,14 +4674,1014 @@
       </p:pic>
       <p:sp>
         <p:nvSpPr>
-          <p:cNvPr id="29" name="Rectangle 28"/>
+          <p:cNvPr id="29" name="TextBox 28"/>
+          <p:cNvSpPr txBox="1"/>
+          <p:nvPr/>
+        </p:nvSpPr>
+        <p:spPr>
+          <a:xfrm>
+            <a:off x="6263640" y="1847088"/>
+            <a:ext cx="5577840" cy="237744"/>
+          </a:xfrm>
+          <a:prstGeom prst="rect">
+            <a:avLst/>
+          </a:prstGeom>
+          <a:noFill/>
+        </p:spPr>
+        <p:txBody>
+          <a:bodyPr wrap="square">
+            <a:spAutoFit/>
+          </a:bodyPr>
+          <a:lstStyle/>
+          <a:p>
+            <a:pPr algn="l"/>
+            <a:r>
+              <a:rPr sz="1200" b="1">
+                <a:solidFill>
+                  <a:srgbClr val="0B2545"/>
+                </a:solidFill>
+                <a:latin typeface="Calibri"/>
+              </a:rPr>
+              <a:t>Who plays, who is winning (12-month value)</a:t>
+            </a:r>
+          </a:p>
+        </p:txBody>
+      </p:sp>
+      <p:graphicFrame>
+        <p:nvGraphicFramePr>
+          <p:cNvPr id="30" name="Table 29"/>
+          <p:cNvGraphicFramePr>
+            <a:graphicFrameLocks noGrp="1"/>
+          </p:cNvGraphicFramePr>
+          <p:nvPr/>
+        </p:nvGraphicFramePr>
+        <p:xfrm>
+          <a:off x="6263640" y="2103120"/>
+          <a:ext cx="5577840" cy="2331720"/>
+        </p:xfrm>
+        <a:graphic>
+          <a:graphicData uri="http://schemas.openxmlformats.org/drawingml/2006/table">
+            <a:tbl>
+              <a:tblPr firstRow="1" bandRow="1">
+                <a:tableStyleId>{5C22544A-7EE6-4342-B048-85BDC9FD1C3A}</a:tableStyleId>
+              </a:tblPr>
+              <a:tblGrid>
+                <a:gridCol w="1965960"/>
+                <a:gridCol w="822960"/>
+                <a:gridCol w="868680"/>
+                <a:gridCol w="914400"/>
+                <a:gridCol w="1005840"/>
+              </a:tblGrid>
+              <a:tr h="291465">
+                <a:tc>
+                  <a:txBody>
+                    <a:bodyPr/>
+                    <a:lstStyle/>
+                    <a:p>
+                      <a:pPr algn="l"/>
+                      <a:r>
+                        <a:rPr sz="1000" b="1">
+                          <a:solidFill>
+                            <a:srgbClr val="FFFFFF"/>
+                          </a:solidFill>
+                          <a:latin typeface="Calibri"/>
+                        </a:rPr>
+                        <a:t>Manufacturer</a:t>
+                      </a:r>
+                    </a:p>
+                  </a:txBody>
+                  <a:tcPr>
+                    <a:solidFill>
+                      <a:srgbClr val="0B2545"/>
+                    </a:solidFill>
+                  </a:tcPr>
+                </a:tc>
+                <a:tc>
+                  <a:txBody>
+                    <a:bodyPr/>
+                    <a:lstStyle/>
+                    <a:p>
+                      <a:pPr algn="r"/>
+                      <a:r>
+                        <a:rPr sz="1000" b="1">
+                          <a:solidFill>
+                            <a:srgbClr val="FFFFFF"/>
+                          </a:solidFill>
+                          <a:latin typeface="Calibri"/>
+                        </a:rPr>
+                        <a:t>Share</a:t>
+                      </a:r>
+                    </a:p>
+                  </a:txBody>
+                  <a:tcPr>
+                    <a:solidFill>
+                      <a:srgbClr val="0B2545"/>
+                    </a:solidFill>
+                  </a:tcPr>
+                </a:tc>
+                <a:tc>
+                  <a:txBody>
+                    <a:bodyPr/>
+                    <a:lstStyle/>
+                    <a:p>
+                      <a:pPr algn="r"/>
+                      <a:r>
+                        <a:rPr sz="1000" b="1">
+                          <a:solidFill>
+                            <a:srgbClr val="FFFFFF"/>
+                          </a:solidFill>
+                          <a:latin typeface="Calibri"/>
+                        </a:rPr>
+                        <a:t>vs YA</a:t>
+                      </a:r>
+                    </a:p>
+                  </a:txBody>
+                  <a:tcPr>
+                    <a:solidFill>
+                      <a:srgbClr val="0B2545"/>
+                    </a:solidFill>
+                  </a:tcPr>
+                </a:tc>
+                <a:tc>
+                  <a:txBody>
+                    <a:bodyPr/>
+                    <a:lstStyle/>
+                    <a:p>
+                      <a:pPr algn="r"/>
+                      <a:r>
+                        <a:rPr sz="1000" b="1">
+                          <a:solidFill>
+                            <a:srgbClr val="FFFFFF"/>
+                          </a:solidFill>
+                          <a:latin typeface="Calibri"/>
+                        </a:rPr>
+                        <a:t>Value</a:t>
+                      </a:r>
+                    </a:p>
+                  </a:txBody>
+                  <a:tcPr>
+                    <a:solidFill>
+                      <a:srgbClr val="0B2545"/>
+                    </a:solidFill>
+                  </a:tcPr>
+                </a:tc>
+                <a:tc>
+                  <a:txBody>
+                    <a:bodyPr/>
+                    <a:lstStyle/>
+                    <a:p>
+                      <a:pPr algn="r"/>
+                      <a:r>
+                        <a:rPr sz="1000" b="1">
+                          <a:solidFill>
+                            <a:srgbClr val="FFFFFF"/>
+                          </a:solidFill>
+                          <a:latin typeface="Calibri"/>
+                        </a:rPr>
+                        <a:t>R/kg</a:t>
+                      </a:r>
+                    </a:p>
+                  </a:txBody>
+                  <a:tcPr>
+                    <a:solidFill>
+                      <a:srgbClr val="0B2545"/>
+                    </a:solidFill>
+                  </a:tcPr>
+                </a:tc>
+              </a:tr>
+              <a:tr h="291465">
+                <a:tc>
+                  <a:txBody>
+                    <a:bodyPr/>
+                    <a:lstStyle/>
+                    <a:p>
+                      <a:pPr algn="l"/>
+                      <a:r>
+                        <a:rPr sz="1100" b="1">
+                          <a:solidFill>
+                            <a:srgbClr val="1A1A1A"/>
+                          </a:solidFill>
+                          <a:latin typeface="Calibri"/>
+                        </a:rPr>
+                        <a:t>Kellogg's</a:t>
+                      </a:r>
+                    </a:p>
+                  </a:txBody>
+                  <a:tcPr>
+                    <a:solidFill>
+                      <a:srgbClr val="F4F6F8"/>
+                    </a:solidFill>
+                  </a:tcPr>
+                </a:tc>
+                <a:tc>
+                  <a:txBody>
+                    <a:bodyPr/>
+                    <a:lstStyle/>
+                    <a:p>
+                      <a:pPr algn="r"/>
+                      <a:r>
+                        <a:rPr sz="1100" b="0">
+                          <a:solidFill>
+                            <a:srgbClr val="1A1A1A"/>
+                          </a:solidFill>
+                          <a:latin typeface="Calibri"/>
+                        </a:rPr>
+                        <a:t>29.4%</a:t>
+                      </a:r>
+                    </a:p>
+                  </a:txBody>
+                  <a:tcPr>
+                    <a:solidFill>
+                      <a:srgbClr val="F4F6F8"/>
+                    </a:solidFill>
+                  </a:tcPr>
+                </a:tc>
+                <a:tc>
+                  <a:txBody>
+                    <a:bodyPr/>
+                    <a:lstStyle/>
+                    <a:p>
+                      <a:pPr algn="r"/>
+                      <a:r>
+                        <a:rPr sz="1100" b="0">
+                          <a:solidFill>
+                            <a:srgbClr val="1F7A4D"/>
+                          </a:solidFill>
+                          <a:latin typeface="Calibri"/>
+                        </a:rPr>
+                        <a:t>+2.1pp</a:t>
+                      </a:r>
+                    </a:p>
+                  </a:txBody>
+                  <a:tcPr>
+                    <a:solidFill>
+                      <a:srgbClr val="F4F6F8"/>
+                    </a:solidFill>
+                  </a:tcPr>
+                </a:tc>
+                <a:tc>
+                  <a:txBody>
+                    <a:bodyPr/>
+                    <a:lstStyle/>
+                    <a:p>
+                      <a:pPr algn="r"/>
+                      <a:r>
+                        <a:rPr sz="1100" b="0">
+                          <a:solidFill>
+                            <a:srgbClr val="1F7A4D"/>
+                          </a:solidFill>
+                          <a:latin typeface="Calibri"/>
+                        </a:rPr>
+                        <a:t>+13.1%</a:t>
+                      </a:r>
+                    </a:p>
+                  </a:txBody>
+                  <a:tcPr>
+                    <a:solidFill>
+                      <a:srgbClr val="F4F6F8"/>
+                    </a:solidFill>
+                  </a:tcPr>
+                </a:tc>
+                <a:tc>
+                  <a:txBody>
+                    <a:bodyPr/>
+                    <a:lstStyle/>
+                    <a:p>
+                      <a:pPr algn="r"/>
+                      <a:r>
+                        <a:rPr sz="1100" b="0">
+                          <a:solidFill>
+                            <a:srgbClr val="1A1A1A"/>
+                          </a:solidFill>
+                          <a:latin typeface="Calibri"/>
+                        </a:rPr>
+                        <a:t>R87</a:t>
+                      </a:r>
+                    </a:p>
+                  </a:txBody>
+                  <a:tcPr>
+                    <a:solidFill>
+                      <a:srgbClr val="F4F6F8"/>
+                    </a:solidFill>
+                  </a:tcPr>
+                </a:tc>
+              </a:tr>
+              <a:tr h="291465">
+                <a:tc>
+                  <a:txBody>
+                    <a:bodyPr/>
+                    <a:lstStyle/>
+                    <a:p>
+                      <a:pPr algn="l"/>
+                      <a:r>
+                        <a:rPr sz="1100" b="1">
+                          <a:solidFill>
+                            <a:srgbClr val="1A1A1A"/>
+                          </a:solidFill>
+                          <a:latin typeface="Calibri"/>
+                        </a:rPr>
+                        <a:t>Nestlé</a:t>
+                      </a:r>
+                    </a:p>
+                  </a:txBody>
+                  <a:tcPr>
+                    <a:solidFill>
+                      <a:srgbClr val="FFFFFF"/>
+                    </a:solidFill>
+                  </a:tcPr>
+                </a:tc>
+                <a:tc>
+                  <a:txBody>
+                    <a:bodyPr/>
+                    <a:lstStyle/>
+                    <a:p>
+                      <a:pPr algn="r"/>
+                      <a:r>
+                        <a:rPr sz="1100" b="0">
+                          <a:solidFill>
+                            <a:srgbClr val="1A1A1A"/>
+                          </a:solidFill>
+                          <a:latin typeface="Calibri"/>
+                        </a:rPr>
+                        <a:t>18.5%</a:t>
+                      </a:r>
+                    </a:p>
+                  </a:txBody>
+                  <a:tcPr>
+                    <a:solidFill>
+                      <a:srgbClr val="FFFFFF"/>
+                    </a:solidFill>
+                  </a:tcPr>
+                </a:tc>
+                <a:tc>
+                  <a:txBody>
+                    <a:bodyPr/>
+                    <a:lstStyle/>
+                    <a:p>
+                      <a:pPr algn="r"/>
+                      <a:r>
+                        <a:rPr sz="1100" b="0">
+                          <a:solidFill>
+                            <a:srgbClr val="9B2C2C"/>
+                          </a:solidFill>
+                          <a:latin typeface="Calibri"/>
+                        </a:rPr>
+                        <a:t>-2.7pp</a:t>
+                      </a:r>
+                    </a:p>
+                  </a:txBody>
+                  <a:tcPr>
+                    <a:solidFill>
+                      <a:srgbClr val="FFFFFF"/>
+                    </a:solidFill>
+                  </a:tcPr>
+                </a:tc>
+                <a:tc>
+                  <a:txBody>
+                    <a:bodyPr/>
+                    <a:lstStyle/>
+                    <a:p>
+                      <a:pPr algn="r"/>
+                      <a:r>
+                        <a:rPr sz="1100" b="0">
+                          <a:solidFill>
+                            <a:srgbClr val="9B2C2C"/>
+                          </a:solidFill>
+                          <a:latin typeface="Calibri"/>
+                        </a:rPr>
+                        <a:t>-8.2%</a:t>
+                      </a:r>
+                    </a:p>
+                  </a:txBody>
+                  <a:tcPr>
+                    <a:solidFill>
+                      <a:srgbClr val="FFFFFF"/>
+                    </a:solidFill>
+                  </a:tcPr>
+                </a:tc>
+                <a:tc>
+                  <a:txBody>
+                    <a:bodyPr/>
+                    <a:lstStyle/>
+                    <a:p>
+                      <a:pPr algn="r"/>
+                      <a:r>
+                        <a:rPr sz="1100" b="0">
+                          <a:solidFill>
+                            <a:srgbClr val="1A1A1A"/>
+                          </a:solidFill>
+                          <a:latin typeface="Calibri"/>
+                        </a:rPr>
+                        <a:t>R100</a:t>
+                      </a:r>
+                    </a:p>
+                  </a:txBody>
+                  <a:tcPr>
+                    <a:solidFill>
+                      <a:srgbClr val="FFFFFF"/>
+                    </a:solidFill>
+                  </a:tcPr>
+                </a:tc>
+              </a:tr>
+              <a:tr h="291465">
+                <a:tc>
+                  <a:txBody>
+                    <a:bodyPr/>
+                    <a:lstStyle/>
+                    <a:p>
+                      <a:pPr algn="l"/>
+                      <a:r>
+                        <a:rPr sz="1100" b="1">
+                          <a:solidFill>
+                            <a:srgbClr val="1A1A1A"/>
+                          </a:solidFill>
+                          <a:latin typeface="Calibri"/>
+                        </a:rPr>
+                        <a:t>Tiger Brands</a:t>
+                      </a:r>
+                    </a:p>
+                  </a:txBody>
+                  <a:tcPr>
+                    <a:solidFill>
+                      <a:srgbClr val="F4F6F8"/>
+                    </a:solidFill>
+                  </a:tcPr>
+                </a:tc>
+                <a:tc>
+                  <a:txBody>
+                    <a:bodyPr/>
+                    <a:lstStyle/>
+                    <a:p>
+                      <a:pPr algn="r"/>
+                      <a:r>
+                        <a:rPr sz="1100" b="0">
+                          <a:solidFill>
+                            <a:srgbClr val="1A1A1A"/>
+                          </a:solidFill>
+                          <a:latin typeface="Calibri"/>
+                        </a:rPr>
+                        <a:t>13.8%</a:t>
+                      </a:r>
+                    </a:p>
+                  </a:txBody>
+                  <a:tcPr>
+                    <a:solidFill>
+                      <a:srgbClr val="F4F6F8"/>
+                    </a:solidFill>
+                  </a:tcPr>
+                </a:tc>
+                <a:tc>
+                  <a:txBody>
+                    <a:bodyPr/>
+                    <a:lstStyle/>
+                    <a:p>
+                      <a:pPr algn="r"/>
+                      <a:r>
+                        <a:rPr sz="1100" b="0">
+                          <a:solidFill>
+                            <a:srgbClr val="9B2C2C"/>
+                          </a:solidFill>
+                          <a:latin typeface="Calibri"/>
+                        </a:rPr>
+                        <a:t>-1.5pp</a:t>
+                      </a:r>
+                    </a:p>
+                  </a:txBody>
+                  <a:tcPr>
+                    <a:solidFill>
+                      <a:srgbClr val="F4F6F8"/>
+                    </a:solidFill>
+                  </a:tcPr>
+                </a:tc>
+                <a:tc>
+                  <a:txBody>
+                    <a:bodyPr/>
+                    <a:lstStyle/>
+                    <a:p>
+                      <a:pPr algn="r"/>
+                      <a:r>
+                        <a:rPr sz="1100" b="0">
+                          <a:solidFill>
+                            <a:srgbClr val="9B2C2C"/>
+                          </a:solidFill>
+                          <a:latin typeface="Calibri"/>
+                        </a:rPr>
+                        <a:t>-4.8%</a:t>
+                      </a:r>
+                    </a:p>
+                  </a:txBody>
+                  <a:tcPr>
+                    <a:solidFill>
+                      <a:srgbClr val="F4F6F8"/>
+                    </a:solidFill>
+                  </a:tcPr>
+                </a:tc>
+                <a:tc>
+                  <a:txBody>
+                    <a:bodyPr/>
+                    <a:lstStyle/>
+                    <a:p>
+                      <a:pPr algn="r"/>
+                      <a:r>
+                        <a:rPr sz="1100" b="0">
+                          <a:solidFill>
+                            <a:srgbClr val="1A1A1A"/>
+                          </a:solidFill>
+                          <a:latin typeface="Calibri"/>
+                        </a:rPr>
+                        <a:t>R35</a:t>
+                      </a:r>
+                    </a:p>
+                  </a:txBody>
+                  <a:tcPr>
+                    <a:solidFill>
+                      <a:srgbClr val="F4F6F8"/>
+                    </a:solidFill>
+                  </a:tcPr>
+                </a:tc>
+              </a:tr>
+              <a:tr h="291465">
+                <a:tc>
+                  <a:txBody>
+                    <a:bodyPr/>
+                    <a:lstStyle/>
+                    <a:p>
+                      <a:pPr algn="l"/>
+                      <a:r>
+                        <a:rPr sz="1100" b="1">
+                          <a:solidFill>
+                            <a:srgbClr val="1A1A1A"/>
+                          </a:solidFill>
+                          <a:latin typeface="Calibri"/>
+                        </a:rPr>
+                        <a:t>Private Label</a:t>
+                      </a:r>
+                    </a:p>
+                  </a:txBody>
+                  <a:tcPr>
+                    <a:solidFill>
+                      <a:srgbClr val="FFFFFF"/>
+                    </a:solidFill>
+                  </a:tcPr>
+                </a:tc>
+                <a:tc>
+                  <a:txBody>
+                    <a:bodyPr/>
+                    <a:lstStyle/>
+                    <a:p>
+                      <a:pPr algn="r"/>
+                      <a:r>
+                        <a:rPr sz="1100" b="0">
+                          <a:solidFill>
+                            <a:srgbClr val="1A1A1A"/>
+                          </a:solidFill>
+                          <a:latin typeface="Calibri"/>
+                        </a:rPr>
+                        <a:t>9.1%</a:t>
+                      </a:r>
+                    </a:p>
+                  </a:txBody>
+                  <a:tcPr>
+                    <a:solidFill>
+                      <a:srgbClr val="FFFFFF"/>
+                    </a:solidFill>
+                  </a:tcPr>
+                </a:tc>
+                <a:tc>
+                  <a:txBody>
+                    <a:bodyPr/>
+                    <a:lstStyle/>
+                    <a:p>
+                      <a:pPr algn="r"/>
+                      <a:r>
+                        <a:rPr sz="1100" b="0">
+                          <a:solidFill>
+                            <a:srgbClr val="1F7A4D"/>
+                          </a:solidFill>
+                          <a:latin typeface="Calibri"/>
+                        </a:rPr>
+                        <a:t>+0.0pp</a:t>
+                      </a:r>
+                    </a:p>
+                  </a:txBody>
+                  <a:tcPr>
+                    <a:solidFill>
+                      <a:srgbClr val="FFFFFF"/>
+                    </a:solidFill>
+                  </a:tcPr>
+                </a:tc>
+                <a:tc>
+                  <a:txBody>
+                    <a:bodyPr/>
+                    <a:lstStyle/>
+                    <a:p>
+                      <a:pPr algn="r"/>
+                      <a:r>
+                        <a:rPr sz="1100" b="0">
+                          <a:solidFill>
+                            <a:srgbClr val="1F7A4D"/>
+                          </a:solidFill>
+                          <a:latin typeface="Calibri"/>
+                        </a:rPr>
+                        <a:t>+5.6%</a:t>
+                      </a:r>
+                    </a:p>
+                  </a:txBody>
+                  <a:tcPr>
+                    <a:solidFill>
+                      <a:srgbClr val="FFFFFF"/>
+                    </a:solidFill>
+                  </a:tcPr>
+                </a:tc>
+                <a:tc>
+                  <a:txBody>
+                    <a:bodyPr/>
+                    <a:lstStyle/>
+                    <a:p>
+                      <a:pPr algn="r"/>
+                      <a:r>
+                        <a:rPr sz="1100" b="0">
+                          <a:solidFill>
+                            <a:srgbClr val="1A1A1A"/>
+                          </a:solidFill>
+                          <a:latin typeface="Calibri"/>
+                        </a:rPr>
+                        <a:t>R31</a:t>
+                      </a:r>
+                    </a:p>
+                  </a:txBody>
+                  <a:tcPr>
+                    <a:solidFill>
+                      <a:srgbClr val="FFFFFF"/>
+                    </a:solidFill>
+                  </a:tcPr>
+                </a:tc>
+              </a:tr>
+              <a:tr h="291465">
+                <a:tc>
+                  <a:txBody>
+                    <a:bodyPr/>
+                    <a:lstStyle/>
+                    <a:p>
+                      <a:pPr algn="l"/>
+                      <a:r>
+                        <a:rPr sz="1100" b="1">
+                          <a:solidFill>
+                            <a:srgbClr val="1A1A1A"/>
+                          </a:solidFill>
+                          <a:latin typeface="Calibri"/>
+                        </a:rPr>
+                        <a:t>Mr Pasta</a:t>
+                      </a:r>
+                    </a:p>
+                  </a:txBody>
+                  <a:tcPr>
+                    <a:solidFill>
+                      <a:srgbClr val="F4F6F8"/>
+                    </a:solidFill>
+                  </a:tcPr>
+                </a:tc>
+                <a:tc>
+                  <a:txBody>
+                    <a:bodyPr/>
+                    <a:lstStyle/>
+                    <a:p>
+                      <a:pPr algn="r"/>
+                      <a:r>
+                        <a:rPr sz="1100" b="0">
+                          <a:solidFill>
+                            <a:srgbClr val="1A1A1A"/>
+                          </a:solidFill>
+                          <a:latin typeface="Calibri"/>
+                        </a:rPr>
+                        <a:t>5.9%</a:t>
+                      </a:r>
+                    </a:p>
+                  </a:txBody>
+                  <a:tcPr>
+                    <a:solidFill>
+                      <a:srgbClr val="F4F6F8"/>
+                    </a:solidFill>
+                  </a:tcPr>
+                </a:tc>
+                <a:tc>
+                  <a:txBody>
+                    <a:bodyPr/>
+                    <a:lstStyle/>
+                    <a:p>
+                      <a:pPr algn="r"/>
+                      <a:r>
+                        <a:rPr sz="1100" b="0">
+                          <a:solidFill>
+                            <a:srgbClr val="9B2C2C"/>
+                          </a:solidFill>
+                          <a:latin typeface="Calibri"/>
+                        </a:rPr>
+                        <a:t>-2.0pp</a:t>
+                      </a:r>
+                    </a:p>
+                  </a:txBody>
+                  <a:tcPr>
+                    <a:solidFill>
+                      <a:srgbClr val="F4F6F8"/>
+                    </a:solidFill>
+                  </a:tcPr>
+                </a:tc>
+                <a:tc>
+                  <a:txBody>
+                    <a:bodyPr/>
+                    <a:lstStyle/>
+                    <a:p>
+                      <a:pPr algn="r"/>
+                      <a:r>
+                        <a:rPr sz="1100" b="0">
+                          <a:solidFill>
+                            <a:srgbClr val="9B2C2C"/>
+                          </a:solidFill>
+                          <a:latin typeface="Calibri"/>
+                        </a:rPr>
+                        <a:t>-21.6%</a:t>
+                      </a:r>
+                    </a:p>
+                  </a:txBody>
+                  <a:tcPr>
+                    <a:solidFill>
+                      <a:srgbClr val="F4F6F8"/>
+                    </a:solidFill>
+                  </a:tcPr>
+                </a:tc>
+                <a:tc>
+                  <a:txBody>
+                    <a:bodyPr/>
+                    <a:lstStyle/>
+                    <a:p>
+                      <a:pPr algn="r"/>
+                      <a:r>
+                        <a:rPr sz="1100" b="0">
+                          <a:solidFill>
+                            <a:srgbClr val="1A1A1A"/>
+                          </a:solidFill>
+                          <a:latin typeface="Calibri"/>
+                        </a:rPr>
+                        <a:t>R36</a:t>
+                      </a:r>
+                    </a:p>
+                  </a:txBody>
+                  <a:tcPr>
+                    <a:solidFill>
+                      <a:srgbClr val="F4F6F8"/>
+                    </a:solidFill>
+                  </a:tcPr>
+                </a:tc>
+              </a:tr>
+              <a:tr h="291465">
+                <a:tc>
+                  <a:txBody>
+                    <a:bodyPr/>
+                    <a:lstStyle/>
+                    <a:p>
+                      <a:pPr algn="l"/>
+                      <a:r>
+                        <a:rPr sz="1100" b="1">
+                          <a:solidFill>
+                            <a:srgbClr val="1A1A1A"/>
+                          </a:solidFill>
+                          <a:latin typeface="Calibri"/>
+                        </a:rPr>
+                        <a:t>Indofood</a:t>
+                      </a:r>
+                    </a:p>
+                  </a:txBody>
+                  <a:tcPr>
+                    <a:solidFill>
+                      <a:srgbClr val="FFFFFF"/>
+                    </a:solidFill>
+                  </a:tcPr>
+                </a:tc>
+                <a:tc>
+                  <a:txBody>
+                    <a:bodyPr/>
+                    <a:lstStyle/>
+                    <a:p>
+                      <a:pPr algn="r"/>
+                      <a:r>
+                        <a:rPr sz="1100" b="0">
+                          <a:solidFill>
+                            <a:srgbClr val="1A1A1A"/>
+                          </a:solidFill>
+                          <a:latin typeface="Calibri"/>
+                        </a:rPr>
+                        <a:t>4.4%</a:t>
+                      </a:r>
+                    </a:p>
+                  </a:txBody>
+                  <a:tcPr>
+                    <a:solidFill>
+                      <a:srgbClr val="FFFFFF"/>
+                    </a:solidFill>
+                  </a:tcPr>
+                </a:tc>
+                <a:tc>
+                  <a:txBody>
+                    <a:bodyPr/>
+                    <a:lstStyle/>
+                    <a:p>
+                      <a:pPr algn="r"/>
+                      <a:r>
+                        <a:rPr sz="1100" b="0">
+                          <a:solidFill>
+                            <a:srgbClr val="1F7A4D"/>
+                          </a:solidFill>
+                          <a:latin typeface="Calibri"/>
+                        </a:rPr>
+                        <a:t>+1.4pp</a:t>
+                      </a:r>
+                    </a:p>
+                  </a:txBody>
+                  <a:tcPr>
+                    <a:solidFill>
+                      <a:srgbClr val="FFFFFF"/>
+                    </a:solidFill>
+                  </a:tcPr>
+                </a:tc>
+                <a:tc>
+                  <a:txBody>
+                    <a:bodyPr/>
+                    <a:lstStyle/>
+                    <a:p>
+                      <a:pPr algn="r"/>
+                      <a:r>
+                        <a:rPr sz="1100" b="0">
+                          <a:solidFill>
+                            <a:srgbClr val="1F7A4D"/>
+                          </a:solidFill>
+                          <a:latin typeface="Calibri"/>
+                        </a:rPr>
+                        <a:t>+55.7%</a:t>
+                      </a:r>
+                    </a:p>
+                  </a:txBody>
+                  <a:tcPr>
+                    <a:solidFill>
+                      <a:srgbClr val="FFFFFF"/>
+                    </a:solidFill>
+                  </a:tcPr>
+                </a:tc>
+                <a:tc>
+                  <a:txBody>
+                    <a:bodyPr/>
+                    <a:lstStyle/>
+                    <a:p>
+                      <a:pPr algn="r"/>
+                      <a:r>
+                        <a:rPr sz="1100" b="0">
+                          <a:solidFill>
+                            <a:srgbClr val="1A1A1A"/>
+                          </a:solidFill>
+                          <a:latin typeface="Calibri"/>
+                        </a:rPr>
+                        <a:t>R99</a:t>
+                      </a:r>
+                    </a:p>
+                  </a:txBody>
+                  <a:tcPr>
+                    <a:solidFill>
+                      <a:srgbClr val="FFFFFF"/>
+                    </a:solidFill>
+                  </a:tcPr>
+                </a:tc>
+              </a:tr>
+              <a:tr h="291465">
+                <a:tc>
+                  <a:txBody>
+                    <a:bodyPr/>
+                    <a:lstStyle/>
+                    <a:p>
+                      <a:pPr algn="l"/>
+                      <a:r>
+                        <a:rPr sz="1100" b="1">
+                          <a:solidFill>
+                            <a:srgbClr val="1A1A1A"/>
+                          </a:solidFill>
+                          <a:latin typeface="Calibri"/>
+                        </a:rPr>
+                        <a:t>Roka (Zhejiang)</a:t>
+                      </a:r>
+                    </a:p>
+                  </a:txBody>
+                  <a:tcPr>
+                    <a:solidFill>
+                      <a:srgbClr val="F4F6F8"/>
+                    </a:solidFill>
+                  </a:tcPr>
+                </a:tc>
+                <a:tc>
+                  <a:txBody>
+                    <a:bodyPr/>
+                    <a:lstStyle/>
+                    <a:p>
+                      <a:pPr algn="r"/>
+                      <a:r>
+                        <a:rPr sz="1100" b="0">
+                          <a:solidFill>
+                            <a:srgbClr val="1A1A1A"/>
+                          </a:solidFill>
+                          <a:latin typeface="Calibri"/>
+                        </a:rPr>
+                        <a:t>4.1%</a:t>
+                      </a:r>
+                    </a:p>
+                  </a:txBody>
+                  <a:tcPr>
+                    <a:solidFill>
+                      <a:srgbClr val="F4F6F8"/>
+                    </a:solidFill>
+                  </a:tcPr>
+                </a:tc>
+                <a:tc>
+                  <a:txBody>
+                    <a:bodyPr/>
+                    <a:lstStyle/>
+                    <a:p>
+                      <a:pPr algn="r"/>
+                      <a:r>
+                        <a:rPr sz="1100" b="0">
+                          <a:solidFill>
+                            <a:srgbClr val="9B2C2C"/>
+                          </a:solidFill>
+                          <a:latin typeface="Calibri"/>
+                        </a:rPr>
+                        <a:t>-0.2pp</a:t>
+                      </a:r>
+                    </a:p>
+                  </a:txBody>
+                  <a:tcPr>
+                    <a:solidFill>
+                      <a:srgbClr val="F4F6F8"/>
+                    </a:solidFill>
+                  </a:tcPr>
+                </a:tc>
+                <a:tc>
+                  <a:txBody>
+                    <a:bodyPr/>
+                    <a:lstStyle/>
+                    <a:p>
+                      <a:pPr algn="r"/>
+                      <a:r>
+                        <a:rPr sz="1100" b="0">
+                          <a:solidFill>
+                            <a:srgbClr val="1F7A4D"/>
+                          </a:solidFill>
+                          <a:latin typeface="Calibri"/>
+                        </a:rPr>
+                        <a:t>+1.5%</a:t>
+                      </a:r>
+                    </a:p>
+                  </a:txBody>
+                  <a:tcPr>
+                    <a:solidFill>
+                      <a:srgbClr val="F4F6F8"/>
+                    </a:solidFill>
+                  </a:tcPr>
+                </a:tc>
+                <a:tc>
+                  <a:txBody>
+                    <a:bodyPr/>
+                    <a:lstStyle/>
+                    <a:p>
+                      <a:pPr algn="r"/>
+                      <a:r>
+                        <a:rPr sz="1100" b="0">
+                          <a:solidFill>
+                            <a:srgbClr val="1A1A1A"/>
+                          </a:solidFill>
+                          <a:latin typeface="Calibri"/>
+                        </a:rPr>
+                        <a:t>R69</a:t>
+                      </a:r>
+                    </a:p>
+                  </a:txBody>
+                  <a:tcPr>
+                    <a:solidFill>
+                      <a:srgbClr val="F4F6F8"/>
+                    </a:solidFill>
+                  </a:tcPr>
+                </a:tc>
+              </a:tr>
+            </a:tbl>
+          </a:graphicData>
+        </a:graphic>
+      </p:graphicFrame>
+      <p:sp>
+        <p:nvSpPr>
+          <p:cNvPr id="31" name="Rectangle 30"/>
           <p:cNvSpPr/>
           <p:nvPr/>
         </p:nvSpPr>
         <p:spPr>
           <a:xfrm>
-            <a:off x="365760" y="4251960"/>
-            <a:ext cx="11457432" cy="2148840"/>
+            <a:off x="347472" y="4498848"/>
+            <a:ext cx="11484864" cy="1938528"/>
           </a:xfrm>
           <a:prstGeom prst="rect">
             <a:avLst/>
@@ -5274,14 +5719,14 @@
       </p:sp>
       <p:sp>
         <p:nvSpPr>
-          <p:cNvPr id="30" name="TextBox 29"/>
+          <p:cNvPr id="32" name="TextBox 31"/>
           <p:cNvSpPr txBox="1"/>
           <p:nvPr/>
         </p:nvSpPr>
         <p:spPr>
           <a:xfrm>
-            <a:off x="530352" y="4370832"/>
-            <a:ext cx="11064240" cy="256032"/>
+            <a:off x="502920" y="4590288"/>
+            <a:ext cx="11155680" cy="237744"/>
           </a:xfrm>
           <a:prstGeom prst="rect">
             <a:avLst/>
@@ -5296,27 +5741,27 @@
           <a:p>
             <a:pPr algn="l"/>
             <a:r>
-              <a:rPr sz="1400" b="1">
+              <a:rPr sz="1300" b="1">
                 <a:solidFill>
                   <a:srgbClr val="0B2545"/>
                 </a:solidFill>
                 <a:latin typeface="Calibri"/>
               </a:rPr>
-              <a:t>What this tells the client</a:t>
-            </a:r>
-          </a:p>
-        </p:txBody>
-      </p:sp>
-      <p:sp>
-        <p:nvSpPr>
-          <p:cNvPr id="31" name="TextBox 30"/>
+              <a:t>Takeaways</a:t>
+            </a:r>
+          </a:p>
+        </p:txBody>
+      </p:sp>
+      <p:sp>
+        <p:nvSpPr>
+          <p:cNvPr id="33" name="TextBox 32"/>
           <p:cNvSpPr txBox="1"/>
           <p:nvPr/>
         </p:nvSpPr>
         <p:spPr>
           <a:xfrm>
-            <a:off x="530352" y="4663440"/>
-            <a:ext cx="11064240" cy="1600200"/>
+            <a:off x="502920" y="4846320"/>
+            <a:ext cx="11155680" cy="1481328"/>
           </a:xfrm>
           <a:prstGeom prst="rect">
             <a:avLst/>
@@ -5331,7 +5776,7 @@
           <a:p>
             <a:pPr>
               <a:spcAft>
-                <a:spcPts val="400"/>
+                <a:spcPts val="500"/>
               </a:spcAft>
             </a:pPr>
             <a:r>
@@ -5341,13 +5786,13 @@
                 </a:solidFill>
                 <a:latin typeface="Calibri"/>
               </a:rPr>
-              <a:t>•  Unilever’s Pasta line in this extract is one range at one price: Knorr Pasta Pots, all ~R49 a pot.</a:t>
+              <a:t>•  Pasta is a R3.29bn category growing +5.2% in value, with volume -0.7% — growth is price/mix, not more tonnes.</a:t>
             </a:r>
           </a:p>
           <a:p>
             <a:pPr>
               <a:spcAft>
-                <a:spcPts val="400"/>
+                <a:spcPts val="500"/>
               </a:spcAft>
             </a:pPr>
             <a:r>
@@ -5357,13 +5802,13 @@
                 </a:solidFill>
                 <a:latin typeface="Calibri"/>
               </a:rPr>
-              <a:t>•  Carbonara is the lead SKU (49% of value). Tomato &amp; Mozzarella 30%. Mushroom 22% and the smallest pack (59g) at the highest R/kg.</a:t>
+              <a:t>•  Noodles is the engine: 64% of Pasta value (up 1.8pp). Macaroni 21% and spaghetti 13% are the dry-pasta game, led by Tiger Brands and private label at ~R30–35/kg.</a:t>
             </a:r>
           </a:p>
           <a:p>
             <a:pPr>
               <a:spcAft>
-                <a:spcPts val="400"/>
+                <a:spcPts val="500"/>
               </a:spcAft>
             </a:pPr>
             <a:r>
@@ -5373,13 +5818,13 @@
                 </a:solidFill>
                 <a:latin typeface="Calibri"/>
               </a:rPr>
-              <a:t>•  There is no 12-month Pasta view here. The SKUs only appear in June 2026, so we cannot say if the line is winning or losing.</a:t>
+              <a:t>•  Winners: Kellogg's (+2.1pp) and Indomie/Indofood (+1.4pp). Losers: Nestlé/Maggi (−2.7pp), Mr Pasta (−2.0pp), Tiger Brands (−1.5pp).</a:t>
             </a:r>
           </a:p>
           <a:p>
             <a:pPr>
               <a:spcAft>
-                <a:spcPts val="400"/>
+                <a:spcPts val="500"/>
               </a:spcAft>
             </a:pPr>
             <a:r>
@@ -5389,7 +5834,7 @@
                 </a:solidFill>
                 <a:latin typeface="Calibri"/>
               </a:rPr>
-              <a:t>•  Key players and category share cannot be read from this file: every row is Manufacturer = Unilever.</a:t>
+              <a:t>•  Unilever is not a Pasta-category player yet. Knorr Pasta Pots appear only in Jun 26, coded in Noodles.</a:t>
             </a:r>
           </a:p>
         </p:txBody>
@@ -5421,7 +5866,7 @@
         <p:spPr>
           <a:xfrm>
             <a:off x="0" y="0"/>
-            <a:ext cx="12191695" cy="841248"/>
+            <a:ext cx="12191695" cy="804672"/>
           </a:xfrm>
           <a:prstGeom prst="rect">
             <a:avLst/>
@@ -5463,8 +5908,8 @@
         </p:nvSpPr>
         <p:spPr>
           <a:xfrm>
-            <a:off x="365760" y="109728"/>
-            <a:ext cx="9601200" cy="384048"/>
+            <a:off x="347472" y="91440"/>
+            <a:ext cx="11430000" cy="365760"/>
           </a:xfrm>
           <a:prstGeom prst="rect">
             <a:avLst/>
@@ -5479,13 +5924,13 @@
           <a:p>
             <a:pPr algn="l"/>
             <a:r>
-              <a:rPr sz="2400" b="1">
+              <a:rPr sz="2200" b="1">
                 <a:solidFill>
                   <a:srgbClr val="FFFFFF"/>
                 </a:solidFill>
                 <a:latin typeface="Calibri"/>
               </a:rPr>
-              <a:t>Noodles: this extract cannot answer the category question</a:t>
+              <a:t>Noodles: Kellogg's winning, Maggi losing, Unilever not in the sachet game</a:t>
             </a:r>
           </a:p>
         </p:txBody>
@@ -5498,8 +5943,8 @@
         </p:nvSpPr>
         <p:spPr>
           <a:xfrm>
-            <a:off x="365760" y="475488"/>
-            <a:ext cx="11338560" cy="292608"/>
+            <a:off x="347472" y="457200"/>
+            <a:ext cx="11430000" cy="274320"/>
           </a:xfrm>
           <a:prstGeom prst="rect">
             <a:avLst/>
@@ -5514,13 +5959,13 @@
           <a:p>
             <a:pPr algn="l"/>
             <a:r>
-              <a:rPr sz="1200" b="0">
+              <a:rPr sz="1100" b="0">
                 <a:solidFill>
                   <a:srgbClr val="C9D6E3"/>
                 </a:solidFill>
                 <a:latin typeface="Calibri"/>
               </a:rPr>
-              <a:t>No Noodles category  ·  Instant noodle cups at R0  ·  Only live ‘Noodle’ SKU is a soup sachet</a:t>
+              <a:t>Noodles subcategory  ·  12 months to Jun 26 and June 2026  ·  Unilever = Knorr Pasta Pots</a:t>
             </a:r>
           </a:p>
         </p:txBody>
@@ -5576,8 +6021,8 @@
         </p:nvSpPr>
         <p:spPr>
           <a:xfrm>
-            <a:off x="365760" y="6620256"/>
-            <a:ext cx="11430000" cy="201168"/>
+            <a:off x="347472" y="6620256"/>
+            <a:ext cx="11521440" cy="201168"/>
           </a:xfrm>
           <a:prstGeom prst="rect">
             <a:avLst/>
@@ -5598,7 +6043,7 @@
                 </a:solidFill>
                 <a:latin typeface="Calibri"/>
               </a:rPr>
-              <a:t>Source: Monthly Time Groupings Export, South Africa  ·  Period in file: Jul 2025–Jun 2026  ·  Measures: 12mm CY Value, Volume, Ave Price (Value/Volume)</a:t>
+              <a:t>Source: Monthly Trended Export, South Africa Pasta, multi-retailer  ·  12 months = Jul 25–Jun 26 vs YA Jul 24–Jun 25  ·  Price = value ÷ volume (R/kg)  ·  Latest month = Jun 26</a:t>
             </a:r>
           </a:p>
         </p:txBody>
@@ -5611,8 +6056,8 @@
         </p:nvSpPr>
         <p:spPr>
           <a:xfrm>
-            <a:off x="365760" y="1024128"/>
-            <a:ext cx="5623560" cy="2331720"/>
+            <a:off x="347472" y="950976"/>
+            <a:ext cx="2834640" cy="804672"/>
           </a:xfrm>
           <a:prstGeom prst="rect">
             <a:avLst/>
@@ -5650,131 +6095,23 @@
       </p:sp>
       <p:sp>
         <p:nvSpPr>
-          <p:cNvPr id="8" name="TextBox 7"/>
-          <p:cNvSpPr txBox="1"/>
-          <p:nvPr/>
-        </p:nvSpPr>
-        <p:spPr>
-          <a:xfrm>
-            <a:off x="530352" y="1115568"/>
-            <a:ext cx="5303520" cy="274320"/>
-          </a:xfrm>
-          <a:prstGeom prst="rect">
-            <a:avLst/>
-          </a:prstGeom>
-          <a:noFill/>
-        </p:spPr>
-        <p:txBody>
-          <a:bodyPr wrap="square">
-            <a:spAutoFit/>
-          </a:bodyPr>
-          <a:lstStyle/>
-          <a:p>
-            <a:pPr algn="l"/>
-            <a:r>
-              <a:rPr sz="1400" b="1">
-                <a:solidFill>
-                  <a:srgbClr val="0B2545"/>
-                </a:solidFill>
-                <a:latin typeface="Calibri"/>
-              </a:rPr>
-              <a:t>What we looked for</a:t>
-            </a:r>
-          </a:p>
-        </p:txBody>
-      </p:sp>
-      <p:sp>
-        <p:nvSpPr>
-          <p:cNvPr id="9" name="TextBox 8"/>
-          <p:cNvSpPr txBox="1"/>
-          <p:nvPr/>
-        </p:nvSpPr>
-        <p:spPr>
-          <a:xfrm>
-            <a:off x="530352" y="1417320"/>
-            <a:ext cx="5303520" cy="1783080"/>
-          </a:xfrm>
-          <a:prstGeom prst="rect">
-            <a:avLst/>
-          </a:prstGeom>
-          <a:noFill/>
-        </p:spPr>
-        <p:txBody>
-          <a:bodyPr wrap="square">
-            <a:spAutoFit/>
-          </a:bodyPr>
-          <a:lstStyle/>
-          <a:p>
-            <a:pPr>
-              <a:spcAft>
-                <a:spcPts val="600"/>
-              </a:spcAft>
-            </a:pPr>
-            <a:r>
-              <a:rPr sz="1300" b="0">
-                <a:solidFill>
-                  <a:srgbClr val="1A1A1A"/>
-                </a:solidFill>
-                <a:latin typeface="Calibri"/>
-              </a:rPr>
-              <a:t>•  Categories in file: 21 Unilever categories. Pasta is present. Noodles is not.</a:t>
-            </a:r>
-          </a:p>
-          <a:p>
-            <a:pPr>
-              <a:spcAft>
-                <a:spcPts val="600"/>
-              </a:spcAft>
-            </a:pPr>
-            <a:r>
-              <a:rPr sz="1300" b="0">
-                <a:solidFill>
-                  <a:srgbClr val="1A1A1A"/>
-                </a:solidFill>
-                <a:latin typeface="Calibri"/>
-              </a:rPr>
-              <a:t>•  Instant Soup: Knorr Cup A Snack Noodle (Smoked Paprika &amp; Mung Bean; Spicy Bean) — listed in Jul, Aug, Mar with R0 / 0 kg.</a:t>
-            </a:r>
-          </a:p>
-          <a:p>
-            <a:pPr>
-              <a:spcAft>
-                <a:spcPts val="600"/>
-              </a:spcAft>
-            </a:pPr>
-            <a:r>
-              <a:rPr sz="1300" b="0">
-                <a:solidFill>
-                  <a:srgbClr val="1A1A1A"/>
-                </a:solidFill>
-                <a:latin typeface="Calibri"/>
-              </a:rPr>
-              <a:t>•  Regular &amp; Low Price Soup: Knorr Soup Chicken Noodle 45g is the only SKU with ‘Noodle’ in the name and sales.</a:t>
-            </a:r>
-          </a:p>
-        </p:txBody>
-      </p:sp>
-      <p:sp>
-        <p:nvSpPr>
-          <p:cNvPr id="10" name="Rectangle 9"/>
+          <p:cNvPr id="8" name="Rectangle 7"/>
           <p:cNvSpPr/>
           <p:nvPr/>
         </p:nvSpPr>
         <p:spPr>
           <a:xfrm>
-            <a:off x="6172200" y="1024128"/>
-            <a:ext cx="5650992" cy="2331720"/>
+            <a:off x="347472" y="950976"/>
+            <a:ext cx="64008" cy="804672"/>
           </a:xfrm>
           <a:prstGeom prst="rect">
             <a:avLst/>
           </a:prstGeom>
           <a:solidFill>
-            <a:srgbClr val="F4F6F8"/>
+            <a:srgbClr val="1B4F8A"/>
           </a:solidFill>
           <a:ln>
-            <a:solidFill>
-              <a:srgbClr val="D5DBE0"/>
-            </a:solidFill>
+            <a:noFill/>
           </a:ln>
         </p:spPr>
         <p:style>
@@ -5801,14 +6138,14 @@
       </p:sp>
       <p:sp>
         <p:nvSpPr>
-          <p:cNvPr id="11" name="TextBox 10"/>
+          <p:cNvPr id="9" name="TextBox 8"/>
           <p:cNvSpPr txBox="1"/>
           <p:nvPr/>
         </p:nvSpPr>
         <p:spPr>
           <a:xfrm>
-            <a:off x="6336792" y="1115568"/>
-            <a:ext cx="5349240" cy="274320"/>
+            <a:off x="493776" y="1005840"/>
+            <a:ext cx="2633472" cy="201168"/>
           </a:xfrm>
           <a:prstGeom prst="rect">
             <a:avLst/>
@@ -5823,27 +6160,27 @@
           <a:p>
             <a:pPr algn="l"/>
             <a:r>
-              <a:rPr sz="1400" b="1">
+              <a:rPr sz="1000" b="0">
                 <a:solidFill>
-                  <a:srgbClr val="9B2C2C"/>
+                  <a:srgbClr val="5C6B73"/>
                 </a:solidFill>
                 <a:latin typeface="Calibri"/>
               </a:rPr>
-              <a:t>Therefore we cannot say</a:t>
-            </a:r>
-          </a:p>
-        </p:txBody>
-      </p:sp>
-      <p:sp>
-        <p:nvSpPr>
-          <p:cNvPr id="12" name="TextBox 11"/>
+              <a:t>12-MONTH VALUE</a:t>
+            </a:r>
+          </a:p>
+        </p:txBody>
+      </p:sp>
+      <p:sp>
+        <p:nvSpPr>
+          <p:cNvPr id="10" name="TextBox 9"/>
           <p:cNvSpPr txBox="1"/>
           <p:nvPr/>
         </p:nvSpPr>
         <p:spPr>
           <a:xfrm>
-            <a:off x="6336792" y="1417320"/>
-            <a:ext cx="5349240" cy="1783080"/>
+            <a:off x="493776" y="1188720"/>
+            <a:ext cx="2633472" cy="292608"/>
           </a:xfrm>
           <a:prstGeom prst="rect">
             <a:avLst/>
@@ -5856,707 +6193,671 @@
           </a:bodyPr>
           <a:lstStyle/>
           <a:p>
-            <a:pPr>
-              <a:spcAft>
-                <a:spcPts val="800"/>
-              </a:spcAft>
-            </a:pPr>
-            <a:r>
-              <a:rPr sz="1300" b="0">
-                <a:solidFill>
-                  <a:srgbClr val="1A1A1A"/>
-                </a:solidFill>
-                <a:latin typeface="Calibri"/>
-              </a:rPr>
-              <a:t>•  Who the key Noodles players are (Tiger, Rainbow, Maggi, house brands, etc.).</a:t>
-            </a:r>
-          </a:p>
-          <a:p>
-            <a:pPr>
-              <a:spcAft>
-                <a:spcPts val="800"/>
-              </a:spcAft>
-            </a:pPr>
-            <a:r>
-              <a:rPr sz="1300" b="0">
-                <a:solidFill>
-                  <a:srgbClr val="1A1A1A"/>
-                </a:solidFill>
-                <a:latin typeface="Calibri"/>
-              </a:rPr>
-              <a:t>•  Who is winning or losing share over 12 months.</a:t>
-            </a:r>
-          </a:p>
-          <a:p>
-            <a:pPr>
-              <a:spcAft>
-                <a:spcPts val="800"/>
-              </a:spcAft>
-            </a:pPr>
-            <a:r>
-              <a:rPr sz="1300" b="0">
-                <a:solidFill>
-                  <a:srgbClr val="1A1A1A"/>
-                </a:solidFill>
-                <a:latin typeface="Calibri"/>
-              </a:rPr>
-              <a:t>•  What the Noodles price ladder looks like, or where Unilever sits on it.</a:t>
-            </a:r>
-          </a:p>
-        </p:txBody>
-      </p:sp>
-      <p:sp>
-        <p:nvSpPr>
-          <p:cNvPr id="13" name="TextBox 12"/>
-          <p:cNvSpPr txBox="1"/>
-          <p:nvPr/>
-        </p:nvSpPr>
-        <p:spPr>
-          <a:xfrm>
-            <a:off x="365760" y="3474720"/>
-            <a:ext cx="11430000" cy="274320"/>
-          </a:xfrm>
-          <a:prstGeom prst="rect">
-            <a:avLst/>
-          </a:prstGeom>
-          <a:noFill/>
-        </p:spPr>
-        <p:txBody>
-          <a:bodyPr wrap="square">
-            <a:spAutoFit/>
-          </a:bodyPr>
-          <a:lstStyle/>
-          <a:p>
             <a:pPr algn="l"/>
             <a:r>
-              <a:rPr sz="1400" b="1">
+              <a:rPr sz="1800" b="1">
                 <a:solidFill>
                   <a:srgbClr val="0B2545"/>
                 </a:solidFill>
                 <a:latin typeface="Calibri"/>
               </a:rPr>
-              <a:t>Closest live SKU — Knorr Soup Chicken Noodle 45g (soup category, not noodles)</a:t>
-            </a:r>
-          </a:p>
-        </p:txBody>
-      </p:sp>
-      <p:graphicFrame>
-        <p:nvGraphicFramePr>
-          <p:cNvPr id="14" name="Table 13"/>
-          <p:cNvGraphicFramePr>
-            <a:graphicFrameLocks noGrp="1"/>
-          </p:cNvGraphicFramePr>
+              <a:t>R2.1bn</a:t>
+            </a:r>
+          </a:p>
+        </p:txBody>
+      </p:sp>
+      <p:sp>
+        <p:nvSpPr>
+          <p:cNvPr id="11" name="TextBox 10"/>
+          <p:cNvSpPr txBox="1"/>
           <p:nvPr/>
-        </p:nvGraphicFramePr>
-        <p:xfrm>
-          <a:off x="365760" y="3794760"/>
-          <a:ext cx="5760720" cy="1965960"/>
-        </p:xfrm>
-        <a:graphic>
-          <a:graphicData uri="http://schemas.openxmlformats.org/drawingml/2006/table">
-            <a:tbl>
-              <a:tblPr firstRow="1" bandRow="1">
-                <a:tableStyleId>{5C22544A-7EE6-4342-B048-85BDC9FD1C3A}</a:tableStyleId>
-              </a:tblPr>
-              <a:tblGrid>
-                <a:gridCol w="1280160"/>
-                <a:gridCol w="1097280"/>
-                <a:gridCol w="1143000"/>
-                <a:gridCol w="1051560"/>
-                <a:gridCol w="1188720"/>
-              </a:tblGrid>
-              <a:tr h="393192">
-                <a:tc>
-                  <a:txBody>
-                    <a:bodyPr/>
-                    <a:lstStyle/>
-                    <a:p>
-                      <a:pPr algn="l"/>
-                      <a:r>
-                        <a:rPr sz="1100" b="1">
-                          <a:solidFill>
-                            <a:srgbClr val="FFFFFF"/>
-                          </a:solidFill>
-                          <a:latin typeface="Calibri"/>
-                        </a:rPr>
-                        <a:t>Month</a:t>
-                      </a:r>
-                    </a:p>
-                  </a:txBody>
-                  <a:tcPr>
-                    <a:solidFill>
-                      <a:srgbClr val="0B2545"/>
-                    </a:solidFill>
-                  </a:tcPr>
-                </a:tc>
-                <a:tc>
-                  <a:txBody>
-                    <a:bodyPr/>
-                    <a:lstStyle/>
-                    <a:p>
-                      <a:pPr algn="r"/>
-                      <a:r>
-                        <a:rPr sz="1100" b="1">
-                          <a:solidFill>
-                            <a:srgbClr val="FFFFFF"/>
-                          </a:solidFill>
-                          <a:latin typeface="Calibri"/>
-                        </a:rPr>
-                        <a:t>Value</a:t>
-                      </a:r>
-                    </a:p>
-                  </a:txBody>
-                  <a:tcPr>
-                    <a:solidFill>
-                      <a:srgbClr val="0B2545"/>
-                    </a:solidFill>
-                  </a:tcPr>
-                </a:tc>
-                <a:tc>
-                  <a:txBody>
-                    <a:bodyPr/>
-                    <a:lstStyle/>
-                    <a:p>
-                      <a:pPr algn="r"/>
-                      <a:r>
-                        <a:rPr sz="1100" b="1">
-                          <a:solidFill>
-                            <a:srgbClr val="FFFFFF"/>
-                          </a:solidFill>
-                          <a:latin typeface="Calibri"/>
-                        </a:rPr>
-                        <a:t>Volume</a:t>
-                      </a:r>
-                    </a:p>
-                  </a:txBody>
-                  <a:tcPr>
-                    <a:solidFill>
-                      <a:srgbClr val="0B2545"/>
-                    </a:solidFill>
-                  </a:tcPr>
-                </a:tc>
-                <a:tc>
-                  <a:txBody>
-                    <a:bodyPr/>
-                    <a:lstStyle/>
-                    <a:p>
-                      <a:pPr algn="r"/>
-                      <a:r>
-                        <a:rPr sz="1100" b="1">
-                          <a:solidFill>
-                            <a:srgbClr val="FFFFFF"/>
-                          </a:solidFill>
-                          <a:latin typeface="Calibri"/>
-                        </a:rPr>
-                        <a:t>R/kg</a:t>
-                      </a:r>
-                    </a:p>
-                  </a:txBody>
-                  <a:tcPr>
-                    <a:solidFill>
-                      <a:srgbClr val="0B2545"/>
-                    </a:solidFill>
-                  </a:tcPr>
-                </a:tc>
-                <a:tc>
-                  <a:txBody>
-                    <a:bodyPr/>
-                    <a:lstStyle/>
-                    <a:p>
-                      <a:pPr algn="r"/>
-                      <a:r>
-                        <a:rPr sz="1100" b="1">
-                          <a:solidFill>
-                            <a:srgbClr val="FFFFFF"/>
-                          </a:solidFill>
-                          <a:latin typeface="Calibri"/>
-                        </a:rPr>
-                        <a:t>R/sachet</a:t>
-                      </a:r>
-                    </a:p>
-                  </a:txBody>
-                  <a:tcPr>
-                    <a:solidFill>
-                      <a:srgbClr val="0B2545"/>
-                    </a:solidFill>
-                  </a:tcPr>
-                </a:tc>
-              </a:tr>
-              <a:tr h="393192">
-                <a:tc>
-                  <a:txBody>
-                    <a:bodyPr/>
-                    <a:lstStyle/>
-                    <a:p>
-                      <a:pPr algn="l"/>
-                      <a:r>
-                        <a:rPr sz="1200" b="1">
-                          <a:solidFill>
-                            <a:srgbClr val="1A1A1A"/>
-                          </a:solidFill>
-                          <a:latin typeface="Calibri"/>
-                        </a:rPr>
-                        <a:t>Apr 2026</a:t>
-                      </a:r>
-                    </a:p>
-                  </a:txBody>
-                  <a:tcPr>
-                    <a:solidFill>
-                      <a:srgbClr val="F4F6F8"/>
-                    </a:solidFill>
-                  </a:tcPr>
-                </a:tc>
-                <a:tc>
-                  <a:txBody>
-                    <a:bodyPr/>
-                    <a:lstStyle/>
-                    <a:p>
-                      <a:pPr algn="r"/>
-                      <a:r>
-                        <a:rPr sz="1200" b="0">
-                          <a:solidFill>
-                            <a:srgbClr val="1A1A1A"/>
-                          </a:solidFill>
-                          <a:latin typeface="Calibri"/>
-                        </a:rPr>
-                        <a:t>R1,008k</a:t>
-                      </a:r>
-                    </a:p>
-                  </a:txBody>
-                  <a:tcPr>
-                    <a:solidFill>
-                      <a:srgbClr val="F4F6F8"/>
-                    </a:solidFill>
-                  </a:tcPr>
-                </a:tc>
-                <a:tc>
-                  <a:txBody>
-                    <a:bodyPr/>
-                    <a:lstStyle/>
-                    <a:p>
-                      <a:pPr algn="r"/>
-                      <a:r>
-                        <a:rPr sz="1200" b="0">
-                          <a:solidFill>
-                            <a:srgbClr val="1A1A1A"/>
-                          </a:solidFill>
-                          <a:latin typeface="Calibri"/>
-                        </a:rPr>
-                        <a:t>7,870 kg</a:t>
-                      </a:r>
-                    </a:p>
-                  </a:txBody>
-                  <a:tcPr>
-                    <a:solidFill>
-                      <a:srgbClr val="F4F6F8"/>
-                    </a:solidFill>
-                  </a:tcPr>
-                </a:tc>
-                <a:tc>
-                  <a:txBody>
-                    <a:bodyPr/>
-                    <a:lstStyle/>
-                    <a:p>
-                      <a:pPr algn="r"/>
-                      <a:r>
-                        <a:rPr sz="1200" b="0">
-                          <a:solidFill>
-                            <a:srgbClr val="1A1A1A"/>
-                          </a:solidFill>
-                          <a:latin typeface="Calibri"/>
-                        </a:rPr>
-                        <a:t>R128.1</a:t>
-                      </a:r>
-                    </a:p>
-                  </a:txBody>
-                  <a:tcPr>
-                    <a:solidFill>
-                      <a:srgbClr val="F4F6F8"/>
-                    </a:solidFill>
-                  </a:tcPr>
-                </a:tc>
-                <a:tc>
-                  <a:txBody>
-                    <a:bodyPr/>
-                    <a:lstStyle/>
-                    <a:p>
-                      <a:pPr algn="r"/>
-                      <a:r>
-                        <a:rPr sz="1200" b="0">
-                          <a:solidFill>
-                            <a:srgbClr val="1A1A1A"/>
-                          </a:solidFill>
-                          <a:latin typeface="Calibri"/>
-                        </a:rPr>
-                        <a:t>R5.77</a:t>
-                      </a:r>
-                    </a:p>
-                  </a:txBody>
-                  <a:tcPr>
-                    <a:solidFill>
-                      <a:srgbClr val="F4F6F8"/>
-                    </a:solidFill>
-                  </a:tcPr>
-                </a:tc>
-              </a:tr>
-              <a:tr h="393192">
-                <a:tc>
-                  <a:txBody>
-                    <a:bodyPr/>
-                    <a:lstStyle/>
-                    <a:p>
-                      <a:pPr algn="l"/>
-                      <a:r>
-                        <a:rPr sz="1200" b="1">
-                          <a:solidFill>
-                            <a:srgbClr val="1A1A1A"/>
-                          </a:solidFill>
-                          <a:latin typeface="Calibri"/>
-                        </a:rPr>
-                        <a:t>Jun 2026</a:t>
-                      </a:r>
-                    </a:p>
-                  </a:txBody>
-                  <a:tcPr>
-                    <a:solidFill>
-                      <a:srgbClr val="FFFFFF"/>
-                    </a:solidFill>
-                  </a:tcPr>
-                </a:tc>
-                <a:tc>
-                  <a:txBody>
-                    <a:bodyPr/>
-                    <a:lstStyle/>
-                    <a:p>
-                      <a:pPr algn="r"/>
-                      <a:r>
-                        <a:rPr sz="1200" b="0">
-                          <a:solidFill>
-                            <a:srgbClr val="1A1A1A"/>
-                          </a:solidFill>
-                          <a:latin typeface="Calibri"/>
-                        </a:rPr>
-                        <a:t>R2,120k</a:t>
-                      </a:r>
-                    </a:p>
-                  </a:txBody>
-                  <a:tcPr>
-                    <a:solidFill>
-                      <a:srgbClr val="FFFFFF"/>
-                    </a:solidFill>
-                  </a:tcPr>
-                </a:tc>
-                <a:tc>
-                  <a:txBody>
-                    <a:bodyPr/>
-                    <a:lstStyle/>
-                    <a:p>
-                      <a:pPr algn="r"/>
-                      <a:r>
-                        <a:rPr sz="1200" b="0">
-                          <a:solidFill>
-                            <a:srgbClr val="1A1A1A"/>
-                          </a:solidFill>
-                          <a:latin typeface="Calibri"/>
-                        </a:rPr>
-                        <a:t>16,149 kg</a:t>
-                      </a:r>
-                    </a:p>
-                  </a:txBody>
-                  <a:tcPr>
-                    <a:solidFill>
-                      <a:srgbClr val="FFFFFF"/>
-                    </a:solidFill>
-                  </a:tcPr>
-                </a:tc>
-                <a:tc>
-                  <a:txBody>
-                    <a:bodyPr/>
-                    <a:lstStyle/>
-                    <a:p>
-                      <a:pPr algn="r"/>
-                      <a:r>
-                        <a:rPr sz="1200" b="0">
-                          <a:solidFill>
-                            <a:srgbClr val="1A1A1A"/>
-                          </a:solidFill>
-                          <a:latin typeface="Calibri"/>
-                        </a:rPr>
-                        <a:t>R131.3</a:t>
-                      </a:r>
-                    </a:p>
-                  </a:txBody>
-                  <a:tcPr>
-                    <a:solidFill>
-                      <a:srgbClr val="FFFFFF"/>
-                    </a:solidFill>
-                  </a:tcPr>
-                </a:tc>
-                <a:tc>
-                  <a:txBody>
-                    <a:bodyPr/>
-                    <a:lstStyle/>
-                    <a:p>
-                      <a:pPr algn="r"/>
-                      <a:r>
-                        <a:rPr sz="1200" b="0">
-                          <a:solidFill>
-                            <a:srgbClr val="1A1A1A"/>
-                          </a:solidFill>
-                          <a:latin typeface="Calibri"/>
-                        </a:rPr>
-                        <a:t>R5.91</a:t>
-                      </a:r>
-                    </a:p>
-                  </a:txBody>
-                  <a:tcPr>
-                    <a:solidFill>
-                      <a:srgbClr val="FFFFFF"/>
-                    </a:solidFill>
-                  </a:tcPr>
-                </a:tc>
-              </a:tr>
-              <a:tr h="393192">
-                <a:tc>
-                  <a:txBody>
-                    <a:bodyPr/>
-                    <a:lstStyle/>
-                    <a:p>
-                      <a:pPr algn="l"/>
-                      <a:r>
-                        <a:rPr sz="1200" b="1">
-                          <a:solidFill>
-                            <a:srgbClr val="1A1A1A"/>
-                          </a:solidFill>
-                          <a:latin typeface="Calibri"/>
-                        </a:rPr>
-                        <a:t>Mar 2026</a:t>
-                      </a:r>
-                    </a:p>
-                  </a:txBody>
-                  <a:tcPr>
-                    <a:solidFill>
-                      <a:srgbClr val="F4F6F8"/>
-                    </a:solidFill>
-                  </a:tcPr>
-                </a:tc>
-                <a:tc>
-                  <a:txBody>
-                    <a:bodyPr/>
-                    <a:lstStyle/>
-                    <a:p>
-                      <a:pPr algn="r"/>
-                      <a:r>
-                        <a:rPr sz="1200" b="0">
-                          <a:solidFill>
-                            <a:srgbClr val="1A1A1A"/>
-                          </a:solidFill>
-                          <a:latin typeface="Calibri"/>
-                        </a:rPr>
-                        <a:t>R656k</a:t>
-                      </a:r>
-                    </a:p>
-                  </a:txBody>
-                  <a:tcPr>
-                    <a:solidFill>
-                      <a:srgbClr val="F4F6F8"/>
-                    </a:solidFill>
-                  </a:tcPr>
-                </a:tc>
-                <a:tc>
-                  <a:txBody>
-                    <a:bodyPr/>
-                    <a:lstStyle/>
-                    <a:p>
-                      <a:pPr algn="r"/>
-                      <a:r>
-                        <a:rPr sz="1200" b="0">
-                          <a:solidFill>
-                            <a:srgbClr val="1A1A1A"/>
-                          </a:solidFill>
-                          <a:latin typeface="Calibri"/>
-                        </a:rPr>
-                        <a:t>4,791 kg</a:t>
-                      </a:r>
-                    </a:p>
-                  </a:txBody>
-                  <a:tcPr>
-                    <a:solidFill>
-                      <a:srgbClr val="F4F6F8"/>
-                    </a:solidFill>
-                  </a:tcPr>
-                </a:tc>
-                <a:tc>
-                  <a:txBody>
-                    <a:bodyPr/>
-                    <a:lstStyle/>
-                    <a:p>
-                      <a:pPr algn="r"/>
-                      <a:r>
-                        <a:rPr sz="1200" b="0">
-                          <a:solidFill>
-                            <a:srgbClr val="1A1A1A"/>
-                          </a:solidFill>
-                          <a:latin typeface="Calibri"/>
-                        </a:rPr>
-                        <a:t>R136.9</a:t>
-                      </a:r>
-                    </a:p>
-                  </a:txBody>
-                  <a:tcPr>
-                    <a:solidFill>
-                      <a:srgbClr val="F4F6F8"/>
-                    </a:solidFill>
-                  </a:tcPr>
-                </a:tc>
-                <a:tc>
-                  <a:txBody>
-                    <a:bodyPr/>
-                    <a:lstStyle/>
-                    <a:p>
-                      <a:pPr algn="r"/>
-                      <a:r>
-                        <a:rPr sz="1200" b="0">
-                          <a:solidFill>
-                            <a:srgbClr val="1A1A1A"/>
-                          </a:solidFill>
-                          <a:latin typeface="Calibri"/>
-                        </a:rPr>
-                        <a:t>R6.16</a:t>
-                      </a:r>
-                    </a:p>
-                  </a:txBody>
-                  <a:tcPr>
-                    <a:solidFill>
-                      <a:srgbClr val="F4F6F8"/>
-                    </a:solidFill>
-                  </a:tcPr>
-                </a:tc>
-              </a:tr>
-              <a:tr h="393192">
-                <a:tc>
-                  <a:txBody>
-                    <a:bodyPr/>
-                    <a:lstStyle/>
-                    <a:p>
-                      <a:pPr algn="l"/>
-                      <a:r>
-                        <a:rPr sz="1200" b="1">
-                          <a:solidFill>
-                            <a:srgbClr val="1A1A1A"/>
-                          </a:solidFill>
-                          <a:latin typeface="Calibri"/>
-                        </a:rPr>
-                        <a:t>May 2026</a:t>
-                      </a:r>
-                    </a:p>
-                  </a:txBody>
-                  <a:tcPr>
-                    <a:solidFill>
-                      <a:srgbClr val="FFFFFF"/>
-                    </a:solidFill>
-                  </a:tcPr>
-                </a:tc>
-                <a:tc>
-                  <a:txBody>
-                    <a:bodyPr/>
-                    <a:lstStyle/>
-                    <a:p>
-                      <a:pPr algn="r"/>
-                      <a:r>
-                        <a:rPr sz="1200" b="0">
-                          <a:solidFill>
-                            <a:srgbClr val="1A1A1A"/>
-                          </a:solidFill>
-                          <a:latin typeface="Calibri"/>
-                        </a:rPr>
-                        <a:t>R1,295k</a:t>
-                      </a:r>
-                    </a:p>
-                  </a:txBody>
-                  <a:tcPr>
-                    <a:solidFill>
-                      <a:srgbClr val="FFFFFF"/>
-                    </a:solidFill>
-                  </a:tcPr>
-                </a:tc>
-                <a:tc>
-                  <a:txBody>
-                    <a:bodyPr/>
-                    <a:lstStyle/>
-                    <a:p>
-                      <a:pPr algn="r"/>
-                      <a:r>
-                        <a:rPr sz="1200" b="0">
-                          <a:solidFill>
-                            <a:srgbClr val="1A1A1A"/>
-                          </a:solidFill>
-                          <a:latin typeface="Calibri"/>
-                        </a:rPr>
-                        <a:t>9,809 kg</a:t>
-                      </a:r>
-                    </a:p>
-                  </a:txBody>
-                  <a:tcPr>
-                    <a:solidFill>
-                      <a:srgbClr val="FFFFFF"/>
-                    </a:solidFill>
-                  </a:tcPr>
-                </a:tc>
-                <a:tc>
-                  <a:txBody>
-                    <a:bodyPr/>
-                    <a:lstStyle/>
-                    <a:p>
-                      <a:pPr algn="r"/>
-                      <a:r>
-                        <a:rPr sz="1200" b="0">
-                          <a:solidFill>
-                            <a:srgbClr val="1A1A1A"/>
-                          </a:solidFill>
-                          <a:latin typeface="Calibri"/>
-                        </a:rPr>
-                        <a:t>R132.0</a:t>
-                      </a:r>
-                    </a:p>
-                  </a:txBody>
-                  <a:tcPr>
-                    <a:solidFill>
-                      <a:srgbClr val="FFFFFF"/>
-                    </a:solidFill>
-                  </a:tcPr>
-                </a:tc>
-                <a:tc>
-                  <a:txBody>
-                    <a:bodyPr/>
-                    <a:lstStyle/>
-                    <a:p>
-                      <a:pPr algn="r"/>
-                      <a:r>
-                        <a:rPr sz="1200" b="0">
-                          <a:solidFill>
-                            <a:srgbClr val="1A1A1A"/>
-                          </a:solidFill>
-                          <a:latin typeface="Calibri"/>
-                        </a:rPr>
-                        <a:t>R5.94</a:t>
-                      </a:r>
-                    </a:p>
-                  </a:txBody>
-                  <a:tcPr>
-                    <a:solidFill>
-                      <a:srgbClr val="FFFFFF"/>
-                    </a:solidFill>
-                  </a:tcPr>
-                </a:tc>
-              </a:tr>
-            </a:tbl>
-          </a:graphicData>
-        </a:graphic>
-      </p:graphicFrame>
+        </p:nvSpPr>
+        <p:spPr>
+          <a:xfrm>
+            <a:off x="493776" y="1481328"/>
+            <a:ext cx="2633472" cy="201168"/>
+          </a:xfrm>
+          <a:prstGeom prst="rect">
+            <a:avLst/>
+          </a:prstGeom>
+          <a:noFill/>
+        </p:spPr>
+        <p:txBody>
+          <a:bodyPr wrap="square">
+            <a:spAutoFit/>
+          </a:bodyPr>
+          <a:lstStyle/>
+          <a:p>
+            <a:pPr algn="l"/>
+            <a:r>
+              <a:rPr sz="1000" b="0">
+                <a:solidFill>
+                  <a:srgbClr val="5C6B73"/>
+                </a:solidFill>
+                <a:latin typeface="Calibri"/>
+              </a:rPr>
+              <a:t>+8.2%  ·  vol +5.0%</a:t>
+            </a:r>
+          </a:p>
+        </p:txBody>
+      </p:sp>
+      <p:sp>
+        <p:nvSpPr>
+          <p:cNvPr id="12" name="Rectangle 11"/>
+          <p:cNvSpPr/>
+          <p:nvPr/>
+        </p:nvSpPr>
+        <p:spPr>
+          <a:xfrm>
+            <a:off x="3273552" y="950976"/>
+            <a:ext cx="2834640" cy="804672"/>
+          </a:xfrm>
+          <a:prstGeom prst="rect">
+            <a:avLst/>
+          </a:prstGeom>
+          <a:solidFill>
+            <a:srgbClr val="F4F6F8"/>
+          </a:solidFill>
+          <a:ln>
+            <a:solidFill>
+              <a:srgbClr val="D5DBE0"/>
+            </a:solidFill>
+          </a:ln>
+        </p:spPr>
+        <p:style>
+          <a:lnRef idx="1">
+            <a:schemeClr val="accent1"/>
+          </a:lnRef>
+          <a:fillRef idx="3">
+            <a:schemeClr val="accent1"/>
+          </a:fillRef>
+          <a:effectRef idx="2">
+            <a:schemeClr val="accent1"/>
+          </a:effectRef>
+          <a:fontRef idx="minor">
+            <a:schemeClr val="lt1"/>
+          </a:fontRef>
+        </p:style>
+        <p:txBody>
+          <a:bodyPr rtlCol="0" anchor="ctr"/>
+          <a:lstStyle/>
+          <a:p>
+            <a:pPr algn="ctr"/>
+          </a:p>
+        </p:txBody>
+      </p:sp>
+      <p:sp>
+        <p:nvSpPr>
+          <p:cNvPr id="13" name="Rectangle 12"/>
+          <p:cNvSpPr/>
+          <p:nvPr/>
+        </p:nvSpPr>
+        <p:spPr>
+          <a:xfrm>
+            <a:off x="3273552" y="950976"/>
+            <a:ext cx="64008" cy="804672"/>
+          </a:xfrm>
+          <a:prstGeom prst="rect">
+            <a:avLst/>
+          </a:prstGeom>
+          <a:solidFill>
+            <a:srgbClr val="0E7C7B"/>
+          </a:solidFill>
+          <a:ln>
+            <a:noFill/>
+          </a:ln>
+        </p:spPr>
+        <p:style>
+          <a:lnRef idx="1">
+            <a:schemeClr val="accent1"/>
+          </a:lnRef>
+          <a:fillRef idx="3">
+            <a:schemeClr val="accent1"/>
+          </a:fillRef>
+          <a:effectRef idx="2">
+            <a:schemeClr val="accent1"/>
+          </a:effectRef>
+          <a:fontRef idx="minor">
+            <a:schemeClr val="lt1"/>
+          </a:fontRef>
+        </p:style>
+        <p:txBody>
+          <a:bodyPr rtlCol="0" anchor="ctr"/>
+          <a:lstStyle/>
+          <a:p>
+            <a:pPr algn="ctr"/>
+          </a:p>
+        </p:txBody>
+      </p:sp>
+      <p:sp>
+        <p:nvSpPr>
+          <p:cNvPr id="14" name="TextBox 13"/>
+          <p:cNvSpPr txBox="1"/>
+          <p:nvPr/>
+        </p:nvSpPr>
+        <p:spPr>
+          <a:xfrm>
+            <a:off x="3419856" y="1005840"/>
+            <a:ext cx="2633472" cy="201168"/>
+          </a:xfrm>
+          <a:prstGeom prst="rect">
+            <a:avLst/>
+          </a:prstGeom>
+          <a:noFill/>
+        </p:spPr>
+        <p:txBody>
+          <a:bodyPr wrap="square">
+            <a:spAutoFit/>
+          </a:bodyPr>
+          <a:lstStyle/>
+          <a:p>
+            <a:pPr algn="l"/>
+            <a:r>
+              <a:rPr sz="1000" b="0">
+                <a:solidFill>
+                  <a:srgbClr val="5C6B73"/>
+                </a:solidFill>
+                <a:latin typeface="Calibri"/>
+              </a:rPr>
+              <a:t>JUNE 2026</a:t>
+            </a:r>
+          </a:p>
+        </p:txBody>
+      </p:sp>
+      <p:sp>
+        <p:nvSpPr>
+          <p:cNvPr id="15" name="TextBox 14"/>
+          <p:cNvSpPr txBox="1"/>
+          <p:nvPr/>
+        </p:nvSpPr>
+        <p:spPr>
+          <a:xfrm>
+            <a:off x="3419856" y="1188720"/>
+            <a:ext cx="2633472" cy="292608"/>
+          </a:xfrm>
+          <a:prstGeom prst="rect">
+            <a:avLst/>
+          </a:prstGeom>
+          <a:noFill/>
+        </p:spPr>
+        <p:txBody>
+          <a:bodyPr wrap="square">
+            <a:spAutoFit/>
+          </a:bodyPr>
+          <a:lstStyle/>
+          <a:p>
+            <a:pPr algn="l"/>
+            <a:r>
+              <a:rPr sz="1800" b="1">
+                <a:solidFill>
+                  <a:srgbClr val="0B2545"/>
+                </a:solidFill>
+                <a:latin typeface="Calibri"/>
+              </a:rPr>
+              <a:t>R221.5m</a:t>
+            </a:r>
+          </a:p>
+        </p:txBody>
+      </p:sp>
+      <p:sp>
+        <p:nvSpPr>
+          <p:cNvPr id="16" name="TextBox 15"/>
+          <p:cNvSpPr txBox="1"/>
+          <p:nvPr/>
+        </p:nvSpPr>
+        <p:spPr>
+          <a:xfrm>
+            <a:off x="3419856" y="1481328"/>
+            <a:ext cx="2633472" cy="201168"/>
+          </a:xfrm>
+          <a:prstGeom prst="rect">
+            <a:avLst/>
+          </a:prstGeom>
+          <a:noFill/>
+        </p:spPr>
+        <p:txBody>
+          <a:bodyPr wrap="square">
+            <a:spAutoFit/>
+          </a:bodyPr>
+          <a:lstStyle/>
+          <a:p>
+            <a:pPr algn="l"/>
+            <a:r>
+              <a:rPr sz="1000" b="0">
+                <a:solidFill>
+                  <a:srgbClr val="5C6B73"/>
+                </a:solidFill>
+                <a:latin typeface="Calibri"/>
+              </a:rPr>
+              <a:t>+10.0% vs Jun 25</a:t>
+            </a:r>
+          </a:p>
+        </p:txBody>
+      </p:sp>
+      <p:sp>
+        <p:nvSpPr>
+          <p:cNvPr id="17" name="Rectangle 16"/>
+          <p:cNvSpPr/>
+          <p:nvPr/>
+        </p:nvSpPr>
+        <p:spPr>
+          <a:xfrm>
+            <a:off x="6199632" y="950976"/>
+            <a:ext cx="2834640" cy="804672"/>
+          </a:xfrm>
+          <a:prstGeom prst="rect">
+            <a:avLst/>
+          </a:prstGeom>
+          <a:solidFill>
+            <a:srgbClr val="F4F6F8"/>
+          </a:solidFill>
+          <a:ln>
+            <a:solidFill>
+              <a:srgbClr val="D5DBE0"/>
+            </a:solidFill>
+          </a:ln>
+        </p:spPr>
+        <p:style>
+          <a:lnRef idx="1">
+            <a:schemeClr val="accent1"/>
+          </a:lnRef>
+          <a:fillRef idx="3">
+            <a:schemeClr val="accent1"/>
+          </a:fillRef>
+          <a:effectRef idx="2">
+            <a:schemeClr val="accent1"/>
+          </a:effectRef>
+          <a:fontRef idx="minor">
+            <a:schemeClr val="lt1"/>
+          </a:fontRef>
+        </p:style>
+        <p:txBody>
+          <a:bodyPr rtlCol="0" anchor="ctr"/>
+          <a:lstStyle/>
+          <a:p>
+            <a:pPr algn="ctr"/>
+          </a:p>
+        </p:txBody>
+      </p:sp>
+      <p:sp>
+        <p:nvSpPr>
+          <p:cNvPr id="18" name="Rectangle 17"/>
+          <p:cNvSpPr/>
+          <p:nvPr/>
+        </p:nvSpPr>
+        <p:spPr>
+          <a:xfrm>
+            <a:off x="6199632" y="950976"/>
+            <a:ext cx="64008" cy="804672"/>
+          </a:xfrm>
+          <a:prstGeom prst="rect">
+            <a:avLst/>
+          </a:prstGeom>
+          <a:solidFill>
+            <a:srgbClr val="C45C26"/>
+          </a:solidFill>
+          <a:ln>
+            <a:noFill/>
+          </a:ln>
+        </p:spPr>
+        <p:style>
+          <a:lnRef idx="1">
+            <a:schemeClr val="accent1"/>
+          </a:lnRef>
+          <a:fillRef idx="3">
+            <a:schemeClr val="accent1"/>
+          </a:fillRef>
+          <a:effectRef idx="2">
+            <a:schemeClr val="accent1"/>
+          </a:effectRef>
+          <a:fontRef idx="minor">
+            <a:schemeClr val="lt1"/>
+          </a:fontRef>
+        </p:style>
+        <p:txBody>
+          <a:bodyPr rtlCol="0" anchor="ctr"/>
+          <a:lstStyle/>
+          <a:p>
+            <a:pPr algn="ctr"/>
+          </a:p>
+        </p:txBody>
+      </p:sp>
+      <p:sp>
+        <p:nvSpPr>
+          <p:cNvPr id="19" name="TextBox 18"/>
+          <p:cNvSpPr txBox="1"/>
+          <p:nvPr/>
+        </p:nvSpPr>
+        <p:spPr>
+          <a:xfrm>
+            <a:off x="6345936" y="1005840"/>
+            <a:ext cx="2633472" cy="201168"/>
+          </a:xfrm>
+          <a:prstGeom prst="rect">
+            <a:avLst/>
+          </a:prstGeom>
+          <a:noFill/>
+        </p:spPr>
+        <p:txBody>
+          <a:bodyPr wrap="square">
+            <a:spAutoFit/>
+          </a:bodyPr>
+          <a:lstStyle/>
+          <a:p>
+            <a:pPr algn="l"/>
+            <a:r>
+              <a:rPr sz="1000" b="0">
+                <a:solidFill>
+                  <a:srgbClr val="5C6B73"/>
+                </a:solidFill>
+                <a:latin typeface="Calibri"/>
+              </a:rPr>
+              <a:t>PRICE POINT</a:t>
+            </a:r>
+          </a:p>
+        </p:txBody>
+      </p:sp>
+      <p:sp>
+        <p:nvSpPr>
+          <p:cNvPr id="20" name="TextBox 19"/>
+          <p:cNvSpPr txBox="1"/>
+          <p:nvPr/>
+        </p:nvSpPr>
+        <p:spPr>
+          <a:xfrm>
+            <a:off x="6345936" y="1188720"/>
+            <a:ext cx="2633472" cy="292608"/>
+          </a:xfrm>
+          <a:prstGeom prst="rect">
+            <a:avLst/>
+          </a:prstGeom>
+          <a:noFill/>
+        </p:spPr>
+        <p:txBody>
+          <a:bodyPr wrap="square">
+            <a:spAutoFit/>
+          </a:bodyPr>
+          <a:lstStyle/>
+          <a:p>
+            <a:pPr algn="l"/>
+            <a:r>
+              <a:rPr sz="1800" b="1">
+                <a:solidFill>
+                  <a:srgbClr val="0B2545"/>
+                </a:solidFill>
+                <a:latin typeface="Calibri"/>
+              </a:rPr>
+              <a:t>R96/kg</a:t>
+            </a:r>
+          </a:p>
+        </p:txBody>
+      </p:sp>
+      <p:sp>
+        <p:nvSpPr>
+          <p:cNvPr id="21" name="TextBox 20"/>
+          <p:cNvSpPr txBox="1"/>
+          <p:nvPr/>
+        </p:nvSpPr>
+        <p:spPr>
+          <a:xfrm>
+            <a:off x="6345936" y="1481328"/>
+            <a:ext cx="2633472" cy="201168"/>
+          </a:xfrm>
+          <a:prstGeom prst="rect">
+            <a:avLst/>
+          </a:prstGeom>
+          <a:noFill/>
+        </p:spPr>
+        <p:txBody>
+          <a:bodyPr wrap="square">
+            <a:spAutoFit/>
+          </a:bodyPr>
+          <a:lstStyle/>
+          <a:p>
+            <a:pPr algn="l"/>
+            <a:r>
+              <a:rPr sz="1000" b="0">
+                <a:solidFill>
+                  <a:srgbClr val="5C6B73"/>
+                </a:solidFill>
+                <a:latin typeface="Calibri"/>
+              </a:rPr>
+              <a:t>86% of value is R5–8 a sachet</a:t>
+            </a:r>
+          </a:p>
+        </p:txBody>
+      </p:sp>
+      <p:sp>
+        <p:nvSpPr>
+          <p:cNvPr id="22" name="Rectangle 21"/>
+          <p:cNvSpPr/>
+          <p:nvPr/>
+        </p:nvSpPr>
+        <p:spPr>
+          <a:xfrm>
+            <a:off x="9125712" y="950976"/>
+            <a:ext cx="2706624" cy="804672"/>
+          </a:xfrm>
+          <a:prstGeom prst="rect">
+            <a:avLst/>
+          </a:prstGeom>
+          <a:solidFill>
+            <a:srgbClr val="F4F6F8"/>
+          </a:solidFill>
+          <a:ln>
+            <a:solidFill>
+              <a:srgbClr val="D5DBE0"/>
+            </a:solidFill>
+          </a:ln>
+        </p:spPr>
+        <p:style>
+          <a:lnRef idx="1">
+            <a:schemeClr val="accent1"/>
+          </a:lnRef>
+          <a:fillRef idx="3">
+            <a:schemeClr val="accent1"/>
+          </a:fillRef>
+          <a:effectRef idx="2">
+            <a:schemeClr val="accent1"/>
+          </a:effectRef>
+          <a:fontRef idx="minor">
+            <a:schemeClr val="lt1"/>
+          </a:fontRef>
+        </p:style>
+        <p:txBody>
+          <a:bodyPr rtlCol="0" anchor="ctr"/>
+          <a:lstStyle/>
+          <a:p>
+            <a:pPr algn="ctr"/>
+          </a:p>
+        </p:txBody>
+      </p:sp>
+      <p:sp>
+        <p:nvSpPr>
+          <p:cNvPr id="23" name="Rectangle 22"/>
+          <p:cNvSpPr/>
+          <p:nvPr/>
+        </p:nvSpPr>
+        <p:spPr>
+          <a:xfrm>
+            <a:off x="9125712" y="950976"/>
+            <a:ext cx="64008" cy="804672"/>
+          </a:xfrm>
+          <a:prstGeom prst="rect">
+            <a:avLst/>
+          </a:prstGeom>
+          <a:solidFill>
+            <a:srgbClr val="9B2C2C"/>
+          </a:solidFill>
+          <a:ln>
+            <a:noFill/>
+          </a:ln>
+        </p:spPr>
+        <p:style>
+          <a:lnRef idx="1">
+            <a:schemeClr val="accent1"/>
+          </a:lnRef>
+          <a:fillRef idx="3">
+            <a:schemeClr val="accent1"/>
+          </a:fillRef>
+          <a:effectRef idx="2">
+            <a:schemeClr val="accent1"/>
+          </a:effectRef>
+          <a:fontRef idx="minor">
+            <a:schemeClr val="lt1"/>
+          </a:fontRef>
+        </p:style>
+        <p:txBody>
+          <a:bodyPr rtlCol="0" anchor="ctr"/>
+          <a:lstStyle/>
+          <a:p>
+            <a:pPr algn="ctr"/>
+          </a:p>
+        </p:txBody>
+      </p:sp>
+      <p:sp>
+        <p:nvSpPr>
+          <p:cNvPr id="24" name="TextBox 23"/>
+          <p:cNvSpPr txBox="1"/>
+          <p:nvPr/>
+        </p:nvSpPr>
+        <p:spPr>
+          <a:xfrm>
+            <a:off x="9272016" y="1005840"/>
+            <a:ext cx="2505456" cy="201168"/>
+          </a:xfrm>
+          <a:prstGeom prst="rect">
+            <a:avLst/>
+          </a:prstGeom>
+          <a:noFill/>
+        </p:spPr>
+        <p:txBody>
+          <a:bodyPr wrap="square">
+            <a:spAutoFit/>
+          </a:bodyPr>
+          <a:lstStyle/>
+          <a:p>
+            <a:pPr algn="l"/>
+            <a:r>
+              <a:rPr sz="1000" b="0">
+                <a:solidFill>
+                  <a:srgbClr val="5C6B73"/>
+                </a:solidFill>
+                <a:latin typeface="Calibri"/>
+              </a:rPr>
+              <a:t>UNILEVER (JUN)</a:t>
+            </a:r>
+          </a:p>
+        </p:txBody>
+      </p:sp>
+      <p:sp>
+        <p:nvSpPr>
+          <p:cNvPr id="25" name="TextBox 24"/>
+          <p:cNvSpPr txBox="1"/>
+          <p:nvPr/>
+        </p:nvSpPr>
+        <p:spPr>
+          <a:xfrm>
+            <a:off x="9272016" y="1188720"/>
+            <a:ext cx="2505456" cy="292608"/>
+          </a:xfrm>
+          <a:prstGeom prst="rect">
+            <a:avLst/>
+          </a:prstGeom>
+          <a:noFill/>
+        </p:spPr>
+        <p:txBody>
+          <a:bodyPr wrap="square">
+            <a:spAutoFit/>
+          </a:bodyPr>
+          <a:lstStyle/>
+          <a:p>
+            <a:pPr algn="l"/>
+            <a:r>
+              <a:rPr sz="1800" b="1">
+                <a:solidFill>
+                  <a:srgbClr val="0B2545"/>
+                </a:solidFill>
+                <a:latin typeface="Calibri"/>
+              </a:rPr>
+              <a:t>0.56% share</a:t>
+            </a:r>
+          </a:p>
+        </p:txBody>
+      </p:sp>
+      <p:sp>
+        <p:nvSpPr>
+          <p:cNvPr id="26" name="TextBox 25"/>
+          <p:cNvSpPr txBox="1"/>
+          <p:nvPr/>
+        </p:nvSpPr>
+        <p:spPr>
+          <a:xfrm>
+            <a:off x="9272016" y="1481328"/>
+            <a:ext cx="2505456" cy="201168"/>
+          </a:xfrm>
+          <a:prstGeom prst="rect">
+            <a:avLst/>
+          </a:prstGeom>
+          <a:noFill/>
+        </p:spPr>
+        <p:txBody>
+          <a:bodyPr wrap="square">
+            <a:spAutoFit/>
+          </a:bodyPr>
+          <a:lstStyle/>
+          <a:p>
+            <a:pPr algn="l"/>
+            <a:r>
+              <a:rPr sz="1000" b="0">
+                <a:solidFill>
+                  <a:srgbClr val="5C6B73"/>
+                </a:solidFill>
+                <a:latin typeface="Calibri"/>
+              </a:rPr>
+              <a:t>R1.2m  ·  3 Pasta Pots</a:t>
+            </a:r>
+          </a:p>
+        </p:txBody>
+      </p:sp>
+      <p:sp>
+        <p:nvSpPr>
+          <p:cNvPr id="27" name="TextBox 26"/>
+          <p:cNvSpPr txBox="1"/>
+          <p:nvPr/>
+        </p:nvSpPr>
+        <p:spPr>
+          <a:xfrm>
+            <a:off x="347472" y="1847088"/>
+            <a:ext cx="5760720" cy="219456"/>
+          </a:xfrm>
+          <a:prstGeom prst="rect">
+            <a:avLst/>
+          </a:prstGeom>
+          <a:noFill/>
+        </p:spPr>
+        <p:txBody>
+          <a:bodyPr wrap="square">
+            <a:spAutoFit/>
+          </a:bodyPr>
+          <a:lstStyle/>
+          <a:p>
+            <a:pPr algn="l"/>
+            <a:r>
+              <a:rPr sz="1200" b="1">
+                <a:solidFill>
+                  <a:srgbClr val="0B2545"/>
+                </a:solidFill>
+                <a:latin typeface="Calibri"/>
+              </a:rPr>
+              <a:t>Key players — 12-month value share and change</a:t>
+            </a:r>
+          </a:p>
+        </p:txBody>
+      </p:sp>
       <p:pic>
         <p:nvPicPr>
-          <p:cNvPr id="15" name="Picture 14" descr="chicken_noodle_soup.png"/>
+          <p:cNvPr id="28" name="Picture 27" descr="noodles_brand_share.png"/>
           <p:cNvPicPr>
             <a:picLocks noChangeAspect="1"/>
           </p:cNvPicPr>
@@ -6570,14 +6871,1882 @@
         </p:blipFill>
         <p:spPr>
           <a:xfrm>
-            <a:off x="6355080" y="3794760"/>
-            <a:ext cx="5440680" cy="1965960"/>
+            <a:off x="256032" y="2048256"/>
+            <a:ext cx="5897880" cy="2331720"/>
           </a:xfrm>
           <a:prstGeom prst="rect">
             <a:avLst/>
           </a:prstGeom>
         </p:spPr>
       </p:pic>
+      <p:sp>
+        <p:nvSpPr>
+          <p:cNvPr id="29" name="TextBox 28"/>
+          <p:cNvSpPr txBox="1"/>
+          <p:nvPr/>
+        </p:nvSpPr>
+        <p:spPr>
+          <a:xfrm>
+            <a:off x="6263640" y="1847088"/>
+            <a:ext cx="5577840" cy="219456"/>
+          </a:xfrm>
+          <a:prstGeom prst="rect">
+            <a:avLst/>
+          </a:prstGeom>
+          <a:noFill/>
+        </p:spPr>
+        <p:txBody>
+          <a:bodyPr wrap="square">
+            <a:spAutoFit/>
+          </a:bodyPr>
+          <a:lstStyle/>
+          <a:p>
+            <a:pPr algn="l"/>
+            <a:r>
+              <a:rPr sz="1200" b="1">
+                <a:solidFill>
+                  <a:srgbClr val="0B2545"/>
+                </a:solidFill>
+                <a:latin typeface="Calibri"/>
+              </a:rPr>
+              <a:t>Share, June pulse, price</a:t>
+            </a:r>
+          </a:p>
+        </p:txBody>
+      </p:sp>
+      <p:graphicFrame>
+        <p:nvGraphicFramePr>
+          <p:cNvPr id="30" name="Table 29"/>
+          <p:cNvGraphicFramePr>
+            <a:graphicFrameLocks noGrp="1"/>
+          </p:cNvGraphicFramePr>
+          <p:nvPr/>
+        </p:nvGraphicFramePr>
+        <p:xfrm>
+          <a:off x="6263640" y="2084831"/>
+          <a:ext cx="5577840" cy="2468880"/>
+        </p:xfrm>
+        <a:graphic>
+          <a:graphicData uri="http://schemas.openxmlformats.org/drawingml/2006/table">
+            <a:tbl>
+              <a:tblPr firstRow="1" bandRow="1">
+                <a:tableStyleId>{5C22544A-7EE6-4342-B048-85BDC9FD1C3A}</a:tableStyleId>
+              </a:tblPr>
+              <a:tblGrid>
+                <a:gridCol w="1234440"/>
+                <a:gridCol w="777240"/>
+                <a:gridCol w="731520"/>
+                <a:gridCol w="822960"/>
+                <a:gridCol w="960120"/>
+                <a:gridCol w="1051560"/>
+              </a:tblGrid>
+              <a:tr h="274320">
+                <a:tc>
+                  <a:txBody>
+                    <a:bodyPr/>
+                    <a:lstStyle/>
+                    <a:p>
+                      <a:pPr algn="l"/>
+                      <a:r>
+                        <a:rPr sz="1000" b="1">
+                          <a:solidFill>
+                            <a:srgbClr val="FFFFFF"/>
+                          </a:solidFill>
+                          <a:latin typeface="Calibri"/>
+                        </a:rPr>
+                        <a:t>Brand</a:t>
+                      </a:r>
+                    </a:p>
+                  </a:txBody>
+                  <a:tcPr>
+                    <a:solidFill>
+                      <a:srgbClr val="0B2545"/>
+                    </a:solidFill>
+                  </a:tcPr>
+                </a:tc>
+                <a:tc>
+                  <a:txBody>
+                    <a:bodyPr/>
+                    <a:lstStyle/>
+                    <a:p>
+                      <a:pPr algn="r"/>
+                      <a:r>
+                        <a:rPr sz="1000" b="1">
+                          <a:solidFill>
+                            <a:srgbClr val="FFFFFF"/>
+                          </a:solidFill>
+                          <a:latin typeface="Calibri"/>
+                        </a:rPr>
+                        <a:t>12m</a:t>
+                      </a:r>
+                    </a:p>
+                  </a:txBody>
+                  <a:tcPr>
+                    <a:solidFill>
+                      <a:srgbClr val="0B2545"/>
+                    </a:solidFill>
+                  </a:tcPr>
+                </a:tc>
+                <a:tc>
+                  <a:txBody>
+                    <a:bodyPr/>
+                    <a:lstStyle/>
+                    <a:p>
+                      <a:pPr algn="r"/>
+                      <a:r>
+                        <a:rPr sz="1000" b="1">
+                          <a:solidFill>
+                            <a:srgbClr val="FFFFFF"/>
+                          </a:solidFill>
+                          <a:latin typeface="Calibri"/>
+                        </a:rPr>
+                        <a:t>Jun</a:t>
+                      </a:r>
+                    </a:p>
+                  </a:txBody>
+                  <a:tcPr>
+                    <a:solidFill>
+                      <a:srgbClr val="0B2545"/>
+                    </a:solidFill>
+                  </a:tcPr>
+                </a:tc>
+                <a:tc>
+                  <a:txBody>
+                    <a:bodyPr/>
+                    <a:lstStyle/>
+                    <a:p>
+                      <a:pPr algn="r"/>
+                      <a:r>
+                        <a:rPr sz="1000" b="1">
+                          <a:solidFill>
+                            <a:srgbClr val="FFFFFF"/>
+                          </a:solidFill>
+                          <a:latin typeface="Calibri"/>
+                        </a:rPr>
+                        <a:t>vs YA</a:t>
+                      </a:r>
+                    </a:p>
+                  </a:txBody>
+                  <a:tcPr>
+                    <a:solidFill>
+                      <a:srgbClr val="0B2545"/>
+                    </a:solidFill>
+                  </a:tcPr>
+                </a:tc>
+                <a:tc>
+                  <a:txBody>
+                    <a:bodyPr/>
+                    <a:lstStyle/>
+                    <a:p>
+                      <a:pPr algn="r"/>
+                      <a:r>
+                        <a:rPr sz="1000" b="1">
+                          <a:solidFill>
+                            <a:srgbClr val="FFFFFF"/>
+                          </a:solidFill>
+                          <a:latin typeface="Calibri"/>
+                        </a:rPr>
+                        <a:t>Value</a:t>
+                      </a:r>
+                    </a:p>
+                  </a:txBody>
+                  <a:tcPr>
+                    <a:solidFill>
+                      <a:srgbClr val="0B2545"/>
+                    </a:solidFill>
+                  </a:tcPr>
+                </a:tc>
+                <a:tc>
+                  <a:txBody>
+                    <a:bodyPr/>
+                    <a:lstStyle/>
+                    <a:p>
+                      <a:pPr algn="r"/>
+                      <a:r>
+                        <a:rPr sz="1000" b="1">
+                          <a:solidFill>
+                            <a:srgbClr val="FFFFFF"/>
+                          </a:solidFill>
+                          <a:latin typeface="Calibri"/>
+                        </a:rPr>
+                        <a:t>R/kg</a:t>
+                      </a:r>
+                    </a:p>
+                  </a:txBody>
+                  <a:tcPr>
+                    <a:solidFill>
+                      <a:srgbClr val="0B2545"/>
+                    </a:solidFill>
+                  </a:tcPr>
+                </a:tc>
+              </a:tr>
+              <a:tr h="274320">
+                <a:tc>
+                  <a:txBody>
+                    <a:bodyPr/>
+                    <a:lstStyle/>
+                    <a:p>
+                      <a:pPr algn="l"/>
+                      <a:r>
+                        <a:rPr sz="1100" b="1">
+                          <a:solidFill>
+                            <a:srgbClr val="1A1A1A"/>
+                          </a:solidFill>
+                          <a:latin typeface="Calibri"/>
+                        </a:rPr>
+                        <a:t>Kellogg's</a:t>
+                      </a:r>
+                    </a:p>
+                  </a:txBody>
+                  <a:tcPr>
+                    <a:solidFill>
+                      <a:srgbClr val="F4F6F8"/>
+                    </a:solidFill>
+                  </a:tcPr>
+                </a:tc>
+                <a:tc>
+                  <a:txBody>
+                    <a:bodyPr/>
+                    <a:lstStyle/>
+                    <a:p>
+                      <a:pPr algn="r"/>
+                      <a:r>
+                        <a:rPr sz="1100" b="0">
+                          <a:solidFill>
+                            <a:srgbClr val="1A1A1A"/>
+                          </a:solidFill>
+                          <a:latin typeface="Calibri"/>
+                        </a:rPr>
+                        <a:t>45.6%</a:t>
+                      </a:r>
+                    </a:p>
+                  </a:txBody>
+                  <a:tcPr>
+                    <a:solidFill>
+                      <a:srgbClr val="F4F6F8"/>
+                    </a:solidFill>
+                  </a:tcPr>
+                </a:tc>
+                <a:tc>
+                  <a:txBody>
+                    <a:bodyPr/>
+                    <a:lstStyle/>
+                    <a:p>
+                      <a:pPr algn="r"/>
+                      <a:r>
+                        <a:rPr sz="1100" b="0">
+                          <a:solidFill>
+                            <a:srgbClr val="1A1A1A"/>
+                          </a:solidFill>
+                          <a:latin typeface="Calibri"/>
+                        </a:rPr>
+                        <a:t>44.3%</a:t>
+                      </a:r>
+                    </a:p>
+                  </a:txBody>
+                  <a:tcPr>
+                    <a:solidFill>
+                      <a:srgbClr val="F4F6F8"/>
+                    </a:solidFill>
+                  </a:tcPr>
+                </a:tc>
+                <a:tc>
+                  <a:txBody>
+                    <a:bodyPr/>
+                    <a:lstStyle/>
+                    <a:p>
+                      <a:pPr algn="r"/>
+                      <a:r>
+                        <a:rPr sz="1100" b="0">
+                          <a:solidFill>
+                            <a:srgbClr val="1F7A4D"/>
+                          </a:solidFill>
+                          <a:latin typeface="Calibri"/>
+                        </a:rPr>
+                        <a:t>+2.0pp</a:t>
+                      </a:r>
+                    </a:p>
+                  </a:txBody>
+                  <a:tcPr>
+                    <a:solidFill>
+                      <a:srgbClr val="F4F6F8"/>
+                    </a:solidFill>
+                  </a:tcPr>
+                </a:tc>
+                <a:tc>
+                  <a:txBody>
+                    <a:bodyPr/>
+                    <a:lstStyle/>
+                    <a:p>
+                      <a:pPr algn="r"/>
+                      <a:r>
+                        <a:rPr sz="1100" b="0">
+                          <a:solidFill>
+                            <a:srgbClr val="1F7A4D"/>
+                          </a:solidFill>
+                          <a:latin typeface="Calibri"/>
+                        </a:rPr>
+                        <a:t>+13.1%</a:t>
+                      </a:r>
+                    </a:p>
+                  </a:txBody>
+                  <a:tcPr>
+                    <a:solidFill>
+                      <a:srgbClr val="F4F6F8"/>
+                    </a:solidFill>
+                  </a:tcPr>
+                </a:tc>
+                <a:tc>
+                  <a:txBody>
+                    <a:bodyPr/>
+                    <a:lstStyle/>
+                    <a:p>
+                      <a:pPr algn="r"/>
+                      <a:r>
+                        <a:rPr sz="1100" b="0">
+                          <a:solidFill>
+                            <a:srgbClr val="1A1A1A"/>
+                          </a:solidFill>
+                          <a:latin typeface="Calibri"/>
+                        </a:rPr>
+                        <a:t>R87</a:t>
+                      </a:r>
+                    </a:p>
+                  </a:txBody>
+                  <a:tcPr>
+                    <a:solidFill>
+                      <a:srgbClr val="F4F6F8"/>
+                    </a:solidFill>
+                  </a:tcPr>
+                </a:tc>
+              </a:tr>
+              <a:tr h="274320">
+                <a:tc>
+                  <a:txBody>
+                    <a:bodyPr/>
+                    <a:lstStyle/>
+                    <a:p>
+                      <a:pPr algn="l"/>
+                      <a:r>
+                        <a:rPr sz="1100" b="1">
+                          <a:solidFill>
+                            <a:srgbClr val="1A1A1A"/>
+                          </a:solidFill>
+                          <a:latin typeface="Calibri"/>
+                        </a:rPr>
+                        <a:t>Maggi</a:t>
+                      </a:r>
+                    </a:p>
+                  </a:txBody>
+                  <a:tcPr>
+                    <a:solidFill>
+                      <a:srgbClr val="FFFFFF"/>
+                    </a:solidFill>
+                  </a:tcPr>
+                </a:tc>
+                <a:tc>
+                  <a:txBody>
+                    <a:bodyPr/>
+                    <a:lstStyle/>
+                    <a:p>
+                      <a:pPr algn="r"/>
+                      <a:r>
+                        <a:rPr sz="1100" b="0">
+                          <a:solidFill>
+                            <a:srgbClr val="1A1A1A"/>
+                          </a:solidFill>
+                          <a:latin typeface="Calibri"/>
+                        </a:rPr>
+                        <a:t>28.7%</a:t>
+                      </a:r>
+                    </a:p>
+                  </a:txBody>
+                  <a:tcPr>
+                    <a:solidFill>
+                      <a:srgbClr val="FFFFFF"/>
+                    </a:solidFill>
+                  </a:tcPr>
+                </a:tc>
+                <a:tc>
+                  <a:txBody>
+                    <a:bodyPr/>
+                    <a:lstStyle/>
+                    <a:p>
+                      <a:pPr algn="r"/>
+                      <a:r>
+                        <a:rPr sz="1100" b="0">
+                          <a:solidFill>
+                            <a:srgbClr val="1A1A1A"/>
+                          </a:solidFill>
+                          <a:latin typeface="Calibri"/>
+                        </a:rPr>
+                        <a:t>28.2%</a:t>
+                      </a:r>
+                    </a:p>
+                  </a:txBody>
+                  <a:tcPr>
+                    <a:solidFill>
+                      <a:srgbClr val="FFFFFF"/>
+                    </a:solidFill>
+                  </a:tcPr>
+                </a:tc>
+                <a:tc>
+                  <a:txBody>
+                    <a:bodyPr/>
+                    <a:lstStyle/>
+                    <a:p>
+                      <a:pPr algn="r"/>
+                      <a:r>
+                        <a:rPr sz="1100" b="0">
+                          <a:solidFill>
+                            <a:srgbClr val="9B2C2C"/>
+                          </a:solidFill>
+                          <a:latin typeface="Calibri"/>
+                        </a:rPr>
+                        <a:t>-5.1pp</a:t>
+                      </a:r>
+                    </a:p>
+                  </a:txBody>
+                  <a:tcPr>
+                    <a:solidFill>
+                      <a:srgbClr val="FFFFFF"/>
+                    </a:solidFill>
+                  </a:tcPr>
+                </a:tc>
+                <a:tc>
+                  <a:txBody>
+                    <a:bodyPr/>
+                    <a:lstStyle/>
+                    <a:p>
+                      <a:pPr algn="r"/>
+                      <a:r>
+                        <a:rPr sz="1100" b="0">
+                          <a:solidFill>
+                            <a:srgbClr val="9B2C2C"/>
+                          </a:solidFill>
+                          <a:latin typeface="Calibri"/>
+                        </a:rPr>
+                        <a:t>-8.2%</a:t>
+                      </a:r>
+                    </a:p>
+                  </a:txBody>
+                  <a:tcPr>
+                    <a:solidFill>
+                      <a:srgbClr val="FFFFFF"/>
+                    </a:solidFill>
+                  </a:tcPr>
+                </a:tc>
+                <a:tc>
+                  <a:txBody>
+                    <a:bodyPr/>
+                    <a:lstStyle/>
+                    <a:p>
+                      <a:pPr algn="r"/>
+                      <a:r>
+                        <a:rPr sz="1100" b="0">
+                          <a:solidFill>
+                            <a:srgbClr val="1A1A1A"/>
+                          </a:solidFill>
+                          <a:latin typeface="Calibri"/>
+                        </a:rPr>
+                        <a:t>R100</a:t>
+                      </a:r>
+                    </a:p>
+                  </a:txBody>
+                  <a:tcPr>
+                    <a:solidFill>
+                      <a:srgbClr val="FFFFFF"/>
+                    </a:solidFill>
+                  </a:tcPr>
+                </a:tc>
+              </a:tr>
+              <a:tr h="274320">
+                <a:tc>
+                  <a:txBody>
+                    <a:bodyPr/>
+                    <a:lstStyle/>
+                    <a:p>
+                      <a:pPr algn="l"/>
+                      <a:r>
+                        <a:rPr sz="1100" b="1">
+                          <a:solidFill>
+                            <a:srgbClr val="1A1A1A"/>
+                          </a:solidFill>
+                          <a:latin typeface="Calibri"/>
+                        </a:rPr>
+                        <a:t>Indomie</a:t>
+                      </a:r>
+                    </a:p>
+                  </a:txBody>
+                  <a:tcPr>
+                    <a:solidFill>
+                      <a:srgbClr val="F4F6F8"/>
+                    </a:solidFill>
+                  </a:tcPr>
+                </a:tc>
+                <a:tc>
+                  <a:txBody>
+                    <a:bodyPr/>
+                    <a:lstStyle/>
+                    <a:p>
+                      <a:pPr algn="r"/>
+                      <a:r>
+                        <a:rPr sz="1100" b="0">
+                          <a:solidFill>
+                            <a:srgbClr val="1A1A1A"/>
+                          </a:solidFill>
+                          <a:latin typeface="Calibri"/>
+                        </a:rPr>
+                        <a:t>6.9%</a:t>
+                      </a:r>
+                    </a:p>
+                  </a:txBody>
+                  <a:tcPr>
+                    <a:solidFill>
+                      <a:srgbClr val="F4F6F8"/>
+                    </a:solidFill>
+                  </a:tcPr>
+                </a:tc>
+                <a:tc>
+                  <a:txBody>
+                    <a:bodyPr/>
+                    <a:lstStyle/>
+                    <a:p>
+                      <a:pPr algn="r"/>
+                      <a:r>
+                        <a:rPr sz="1100" b="0">
+                          <a:solidFill>
+                            <a:srgbClr val="1A1A1A"/>
+                          </a:solidFill>
+                          <a:latin typeface="Calibri"/>
+                        </a:rPr>
+                        <a:t>7.8%</a:t>
+                      </a:r>
+                    </a:p>
+                  </a:txBody>
+                  <a:tcPr>
+                    <a:solidFill>
+                      <a:srgbClr val="F4F6F8"/>
+                    </a:solidFill>
+                  </a:tcPr>
+                </a:tc>
+                <a:tc>
+                  <a:txBody>
+                    <a:bodyPr/>
+                    <a:lstStyle/>
+                    <a:p>
+                      <a:pPr algn="r"/>
+                      <a:r>
+                        <a:rPr sz="1100" b="0">
+                          <a:solidFill>
+                            <a:srgbClr val="1F7A4D"/>
+                          </a:solidFill>
+                          <a:latin typeface="Calibri"/>
+                        </a:rPr>
+                        <a:t>+2.1pp</a:t>
+                      </a:r>
+                    </a:p>
+                  </a:txBody>
+                  <a:tcPr>
+                    <a:solidFill>
+                      <a:srgbClr val="F4F6F8"/>
+                    </a:solidFill>
+                  </a:tcPr>
+                </a:tc>
+                <a:tc>
+                  <a:txBody>
+                    <a:bodyPr/>
+                    <a:lstStyle/>
+                    <a:p>
+                      <a:pPr algn="r"/>
+                      <a:r>
+                        <a:rPr sz="1100" b="0">
+                          <a:solidFill>
+                            <a:srgbClr val="1F7A4D"/>
+                          </a:solidFill>
+                          <a:latin typeface="Calibri"/>
+                        </a:rPr>
+                        <a:t>+55.7%</a:t>
+                      </a:r>
+                    </a:p>
+                  </a:txBody>
+                  <a:tcPr>
+                    <a:solidFill>
+                      <a:srgbClr val="F4F6F8"/>
+                    </a:solidFill>
+                  </a:tcPr>
+                </a:tc>
+                <a:tc>
+                  <a:txBody>
+                    <a:bodyPr/>
+                    <a:lstStyle/>
+                    <a:p>
+                      <a:pPr algn="r"/>
+                      <a:r>
+                        <a:rPr sz="1100" b="0">
+                          <a:solidFill>
+                            <a:srgbClr val="1A1A1A"/>
+                          </a:solidFill>
+                          <a:latin typeface="Calibri"/>
+                        </a:rPr>
+                        <a:t>R99</a:t>
+                      </a:r>
+                    </a:p>
+                  </a:txBody>
+                  <a:tcPr>
+                    <a:solidFill>
+                      <a:srgbClr val="F4F6F8"/>
+                    </a:solidFill>
+                  </a:tcPr>
+                </a:tc>
+              </a:tr>
+              <a:tr h="274320">
+                <a:tc>
+                  <a:txBody>
+                    <a:bodyPr/>
+                    <a:lstStyle/>
+                    <a:p>
+                      <a:pPr algn="l"/>
+                      <a:r>
+                        <a:rPr sz="1100" b="1">
+                          <a:solidFill>
+                            <a:srgbClr val="1A1A1A"/>
+                          </a:solidFill>
+                          <a:latin typeface="Calibri"/>
+                        </a:rPr>
+                        <a:t>Roka</a:t>
+                      </a:r>
+                    </a:p>
+                  </a:txBody>
+                  <a:tcPr>
+                    <a:solidFill>
+                      <a:srgbClr val="FFFFFF"/>
+                    </a:solidFill>
+                  </a:tcPr>
+                </a:tc>
+                <a:tc>
+                  <a:txBody>
+                    <a:bodyPr/>
+                    <a:lstStyle/>
+                    <a:p>
+                      <a:pPr algn="r"/>
+                      <a:r>
+                        <a:rPr sz="1100" b="0">
+                          <a:solidFill>
+                            <a:srgbClr val="1A1A1A"/>
+                          </a:solidFill>
+                          <a:latin typeface="Calibri"/>
+                        </a:rPr>
+                        <a:t>6.4%</a:t>
+                      </a:r>
+                    </a:p>
+                  </a:txBody>
+                  <a:tcPr>
+                    <a:solidFill>
+                      <a:srgbClr val="FFFFFF"/>
+                    </a:solidFill>
+                  </a:tcPr>
+                </a:tc>
+                <a:tc>
+                  <a:txBody>
+                    <a:bodyPr/>
+                    <a:lstStyle/>
+                    <a:p>
+                      <a:pPr algn="r"/>
+                      <a:r>
+                        <a:rPr sz="1100" b="0">
+                          <a:solidFill>
+                            <a:srgbClr val="1A1A1A"/>
+                          </a:solidFill>
+                          <a:latin typeface="Calibri"/>
+                        </a:rPr>
+                        <a:t>5.1%</a:t>
+                      </a:r>
+                    </a:p>
+                  </a:txBody>
+                  <a:tcPr>
+                    <a:solidFill>
+                      <a:srgbClr val="FFFFFF"/>
+                    </a:solidFill>
+                  </a:tcPr>
+                </a:tc>
+                <a:tc>
+                  <a:txBody>
+                    <a:bodyPr/>
+                    <a:lstStyle/>
+                    <a:p>
+                      <a:pPr algn="r"/>
+                      <a:r>
+                        <a:rPr sz="1100" b="0">
+                          <a:solidFill>
+                            <a:srgbClr val="9B2C2C"/>
+                          </a:solidFill>
+                          <a:latin typeface="Calibri"/>
+                        </a:rPr>
+                        <a:t>-0.4pp</a:t>
+                      </a:r>
+                    </a:p>
+                  </a:txBody>
+                  <a:tcPr>
+                    <a:solidFill>
+                      <a:srgbClr val="FFFFFF"/>
+                    </a:solidFill>
+                  </a:tcPr>
+                </a:tc>
+                <a:tc>
+                  <a:txBody>
+                    <a:bodyPr/>
+                    <a:lstStyle/>
+                    <a:p>
+                      <a:pPr algn="r"/>
+                      <a:r>
+                        <a:rPr sz="1100" b="0">
+                          <a:solidFill>
+                            <a:srgbClr val="1F7A4D"/>
+                          </a:solidFill>
+                          <a:latin typeface="Calibri"/>
+                        </a:rPr>
+                        <a:t>+1.5%</a:t>
+                      </a:r>
+                    </a:p>
+                  </a:txBody>
+                  <a:tcPr>
+                    <a:solidFill>
+                      <a:srgbClr val="FFFFFF"/>
+                    </a:solidFill>
+                  </a:tcPr>
+                </a:tc>
+                <a:tc>
+                  <a:txBody>
+                    <a:bodyPr/>
+                    <a:lstStyle/>
+                    <a:p>
+                      <a:pPr algn="r"/>
+                      <a:r>
+                        <a:rPr sz="1100" b="0">
+                          <a:solidFill>
+                            <a:srgbClr val="1A1A1A"/>
+                          </a:solidFill>
+                          <a:latin typeface="Calibri"/>
+                        </a:rPr>
+                        <a:t>R69</a:t>
+                      </a:r>
+                    </a:p>
+                  </a:txBody>
+                  <a:tcPr>
+                    <a:solidFill>
+                      <a:srgbClr val="FFFFFF"/>
+                    </a:solidFill>
+                  </a:tcPr>
+                </a:tc>
+              </a:tr>
+              <a:tr h="274320">
+                <a:tc>
+                  <a:txBody>
+                    <a:bodyPr/>
+                    <a:lstStyle/>
+                    <a:p>
+                      <a:pPr algn="l"/>
+                      <a:r>
+                        <a:rPr sz="1100" b="1">
+                          <a:solidFill>
+                            <a:srgbClr val="1A1A1A"/>
+                          </a:solidFill>
+                          <a:latin typeface="Calibri"/>
+                        </a:rPr>
+                        <a:t>Samyang</a:t>
+                      </a:r>
+                    </a:p>
+                  </a:txBody>
+                  <a:tcPr>
+                    <a:solidFill>
+                      <a:srgbClr val="F4F6F8"/>
+                    </a:solidFill>
+                  </a:tcPr>
+                </a:tc>
+                <a:tc>
+                  <a:txBody>
+                    <a:bodyPr/>
+                    <a:lstStyle/>
+                    <a:p>
+                      <a:pPr algn="r"/>
+                      <a:r>
+                        <a:rPr sz="1100" b="0">
+                          <a:solidFill>
+                            <a:srgbClr val="1A1A1A"/>
+                          </a:solidFill>
+                          <a:latin typeface="Calibri"/>
+                        </a:rPr>
+                        <a:t>3.4%</a:t>
+                      </a:r>
+                    </a:p>
+                  </a:txBody>
+                  <a:tcPr>
+                    <a:solidFill>
+                      <a:srgbClr val="F4F6F8"/>
+                    </a:solidFill>
+                  </a:tcPr>
+                </a:tc>
+                <a:tc>
+                  <a:txBody>
+                    <a:bodyPr/>
+                    <a:lstStyle/>
+                    <a:p>
+                      <a:pPr algn="r"/>
+                      <a:r>
+                        <a:rPr sz="1100" b="0">
+                          <a:solidFill>
+                            <a:srgbClr val="1A1A1A"/>
+                          </a:solidFill>
+                          <a:latin typeface="Calibri"/>
+                        </a:rPr>
+                        <a:t>3.3%</a:t>
+                      </a:r>
+                    </a:p>
+                  </a:txBody>
+                  <a:tcPr>
+                    <a:solidFill>
+                      <a:srgbClr val="F4F6F8"/>
+                    </a:solidFill>
+                  </a:tcPr>
+                </a:tc>
+                <a:tc>
+                  <a:txBody>
+                    <a:bodyPr/>
+                    <a:lstStyle/>
+                    <a:p>
+                      <a:pPr algn="r"/>
+                      <a:r>
+                        <a:rPr sz="1100" b="0">
+                          <a:solidFill>
+                            <a:srgbClr val="1F7A4D"/>
+                          </a:solidFill>
+                          <a:latin typeface="Calibri"/>
+                        </a:rPr>
+                        <a:t>+1.8pp</a:t>
+                      </a:r>
+                    </a:p>
+                  </a:txBody>
+                  <a:tcPr>
+                    <a:solidFill>
+                      <a:srgbClr val="F4F6F8"/>
+                    </a:solidFill>
+                  </a:tcPr>
+                </a:tc>
+                <a:tc>
+                  <a:txBody>
+                    <a:bodyPr/>
+                    <a:lstStyle/>
+                    <a:p>
+                      <a:pPr algn="r"/>
+                      <a:r>
+                        <a:rPr sz="1100" b="0">
+                          <a:solidFill>
+                            <a:srgbClr val="1F7A4D"/>
+                          </a:solidFill>
+                          <a:latin typeface="Calibri"/>
+                        </a:rPr>
+                        <a:t>+122.3%</a:t>
+                      </a:r>
+                    </a:p>
+                  </a:txBody>
+                  <a:tcPr>
+                    <a:solidFill>
+                      <a:srgbClr val="F4F6F8"/>
+                    </a:solidFill>
+                  </a:tcPr>
+                </a:tc>
+                <a:tc>
+                  <a:txBody>
+                    <a:bodyPr/>
+                    <a:lstStyle/>
+                    <a:p>
+                      <a:pPr algn="r"/>
+                      <a:r>
+                        <a:rPr sz="1100" b="0">
+                          <a:solidFill>
+                            <a:srgbClr val="1A1A1A"/>
+                          </a:solidFill>
+                          <a:latin typeface="Calibri"/>
+                        </a:rPr>
+                        <a:t>R302</a:t>
+                      </a:r>
+                    </a:p>
+                  </a:txBody>
+                  <a:tcPr>
+                    <a:solidFill>
+                      <a:srgbClr val="F4F6F8"/>
+                    </a:solidFill>
+                  </a:tcPr>
+                </a:tc>
+              </a:tr>
+              <a:tr h="274320">
+                <a:tc>
+                  <a:txBody>
+                    <a:bodyPr/>
+                    <a:lstStyle/>
+                    <a:p>
+                      <a:pPr algn="l"/>
+                      <a:r>
+                        <a:rPr sz="1100" b="1">
+                          <a:solidFill>
+                            <a:srgbClr val="1A1A1A"/>
+                          </a:solidFill>
+                          <a:latin typeface="Calibri"/>
+                        </a:rPr>
+                        <a:t>Eezee/Joy</a:t>
+                      </a:r>
+                    </a:p>
+                  </a:txBody>
+                  <a:tcPr>
+                    <a:solidFill>
+                      <a:srgbClr val="FFFFFF"/>
+                    </a:solidFill>
+                  </a:tcPr>
+                </a:tc>
+                <a:tc>
+                  <a:txBody>
+                    <a:bodyPr/>
+                    <a:lstStyle/>
+                    <a:p>
+                      <a:pPr algn="r"/>
+                      <a:r>
+                        <a:rPr sz="1100" b="0">
+                          <a:solidFill>
+                            <a:srgbClr val="1A1A1A"/>
+                          </a:solidFill>
+                          <a:latin typeface="Calibri"/>
+                        </a:rPr>
+                        <a:t>3.1%</a:t>
+                      </a:r>
+                    </a:p>
+                  </a:txBody>
+                  <a:tcPr>
+                    <a:solidFill>
+                      <a:srgbClr val="FFFFFF"/>
+                    </a:solidFill>
+                  </a:tcPr>
+                </a:tc>
+                <a:tc>
+                  <a:txBody>
+                    <a:bodyPr/>
+                    <a:lstStyle/>
+                    <a:p>
+                      <a:pPr algn="r"/>
+                      <a:r>
+                        <a:rPr sz="1100" b="0">
+                          <a:solidFill>
+                            <a:srgbClr val="1A1A1A"/>
+                          </a:solidFill>
+                          <a:latin typeface="Calibri"/>
+                        </a:rPr>
+                        <a:t>4.4%</a:t>
+                      </a:r>
+                    </a:p>
+                  </a:txBody>
+                  <a:tcPr>
+                    <a:solidFill>
+                      <a:srgbClr val="FFFFFF"/>
+                    </a:solidFill>
+                  </a:tcPr>
+                </a:tc>
+                <a:tc>
+                  <a:txBody>
+                    <a:bodyPr/>
+                    <a:lstStyle/>
+                    <a:p>
+                      <a:pPr algn="r"/>
+                      <a:r>
+                        <a:rPr sz="1100" b="0">
+                          <a:solidFill>
+                            <a:srgbClr val="1F7A4D"/>
+                          </a:solidFill>
+                          <a:latin typeface="Calibri"/>
+                        </a:rPr>
+                        <a:t>+2.0pp</a:t>
+                      </a:r>
+                    </a:p>
+                  </a:txBody>
+                  <a:tcPr>
+                    <a:solidFill>
+                      <a:srgbClr val="FFFFFF"/>
+                    </a:solidFill>
+                  </a:tcPr>
+                </a:tc>
+                <a:tc>
+                  <a:txBody>
+                    <a:bodyPr/>
+                    <a:lstStyle/>
+                    <a:p>
+                      <a:pPr algn="r"/>
+                      <a:r>
+                        <a:rPr sz="1100" b="0">
+                          <a:solidFill>
+                            <a:srgbClr val="1F7A4D"/>
+                          </a:solidFill>
+                          <a:latin typeface="Calibri"/>
+                        </a:rPr>
+                        <a:t>+217.1%</a:t>
+                      </a:r>
+                    </a:p>
+                  </a:txBody>
+                  <a:tcPr>
+                    <a:solidFill>
+                      <a:srgbClr val="FFFFFF"/>
+                    </a:solidFill>
+                  </a:tcPr>
+                </a:tc>
+                <a:tc>
+                  <a:txBody>
+                    <a:bodyPr/>
+                    <a:lstStyle/>
+                    <a:p>
+                      <a:pPr algn="r"/>
+                      <a:r>
+                        <a:rPr sz="1100" b="0">
+                          <a:solidFill>
+                            <a:srgbClr val="1A1A1A"/>
+                          </a:solidFill>
+                          <a:latin typeface="Calibri"/>
+                        </a:rPr>
+                        <a:t>R356</a:t>
+                      </a:r>
+                    </a:p>
+                  </a:txBody>
+                  <a:tcPr>
+                    <a:solidFill>
+                      <a:srgbClr val="FFFFFF"/>
+                    </a:solidFill>
+                  </a:tcPr>
+                </a:tc>
+              </a:tr>
+              <a:tr h="274320">
+                <a:tc>
+                  <a:txBody>
+                    <a:bodyPr/>
+                    <a:lstStyle/>
+                    <a:p>
+                      <a:pPr algn="l"/>
+                      <a:r>
+                        <a:rPr sz="1100" b="1">
+                          <a:solidFill>
+                            <a:srgbClr val="1A1A1A"/>
+                          </a:solidFill>
+                          <a:latin typeface="Calibri"/>
+                        </a:rPr>
+                        <a:t>Mr Pasta</a:t>
+                      </a:r>
+                    </a:p>
+                  </a:txBody>
+                  <a:tcPr>
+                    <a:solidFill>
+                      <a:srgbClr val="F4F6F8"/>
+                    </a:solidFill>
+                  </a:tcPr>
+                </a:tc>
+                <a:tc>
+                  <a:txBody>
+                    <a:bodyPr/>
+                    <a:lstStyle/>
+                    <a:p>
+                      <a:pPr algn="r"/>
+                      <a:r>
+                        <a:rPr sz="1100" b="0">
+                          <a:solidFill>
+                            <a:srgbClr val="1A1A1A"/>
+                          </a:solidFill>
+                          <a:latin typeface="Calibri"/>
+                        </a:rPr>
+                        <a:t>1.9%</a:t>
+                      </a:r>
+                    </a:p>
+                  </a:txBody>
+                  <a:tcPr>
+                    <a:solidFill>
+                      <a:srgbClr val="F4F6F8"/>
+                    </a:solidFill>
+                  </a:tcPr>
+                </a:tc>
+                <a:tc>
+                  <a:txBody>
+                    <a:bodyPr/>
+                    <a:lstStyle/>
+                    <a:p>
+                      <a:pPr algn="r"/>
+                      <a:r>
+                        <a:rPr sz="1100" b="0">
+                          <a:solidFill>
+                            <a:srgbClr val="1A1A1A"/>
+                          </a:solidFill>
+                          <a:latin typeface="Calibri"/>
+                        </a:rPr>
+                        <a:t>1.5%</a:t>
+                      </a:r>
+                    </a:p>
+                  </a:txBody>
+                  <a:tcPr>
+                    <a:solidFill>
+                      <a:srgbClr val="F4F6F8"/>
+                    </a:solidFill>
+                  </a:tcPr>
+                </a:tc>
+                <a:tc>
+                  <a:txBody>
+                    <a:bodyPr/>
+                    <a:lstStyle/>
+                    <a:p>
+                      <a:pPr algn="r"/>
+                      <a:r>
+                        <a:rPr sz="1100" b="0">
+                          <a:solidFill>
+                            <a:srgbClr val="9B2C2C"/>
+                          </a:solidFill>
+                          <a:latin typeface="Calibri"/>
+                        </a:rPr>
+                        <a:t>-2.3pp</a:t>
+                      </a:r>
+                    </a:p>
+                  </a:txBody>
+                  <a:tcPr>
+                    <a:solidFill>
+                      <a:srgbClr val="F4F6F8"/>
+                    </a:solidFill>
+                  </a:tcPr>
+                </a:tc>
+                <a:tc>
+                  <a:txBody>
+                    <a:bodyPr/>
+                    <a:lstStyle/>
+                    <a:p>
+                      <a:pPr algn="r"/>
+                      <a:r>
+                        <a:rPr sz="1100" b="0">
+                          <a:solidFill>
+                            <a:srgbClr val="9B2C2C"/>
+                          </a:solidFill>
+                          <a:latin typeface="Calibri"/>
+                        </a:rPr>
+                        <a:t>-50.7%</a:t>
+                      </a:r>
+                    </a:p>
+                  </a:txBody>
+                  <a:tcPr>
+                    <a:solidFill>
+                      <a:srgbClr val="F4F6F8"/>
+                    </a:solidFill>
+                  </a:tcPr>
+                </a:tc>
+                <a:tc>
+                  <a:txBody>
+                    <a:bodyPr/>
+                    <a:lstStyle/>
+                    <a:p>
+                      <a:pPr algn="r"/>
+                      <a:r>
+                        <a:rPr sz="1100" b="0">
+                          <a:solidFill>
+                            <a:srgbClr val="1A1A1A"/>
+                          </a:solidFill>
+                          <a:latin typeface="Calibri"/>
+                        </a:rPr>
+                        <a:t>R147</a:t>
+                      </a:r>
+                    </a:p>
+                  </a:txBody>
+                  <a:tcPr>
+                    <a:solidFill>
+                      <a:srgbClr val="F4F6F8"/>
+                    </a:solidFill>
+                  </a:tcPr>
+                </a:tc>
+              </a:tr>
+              <a:tr h="274320">
+                <a:tc>
+                  <a:txBody>
+                    <a:bodyPr/>
+                    <a:lstStyle/>
+                    <a:p>
+                      <a:pPr algn="l"/>
+                      <a:r>
+                        <a:rPr sz="1100" b="1">
+                          <a:solidFill>
+                            <a:srgbClr val="1A1A1A"/>
+                          </a:solidFill>
+                          <a:latin typeface="Calibri"/>
+                        </a:rPr>
+                        <a:t>Knorr</a:t>
+                      </a:r>
+                    </a:p>
+                  </a:txBody>
+                  <a:tcPr>
+                    <a:solidFill>
+                      <a:srgbClr val="FFFFFF"/>
+                    </a:solidFill>
+                  </a:tcPr>
+                </a:tc>
+                <a:tc>
+                  <a:txBody>
+                    <a:bodyPr/>
+                    <a:lstStyle/>
+                    <a:p>
+                      <a:pPr algn="r"/>
+                      <a:r>
+                        <a:rPr sz="1100" b="0">
+                          <a:solidFill>
+                            <a:srgbClr val="1A1A1A"/>
+                          </a:solidFill>
+                          <a:latin typeface="Calibri"/>
+                        </a:rPr>
+                        <a:t>0.1%</a:t>
+                      </a:r>
+                    </a:p>
+                  </a:txBody>
+                  <a:tcPr>
+                    <a:solidFill>
+                      <a:srgbClr val="FFFFFF"/>
+                    </a:solidFill>
+                  </a:tcPr>
+                </a:tc>
+                <a:tc>
+                  <a:txBody>
+                    <a:bodyPr/>
+                    <a:lstStyle/>
+                    <a:p>
+                      <a:pPr algn="r"/>
+                      <a:r>
+                        <a:rPr sz="1100" b="0">
+                          <a:solidFill>
+                            <a:srgbClr val="1A1A1A"/>
+                          </a:solidFill>
+                          <a:latin typeface="Calibri"/>
+                        </a:rPr>
+                        <a:t>0.6%</a:t>
+                      </a:r>
+                    </a:p>
+                  </a:txBody>
+                  <a:tcPr>
+                    <a:solidFill>
+                      <a:srgbClr val="FFFFFF"/>
+                    </a:solidFill>
+                  </a:tcPr>
+                </a:tc>
+                <a:tc>
+                  <a:txBody>
+                    <a:bodyPr/>
+                    <a:lstStyle/>
+                    <a:p>
+                      <a:pPr algn="r"/>
+                      <a:r>
+                        <a:rPr sz="1100" b="0">
+                          <a:solidFill>
+                            <a:srgbClr val="1F7A4D"/>
+                          </a:solidFill>
+                          <a:latin typeface="Calibri"/>
+                        </a:rPr>
+                        <a:t>+0.1pp</a:t>
+                      </a:r>
+                    </a:p>
+                  </a:txBody>
+                  <a:tcPr>
+                    <a:solidFill>
+                      <a:srgbClr val="FFFFFF"/>
+                    </a:solidFill>
+                  </a:tcPr>
+                </a:tc>
+                <a:tc>
+                  <a:txBody>
+                    <a:bodyPr/>
+                    <a:lstStyle/>
+                    <a:p>
+                      <a:pPr algn="r"/>
+                      <a:r>
+                        <a:rPr sz="1100" b="0">
+                          <a:solidFill>
+                            <a:srgbClr val="1A1A1A"/>
+                          </a:solidFill>
+                          <a:latin typeface="Calibri"/>
+                        </a:rPr>
+                        <a:t>n/a</a:t>
+                      </a:r>
+                    </a:p>
+                  </a:txBody>
+                  <a:tcPr>
+                    <a:solidFill>
+                      <a:srgbClr val="FFFFFF"/>
+                    </a:solidFill>
+                  </a:tcPr>
+                </a:tc>
+                <a:tc>
+                  <a:txBody>
+                    <a:bodyPr/>
+                    <a:lstStyle/>
+                    <a:p>
+                      <a:pPr algn="r"/>
+                      <a:r>
+                        <a:rPr sz="1100" b="0">
+                          <a:solidFill>
+                            <a:srgbClr val="1A1A1A"/>
+                          </a:solidFill>
+                          <a:latin typeface="Calibri"/>
+                        </a:rPr>
+                        <a:t>R790</a:t>
+                      </a:r>
+                    </a:p>
+                  </a:txBody>
+                  <a:tcPr>
+                    <a:solidFill>
+                      <a:srgbClr val="FFFFFF"/>
+                    </a:solidFill>
+                  </a:tcPr>
+                </a:tc>
+              </a:tr>
+            </a:tbl>
+          </a:graphicData>
+        </a:graphic>
+      </p:graphicFrame>
+      <p:sp>
+        <p:nvSpPr>
+          <p:cNvPr id="31" name="TextBox 30"/>
+          <p:cNvSpPr txBox="1"/>
+          <p:nvPr/>
+        </p:nvSpPr>
+        <p:spPr>
+          <a:xfrm>
+            <a:off x="347472" y="4480560"/>
+            <a:ext cx="5760720" cy="219456"/>
+          </a:xfrm>
+          <a:prstGeom prst="rect">
+            <a:avLst/>
+          </a:prstGeom>
+          <a:noFill/>
+        </p:spPr>
+        <p:txBody>
+          <a:bodyPr wrap="square">
+            <a:spAutoFit/>
+          </a:bodyPr>
+          <a:lstStyle/>
+          <a:p>
+            <a:pPr algn="l"/>
+            <a:r>
+              <a:rPr sz="1200" b="1">
+                <a:solidFill>
+                  <a:srgbClr val="0B2545"/>
+                </a:solidFill>
+                <a:latin typeface="Calibri"/>
+              </a:rPr>
+              <a:t>Price ladder — typical unit pack</a:t>
+            </a:r>
+          </a:p>
+        </p:txBody>
+      </p:sp>
+      <p:pic>
+        <p:nvPicPr>
+          <p:cNvPr id="32" name="Picture 31" descr="noodles_price_ladder.png"/>
+          <p:cNvPicPr>
+            <a:picLocks noChangeAspect="1"/>
+          </p:cNvPicPr>
+          <p:nvPr/>
+        </p:nvPicPr>
+        <p:blipFill>
+          <a:blip r:embed="rId3"/>
+          <a:stretch>
+            <a:fillRect/>
+          </a:stretch>
+        </p:blipFill>
+        <p:spPr>
+          <a:xfrm>
+            <a:off x="256032" y="4663440"/>
+            <a:ext cx="5943600" cy="1783080"/>
+          </a:xfrm>
+          <a:prstGeom prst="rect">
+            <a:avLst/>
+          </a:prstGeom>
+        </p:spPr>
+      </p:pic>
+      <p:sp>
+        <p:nvSpPr>
+          <p:cNvPr id="33" name="Rectangle 32"/>
+          <p:cNvSpPr/>
+          <p:nvPr/>
+        </p:nvSpPr>
+        <p:spPr>
+          <a:xfrm>
+            <a:off x="6263640" y="4645152"/>
+            <a:ext cx="5577840" cy="1810512"/>
+          </a:xfrm>
+          <a:prstGeom prst="rect">
+            <a:avLst/>
+          </a:prstGeom>
+          <a:solidFill>
+            <a:srgbClr val="F4F6F8"/>
+          </a:solidFill>
+          <a:ln>
+            <a:solidFill>
+              <a:srgbClr val="D5DBE0"/>
+            </a:solidFill>
+          </a:ln>
+        </p:spPr>
+        <p:style>
+          <a:lnRef idx="1">
+            <a:schemeClr val="accent1"/>
+          </a:lnRef>
+          <a:fillRef idx="3">
+            <a:schemeClr val="accent1"/>
+          </a:fillRef>
+          <a:effectRef idx="2">
+            <a:schemeClr val="accent1"/>
+          </a:effectRef>
+          <a:fontRef idx="minor">
+            <a:schemeClr val="lt1"/>
+          </a:fontRef>
+        </p:style>
+        <p:txBody>
+          <a:bodyPr rtlCol="0" anchor="ctr"/>
+          <a:lstStyle/>
+          <a:p>
+            <a:pPr algn="ctr"/>
+          </a:p>
+        </p:txBody>
+      </p:sp>
+      <p:sp>
+        <p:nvSpPr>
+          <p:cNvPr id="34" name="TextBox 33"/>
+          <p:cNvSpPr txBox="1"/>
+          <p:nvPr/>
+        </p:nvSpPr>
+        <p:spPr>
+          <a:xfrm>
+            <a:off x="6400800" y="4718304"/>
+            <a:ext cx="5303520" cy="219456"/>
+          </a:xfrm>
+          <a:prstGeom prst="rect">
+            <a:avLst/>
+          </a:prstGeom>
+          <a:noFill/>
+        </p:spPr>
+        <p:txBody>
+          <a:bodyPr wrap="square">
+            <a:spAutoFit/>
+          </a:bodyPr>
+          <a:lstStyle/>
+          <a:p>
+            <a:pPr algn="l"/>
+            <a:r>
+              <a:rPr sz="1200" b="1">
+                <a:solidFill>
+                  <a:srgbClr val="0B2545"/>
+                </a:solidFill>
+                <a:latin typeface="Calibri"/>
+              </a:rPr>
+              <a:t>Unilever competing SKUs (Jun 26 only)</a:t>
+            </a:r>
+          </a:p>
+        </p:txBody>
+      </p:sp>
+      <p:graphicFrame>
+        <p:nvGraphicFramePr>
+          <p:cNvPr id="35" name="Table 34"/>
+          <p:cNvGraphicFramePr>
+            <a:graphicFrameLocks noGrp="1"/>
+          </p:cNvGraphicFramePr>
+          <p:nvPr/>
+        </p:nvGraphicFramePr>
+        <p:xfrm>
+          <a:off x="6400800" y="4956048"/>
+          <a:ext cx="5303520" cy="1389888"/>
+        </p:xfrm>
+        <a:graphic>
+          <a:graphicData uri="http://schemas.openxmlformats.org/drawingml/2006/table">
+            <a:tbl>
+              <a:tblPr firstRow="1" bandRow="1">
+                <a:tableStyleId>{5C22544A-7EE6-4342-B048-85BDC9FD1C3A}</a:tableStyleId>
+              </a:tblPr>
+              <a:tblGrid>
+                <a:gridCol w="2148840"/>
+                <a:gridCol w="1005840"/>
+                <a:gridCol w="914400"/>
+                <a:gridCol w="1234440"/>
+              </a:tblGrid>
+              <a:tr h="347472">
+                <a:tc>
+                  <a:txBody>
+                    <a:bodyPr/>
+                    <a:lstStyle/>
+                    <a:p>
+                      <a:pPr algn="l"/>
+                      <a:r>
+                        <a:rPr sz="1000" b="1">
+                          <a:solidFill>
+                            <a:srgbClr val="FFFFFF"/>
+                          </a:solidFill>
+                          <a:latin typeface="Calibri"/>
+                        </a:rPr>
+                        <a:t>SKU</a:t>
+                      </a:r>
+                    </a:p>
+                  </a:txBody>
+                  <a:tcPr>
+                    <a:solidFill>
+                      <a:srgbClr val="0B2545"/>
+                    </a:solidFill>
+                  </a:tcPr>
+                </a:tc>
+                <a:tc>
+                  <a:txBody>
+                    <a:bodyPr/>
+                    <a:lstStyle/>
+                    <a:p>
+                      <a:pPr algn="r"/>
+                      <a:r>
+                        <a:rPr sz="1000" b="1">
+                          <a:solidFill>
+                            <a:srgbClr val="FFFFFF"/>
+                          </a:solidFill>
+                          <a:latin typeface="Calibri"/>
+                        </a:rPr>
+                        <a:t>Value</a:t>
+                      </a:r>
+                    </a:p>
+                  </a:txBody>
+                  <a:tcPr>
+                    <a:solidFill>
+                      <a:srgbClr val="0B2545"/>
+                    </a:solidFill>
+                  </a:tcPr>
+                </a:tc>
+                <a:tc>
+                  <a:txBody>
+                    <a:bodyPr/>
+                    <a:lstStyle/>
+                    <a:p>
+                      <a:pPr algn="r"/>
+                      <a:r>
+                        <a:rPr sz="1000" b="1">
+                          <a:solidFill>
+                            <a:srgbClr val="FFFFFF"/>
+                          </a:solidFill>
+                          <a:latin typeface="Calibri"/>
+                        </a:rPr>
+                        <a:t>Mix</a:t>
+                      </a:r>
+                    </a:p>
+                  </a:txBody>
+                  <a:tcPr>
+                    <a:solidFill>
+                      <a:srgbClr val="0B2545"/>
+                    </a:solidFill>
+                  </a:tcPr>
+                </a:tc>
+                <a:tc>
+                  <a:txBody>
+                    <a:bodyPr/>
+                    <a:lstStyle/>
+                    <a:p>
+                      <a:pPr algn="r"/>
+                      <a:r>
+                        <a:rPr sz="1000" b="1">
+                          <a:solidFill>
+                            <a:srgbClr val="FFFFFF"/>
+                          </a:solidFill>
+                          <a:latin typeface="Calibri"/>
+                        </a:rPr>
+                        <a:t>R/pot</a:t>
+                      </a:r>
+                    </a:p>
+                  </a:txBody>
+                  <a:tcPr>
+                    <a:solidFill>
+                      <a:srgbClr val="0B2545"/>
+                    </a:solidFill>
+                  </a:tcPr>
+                </a:tc>
+              </a:tr>
+              <a:tr h="347472">
+                <a:tc>
+                  <a:txBody>
+                    <a:bodyPr/>
+                    <a:lstStyle/>
+                    <a:p>
+                      <a:pPr algn="l"/>
+                      <a:r>
+                        <a:rPr sz="1100" b="1">
+                          <a:solidFill>
+                            <a:srgbClr val="1A1A1A"/>
+                          </a:solidFill>
+                          <a:latin typeface="Calibri"/>
+                        </a:rPr>
+                        <a:t>Carbonara</a:t>
+                      </a:r>
+                    </a:p>
+                  </a:txBody>
+                  <a:tcPr>
+                    <a:solidFill>
+                      <a:srgbClr val="F4F6F8"/>
+                    </a:solidFill>
+                  </a:tcPr>
+                </a:tc>
+                <a:tc>
+                  <a:txBody>
+                    <a:bodyPr/>
+                    <a:lstStyle/>
+                    <a:p>
+                      <a:pPr algn="r"/>
+                      <a:r>
+                        <a:rPr sz="1100" b="0">
+                          <a:solidFill>
+                            <a:srgbClr val="1A1A1A"/>
+                          </a:solidFill>
+                          <a:latin typeface="Calibri"/>
+                        </a:rPr>
+                        <a:t>R603k</a:t>
+                      </a:r>
+                    </a:p>
+                  </a:txBody>
+                  <a:tcPr>
+                    <a:solidFill>
+                      <a:srgbClr val="F4F6F8"/>
+                    </a:solidFill>
+                  </a:tcPr>
+                </a:tc>
+                <a:tc>
+                  <a:txBody>
+                    <a:bodyPr/>
+                    <a:lstStyle/>
+                    <a:p>
+                      <a:pPr algn="r"/>
+                      <a:r>
+                        <a:rPr sz="1100" b="0">
+                          <a:solidFill>
+                            <a:srgbClr val="1A1A1A"/>
+                          </a:solidFill>
+                          <a:latin typeface="Calibri"/>
+                        </a:rPr>
+                        <a:t>49%</a:t>
+                      </a:r>
+                    </a:p>
+                  </a:txBody>
+                  <a:tcPr>
+                    <a:solidFill>
+                      <a:srgbClr val="F4F6F8"/>
+                    </a:solidFill>
+                  </a:tcPr>
+                </a:tc>
+                <a:tc>
+                  <a:txBody>
+                    <a:bodyPr/>
+                    <a:lstStyle/>
+                    <a:p>
+                      <a:pPr algn="r"/>
+                      <a:r>
+                        <a:rPr sz="1100" b="0">
+                          <a:solidFill>
+                            <a:srgbClr val="1A1A1A"/>
+                          </a:solidFill>
+                          <a:latin typeface="Calibri"/>
+                        </a:rPr>
+                        <a:t>R49.05</a:t>
+                      </a:r>
+                    </a:p>
+                  </a:txBody>
+                  <a:tcPr>
+                    <a:solidFill>
+                      <a:srgbClr val="F4F6F8"/>
+                    </a:solidFill>
+                  </a:tcPr>
+                </a:tc>
+              </a:tr>
+              <a:tr h="347472">
+                <a:tc>
+                  <a:txBody>
+                    <a:bodyPr/>
+                    <a:lstStyle/>
+                    <a:p>
+                      <a:pPr algn="l"/>
+                      <a:r>
+                        <a:rPr sz="1100" b="1">
+                          <a:solidFill>
+                            <a:srgbClr val="1A1A1A"/>
+                          </a:solidFill>
+                          <a:latin typeface="Calibri"/>
+                        </a:rPr>
+                        <a:t>Tomato &amp; Mozzarella</a:t>
+                      </a:r>
+                    </a:p>
+                  </a:txBody>
+                  <a:tcPr>
+                    <a:solidFill>
+                      <a:srgbClr val="FFFFFF"/>
+                    </a:solidFill>
+                  </a:tcPr>
+                </a:tc>
+                <a:tc>
+                  <a:txBody>
+                    <a:bodyPr/>
+                    <a:lstStyle/>
+                    <a:p>
+                      <a:pPr algn="r"/>
+                      <a:r>
+                        <a:rPr sz="1100" b="0">
+                          <a:solidFill>
+                            <a:srgbClr val="1A1A1A"/>
+                          </a:solidFill>
+                          <a:latin typeface="Calibri"/>
+                        </a:rPr>
+                        <a:t>R368k</a:t>
+                      </a:r>
+                    </a:p>
+                  </a:txBody>
+                  <a:tcPr>
+                    <a:solidFill>
+                      <a:srgbClr val="FFFFFF"/>
+                    </a:solidFill>
+                  </a:tcPr>
+                </a:tc>
+                <a:tc>
+                  <a:txBody>
+                    <a:bodyPr/>
+                    <a:lstStyle/>
+                    <a:p>
+                      <a:pPr algn="r"/>
+                      <a:r>
+                        <a:rPr sz="1100" b="0">
+                          <a:solidFill>
+                            <a:srgbClr val="1A1A1A"/>
+                          </a:solidFill>
+                          <a:latin typeface="Calibri"/>
+                        </a:rPr>
+                        <a:t>30%</a:t>
+                      </a:r>
+                    </a:p>
+                  </a:txBody>
+                  <a:tcPr>
+                    <a:solidFill>
+                      <a:srgbClr val="FFFFFF"/>
+                    </a:solidFill>
+                  </a:tcPr>
+                </a:tc>
+                <a:tc>
+                  <a:txBody>
+                    <a:bodyPr/>
+                    <a:lstStyle/>
+                    <a:p>
+                      <a:pPr algn="r"/>
+                      <a:r>
+                        <a:rPr sz="1100" b="0">
+                          <a:solidFill>
+                            <a:srgbClr val="1A1A1A"/>
+                          </a:solidFill>
+                          <a:latin typeface="Calibri"/>
+                        </a:rPr>
+                        <a:t>R49.22</a:t>
+                      </a:r>
+                    </a:p>
+                  </a:txBody>
+                  <a:tcPr>
+                    <a:solidFill>
+                      <a:srgbClr val="FFFFFF"/>
+                    </a:solidFill>
+                  </a:tcPr>
+                </a:tc>
+              </a:tr>
+              <a:tr h="347472">
+                <a:tc>
+                  <a:txBody>
+                    <a:bodyPr/>
+                    <a:lstStyle/>
+                    <a:p>
+                      <a:pPr algn="l"/>
+                      <a:r>
+                        <a:rPr sz="1100" b="1">
+                          <a:solidFill>
+                            <a:srgbClr val="1A1A1A"/>
+                          </a:solidFill>
+                          <a:latin typeface="Calibri"/>
+                        </a:rPr>
+                        <a:t>Mushroom</a:t>
+                      </a:r>
+                    </a:p>
+                  </a:txBody>
+                  <a:tcPr>
+                    <a:solidFill>
+                      <a:srgbClr val="F4F6F8"/>
+                    </a:solidFill>
+                  </a:tcPr>
+                </a:tc>
+                <a:tc>
+                  <a:txBody>
+                    <a:bodyPr/>
+                    <a:lstStyle/>
+                    <a:p>
+                      <a:pPr algn="r"/>
+                      <a:r>
+                        <a:rPr sz="1100" b="0">
+                          <a:solidFill>
+                            <a:srgbClr val="1A1A1A"/>
+                          </a:solidFill>
+                          <a:latin typeface="Calibri"/>
+                        </a:rPr>
+                        <a:t>R269k</a:t>
+                      </a:r>
+                    </a:p>
+                  </a:txBody>
+                  <a:tcPr>
+                    <a:solidFill>
+                      <a:srgbClr val="F4F6F8"/>
+                    </a:solidFill>
+                  </a:tcPr>
+                </a:tc>
+                <a:tc>
+                  <a:txBody>
+                    <a:bodyPr/>
+                    <a:lstStyle/>
+                    <a:p>
+                      <a:pPr algn="r"/>
+                      <a:r>
+                        <a:rPr sz="1100" b="0">
+                          <a:solidFill>
+                            <a:srgbClr val="1A1A1A"/>
+                          </a:solidFill>
+                          <a:latin typeface="Calibri"/>
+                        </a:rPr>
+                        <a:t>22%</a:t>
+                      </a:r>
+                    </a:p>
+                  </a:txBody>
+                  <a:tcPr>
+                    <a:solidFill>
+                      <a:srgbClr val="F4F6F8"/>
+                    </a:solidFill>
+                  </a:tcPr>
+                </a:tc>
+                <a:tc>
+                  <a:txBody>
+                    <a:bodyPr/>
+                    <a:lstStyle/>
+                    <a:p>
+                      <a:pPr algn="r"/>
+                      <a:r>
+                        <a:rPr sz="1100" b="0">
+                          <a:solidFill>
+                            <a:srgbClr val="1A1A1A"/>
+                          </a:solidFill>
+                          <a:latin typeface="Calibri"/>
+                        </a:rPr>
+                        <a:t>R49.08</a:t>
+                      </a:r>
+                    </a:p>
+                  </a:txBody>
+                  <a:tcPr>
+                    <a:solidFill>
+                      <a:srgbClr val="F4F6F8"/>
+                    </a:solidFill>
+                  </a:tcPr>
+                </a:tc>
+              </a:tr>
+            </a:tbl>
+          </a:graphicData>
+        </a:graphic>
+      </p:graphicFrame>
     </p:spTree>
   </p:cSld>
   <p:clrMapOvr>
@@ -6605,7 +8774,7 @@
         <p:spPr>
           <a:xfrm>
             <a:off x="0" y="0"/>
-            <a:ext cx="12191695" cy="841248"/>
+            <a:ext cx="12191695" cy="804672"/>
           </a:xfrm>
           <a:prstGeom prst="rect">
             <a:avLst/>
@@ -6647,8 +8816,8 @@
         </p:nvSpPr>
         <p:spPr>
           <a:xfrm>
-            <a:off x="365760" y="109728"/>
-            <a:ext cx="9601200" cy="384048"/>
+            <a:off x="347472" y="91440"/>
+            <a:ext cx="11430000" cy="365760"/>
           </a:xfrm>
           <a:prstGeom prst="rect">
             <a:avLst/>
@@ -6663,13 +8832,13 @@
           <a:p>
             <a:pPr algn="l"/>
             <a:r>
-              <a:rPr sz="2400" b="1">
+              <a:rPr sz="2200" b="1">
                 <a:solidFill>
                   <a:srgbClr val="FFFFFF"/>
                 </a:solidFill>
                 <a:latin typeface="Calibri"/>
               </a:rPr>
-              <a:t>So what, and the extract we still need</a:t>
+              <a:t>So what for Unilever</a:t>
             </a:r>
           </a:p>
         </p:txBody>
@@ -6682,8 +8851,8 @@
         </p:nvSpPr>
         <p:spPr>
           <a:xfrm>
-            <a:off x="365760" y="475488"/>
-            <a:ext cx="11338560" cy="292608"/>
+            <a:off x="347472" y="457200"/>
+            <a:ext cx="11430000" cy="274320"/>
           </a:xfrm>
           <a:prstGeom prst="rect">
             <a:avLst/>
@@ -6698,13 +8867,13 @@
           <a:p>
             <a:pPr algn="l"/>
             <a:r>
-              <a:rPr sz="1200" b="0">
+              <a:rPr sz="1100" b="0">
                 <a:solidFill>
                   <a:srgbClr val="C9D6E3"/>
                 </a:solidFill>
                 <a:latin typeface="Calibri"/>
               </a:rPr>
-              <a:t>This file is a Unilever portfolio cut, not a Pasta / Noodles category competitive cut</a:t>
+              <a:t>Pasta Pots are a different product and price tier, not a head-to-head with Maggi or Kellogg's sachets</a:t>
             </a:r>
           </a:p>
         </p:txBody>
@@ -6760,8 +8929,8 @@
         </p:nvSpPr>
         <p:spPr>
           <a:xfrm>
-            <a:off x="365760" y="6620256"/>
-            <a:ext cx="11430000" cy="201168"/>
+            <a:off x="347472" y="6620256"/>
+            <a:ext cx="11521440" cy="201168"/>
           </a:xfrm>
           <a:prstGeom prst="rect">
             <a:avLst/>
@@ -6782,7 +8951,7 @@
                 </a:solidFill>
                 <a:latin typeface="Calibri"/>
               </a:rPr>
-              <a:t>Source: Monthly Time Groupings Export, South Africa  ·  Period in file: Jul 2025–Jun 2026  ·  Measures: 12mm CY Value, Volume, Ave Price (Value/Volume)</a:t>
+              <a:t>Source: Monthly Trended Export, South Africa Pasta, multi-retailer  ·  12 months = Jul 25–Jun 26 vs YA Jul 24–Jun 25  ·  Price = value ÷ volume (R/kg)  ·  Latest month = Jun 26</a:t>
             </a:r>
           </a:p>
         </p:txBody>
@@ -6795,8 +8964,8 @@
         </p:nvSpPr>
         <p:spPr>
           <a:xfrm>
-            <a:off x="365760" y="1024128"/>
-            <a:ext cx="5623560" cy="5349240"/>
+            <a:off x="347472" y="987552"/>
+            <a:ext cx="5669280" cy="5413248"/>
           </a:xfrm>
           <a:prstGeom prst="rect">
             <a:avLst/>
@@ -6840,8 +9009,8 @@
         </p:nvSpPr>
         <p:spPr>
           <a:xfrm>
-            <a:off x="530352" y="1133856"/>
-            <a:ext cx="5303520" cy="292608"/>
+            <a:off x="502920" y="1097280"/>
+            <a:ext cx="5349240" cy="274320"/>
           </a:xfrm>
           <a:prstGeom prst="rect">
             <a:avLst/>
@@ -6862,7 +9031,7 @@
                 </a:solidFill>
                 <a:latin typeface="Calibri"/>
               </a:rPr>
-              <a:t>Working conclusions from this file</a:t>
+              <a:t>What the category is doing</a:t>
             </a:r>
           </a:p>
         </p:txBody>
@@ -6875,8 +9044,8 @@
         </p:nvSpPr>
         <p:spPr>
           <a:xfrm>
-            <a:off x="530352" y="1508760"/>
-            <a:ext cx="5303520" cy="4617720"/>
+            <a:off x="502920" y="1444752"/>
+            <a:ext cx="5349240" cy="4754880"/>
           </a:xfrm>
           <a:prstGeom prst="rect">
             <a:avLst/>
@@ -6891,7 +9060,7 @@
           <a:p>
             <a:pPr>
               <a:spcAft>
-                <a:spcPts val="1200"/>
+                <a:spcPts val="500"/>
               </a:spcAft>
             </a:pPr>
             <a:r>
@@ -6901,13 +9070,13 @@
                 </a:solidFill>
                 <a:latin typeface="Calibri"/>
               </a:rPr>
-              <a:t>•  Pasta: Unilever is in-market in June with three Pasta Pots at a single ~R49 price point. Carbonara is the SKU to watch inside that range.</a:t>
+              <a:t>•  Noodles is the Pasta category. 64% of value, growing faster than dry pasta, and the only segment Unilever is in.</a:t>
             </a:r>
           </a:p>
           <a:p>
             <a:pPr>
               <a:spcAft>
-                <a:spcPts val="1200"/>
+                <a:spcPts val="500"/>
               </a:spcAft>
             </a:pPr>
             <a:r>
@@ -6917,13 +9086,13 @@
                 </a:solidFill>
                 <a:latin typeface="Calibri"/>
               </a:rPr>
-              <a:t>•  Noodles: Unilever’s instant noodle cups in this file have no sales. They look delisted or not distributed, not competing.</a:t>
+              <a:t>•  The mass market is a R6 sachet: Kellogg's (~R87/kg) and Maggi (~R100/kg). Roka undercuts at ~R69/kg. That band is ~87% of noodles value.</a:t>
             </a:r>
           </a:p>
           <a:p>
             <a:pPr>
               <a:spcAft>
-                <a:spcPts val="1200"/>
+                <a:spcPts val="500"/>
               </a:spcAft>
             </a:pPr>
             <a:r>
@@ -6933,13 +9102,13 @@
                 </a:solidFill>
                 <a:latin typeface="Calibri"/>
               </a:rPr>
-              <a:t>•  Do not use Chicken Noodle soup as a proxy for the Noodles category. It is a 45g soup sachet at ~R6.</a:t>
+              <a:t>•  Kellogg's is taking Maggi's lunch. Maggi −5.1pp over 12 months; Kellogg's +2.0pp. Indomie and Samyang are the other gainers.</a:t>
             </a:r>
           </a:p>
           <a:p>
             <a:pPr>
               <a:spcAft>
-                <a:spcPts val="1200"/>
+                <a:spcPts val="500"/>
               </a:spcAft>
             </a:pPr>
             <a:r>
@@ -6949,23 +9118,7 @@
                 </a:solidFill>
                 <a:latin typeface="Calibri"/>
               </a:rPr>
-              <a:t>•  Winning / losing vs competitors cannot be scored. There are no non-Unilever rows.</a:t>
-            </a:r>
-          </a:p>
-          <a:p>
-            <a:pPr>
-              <a:spcAft>
-                <a:spcPts val="1200"/>
-              </a:spcAft>
-            </a:pPr>
-            <a:r>
-              <a:rPr sz="1400" b="0">
-                <a:solidFill>
-                  <a:srgbClr val="1A1A1A"/>
-                </a:solidFill>
-                <a:latin typeface="Calibri"/>
-              </a:rPr>
-              <a:t>•  Price architecture for the category cannot be scored. We only have Unilever’s own R/kg.</a:t>
+              <a:t>•  Dry pasta is a separate fight (Tiger, private label, Mr Pasta at R30–35/kg). Unilever is absent there.</a:t>
             </a:r>
           </a:p>
         </p:txBody>
@@ -6978,8 +9131,8 @@
         </p:nvSpPr>
         <p:spPr>
           <a:xfrm>
-            <a:off x="6172200" y="1024128"/>
-            <a:ext cx="5650992" cy="5349240"/>
+            <a:off x="6199632" y="987552"/>
+            <a:ext cx="5632704" cy="5413248"/>
           </a:xfrm>
           <a:prstGeom prst="rect">
             <a:avLst/>
@@ -7021,8 +9174,8 @@
         </p:nvSpPr>
         <p:spPr>
           <a:xfrm>
-            <a:off x="6355080" y="1133856"/>
-            <a:ext cx="5303520" cy="292608"/>
+            <a:off x="6364224" y="1097280"/>
+            <a:ext cx="5303520" cy="274320"/>
           </a:xfrm>
           <a:prstGeom prst="rect">
             <a:avLst/>
@@ -7043,7 +9196,7 @@
                 </a:solidFill>
                 <a:latin typeface="Calibri"/>
               </a:rPr>
-              <a:t>Please pull this instead</a:t>
+              <a:t>Where Unilever sits</a:t>
             </a:r>
           </a:p>
         </p:txBody>
@@ -7056,8 +9209,8 @@
         </p:nvSpPr>
         <p:spPr>
           <a:xfrm>
-            <a:off x="6355080" y="1554480"/>
-            <a:ext cx="5303520" cy="4480560"/>
+            <a:off x="6364224" y="1444752"/>
+            <a:ext cx="5303520" cy="4754880"/>
           </a:xfrm>
           <a:prstGeom prst="rect">
             <a:avLst/>
@@ -7072,7 +9225,7 @@
           <a:p>
             <a:pPr>
               <a:spcAft>
-                <a:spcPts val="1000"/>
+                <a:spcPts val="1100"/>
               </a:spcAft>
             </a:pPr>
             <a:r>
@@ -7082,13 +9235,13 @@
                 </a:solidFill>
                 <a:latin typeface="Calibri"/>
               </a:rPr>
-              <a:t>•  Market: South Africa, same source.</a:t>
+              <a:t>•  Knorr Pasta Pots launched into the file in June only: R1.2m, 0.56% of Noodles, 0.37% of Pasta.</a:t>
             </a:r>
           </a:p>
           <a:p>
             <a:pPr>
               <a:spcAft>
-                <a:spcPts val="1000"/>
+                <a:spcPts val="1100"/>
               </a:spcAft>
             </a:pPr>
             <a:r>
@@ -7098,13 +9251,13 @@
                 </a:solidFill>
                 <a:latin typeface="Calibri"/>
               </a:rPr>
-              <a:t>•  Time: monthly, Jul 2025–Jun 2026 (plus June 2026 latest month).</a:t>
+              <a:t>•  One range, one price: ~R49 a pot / ~R790/kg — about 8× the mainstream sachet and 8× category noodles R/kg.</a:t>
             </a:r>
           </a:p>
           <a:p>
             <a:pPr>
               <a:spcAft>
-                <a:spcPts val="1000"/>
+                <a:spcPts val="1100"/>
               </a:spcAft>
             </a:pPr>
             <a:r>
@@ -7114,13 +9267,13 @@
                 </a:solidFill>
                 <a:latin typeface="Calibri"/>
               </a:rPr>
-              <a:t>•  Filter: Category = Pasta and Category = Noodles (or the local subcategory split).</a:t>
+              <a:t>•  Carbonara is the lead SKU (49%). This is a cup/meal occasion, closer to Samyang/ramen than to Maggi 2-minute sachets.</a:t>
             </a:r>
           </a:p>
           <a:p>
             <a:pPr>
               <a:spcAft>
-                <a:spcPts val="1000"/>
+                <a:spcPts val="1100"/>
               </a:spcAft>
             </a:pPr>
             <a:r>
@@ -7130,13 +9283,13 @@
                 </a:solidFill>
                 <a:latin typeface="Calibri"/>
               </a:rPr>
-              <a:t>•  Rows: all manufacturers and brands, not Unilever only.</a:t>
+              <a:t>•  The three SKUs compete with each other more than with Kellogg's. Scale is still a rounding error.</a:t>
             </a:r>
           </a:p>
           <a:p>
             <a:pPr>
               <a:spcAft>
-                <a:spcPts val="1000"/>
+                <a:spcPts val="1100"/>
               </a:spcAft>
             </a:pPr>
             <a:r>
@@ -7146,23 +9299,7 @@
                 </a:solidFill>
                 <a:latin typeface="Calibri"/>
               </a:rPr>
-              <a:t>•  Columns: month, category, manufacturer, brand, SKU, value, volume, average price, pack size.</a:t>
-            </a:r>
-          </a:p>
-          <a:p>
-            <a:pPr>
-              <a:spcAft>
-                <a:spcPts val="1000"/>
-              </a:spcAft>
-            </a:pPr>
-            <a:r>
-              <a:rPr sz="1400" b="0">
-                <a:solidFill>
-                  <a:srgbClr val="FFFFFF"/>
-                </a:solidFill>
-                <a:latin typeface="Calibri"/>
-              </a:rPr>
-              <a:t>•  Then we can show: category size, key players, 12-month winners/losers, and the price ladder with Unilever SKUs marked.</a:t>
+              <a:t>•  Watch: Maggi's share loss (room if Nestlé stumbles on occasion), Indomie (flavour/heat), and whether Pasta Pots can hold R49 without promo.</a:t>
             </a:r>
           </a:p>
         </p:txBody>

--- a/output/Unilever_Pasta_Noodles_Jun2026.pptx
+++ b/output/Unilever_Pasta_Noodles_Jun2026.pptx
@@ -6,8 +6,11 @@
   </p:sldMasterIdLst>
   <p:sldIdLst>
     <p:sldId id="256" r:id="rId7"/>
-    <p:sldId id="257" r:id="rId9"/>
-    <p:sldId id="258" r:id="rId10"/>
+    <p:sldId id="257" r:id="rId8"/>
+    <p:sldId id="258" r:id="rId9"/>
+    <p:sldId id="259" r:id="rId10"/>
+    <p:sldId id="260" r:id="rId11"/>
+    <p:sldId id="261" r:id="rId12"/>
   </p:sldIdLst>
   <p:sldSz cx="12191695" cy="6858000" type="screen4x3"/>
   <p:notesSz cx="6858000" cy="9144000"/>
@@ -107,566 +110,6 @@
     </a:lvl9pPr>
   </p:defaultTextStyle>
 </p:presentation>
-</file>
-
-<file path=ppt/notesMasters/notesMaster1.xml><?xml version="1.0" encoding="utf-8"?>
-<p:notesMaster xmlns:a="http://schemas.openxmlformats.org/drawingml/2006/main" xmlns:p="http://schemas.openxmlformats.org/presentationml/2006/main" xmlns:r="http://schemas.openxmlformats.org/officeDocument/2006/relationships">
-  <p:cSld>
-    <p:bg>
-      <p:bgRef idx="1001">
-        <a:schemeClr val="bg1"/>
-      </p:bgRef>
-    </p:bg>
-    <p:spTree>
-      <p:nvGrpSpPr>
-        <p:cNvPr id="1" name=""/>
-        <p:cNvGrpSpPr/>
-        <p:nvPr/>
-      </p:nvGrpSpPr>
-      <p:grpSpPr>
-        <a:xfrm>
-          <a:off x="0" y="0"/>
-          <a:ext cx="0" cy="0"/>
-          <a:chOff x="0" y="0"/>
-          <a:chExt cx="0" cy="0"/>
-        </a:xfrm>
-      </p:grpSpPr>
-      <p:sp>
-        <p:nvSpPr>
-          <p:cNvPr id="2" name="Header Placeholder 1"/>
-          <p:cNvSpPr>
-            <a:spLocks noGrp="1"/>
-          </p:cNvSpPr>
-          <p:nvPr>
-            <p:ph type="hdr" sz="quarter"/>
-          </p:nvPr>
-        </p:nvSpPr>
-        <p:spPr>
-          <a:xfrm>
-            <a:off x="0" y="0"/>
-            <a:ext cx="2971800" cy="457200"/>
-          </a:xfrm>
-          <a:prstGeom prst="rect">
-            <a:avLst/>
-          </a:prstGeom>
-        </p:spPr>
-        <p:txBody>
-          <a:bodyPr vert="horz" lIns="91440" tIns="45720" rIns="91440" bIns="45720" rtlCol="0"/>
-          <a:lstStyle>
-            <a:lvl1pPr algn="l">
-              <a:defRPr sz="1200"/>
-            </a:lvl1pPr>
-          </a:lstStyle>
-          <a:p>
-            <a:endParaRPr lang="en-US"/>
-          </a:p>
-        </p:txBody>
-      </p:sp>
-      <p:sp>
-        <p:nvSpPr>
-          <p:cNvPr id="3" name="Date Placeholder 2"/>
-          <p:cNvSpPr>
-            <a:spLocks noGrp="1"/>
-          </p:cNvSpPr>
-          <p:nvPr>
-            <p:ph type="dt" idx="1"/>
-          </p:nvPr>
-        </p:nvSpPr>
-        <p:spPr>
-          <a:xfrm>
-            <a:off x="3884613" y="0"/>
-            <a:ext cx="2971800" cy="457200"/>
-          </a:xfrm>
-          <a:prstGeom prst="rect">
-            <a:avLst/>
-          </a:prstGeom>
-        </p:spPr>
-        <p:txBody>
-          <a:bodyPr vert="horz" lIns="91440" tIns="45720" rIns="91440" bIns="45720" rtlCol="0"/>
-          <a:lstStyle>
-            <a:lvl1pPr algn="r">
-              <a:defRPr sz="1200"/>
-            </a:lvl1pPr>
-          </a:lstStyle>
-          <a:p>
-            <a:fld id="{0F89C1C7-3DCD-1040-A9CF-14679D8B5DDD}" type="datetimeFigureOut">
-              <a:rPr lang="en-US" smtClean="0"/>
-              <a:t>10/17/16</a:t>
-            </a:fld>
-            <a:endParaRPr lang="en-US"/>
-          </a:p>
-        </p:txBody>
-      </p:sp>
-      <p:sp>
-        <p:nvSpPr>
-          <p:cNvPr id="4" name="Slide Image Placeholder 3"/>
-          <p:cNvSpPr>
-            <a:spLocks noGrp="1" noRot="1" noChangeAspect="1"/>
-          </p:cNvSpPr>
-          <p:nvPr>
-            <p:ph type="sldImg" idx="2"/>
-          </p:nvPr>
-        </p:nvSpPr>
-        <p:spPr>
-          <a:xfrm>
-            <a:off x="1143000" y="685800"/>
-            <a:ext cx="4572000" cy="3429000"/>
-          </a:xfrm>
-          <a:prstGeom prst="rect">
-            <a:avLst/>
-          </a:prstGeom>
-          <a:noFill/>
-          <a:ln w="12700">
-            <a:solidFill>
-              <a:prstClr val="black"/>
-            </a:solidFill>
-          </a:ln>
-        </p:spPr>
-        <p:txBody>
-          <a:bodyPr vert="horz" lIns="91440" tIns="45720" rIns="91440" bIns="45720" rtlCol="0" anchor="ctr"/>
-          <a:lstStyle/>
-          <a:p>
-            <a:endParaRPr lang="en-US"/>
-          </a:p>
-        </p:txBody>
-      </p:sp>
-      <p:sp>
-        <p:nvSpPr>
-          <p:cNvPr id="5" name="Notes Placeholder 4"/>
-          <p:cNvSpPr>
-            <a:spLocks noGrp="1"/>
-          </p:cNvSpPr>
-          <p:nvPr>
-            <p:ph type="body" sz="quarter" idx="3"/>
-          </p:nvPr>
-        </p:nvSpPr>
-        <p:spPr>
-          <a:xfrm>
-            <a:off x="685800" y="4343400"/>
-            <a:ext cx="5486400" cy="4114800"/>
-          </a:xfrm>
-          <a:prstGeom prst="rect">
-            <a:avLst/>
-          </a:prstGeom>
-        </p:spPr>
-        <p:txBody>
-          <a:bodyPr vert="horz" lIns="91440" tIns="45720" rIns="91440" bIns="45720" rtlCol="0"/>
-          <a:lstStyle/>
-          <a:p>
-            <a:pPr lvl="0"/>
-            <a:r>
-              <a:rPr lang="en-US" smtClean="0"/>
-              <a:t>Click to edit Master text styles</a:t>
-            </a:r>
-          </a:p>
-          <a:p>
-            <a:pPr lvl="1"/>
-            <a:r>
-              <a:rPr lang="en-US" smtClean="0"/>
-              <a:t>Second level</a:t>
-            </a:r>
-          </a:p>
-          <a:p>
-            <a:pPr lvl="2"/>
-            <a:r>
-              <a:rPr lang="en-US" smtClean="0"/>
-              <a:t>Third level</a:t>
-            </a:r>
-          </a:p>
-          <a:p>
-            <a:pPr lvl="3"/>
-            <a:r>
-              <a:rPr lang="en-US" smtClean="0"/>
-              <a:t>Fourth level</a:t>
-            </a:r>
-          </a:p>
-          <a:p>
-            <a:pPr lvl="4"/>
-            <a:r>
-              <a:rPr lang="en-US" smtClean="0"/>
-              <a:t>Fifth level</a:t>
-            </a:r>
-            <a:endParaRPr lang="en-US"/>
-          </a:p>
-        </p:txBody>
-      </p:sp>
-      <p:sp>
-        <p:nvSpPr>
-          <p:cNvPr id="6" name="Footer Placeholder 5"/>
-          <p:cNvSpPr>
-            <a:spLocks noGrp="1"/>
-          </p:cNvSpPr>
-          <p:nvPr>
-            <p:ph type="ftr" sz="quarter" idx="4"/>
-          </p:nvPr>
-        </p:nvSpPr>
-        <p:spPr>
-          <a:xfrm>
-            <a:off x="0" y="8685213"/>
-            <a:ext cx="2971800" cy="457200"/>
-          </a:xfrm>
-          <a:prstGeom prst="rect">
-            <a:avLst/>
-          </a:prstGeom>
-        </p:spPr>
-        <p:txBody>
-          <a:bodyPr vert="horz" lIns="91440" tIns="45720" rIns="91440" bIns="45720" rtlCol="0" anchor="b"/>
-          <a:lstStyle>
-            <a:lvl1pPr algn="l">
-              <a:defRPr sz="1200"/>
-            </a:lvl1pPr>
-          </a:lstStyle>
-          <a:p>
-            <a:endParaRPr lang="en-US"/>
-          </a:p>
-        </p:txBody>
-      </p:sp>
-      <p:sp>
-        <p:nvSpPr>
-          <p:cNvPr id="7" name="Slide Number Placeholder 6"/>
-          <p:cNvSpPr>
-            <a:spLocks noGrp="1"/>
-          </p:cNvSpPr>
-          <p:nvPr>
-            <p:ph type="sldNum" sz="quarter" idx="5"/>
-          </p:nvPr>
-        </p:nvSpPr>
-        <p:spPr>
-          <a:xfrm>
-            <a:off x="3884613" y="8685213"/>
-            <a:ext cx="2971800" cy="457200"/>
-          </a:xfrm>
-          <a:prstGeom prst="rect">
-            <a:avLst/>
-          </a:prstGeom>
-        </p:spPr>
-        <p:txBody>
-          <a:bodyPr vert="horz" lIns="91440" tIns="45720" rIns="91440" bIns="45720" rtlCol="0" anchor="b"/>
-          <a:lstStyle>
-            <a:lvl1pPr algn="r">
-              <a:defRPr sz="1200"/>
-            </a:lvl1pPr>
-          </a:lstStyle>
-          <a:p>
-            <a:fld id="{BB5E49A5-4136-284D-997B-48E1D791AD67}" type="slidenum">
-              <a:rPr lang="en-US" smtClean="0"/>
-              <a:t>‹#›</a:t>
-            </a:fld>
-            <a:endParaRPr lang="en-US"/>
-          </a:p>
-        </p:txBody>
-      </p:sp>
-    </p:spTree>
-    <p:extLst>
-      <p:ext uri="{BB962C8B-B14F-4D97-AF65-F5344CB8AC3E}">
-        <p14:creationId xmlns:p14="http://schemas.microsoft.com/office/powerpoint/2010/main" val="2623252185"/>
-      </p:ext>
-    </p:extLst>
-  </p:cSld>
-  <p:clrMap bg1="lt1" tx1="dk1" bg2="lt2" tx2="dk2" accent1="accent1" accent2="accent2" accent3="accent3" accent4="accent4" accent5="accent5" accent6="accent6" hlink="hlink" folHlink="folHlink"/>
-  <p:notesStyle>
-    <a:lvl1pPr marL="0" algn="l" defTabSz="457200" rtl="0" eaLnBrk="1" latinLnBrk="0" hangingPunct="1">
-      <a:defRPr sz="1200" kern="1200">
-        <a:solidFill>
-          <a:schemeClr val="tx1"/>
-        </a:solidFill>
-        <a:latin typeface="+mn-lt"/>
-        <a:ea typeface="+mn-ea"/>
-        <a:cs typeface="+mn-cs"/>
-      </a:defRPr>
-    </a:lvl1pPr>
-    <a:lvl2pPr marL="457200" algn="l" defTabSz="457200" rtl="0" eaLnBrk="1" latinLnBrk="0" hangingPunct="1">
-      <a:defRPr sz="1200" kern="1200">
-        <a:solidFill>
-          <a:schemeClr val="tx1"/>
-        </a:solidFill>
-        <a:latin typeface="+mn-lt"/>
-        <a:ea typeface="+mn-ea"/>
-        <a:cs typeface="+mn-cs"/>
-      </a:defRPr>
-    </a:lvl2pPr>
-    <a:lvl3pPr marL="914400" algn="l" defTabSz="457200" rtl="0" eaLnBrk="1" latinLnBrk="0" hangingPunct="1">
-      <a:defRPr sz="1200" kern="1200">
-        <a:solidFill>
-          <a:schemeClr val="tx1"/>
-        </a:solidFill>
-        <a:latin typeface="+mn-lt"/>
-        <a:ea typeface="+mn-ea"/>
-        <a:cs typeface="+mn-cs"/>
-      </a:defRPr>
-    </a:lvl3pPr>
-    <a:lvl4pPr marL="1371600" algn="l" defTabSz="457200" rtl="0" eaLnBrk="1" latinLnBrk="0" hangingPunct="1">
-      <a:defRPr sz="1200" kern="1200">
-        <a:solidFill>
-          <a:schemeClr val="tx1"/>
-        </a:solidFill>
-        <a:latin typeface="+mn-lt"/>
-        <a:ea typeface="+mn-ea"/>
-        <a:cs typeface="+mn-cs"/>
-      </a:defRPr>
-    </a:lvl4pPr>
-    <a:lvl5pPr marL="1828800" algn="l" defTabSz="457200" rtl="0" eaLnBrk="1" latinLnBrk="0" hangingPunct="1">
-      <a:defRPr sz="1200" kern="1200">
-        <a:solidFill>
-          <a:schemeClr val="tx1"/>
-        </a:solidFill>
-        <a:latin typeface="+mn-lt"/>
-        <a:ea typeface="+mn-ea"/>
-        <a:cs typeface="+mn-cs"/>
-      </a:defRPr>
-    </a:lvl5pPr>
-    <a:lvl6pPr marL="2286000" algn="l" defTabSz="457200" rtl="0" eaLnBrk="1" latinLnBrk="0" hangingPunct="1">
-      <a:defRPr sz="1200" kern="1200">
-        <a:solidFill>
-          <a:schemeClr val="tx1"/>
-        </a:solidFill>
-        <a:latin typeface="+mn-lt"/>
-        <a:ea typeface="+mn-ea"/>
-        <a:cs typeface="+mn-cs"/>
-      </a:defRPr>
-    </a:lvl6pPr>
-    <a:lvl7pPr marL="2743200" algn="l" defTabSz="457200" rtl="0" eaLnBrk="1" latinLnBrk="0" hangingPunct="1">
-      <a:defRPr sz="1200" kern="1200">
-        <a:solidFill>
-          <a:schemeClr val="tx1"/>
-        </a:solidFill>
-        <a:latin typeface="+mn-lt"/>
-        <a:ea typeface="+mn-ea"/>
-        <a:cs typeface="+mn-cs"/>
-      </a:defRPr>
-    </a:lvl7pPr>
-    <a:lvl8pPr marL="3200400" algn="l" defTabSz="457200" rtl="0" eaLnBrk="1" latinLnBrk="0" hangingPunct="1">
-      <a:defRPr sz="1200" kern="1200">
-        <a:solidFill>
-          <a:schemeClr val="tx1"/>
-        </a:solidFill>
-        <a:latin typeface="+mn-lt"/>
-        <a:ea typeface="+mn-ea"/>
-        <a:cs typeface="+mn-cs"/>
-      </a:defRPr>
-    </a:lvl8pPr>
-    <a:lvl9pPr marL="3657600" algn="l" defTabSz="457200" rtl="0" eaLnBrk="1" latinLnBrk="0" hangingPunct="1">
-      <a:defRPr sz="1200" kern="1200">
-        <a:solidFill>
-          <a:schemeClr val="tx1"/>
-        </a:solidFill>
-        <a:latin typeface="+mn-lt"/>
-        <a:ea typeface="+mn-ea"/>
-        <a:cs typeface="+mn-cs"/>
-      </a:defRPr>
-    </a:lvl9pPr>
-  </p:notesStyle>
-</p:notesMaster>
-</file>
-
-<file path=ppt/notesSlides/notesSlide1.xml><?xml version="1.0" encoding="utf-8"?>
-<p:notes xmlns:a="http://schemas.openxmlformats.org/drawingml/2006/main" xmlns:p="http://schemas.openxmlformats.org/presentationml/2006/main" xmlns:r="http://schemas.openxmlformats.org/officeDocument/2006/relationships">
-  <p:cSld>
-    <p:spTree>
-      <p:nvGrpSpPr>
-        <p:cNvPr id="1" name=""/>
-        <p:cNvGrpSpPr/>
-        <p:nvPr/>
-      </p:nvGrpSpPr>
-      <p:grpSpPr>
-        <a:xfrm>
-          <a:off x="0" y="0"/>
-          <a:ext cx="0" cy="0"/>
-          <a:chOff x="0" y="0"/>
-          <a:chExt cx="0" cy="0"/>
-        </a:xfrm>
-      </p:grpSpPr>
-      <p:sp>
-        <p:nvSpPr>
-          <p:cNvPr id="2" name="Slide Image Placeholder 1"/>
-          <p:cNvSpPr>
-            <a:spLocks noGrp="1"/>
-          </p:cNvSpPr>
-          <p:nvPr>
-            <p:ph type="sldImg" idx="2"/>
-          </p:nvPr>
-        </p:nvSpPr>
-        <p:spPr/>
-      </p:sp>
-      <p:sp>
-        <p:nvSpPr>
-          <p:cNvPr id="3" name="Notes Placeholder 2"/>
-          <p:cNvSpPr>
-            <a:spLocks noGrp="1"/>
-          </p:cNvSpPr>
-          <p:nvPr>
-            <p:ph type="body" idx="3" sz="quarter"/>
-          </p:nvPr>
-        </p:nvSpPr>
-        <p:spPr/>
-        <p:txBody>
-          <a:bodyPr/>
-          <a:lstStyle/>
-          <a:p>
-            <a:r>
-              <a:t>Pasta MAT 3289604029 vs YA 3127415433. Noodles MAT 2117632516. Retailer set as in the extract header (Clicks, Massmart, Spar, Shoprite, PnP, etc.).</a:t>
-            </a:r>
-          </a:p>
-        </p:txBody>
-      </p:sp>
-      <p:sp>
-        <p:nvSpPr>
-          <p:cNvPr id="4" name="Slide Number Placeholder 3"/>
-          <p:cNvSpPr>
-            <a:spLocks noGrp="1"/>
-          </p:cNvSpPr>
-          <p:nvPr>
-            <p:ph type="sldNum" idx="5" sz="quarter"/>
-          </p:nvPr>
-        </p:nvSpPr>
-        <p:spPr/>
-      </p:sp>
-    </p:spTree>
-  </p:cSld>
-  <p:clrMapOvr>
-    <a:masterClrMapping/>
-  </p:clrMapOvr>
-</p:notes>
-</file>
-
-<file path=ppt/notesSlides/notesSlide2.xml><?xml version="1.0" encoding="utf-8"?>
-<p:notes xmlns:a="http://schemas.openxmlformats.org/drawingml/2006/main" xmlns:p="http://schemas.openxmlformats.org/presentationml/2006/main" xmlns:r="http://schemas.openxmlformats.org/officeDocument/2006/relationships">
-  <p:cSld>
-    <p:spTree>
-      <p:nvGrpSpPr>
-        <p:cNvPr id="1" name=""/>
-        <p:cNvGrpSpPr/>
-        <p:nvPr/>
-      </p:nvGrpSpPr>
-      <p:grpSpPr>
-        <a:xfrm>
-          <a:off x="0" y="0"/>
-          <a:ext cx="0" cy="0"/>
-          <a:chOff x="0" y="0"/>
-          <a:chExt cx="0" cy="0"/>
-        </a:xfrm>
-      </p:grpSpPr>
-      <p:sp>
-        <p:nvSpPr>
-          <p:cNvPr id="2" name="Slide Image Placeholder 1"/>
-          <p:cNvSpPr>
-            <a:spLocks noGrp="1"/>
-          </p:cNvSpPr>
-          <p:nvPr>
-            <p:ph type="sldImg" idx="2"/>
-          </p:nvPr>
-        </p:nvSpPr>
-        <p:spPr/>
-      </p:sp>
-      <p:sp>
-        <p:nvSpPr>
-          <p:cNvPr id="3" name="Notes Placeholder 2"/>
-          <p:cNvSpPr>
-            <a:spLocks noGrp="1"/>
-          </p:cNvSpPr>
-          <p:nvPr>
-            <p:ph type="body" idx="3" sz="quarter"/>
-          </p:nvPr>
-        </p:nvSpPr>
-        <p:spPr/>
-        <p:txBody>
-          <a:bodyPr/>
-          <a:lstStyle/>
-          <a:p>
-            <a:r>
-              <a:t>Sachet price uses brand R/kg × typical unit grams (Kellogg's 70g, Maggi 68g, Indomie 80g, Roka 85g, Samyang 130g, Knorr 63g). 86% of noodles value is in the R5–8 unit-pack band. Knorr Pasta Pots are not in the file before Jun 26.</a:t>
-            </a:r>
-          </a:p>
-        </p:txBody>
-      </p:sp>
-      <p:sp>
-        <p:nvSpPr>
-          <p:cNvPr id="4" name="Slide Number Placeholder 3"/>
-          <p:cNvSpPr>
-            <a:spLocks noGrp="1"/>
-          </p:cNvSpPr>
-          <p:nvPr>
-            <p:ph type="sldNum" idx="5" sz="quarter"/>
-          </p:nvPr>
-        </p:nvSpPr>
-        <p:spPr/>
-      </p:sp>
-    </p:spTree>
-  </p:cSld>
-  <p:clrMapOvr>
-    <a:masterClrMapping/>
-  </p:clrMapOvr>
-</p:notes>
-</file>
-
-<file path=ppt/notesSlides/notesSlide3.xml><?xml version="1.0" encoding="utf-8"?>
-<p:notes xmlns:a="http://schemas.openxmlformats.org/drawingml/2006/main" xmlns:p="http://schemas.openxmlformats.org/presentationml/2006/main" xmlns:r="http://schemas.openxmlformats.org/officeDocument/2006/relationships">
-  <p:cSld>
-    <p:spTree>
-      <p:nvGrpSpPr>
-        <p:cNvPr id="1" name=""/>
-        <p:cNvGrpSpPr/>
-        <p:nvPr/>
-      </p:nvGrpSpPr>
-      <p:grpSpPr>
-        <a:xfrm>
-          <a:off x="0" y="0"/>
-          <a:ext cx="0" cy="0"/>
-          <a:chOff x="0" y="0"/>
-          <a:chExt cx="0" cy="0"/>
-        </a:xfrm>
-      </p:grpSpPr>
-      <p:sp>
-        <p:nvSpPr>
-          <p:cNvPr id="2" name="Slide Image Placeholder 1"/>
-          <p:cNvSpPr>
-            <a:spLocks noGrp="1"/>
-          </p:cNvSpPr>
-          <p:nvPr>
-            <p:ph type="sldImg" idx="2"/>
-          </p:nvPr>
-        </p:nvSpPr>
-        <p:spPr/>
-      </p:sp>
-      <p:sp>
-        <p:nvSpPr>
-          <p:cNvPr id="3" name="Notes Placeholder 2"/>
-          <p:cNvSpPr>
-            <a:spLocks noGrp="1"/>
-          </p:cNvSpPr>
-          <p:nvPr>
-            <p:ph type="body" idx="3" sz="quarter"/>
-          </p:nvPr>
-        </p:nvSpPr>
-        <p:spPr/>
-        <p:txBody>
-          <a:bodyPr/>
-          <a:lstStyle/>
-          <a:p>
-            <a:r>
-              <a:t>Unilever MAT share of noodles is ~0.06% because the SKUs have one month of sales. Do not read June share as a 12-month position.</a:t>
-            </a:r>
-          </a:p>
-        </p:txBody>
-      </p:sp>
-      <p:sp>
-        <p:nvSpPr>
-          <p:cNvPr id="4" name="Slide Number Placeholder 3"/>
-          <p:cNvSpPr>
-            <a:spLocks noGrp="1"/>
-          </p:cNvSpPr>
-          <p:nvPr>
-            <p:ph type="sldNum" idx="5" sz="quarter"/>
-          </p:nvPr>
-        </p:nvSpPr>
-        <p:spPr/>
-      </p:sp>
-    </p:spTree>
-  </p:cSld>
-  <p:clrMapOvr>
-    <a:masterClrMapping/>
-  </p:clrMapOvr>
-</p:notes>
 </file>
 
 <file path=ppt/slideLayouts/slideLayout1.xml><?xml version="1.0" encoding="utf-8"?>
@@ -3650,6 +3093,618 @@
         <p:nvPr/>
       </p:nvGrpSpPr>
       <p:grpSpPr/>
+      <p:pic>
+        <p:nvPicPr>
+          <p:cNvPr id="2" name="Picture 1" descr="title_bg.png"/>
+          <p:cNvPicPr>
+            <a:picLocks noChangeAspect="1"/>
+          </p:cNvPicPr>
+          <p:nvPr/>
+        </p:nvPicPr>
+        <p:blipFill>
+          <a:blip r:embed="rId2"/>
+          <a:stretch>
+            <a:fillRect/>
+          </a:stretch>
+        </p:blipFill>
+        <p:spPr>
+          <a:xfrm>
+            <a:off x="0" y="0"/>
+            <a:ext cx="12191695" cy="6858000"/>
+          </a:xfrm>
+          <a:prstGeom prst="rect">
+            <a:avLst/>
+          </a:prstGeom>
+        </p:spPr>
+      </p:pic>
+      <p:pic>
+        <p:nvPicPr>
+          <p:cNvPr id="3" name="Picture 2" descr="logo_white.png"/>
+          <p:cNvPicPr>
+            <a:picLocks noChangeAspect="1"/>
+          </p:cNvPicPr>
+          <p:nvPr/>
+        </p:nvPicPr>
+        <p:blipFill>
+          <a:blip r:embed="rId3"/>
+          <a:stretch>
+            <a:fillRect/>
+          </a:stretch>
+        </p:blipFill>
+        <p:spPr>
+          <a:xfrm>
+            <a:off x="384048" y="384048"/>
+            <a:ext cx="2331720" cy="713232"/>
+          </a:xfrm>
+          <a:prstGeom prst="rect">
+            <a:avLst/>
+          </a:prstGeom>
+        </p:spPr>
+      </p:pic>
+      <p:sp>
+        <p:nvSpPr>
+          <p:cNvPr id="4" name="TextBox 3"/>
+          <p:cNvSpPr txBox="1"/>
+          <p:nvPr/>
+        </p:nvSpPr>
+        <p:spPr>
+          <a:xfrm>
+            <a:off x="411480" y="2148840"/>
+            <a:ext cx="5852160" cy="777240"/>
+          </a:xfrm>
+          <a:prstGeom prst="rect">
+            <a:avLst/>
+          </a:prstGeom>
+          <a:noFill/>
+        </p:spPr>
+        <p:txBody>
+          <a:bodyPr wrap="square" anchor="t"/>
+          <a:lstStyle/>
+          <a:p>
+            <a:pPr algn="l"/>
+            <a:r>
+              <a:rPr sz="3600" b="1">
+                <a:solidFill>
+                  <a:srgbClr val="FFFFFF"/>
+                </a:solidFill>
+                <a:latin typeface="Calibri"/>
+              </a:rPr>
+              <a:t>Unilever Presentation</a:t>
+            </a:r>
+          </a:p>
+        </p:txBody>
+      </p:sp>
+      <p:sp>
+        <p:nvSpPr>
+          <p:cNvPr id="5" name="TextBox 4"/>
+          <p:cNvSpPr txBox="1"/>
+          <p:nvPr/>
+        </p:nvSpPr>
+        <p:spPr>
+          <a:xfrm>
+            <a:off x="411480" y="2926080"/>
+            <a:ext cx="5852160" cy="365760"/>
+          </a:xfrm>
+          <a:prstGeom prst="rect">
+            <a:avLst/>
+          </a:prstGeom>
+          <a:noFill/>
+        </p:spPr>
+        <p:txBody>
+          <a:bodyPr wrap="square" anchor="t"/>
+          <a:lstStyle/>
+          <a:p>
+            <a:pPr algn="l"/>
+            <a:r>
+              <a:rPr sz="1800" b="0">
+                <a:solidFill>
+                  <a:srgbClr val="FFFFFF"/>
+                </a:solidFill>
+                <a:latin typeface="Calibri"/>
+              </a:rPr>
+              <a:t>Pasta &amp; Noodles Category Review</a:t>
+            </a:r>
+          </a:p>
+        </p:txBody>
+      </p:sp>
+      <p:sp>
+        <p:nvSpPr>
+          <p:cNvPr id="6" name="TextBox 5"/>
+          <p:cNvSpPr txBox="1"/>
+          <p:nvPr/>
+        </p:nvSpPr>
+        <p:spPr>
+          <a:xfrm>
+            <a:off x="411480" y="3310128"/>
+            <a:ext cx="5852160" cy="292608"/>
+          </a:xfrm>
+          <a:prstGeom prst="rect">
+            <a:avLst/>
+          </a:prstGeom>
+          <a:noFill/>
+        </p:spPr>
+        <p:txBody>
+          <a:bodyPr wrap="square" anchor="t"/>
+          <a:lstStyle/>
+          <a:p>
+            <a:pPr algn="l"/>
+            <a:r>
+              <a:rPr sz="1400" b="0">
+                <a:solidFill>
+                  <a:srgbClr val="00B8F0"/>
+                </a:solidFill>
+                <a:latin typeface="Calibri"/>
+              </a:rPr>
+              <a:t>South Africa  |  12 months to June 2026</a:t>
+            </a:r>
+          </a:p>
+        </p:txBody>
+      </p:sp>
+      <p:sp>
+        <p:nvSpPr>
+          <p:cNvPr id="7" name="TextBox 6"/>
+          <p:cNvSpPr txBox="1"/>
+          <p:nvPr/>
+        </p:nvSpPr>
+        <p:spPr>
+          <a:xfrm>
+            <a:off x="411480" y="5989320"/>
+            <a:ext cx="5029200" cy="256032"/>
+          </a:xfrm>
+          <a:prstGeom prst="rect">
+            <a:avLst/>
+          </a:prstGeom>
+          <a:noFill/>
+        </p:spPr>
+        <p:txBody>
+          <a:bodyPr wrap="square" anchor="t"/>
+          <a:lstStyle/>
+          <a:p>
+            <a:pPr algn="l"/>
+            <a:r>
+              <a:rPr sz="1300" b="1">
+                <a:solidFill>
+                  <a:srgbClr val="88C040"/>
+                </a:solidFill>
+                <a:latin typeface="Calibri"/>
+              </a:rPr>
+              <a:t>Updated: 18/08/2026</a:t>
+            </a:r>
+          </a:p>
+        </p:txBody>
+      </p:sp>
+      <p:sp>
+        <p:nvSpPr>
+          <p:cNvPr id="8" name="TextBox 7"/>
+          <p:cNvSpPr txBox="1"/>
+          <p:nvPr/>
+        </p:nvSpPr>
+        <p:spPr>
+          <a:xfrm>
+            <a:off x="411480" y="6510528"/>
+            <a:ext cx="5029200" cy="201168"/>
+          </a:xfrm>
+          <a:prstGeom prst="rect">
+            <a:avLst/>
+          </a:prstGeom>
+          <a:noFill/>
+        </p:spPr>
+        <p:txBody>
+          <a:bodyPr wrap="square" anchor="t"/>
+          <a:lstStyle/>
+          <a:p>
+            <a:pPr algn="l"/>
+            <a:r>
+              <a:rPr sz="1000" b="0">
+                <a:solidFill>
+                  <a:srgbClr val="FFFFFF"/>
+                </a:solidFill>
+                <a:latin typeface="Calibri"/>
+              </a:rPr>
+              <a:t>A SMOLLAN COMPANY</a:t>
+            </a:r>
+          </a:p>
+        </p:txBody>
+      </p:sp>
+    </p:spTree>
+  </p:cSld>
+  <p:clrMapOvr>
+    <a:masterClrMapping/>
+  </p:clrMapOvr>
+</p:sld>
+</file>
+
+<file path=ppt/slides/slide2.xml><?xml version="1.0" encoding="utf-8"?>
+<p:sld xmlns:a="http://schemas.openxmlformats.org/drawingml/2006/main" xmlns:p="http://schemas.openxmlformats.org/presentationml/2006/main" xmlns:r="http://schemas.openxmlformats.org/officeDocument/2006/relationships">
+  <p:cSld>
+    <p:spTree>
+      <p:nvGrpSpPr>
+        <p:cNvPr id="1" name=""/>
+        <p:cNvGrpSpPr/>
+        <p:nvPr/>
+      </p:nvGrpSpPr>
+      <p:grpSpPr/>
+      <p:pic>
+        <p:nvPicPr>
+          <p:cNvPr id="2" name="Picture 1" descr="agenda_bg.png"/>
+          <p:cNvPicPr>
+            <a:picLocks noChangeAspect="1"/>
+          </p:cNvPicPr>
+          <p:nvPr/>
+        </p:nvPicPr>
+        <p:blipFill>
+          <a:blip r:embed="rId2"/>
+          <a:stretch>
+            <a:fillRect/>
+          </a:stretch>
+        </p:blipFill>
+        <p:spPr>
+          <a:xfrm>
+            <a:off x="0" y="0"/>
+            <a:ext cx="12191695" cy="6858000"/>
+          </a:xfrm>
+          <a:prstGeom prst="rect">
+            <a:avLst/>
+          </a:prstGeom>
+        </p:spPr>
+      </p:pic>
+      <p:pic>
+        <p:nvPicPr>
+          <p:cNvPr id="3" name="Picture 2" descr="logo_white.png"/>
+          <p:cNvPicPr>
+            <a:picLocks noChangeAspect="1"/>
+          </p:cNvPicPr>
+          <p:nvPr/>
+        </p:nvPicPr>
+        <p:blipFill>
+          <a:blip r:embed="rId3"/>
+          <a:stretch>
+            <a:fillRect/>
+          </a:stretch>
+        </p:blipFill>
+        <p:spPr>
+          <a:xfrm>
+            <a:off x="384048" y="256032"/>
+            <a:ext cx="1965960" cy="585216"/>
+          </a:xfrm>
+          <a:prstGeom prst="rect">
+            <a:avLst/>
+          </a:prstGeom>
+        </p:spPr>
+      </p:pic>
+      <p:sp>
+        <p:nvSpPr>
+          <p:cNvPr id="4" name="TextBox 3"/>
+          <p:cNvSpPr txBox="1"/>
+          <p:nvPr/>
+        </p:nvSpPr>
+        <p:spPr>
+          <a:xfrm>
+            <a:off x="411480" y="1005840"/>
+            <a:ext cx="6949440" cy="384048"/>
+          </a:xfrm>
+          <a:prstGeom prst="rect">
+            <a:avLst/>
+          </a:prstGeom>
+          <a:noFill/>
+        </p:spPr>
+        <p:txBody>
+          <a:bodyPr wrap="square" anchor="t"/>
+          <a:lstStyle/>
+          <a:p>
+            <a:pPr algn="l"/>
+            <a:r>
+              <a:rPr sz="2800" b="1">
+                <a:solidFill>
+                  <a:srgbClr val="FFFFFF"/>
+                </a:solidFill>
+                <a:latin typeface="Calibri"/>
+              </a:rPr>
+              <a:t>AGENDA -</a:t>
+            </a:r>
+          </a:p>
+        </p:txBody>
+      </p:sp>
+      <p:sp>
+        <p:nvSpPr>
+          <p:cNvPr id="5" name="TextBox 4"/>
+          <p:cNvSpPr txBox="1"/>
+          <p:nvPr/>
+        </p:nvSpPr>
+        <p:spPr>
+          <a:xfrm>
+            <a:off x="411480" y="1389888"/>
+            <a:ext cx="6949440" cy="292608"/>
+          </a:xfrm>
+          <a:prstGeom prst="rect">
+            <a:avLst/>
+          </a:prstGeom>
+          <a:noFill/>
+        </p:spPr>
+        <p:txBody>
+          <a:bodyPr wrap="square" anchor="t"/>
+          <a:lstStyle/>
+          <a:p>
+            <a:pPr algn="l"/>
+            <a:r>
+              <a:rPr sz="1600" b="0">
+                <a:solidFill>
+                  <a:srgbClr val="FFFFFF"/>
+                </a:solidFill>
+                <a:latin typeface="Calibri"/>
+              </a:rPr>
+              <a:t>Key business questions from the brief</a:t>
+            </a:r>
+          </a:p>
+        </p:txBody>
+      </p:sp>
+      <p:sp>
+        <p:nvSpPr>
+          <p:cNvPr id="6" name="TextBox 5"/>
+          <p:cNvSpPr txBox="1"/>
+          <p:nvPr/>
+        </p:nvSpPr>
+        <p:spPr>
+          <a:xfrm>
+            <a:off x="411480" y="1737360"/>
+            <a:ext cx="6949440" cy="256032"/>
+          </a:xfrm>
+          <a:prstGeom prst="rect">
+            <a:avLst/>
+          </a:prstGeom>
+          <a:noFill/>
+        </p:spPr>
+        <p:txBody>
+          <a:bodyPr wrap="square" anchor="t"/>
+          <a:lstStyle/>
+          <a:p>
+            <a:pPr algn="l"/>
+            <a:r>
+              <a:rPr sz="1300" b="0">
+                <a:solidFill>
+                  <a:srgbClr val="D6EEF8"/>
+                </a:solidFill>
+                <a:latin typeface="Calibri"/>
+              </a:rPr>
+              <a:t>Primary analysis: 12 months Jul 25–Jun 26  ·  latest month Jun 26</a:t>
+            </a:r>
+          </a:p>
+        </p:txBody>
+      </p:sp>
+      <p:sp>
+        <p:nvSpPr>
+          <p:cNvPr id="7" name="TextBox 6"/>
+          <p:cNvSpPr txBox="1"/>
+          <p:nvPr/>
+        </p:nvSpPr>
+        <p:spPr>
+          <a:xfrm>
+            <a:off x="411480" y="2148840"/>
+            <a:ext cx="7040880" cy="4023360"/>
+          </a:xfrm>
+          <a:prstGeom prst="rect">
+            <a:avLst/>
+          </a:prstGeom>
+          <a:noFill/>
+        </p:spPr>
+        <p:txBody>
+          <a:bodyPr wrap="square">
+            <a:spAutoFit/>
+          </a:bodyPr>
+          <a:lstStyle/>
+          <a:p>
+            <a:pPr>
+              <a:spcAft>
+                <a:spcPts val="200"/>
+              </a:spcAft>
+            </a:pPr>
+            <a:r>
+              <a:rPr sz="1600" b="1">
+                <a:solidFill>
+                  <a:srgbClr val="FFFFFF"/>
+                </a:solidFill>
+                <a:latin typeface="Calibri"/>
+              </a:rPr>
+              <a:t>01  —  Category growth</a:t>
+            </a:r>
+          </a:p>
+          <a:p>
+            <a:pPr>
+              <a:spcAft>
+                <a:spcPts val="1200"/>
+              </a:spcAft>
+            </a:pPr>
+            <a:r>
+              <a:rPr sz="1300" b="0">
+                <a:solidFill>
+                  <a:srgbClr val="D6EEF8"/>
+                </a:solidFill>
+                <a:latin typeface="Calibri"/>
+              </a:rPr>
+              <a:t>Where is the Pasta value / volume opportunity?</a:t>
+            </a:r>
+          </a:p>
+          <a:p>
+            <a:pPr>
+              <a:spcAft>
+                <a:spcPts val="200"/>
+              </a:spcAft>
+            </a:pPr>
+            <a:r>
+              <a:rPr sz="1600" b="1">
+                <a:solidFill>
+                  <a:srgbClr val="FFFFFF"/>
+                </a:solidFill>
+                <a:latin typeface="Calibri"/>
+              </a:rPr>
+              <a:t>02  —  Key players</a:t>
+            </a:r>
+          </a:p>
+          <a:p>
+            <a:pPr>
+              <a:spcAft>
+                <a:spcPts val="1200"/>
+              </a:spcAft>
+            </a:pPr>
+            <a:r>
+              <a:rPr sz="1300" b="0">
+                <a:solidFill>
+                  <a:srgbClr val="D6EEF8"/>
+                </a:solidFill>
+                <a:latin typeface="Calibri"/>
+              </a:rPr>
+              <a:t>Who plays in Pasta and Noodles, and who is winning or losing?</a:t>
+            </a:r>
+          </a:p>
+          <a:p>
+            <a:pPr>
+              <a:spcAft>
+                <a:spcPts val="200"/>
+              </a:spcAft>
+            </a:pPr>
+            <a:r>
+              <a:rPr sz="1600" b="1">
+                <a:solidFill>
+                  <a:srgbClr val="FFFFFF"/>
+                </a:solidFill>
+                <a:latin typeface="Calibri"/>
+              </a:rPr>
+              <a:t>03  —  Pack &amp; price</a:t>
+            </a:r>
+          </a:p>
+          <a:p>
+            <a:pPr>
+              <a:spcAft>
+                <a:spcPts val="1200"/>
+              </a:spcAft>
+            </a:pPr>
+            <a:r>
+              <a:rPr sz="1300" b="0">
+                <a:solidFill>
+                  <a:srgbClr val="D6EEF8"/>
+                </a:solidFill>
+                <a:latin typeface="Calibri"/>
+              </a:rPr>
+              <a:t>What is the Noodles price architecture?</a:t>
+            </a:r>
+          </a:p>
+          <a:p>
+            <a:pPr>
+              <a:spcAft>
+                <a:spcPts val="200"/>
+              </a:spcAft>
+            </a:pPr>
+            <a:r>
+              <a:rPr sz="1600" b="1">
+                <a:solidFill>
+                  <a:srgbClr val="FFFFFF"/>
+                </a:solidFill>
+                <a:latin typeface="Calibri"/>
+              </a:rPr>
+              <a:t>04  —  Unilever position</a:t>
+            </a:r>
+          </a:p>
+          <a:p>
+            <a:pPr>
+              <a:spcAft>
+                <a:spcPts val="1200"/>
+              </a:spcAft>
+            </a:pPr>
+            <a:r>
+              <a:rPr sz="1300" b="0">
+                <a:solidFill>
+                  <a:srgbClr val="D6EEF8"/>
+                </a:solidFill>
+                <a:latin typeface="Calibri"/>
+              </a:rPr>
+              <a:t>Where do Knorr Pasta Pots sit versus competing SKUs?</a:t>
+            </a:r>
+          </a:p>
+          <a:p>
+            <a:pPr>
+              <a:spcAft>
+                <a:spcPts val="200"/>
+              </a:spcAft>
+            </a:pPr>
+            <a:r>
+              <a:rPr sz="1600" b="1">
+                <a:solidFill>
+                  <a:srgbClr val="FFFFFF"/>
+                </a:solidFill>
+                <a:latin typeface="Calibri"/>
+              </a:rPr>
+              <a:t>05  —  Commercial action</a:t>
+            </a:r>
+          </a:p>
+          <a:p>
+            <a:pPr>
+              <a:spcAft>
+                <a:spcPts val="1200"/>
+              </a:spcAft>
+            </a:pPr>
+            <a:r>
+              <a:rPr sz="1300" b="0">
+                <a:solidFill>
+                  <a:srgbClr val="D6EEF8"/>
+                </a:solidFill>
+                <a:latin typeface="Calibri"/>
+              </a:rPr>
+              <a:t>What should Unilever Protect, Watch and Test?</a:t>
+            </a:r>
+          </a:p>
+        </p:txBody>
+      </p:sp>
+      <p:sp>
+        <p:nvSpPr>
+          <p:cNvPr id="8" name="TextBox 7"/>
+          <p:cNvSpPr txBox="1"/>
+          <p:nvPr/>
+        </p:nvSpPr>
+        <p:spPr>
+          <a:xfrm>
+            <a:off x="411480" y="6510528"/>
+            <a:ext cx="5029200" cy="201168"/>
+          </a:xfrm>
+          <a:prstGeom prst="rect">
+            <a:avLst/>
+          </a:prstGeom>
+          <a:noFill/>
+        </p:spPr>
+        <p:txBody>
+          <a:bodyPr wrap="square" anchor="t"/>
+          <a:lstStyle/>
+          <a:p>
+            <a:pPr algn="l"/>
+            <a:r>
+              <a:rPr sz="1000" b="0">
+                <a:solidFill>
+                  <a:srgbClr val="FFFFFF"/>
+                </a:solidFill>
+                <a:latin typeface="Calibri"/>
+              </a:rPr>
+              <a:t>A SMOLLAN COMPANY</a:t>
+            </a:r>
+          </a:p>
+        </p:txBody>
+      </p:sp>
+    </p:spTree>
+  </p:cSld>
+  <p:clrMapOvr>
+    <a:masterClrMapping/>
+  </p:clrMapOvr>
+</p:sld>
+</file>
+
+<file path=ppt/slides/slide3.xml><?xml version="1.0" encoding="utf-8"?>
+<p:sld xmlns:a="http://schemas.openxmlformats.org/drawingml/2006/main" xmlns:p="http://schemas.openxmlformats.org/presentationml/2006/main" xmlns:r="http://schemas.openxmlformats.org/officeDocument/2006/relationships">
+  <p:cSld>
+    <p:spTree>
+      <p:nvGrpSpPr>
+        <p:cNvPr id="1" name=""/>
+        <p:cNvGrpSpPr/>
+        <p:nvPr/>
+      </p:nvGrpSpPr>
+      <p:grpSpPr/>
       <p:sp>
         <p:nvSpPr>
           <p:cNvPr id="2" name="Rectangle 1"/>
@@ -3659,13 +3714,13 @@
         <p:spPr>
           <a:xfrm>
             <a:off x="0" y="0"/>
-            <a:ext cx="12191695" cy="804672"/>
+            <a:ext cx="12191695" cy="6858000"/>
           </a:xfrm>
           <a:prstGeom prst="rect">
             <a:avLst/>
           </a:prstGeom>
           <a:solidFill>
-            <a:srgbClr val="0B2545"/>
+            <a:srgbClr val="EEF3F6"/>
           </a:solidFill>
           <a:ln>
             <a:noFill/>
@@ -3693,95 +3748,86 @@
           </a:p>
         </p:txBody>
       </p:sp>
-      <p:sp>
-        <p:nvSpPr>
-          <p:cNvPr id="3" name="TextBox 2"/>
-          <p:cNvSpPr txBox="1"/>
-          <p:nvPr/>
-        </p:nvSpPr>
-        <p:spPr>
-          <a:xfrm>
-            <a:off x="347472" y="91440"/>
-            <a:ext cx="11430000" cy="365760"/>
+      <p:pic>
+        <p:nvPicPr>
+          <p:cNvPr id="3" name="Picture 2" descr="logo_content.png"/>
+          <p:cNvPicPr>
+            <a:picLocks noChangeAspect="1"/>
+          </p:cNvPicPr>
+          <p:nvPr/>
+        </p:nvPicPr>
+        <p:blipFill>
+          <a:blip r:embed="rId2"/>
+          <a:stretch>
+            <a:fillRect/>
+          </a:stretch>
+        </p:blipFill>
+        <p:spPr>
+          <a:xfrm>
+            <a:off x="256032" y="146304"/>
+            <a:ext cx="1691640" cy="475488"/>
           </a:xfrm>
           <a:prstGeom prst="rect">
             <a:avLst/>
           </a:prstGeom>
+        </p:spPr>
+      </p:pic>
+      <p:sp>
+        <p:nvSpPr>
+          <p:cNvPr id="4" name="TextBox 3"/>
+          <p:cNvSpPr txBox="1"/>
+          <p:nvPr/>
+        </p:nvSpPr>
+        <p:spPr>
+          <a:xfrm>
+            <a:off x="2103120" y="164592"/>
+            <a:ext cx="9784080" cy="384048"/>
+          </a:xfrm>
+          <a:prstGeom prst="rect">
+            <a:avLst/>
+          </a:prstGeom>
           <a:noFill/>
         </p:spPr>
         <p:txBody>
-          <a:bodyPr wrap="square">
-            <a:spAutoFit/>
-          </a:bodyPr>
+          <a:bodyPr wrap="square" anchor="t"/>
           <a:lstStyle/>
           <a:p>
             <a:pPr algn="l"/>
             <a:r>
               <a:rPr sz="2200" b="1">
                 <a:solidFill>
-                  <a:srgbClr val="FFFFFF"/>
+                  <a:srgbClr val="1A1A1A"/>
                 </a:solidFill>
                 <a:latin typeface="Calibri"/>
               </a:rPr>
-              <a:t>Pasta category: noodles now run the shop</a:t>
-            </a:r>
-          </a:p>
-        </p:txBody>
-      </p:sp>
-      <p:sp>
-        <p:nvSpPr>
-          <p:cNvPr id="4" name="TextBox 3"/>
-          <p:cNvSpPr txBox="1"/>
-          <p:nvPr/>
-        </p:nvSpPr>
-        <p:spPr>
-          <a:xfrm>
-            <a:off x="347472" y="457200"/>
-            <a:ext cx="11430000" cy="274320"/>
-          </a:xfrm>
-          <a:prstGeom prst="rect">
-            <a:avLst/>
-          </a:prstGeom>
-          <a:noFill/>
-        </p:spPr>
-        <p:txBody>
-          <a:bodyPr wrap="square">
-            <a:spAutoFit/>
-          </a:bodyPr>
-          <a:lstStyle/>
-          <a:p>
-            <a:pPr algn="l"/>
-            <a:r>
-              <a:rPr sz="1100" b="0">
-                <a:solidFill>
-                  <a:srgbClr val="C9D6E3"/>
-                </a:solidFill>
-                <a:latin typeface="Calibri"/>
-              </a:rPr>
-              <a:t>South Africa  ·  12 months to Jun 26  ·  All manufacturers</a:t>
-            </a:r>
-          </a:p>
-        </p:txBody>
-      </p:sp>
-      <p:sp>
-        <p:nvSpPr>
-          <p:cNvPr id="5" name="Rectangle 4"/>
+              <a:t>Pasta category - Key market insights</a:t>
+            </a:r>
+          </a:p>
+        </p:txBody>
+      </p:sp>
+      <p:sp>
+        <p:nvSpPr>
+          <p:cNvPr id="5" name="Rounded Rectangle 4"/>
           <p:cNvSpPr/>
           <p:nvPr/>
         </p:nvSpPr>
         <p:spPr>
           <a:xfrm>
-            <a:off x="0" y="6601968"/>
-            <a:ext cx="12191695" cy="256032"/>
-          </a:xfrm>
-          <a:prstGeom prst="rect">
-            <a:avLst/>
+            <a:off x="256032" y="713232"/>
+            <a:ext cx="11667744" cy="658368"/>
+          </a:xfrm>
+          <a:prstGeom prst="roundRect">
+            <a:avLst>
+              <a:gd name="adj" fmla="val 8000"/>
+            </a:avLst>
           </a:prstGeom>
           <a:solidFill>
-            <a:srgbClr val="0B2545"/>
+            <a:srgbClr val="FFFFFF"/>
           </a:solidFill>
-          <a:ln>
-            <a:noFill/>
+          <a:ln w="12700">
+            <a:solidFill>
+              <a:srgbClr val="D5DEE6"/>
+            </a:solidFill>
           </a:ln>
         </p:spPr>
         <p:style>
@@ -3814,8 +3860,8 @@
         </p:nvSpPr>
         <p:spPr>
           <a:xfrm>
-            <a:off x="347472" y="6620256"/>
-            <a:ext cx="11521440" cy="201168"/>
+            <a:off x="384048" y="786384"/>
+            <a:ext cx="11411712" cy="512064"/>
           </a:xfrm>
           <a:prstGeom prst="rect">
             <a:avLst/>
@@ -3823,44 +3869,110 @@
           <a:noFill/>
         </p:spPr>
         <p:txBody>
-          <a:bodyPr wrap="square">
-            <a:spAutoFit/>
-          </a:bodyPr>
+          <a:bodyPr wrap="square" anchor="t"/>
           <a:lstStyle/>
           <a:p>
             <a:pPr algn="l"/>
             <a:r>
-              <a:rPr sz="1000" b="0">
-                <a:solidFill>
-                  <a:srgbClr val="C9D6E3"/>
+              <a:rPr sz="1300" b="0">
+                <a:solidFill>
+                  <a:srgbClr val="1A1A1A"/>
                 </a:solidFill>
                 <a:latin typeface="Calibri"/>
               </a:rPr>
-              <a:t>Source: Monthly Trended Export, South Africa Pasta, multi-retailer  ·  12 months = Jul 25–Jun 26 vs YA Jul 24–Jun 25  ·  Price = value ÷ volume (R/kg)  ·  Latest month = Jun 26</a:t>
-            </a:r>
-          </a:p>
-        </p:txBody>
-      </p:sp>
-      <p:sp>
-        <p:nvSpPr>
-          <p:cNvPr id="7" name="Rectangle 6"/>
-          <p:cNvSpPr/>
-          <p:nvPr/>
-        </p:nvSpPr>
-        <p:spPr>
-          <a:xfrm>
-            <a:off x="347472" y="950976"/>
-            <a:ext cx="2834640" cy="804672"/>
+              <a:t>Pasta is a R3.3bn category growing +5.2% in value with volume slightly down. Noodles now contribute 64% of value and are the engine of growth.</a:t>
+            </a:r>
+          </a:p>
+        </p:txBody>
+      </p:sp>
+      <p:sp>
+        <p:nvSpPr>
+          <p:cNvPr id="7" name="TextBox 6"/>
+          <p:cNvSpPr txBox="1"/>
+          <p:nvPr/>
+        </p:nvSpPr>
+        <p:spPr>
+          <a:xfrm>
+            <a:off x="256032" y="6601968"/>
+            <a:ext cx="4114800" cy="201168"/>
           </a:xfrm>
           <a:prstGeom prst="rect">
             <a:avLst/>
           </a:prstGeom>
+          <a:noFill/>
+        </p:spPr>
+        <p:txBody>
+          <a:bodyPr wrap="square" anchor="t"/>
+          <a:lstStyle/>
+          <a:p>
+            <a:pPr algn="l"/>
+            <a:r>
+              <a:rPr sz="900" b="0">
+                <a:solidFill>
+                  <a:srgbClr val="6A7A86"/>
+                </a:solidFill>
+                <a:latin typeface="Calibri"/>
+              </a:rPr>
+              <a:t>A SMOLLAN COMPANY</a:t>
+            </a:r>
+          </a:p>
+        </p:txBody>
+      </p:sp>
+      <p:sp>
+        <p:nvSpPr>
+          <p:cNvPr id="8" name="TextBox 7"/>
+          <p:cNvSpPr txBox="1"/>
+          <p:nvPr/>
+        </p:nvSpPr>
+        <p:spPr>
+          <a:xfrm>
+            <a:off x="4937760" y="6601968"/>
+            <a:ext cx="6995160" cy="201168"/>
+          </a:xfrm>
+          <a:prstGeom prst="rect">
+            <a:avLst/>
+          </a:prstGeom>
+          <a:noFill/>
+        </p:spPr>
+        <p:txBody>
+          <a:bodyPr wrap="square" anchor="t"/>
+          <a:lstStyle/>
+          <a:p>
+            <a:pPr algn="r"/>
+            <a:r>
+              <a:rPr sz="900" b="0">
+                <a:solidFill>
+                  <a:srgbClr val="6A7A86"/>
+                </a:solidFill>
+                <a:latin typeface="Calibri"/>
+              </a:rPr>
+              <a:t>EMPOWERING RETAIL PRECISION WITH DATA, SOFTWARE &amp; AI    3</a:t>
+            </a:r>
+          </a:p>
+        </p:txBody>
+      </p:sp>
+      <p:sp>
+        <p:nvSpPr>
+          <p:cNvPr id="9" name="Rounded Rectangle 8"/>
+          <p:cNvSpPr/>
+          <p:nvPr/>
+        </p:nvSpPr>
+        <p:spPr>
+          <a:xfrm>
+            <a:off x="256032" y="1499616"/>
+            <a:ext cx="5742432" cy="2331720"/>
+          </a:xfrm>
+          <a:prstGeom prst="roundRect">
+            <a:avLst>
+              <a:gd name="adj" fmla="val 8000"/>
+            </a:avLst>
+          </a:prstGeom>
           <a:solidFill>
-            <a:srgbClr val="F4F6F8"/>
+            <a:srgbClr val="FFFFFF"/>
           </a:solidFill>
-          <a:ln>
+          <a:ln w="12700">
             <a:solidFill>
-              <a:srgbClr val="D5DBE0"/>
+              <a:srgbClr val="D5DEE6"/>
             </a:solidFill>
           </a:ln>
         </p:spPr>
@@ -3888,20 +4000,20 @@
       </p:sp>
       <p:sp>
         <p:nvSpPr>
-          <p:cNvPr id="8" name="Rectangle 7"/>
+          <p:cNvPr id="10" name="Rectangle 9"/>
           <p:cNvSpPr/>
           <p:nvPr/>
         </p:nvSpPr>
         <p:spPr>
           <a:xfrm>
-            <a:off x="347472" y="950976"/>
-            <a:ext cx="64008" cy="804672"/>
+            <a:off x="256032" y="1499616"/>
+            <a:ext cx="5742432" cy="329184"/>
           </a:xfrm>
           <a:prstGeom prst="rect">
             <a:avLst/>
           </a:prstGeom>
           <a:solidFill>
-            <a:srgbClr val="1B4F8A"/>
+            <a:srgbClr val="003058"/>
           </a:solidFill>
           <a:ln>
             <a:noFill/>
@@ -3931,14 +4043,14 @@
       </p:sp>
       <p:sp>
         <p:nvSpPr>
-          <p:cNvPr id="9" name="TextBox 8"/>
+          <p:cNvPr id="11" name="TextBox 10"/>
           <p:cNvSpPr txBox="1"/>
           <p:nvPr/>
         </p:nvSpPr>
         <p:spPr>
           <a:xfrm>
-            <a:off x="493776" y="1005840"/>
-            <a:ext cx="2633472" cy="201168"/>
+            <a:off x="365760" y="1536192"/>
+            <a:ext cx="5559552" cy="256032"/>
           </a:xfrm>
           <a:prstGeom prst="rect">
             <a:avLst/>
@@ -3946,34 +4058,32 @@
           <a:noFill/>
         </p:spPr>
         <p:txBody>
-          <a:bodyPr wrap="square">
-            <a:spAutoFit/>
-          </a:bodyPr>
+          <a:bodyPr wrap="square" anchor="t"/>
           <a:lstStyle/>
           <a:p>
             <a:pPr algn="l"/>
             <a:r>
-              <a:rPr sz="1000" b="0">
-                <a:solidFill>
-                  <a:srgbClr val="5C6B73"/>
+              <a:rPr sz="1200" b="1">
+                <a:solidFill>
+                  <a:srgbClr val="FFFFFF"/>
                 </a:solidFill>
                 <a:latin typeface="Calibri"/>
               </a:rPr>
-              <a:t>12-MONTH VALUE</a:t>
-            </a:r>
-          </a:p>
-        </p:txBody>
-      </p:sp>
-      <p:sp>
-        <p:nvSpPr>
-          <p:cNvPr id="10" name="TextBox 9"/>
+              <a:t>Category growth</a:t>
+            </a:r>
+          </a:p>
+        </p:txBody>
+      </p:sp>
+      <p:sp>
+        <p:nvSpPr>
+          <p:cNvPr id="12" name="TextBox 11"/>
           <p:cNvSpPr txBox="1"/>
           <p:nvPr/>
         </p:nvSpPr>
         <p:spPr>
           <a:xfrm>
-            <a:off x="493776" y="1188720"/>
-            <a:ext cx="2633472" cy="292608"/>
+            <a:off x="384048" y="1901952"/>
+            <a:ext cx="5486400" cy="347472"/>
           </a:xfrm>
           <a:prstGeom prst="rect">
             <a:avLst/>
@@ -3981,16 +4091,14 @@
           <a:noFill/>
         </p:spPr>
         <p:txBody>
-          <a:bodyPr wrap="square">
-            <a:spAutoFit/>
-          </a:bodyPr>
+          <a:bodyPr wrap="square" anchor="t"/>
           <a:lstStyle/>
           <a:p>
             <a:pPr algn="l"/>
             <a:r>
-              <a:rPr sz="1800" b="1">
-                <a:solidFill>
-                  <a:srgbClr val="0B2545"/>
+              <a:rPr sz="2400" b="1">
+                <a:solidFill>
+                  <a:srgbClr val="003058"/>
                 </a:solidFill>
                 <a:latin typeface="Calibri"/>
               </a:rPr>
@@ -4001,14 +4109,14 @@
       </p:sp>
       <p:sp>
         <p:nvSpPr>
-          <p:cNvPr id="11" name="TextBox 10"/>
+          <p:cNvPr id="13" name="TextBox 12"/>
           <p:cNvSpPr txBox="1"/>
           <p:nvPr/>
         </p:nvSpPr>
         <p:spPr>
           <a:xfrm>
-            <a:off x="493776" y="1481328"/>
-            <a:ext cx="2633472" cy="201168"/>
+            <a:off x="384048" y="2286000"/>
+            <a:ext cx="5486400" cy="1371600"/>
           </a:xfrm>
           <a:prstGeom prst="rect">
             <a:avLst/>
@@ -4016,44 +4124,44 @@
           <a:noFill/>
         </p:spPr>
         <p:txBody>
-          <a:bodyPr wrap="square">
-            <a:spAutoFit/>
-          </a:bodyPr>
+          <a:bodyPr wrap="square" anchor="t"/>
           <a:lstStyle/>
           <a:p>
             <a:pPr algn="l"/>
             <a:r>
-              <a:rPr sz="1000" b="0">
-                <a:solidFill>
-                  <a:srgbClr val="5C6B73"/>
+              <a:rPr sz="1200" b="0">
+                <a:solidFill>
+                  <a:srgbClr val="1A1A1A"/>
                 </a:solidFill>
                 <a:latin typeface="Calibri"/>
               </a:rPr>
-              <a:t>+5.2% vs YA  ·  vol -0.7%</a:t>
-            </a:r>
-          </a:p>
-        </p:txBody>
-      </p:sp>
-      <p:sp>
-        <p:nvSpPr>
-          <p:cNvPr id="12" name="Rectangle 11"/>
+              <a:t>12-month value +5.2% vs YA. Volume -0.7%. June 2026 R337.1m, +7.7% vs Jun 25. Growth is price/mix, not more tonnes.</a:t>
+            </a:r>
+          </a:p>
+        </p:txBody>
+      </p:sp>
+      <p:sp>
+        <p:nvSpPr>
+          <p:cNvPr id="14" name="Rounded Rectangle 13"/>
           <p:cNvSpPr/>
           <p:nvPr/>
         </p:nvSpPr>
         <p:spPr>
           <a:xfrm>
-            <a:off x="3273552" y="950976"/>
-            <a:ext cx="2834640" cy="804672"/>
-          </a:xfrm>
-          <a:prstGeom prst="rect">
-            <a:avLst/>
+            <a:off x="6144768" y="1499616"/>
+            <a:ext cx="5779008" cy="2331720"/>
+          </a:xfrm>
+          <a:prstGeom prst="roundRect">
+            <a:avLst>
+              <a:gd name="adj" fmla="val 8000"/>
+            </a:avLst>
           </a:prstGeom>
           <a:solidFill>
-            <a:srgbClr val="F4F6F8"/>
+            <a:srgbClr val="FFFFFF"/>
           </a:solidFill>
-          <a:ln>
+          <a:ln w="12700">
             <a:solidFill>
-              <a:srgbClr val="D5DBE0"/>
+              <a:srgbClr val="D5DEE6"/>
             </a:solidFill>
           </a:ln>
         </p:spPr>
@@ -4081,20 +4189,20 @@
       </p:sp>
       <p:sp>
         <p:nvSpPr>
-          <p:cNvPr id="13" name="Rectangle 12"/>
+          <p:cNvPr id="15" name="Rectangle 14"/>
           <p:cNvSpPr/>
           <p:nvPr/>
         </p:nvSpPr>
         <p:spPr>
           <a:xfrm>
-            <a:off x="3273552" y="950976"/>
-            <a:ext cx="64008" cy="804672"/>
+            <a:off x="6144768" y="1499616"/>
+            <a:ext cx="5779008" cy="329184"/>
           </a:xfrm>
           <a:prstGeom prst="rect">
             <a:avLst/>
           </a:prstGeom>
           <a:solidFill>
-            <a:srgbClr val="0E7C7B"/>
+            <a:srgbClr val="003058"/>
           </a:solidFill>
           <a:ln>
             <a:noFill/>
@@ -4124,14 +4232,14 @@
       </p:sp>
       <p:sp>
         <p:nvSpPr>
-          <p:cNvPr id="14" name="TextBox 13"/>
+          <p:cNvPr id="16" name="TextBox 15"/>
           <p:cNvSpPr txBox="1"/>
           <p:nvPr/>
         </p:nvSpPr>
         <p:spPr>
           <a:xfrm>
-            <a:off x="3419856" y="1005840"/>
-            <a:ext cx="2633472" cy="201168"/>
+            <a:off x="6254496" y="1536192"/>
+            <a:ext cx="5596128" cy="256032"/>
           </a:xfrm>
           <a:prstGeom prst="rect">
             <a:avLst/>
@@ -4139,34 +4247,32 @@
           <a:noFill/>
         </p:spPr>
         <p:txBody>
-          <a:bodyPr wrap="square">
-            <a:spAutoFit/>
-          </a:bodyPr>
+          <a:bodyPr wrap="square" anchor="t"/>
           <a:lstStyle/>
           <a:p>
             <a:pPr algn="l"/>
             <a:r>
-              <a:rPr sz="1000" b="0">
-                <a:solidFill>
-                  <a:srgbClr val="5C6B73"/>
+              <a:rPr sz="1200" b="1">
+                <a:solidFill>
+                  <a:srgbClr val="FFFFFF"/>
                 </a:solidFill>
                 <a:latin typeface="Calibri"/>
               </a:rPr>
-              <a:t>JUNE 2026</a:t>
-            </a:r>
-          </a:p>
-        </p:txBody>
-      </p:sp>
-      <p:sp>
-        <p:nvSpPr>
-          <p:cNvPr id="15" name="TextBox 14"/>
+              <a:t>Noodles concentration</a:t>
+            </a:r>
+          </a:p>
+        </p:txBody>
+      </p:sp>
+      <p:sp>
+        <p:nvSpPr>
+          <p:cNvPr id="17" name="TextBox 16"/>
           <p:cNvSpPr txBox="1"/>
           <p:nvPr/>
         </p:nvSpPr>
         <p:spPr>
           <a:xfrm>
-            <a:off x="3419856" y="1188720"/>
-            <a:ext cx="2633472" cy="292608"/>
+            <a:off x="6272784" y="1901952"/>
+            <a:ext cx="5522976" cy="347472"/>
           </a:xfrm>
           <a:prstGeom prst="rect">
             <a:avLst/>
@@ -4174,34 +4280,32 @@
           <a:noFill/>
         </p:spPr>
         <p:txBody>
-          <a:bodyPr wrap="square">
-            <a:spAutoFit/>
-          </a:bodyPr>
+          <a:bodyPr wrap="square" anchor="t"/>
           <a:lstStyle/>
           <a:p>
             <a:pPr algn="l"/>
             <a:r>
-              <a:rPr sz="1800" b="1">
-                <a:solidFill>
-                  <a:srgbClr val="0B2545"/>
+              <a:rPr sz="2400" b="1">
+                <a:solidFill>
+                  <a:srgbClr val="003058"/>
                 </a:solidFill>
                 <a:latin typeface="Calibri"/>
               </a:rPr>
-              <a:t>R337.1m</a:t>
-            </a:r>
-          </a:p>
-        </p:txBody>
-      </p:sp>
-      <p:sp>
-        <p:nvSpPr>
-          <p:cNvPr id="16" name="TextBox 15"/>
+              <a:t>64%</a:t>
+            </a:r>
+          </a:p>
+        </p:txBody>
+      </p:sp>
+      <p:sp>
+        <p:nvSpPr>
+          <p:cNvPr id="18" name="TextBox 17"/>
           <p:cNvSpPr txBox="1"/>
           <p:nvPr/>
         </p:nvSpPr>
         <p:spPr>
           <a:xfrm>
-            <a:off x="3419856" y="1481328"/>
-            <a:ext cx="2633472" cy="201168"/>
+            <a:off x="6272784" y="2286000"/>
+            <a:ext cx="3904489" cy="1371600"/>
           </a:xfrm>
           <a:prstGeom prst="rect">
             <a:avLst/>
@@ -4209,44 +4313,68 @@
           <a:noFill/>
         </p:spPr>
         <p:txBody>
-          <a:bodyPr wrap="square">
-            <a:spAutoFit/>
-          </a:bodyPr>
+          <a:bodyPr wrap="square" anchor="t"/>
           <a:lstStyle/>
           <a:p>
             <a:pPr algn="l"/>
             <a:r>
-              <a:rPr sz="1000" b="0">
-                <a:solidFill>
-                  <a:srgbClr val="5C6B73"/>
+              <a:rPr sz="1200" b="0">
+                <a:solidFill>
+                  <a:srgbClr val="1A1A1A"/>
                 </a:solidFill>
                 <a:latin typeface="Calibri"/>
               </a:rPr>
-              <a:t>+7.7% vs Jun 25</a:t>
-            </a:r>
-          </a:p>
-        </p:txBody>
-      </p:sp>
-      <p:sp>
-        <p:nvSpPr>
-          <p:cNvPr id="17" name="Rectangle 16"/>
-          <p:cNvSpPr/>
-          <p:nvPr/>
-        </p:nvSpPr>
-        <p:spPr>
-          <a:xfrm>
-            <a:off x="6199632" y="950976"/>
-            <a:ext cx="2834640" cy="804672"/>
+              <a:t>Noodles is 64.4% of Pasta value, up 1.8pp vs year ago. Macaroni 21% and spaghetti 13% are dry pasta. Unilever is only in Noodles.</a:t>
+            </a:r>
+          </a:p>
+        </p:txBody>
+      </p:sp>
+      <p:pic>
+        <p:nvPicPr>
+          <p:cNvPr id="19" name="Picture 18" descr="sm_noodles_share.png"/>
+          <p:cNvPicPr>
+            <a:picLocks noChangeAspect="1"/>
+          </p:cNvPicPr>
+          <p:nvPr/>
+        </p:nvPicPr>
+        <p:blipFill>
+          <a:blip r:embed="rId3"/>
+          <a:stretch>
+            <a:fillRect/>
+          </a:stretch>
+        </p:blipFill>
+        <p:spPr>
+          <a:xfrm>
+            <a:off x="10186416" y="1938528"/>
+            <a:ext cx="1572768" cy="1572768"/>
           </a:xfrm>
           <a:prstGeom prst="rect">
             <a:avLst/>
           </a:prstGeom>
+        </p:spPr>
+      </p:pic>
+      <p:sp>
+        <p:nvSpPr>
+          <p:cNvPr id="20" name="Rounded Rectangle 19"/>
+          <p:cNvSpPr/>
+          <p:nvPr/>
+        </p:nvSpPr>
+        <p:spPr>
+          <a:xfrm>
+            <a:off x="256032" y="3950208"/>
+            <a:ext cx="5742432" cy="2468880"/>
+          </a:xfrm>
+          <a:prstGeom prst="roundRect">
+            <a:avLst>
+              <a:gd name="adj" fmla="val 8000"/>
+            </a:avLst>
+          </a:prstGeom>
           <a:solidFill>
-            <a:srgbClr val="F4F6F8"/>
+            <a:srgbClr val="FFFFFF"/>
           </a:solidFill>
-          <a:ln>
+          <a:ln w="12700">
             <a:solidFill>
-              <a:srgbClr val="D5DBE0"/>
+              <a:srgbClr val="D5DEE6"/>
             </a:solidFill>
           </a:ln>
         </p:spPr>
@@ -4274,20 +4402,20 @@
       </p:sp>
       <p:sp>
         <p:nvSpPr>
-          <p:cNvPr id="18" name="Rectangle 17"/>
+          <p:cNvPr id="21" name="Rectangle 20"/>
           <p:cNvSpPr/>
           <p:nvPr/>
         </p:nvSpPr>
         <p:spPr>
           <a:xfrm>
-            <a:off x="6199632" y="950976"/>
-            <a:ext cx="64008" cy="804672"/>
+            <a:off x="256032" y="3950208"/>
+            <a:ext cx="5742432" cy="329184"/>
           </a:xfrm>
           <a:prstGeom prst="rect">
             <a:avLst/>
           </a:prstGeom>
           <a:solidFill>
-            <a:srgbClr val="C45C26"/>
+            <a:srgbClr val="003058"/>
           </a:solidFill>
           <a:ln>
             <a:noFill/>
@@ -4317,14 +4445,14 @@
       </p:sp>
       <p:sp>
         <p:nvSpPr>
-          <p:cNvPr id="19" name="TextBox 18"/>
+          <p:cNvPr id="22" name="TextBox 21"/>
           <p:cNvSpPr txBox="1"/>
           <p:nvPr/>
         </p:nvSpPr>
         <p:spPr>
           <a:xfrm>
-            <a:off x="6345936" y="1005840"/>
-            <a:ext cx="2633472" cy="201168"/>
+            <a:off x="365760" y="3986784"/>
+            <a:ext cx="5559552" cy="256032"/>
           </a:xfrm>
           <a:prstGeom prst="rect">
             <a:avLst/>
@@ -4332,34 +4460,32 @@
           <a:noFill/>
         </p:spPr>
         <p:txBody>
-          <a:bodyPr wrap="square">
-            <a:spAutoFit/>
-          </a:bodyPr>
+          <a:bodyPr wrap="square" anchor="t"/>
           <a:lstStyle/>
           <a:p>
             <a:pPr algn="l"/>
             <a:r>
-              <a:rPr sz="1000" b="0">
-                <a:solidFill>
-                  <a:srgbClr val="5C6B73"/>
+              <a:rPr sz="1200" b="1">
+                <a:solidFill>
+                  <a:srgbClr val="FFFFFF"/>
                 </a:solidFill>
                 <a:latin typeface="Calibri"/>
               </a:rPr>
-              <a:t>NOODLES SHARE</a:t>
-            </a:r>
-          </a:p>
-        </p:txBody>
-      </p:sp>
-      <p:sp>
-        <p:nvSpPr>
-          <p:cNvPr id="20" name="TextBox 19"/>
+              <a:t>Who is winning / losing</a:t>
+            </a:r>
+          </a:p>
+        </p:txBody>
+      </p:sp>
+      <p:sp>
+        <p:nvSpPr>
+          <p:cNvPr id="23" name="TextBox 22"/>
           <p:cNvSpPr txBox="1"/>
           <p:nvPr/>
         </p:nvSpPr>
         <p:spPr>
           <a:xfrm>
-            <a:off x="6345936" y="1188720"/>
-            <a:ext cx="2633472" cy="292608"/>
+            <a:off x="384048" y="4352544"/>
+            <a:ext cx="5486400" cy="347472"/>
           </a:xfrm>
           <a:prstGeom prst="rect">
             <a:avLst/>
@@ -4367,34 +4493,32 @@
           <a:noFill/>
         </p:spPr>
         <p:txBody>
-          <a:bodyPr wrap="square">
-            <a:spAutoFit/>
-          </a:bodyPr>
+          <a:bodyPr wrap="square" anchor="t"/>
           <a:lstStyle/>
           <a:p>
             <a:pPr algn="l"/>
             <a:r>
-              <a:rPr sz="1800" b="1">
-                <a:solidFill>
-                  <a:srgbClr val="0B2545"/>
+              <a:rPr sz="2400" b="1">
+                <a:solidFill>
+                  <a:srgbClr val="003058"/>
                 </a:solidFill>
                 <a:latin typeface="Calibri"/>
               </a:rPr>
-              <a:t>64% of Pasta</a:t>
-            </a:r>
-          </a:p>
-        </p:txBody>
-      </p:sp>
-      <p:sp>
-        <p:nvSpPr>
-          <p:cNvPr id="21" name="TextBox 20"/>
+              <a:t>Kellogg's +2.1pp</a:t>
+            </a:r>
+          </a:p>
+        </p:txBody>
+      </p:sp>
+      <p:sp>
+        <p:nvSpPr>
+          <p:cNvPr id="24" name="TextBox 23"/>
           <p:cNvSpPr txBox="1"/>
           <p:nvPr/>
         </p:nvSpPr>
         <p:spPr>
           <a:xfrm>
-            <a:off x="6345936" y="1481328"/>
-            <a:ext cx="2633472" cy="201168"/>
+            <a:off x="384048" y="4736592"/>
+            <a:ext cx="5486400" cy="1371600"/>
           </a:xfrm>
           <a:prstGeom prst="rect">
             <a:avLst/>
@@ -4402,44 +4526,44 @@
           <a:noFill/>
         </p:spPr>
         <p:txBody>
-          <a:bodyPr wrap="square">
-            <a:spAutoFit/>
-          </a:bodyPr>
+          <a:bodyPr wrap="square" anchor="t"/>
           <a:lstStyle/>
           <a:p>
             <a:pPr algn="l"/>
             <a:r>
-              <a:rPr sz="1000" b="0">
-                <a:solidFill>
-                  <a:srgbClr val="5C6B73"/>
+              <a:rPr sz="1200" b="0">
+                <a:solidFill>
+                  <a:srgbClr val="1A1A1A"/>
                 </a:solidFill>
                 <a:latin typeface="Calibri"/>
               </a:rPr>
-              <a:t>+1.8pp vs YA</a:t>
-            </a:r>
-          </a:p>
-        </p:txBody>
-      </p:sp>
-      <p:sp>
-        <p:nvSpPr>
-          <p:cNvPr id="22" name="Rectangle 21"/>
+              <a:t>Kellogg's 29% of Pasta (+2.1pp) and Indomie +1.4pp. Nestlé −2.7pp, Mr Pasta −2.0pp, Tiger −1.5pp. Tiger leads dry pasta; Kellogg's/Nestlé lead because Noodles is most of the value.</a:t>
+            </a:r>
+          </a:p>
+        </p:txBody>
+      </p:sp>
+      <p:sp>
+        <p:nvSpPr>
+          <p:cNvPr id="25" name="Rounded Rectangle 24"/>
           <p:cNvSpPr/>
           <p:nvPr/>
         </p:nvSpPr>
         <p:spPr>
           <a:xfrm>
-            <a:off x="9125712" y="950976"/>
-            <a:ext cx="2706624" cy="804672"/>
-          </a:xfrm>
-          <a:prstGeom prst="rect">
-            <a:avLst/>
+            <a:off x="6144768" y="3950208"/>
+            <a:ext cx="5779008" cy="2468880"/>
+          </a:xfrm>
+          <a:prstGeom prst="roundRect">
+            <a:avLst>
+              <a:gd name="adj" fmla="val 8000"/>
+            </a:avLst>
           </a:prstGeom>
           <a:solidFill>
-            <a:srgbClr val="F4F6F8"/>
+            <a:srgbClr val="FFFFFF"/>
           </a:solidFill>
-          <a:ln>
+          <a:ln w="12700">
             <a:solidFill>
-              <a:srgbClr val="D5DBE0"/>
+              <a:srgbClr val="D5DEE6"/>
             </a:solidFill>
           </a:ln>
         </p:spPr>
@@ -4467,20 +4591,20 @@
       </p:sp>
       <p:sp>
         <p:nvSpPr>
-          <p:cNvPr id="23" name="Rectangle 22"/>
+          <p:cNvPr id="26" name="Rectangle 25"/>
           <p:cNvSpPr/>
           <p:nvPr/>
         </p:nvSpPr>
         <p:spPr>
           <a:xfrm>
-            <a:off x="9125712" y="950976"/>
-            <a:ext cx="64008" cy="804672"/>
+            <a:off x="6144768" y="3950208"/>
+            <a:ext cx="5779008" cy="329184"/>
           </a:xfrm>
           <a:prstGeom prst="rect">
             <a:avLst/>
           </a:prstGeom>
           <a:solidFill>
-            <a:srgbClr val="9B2C2C"/>
+            <a:srgbClr val="003058"/>
           </a:solidFill>
           <a:ln>
             <a:noFill/>
@@ -4510,14 +4634,14 @@
       </p:sp>
       <p:sp>
         <p:nvSpPr>
-          <p:cNvPr id="24" name="TextBox 23"/>
+          <p:cNvPr id="27" name="TextBox 26"/>
           <p:cNvSpPr txBox="1"/>
           <p:nvPr/>
         </p:nvSpPr>
         <p:spPr>
           <a:xfrm>
-            <a:off x="9272016" y="1005840"/>
-            <a:ext cx="2505456" cy="201168"/>
+            <a:off x="6254496" y="3986784"/>
+            <a:ext cx="5596128" cy="256032"/>
           </a:xfrm>
           <a:prstGeom prst="rect">
             <a:avLst/>
@@ -4525,34 +4649,32 @@
           <a:noFill/>
         </p:spPr>
         <p:txBody>
-          <a:bodyPr wrap="square">
-            <a:spAutoFit/>
-          </a:bodyPr>
+          <a:bodyPr wrap="square" anchor="t"/>
           <a:lstStyle/>
           <a:p>
             <a:pPr algn="l"/>
             <a:r>
-              <a:rPr sz="1000" b="0">
-                <a:solidFill>
-                  <a:srgbClr val="5C6B73"/>
+              <a:rPr sz="1200" b="1">
+                <a:solidFill>
+                  <a:srgbClr val="FFFFFF"/>
                 </a:solidFill>
                 <a:latin typeface="Calibri"/>
               </a:rPr>
-              <a:t>CATEGORY PRICE</a:t>
-            </a:r>
-          </a:p>
-        </p:txBody>
-      </p:sp>
-      <p:sp>
-        <p:nvSpPr>
-          <p:cNvPr id="25" name="TextBox 24"/>
+              <a:t>Price architecture</a:t>
+            </a:r>
+          </a:p>
+        </p:txBody>
+      </p:sp>
+      <p:sp>
+        <p:nvSpPr>
+          <p:cNvPr id="28" name="TextBox 27"/>
           <p:cNvSpPr txBox="1"/>
           <p:nvPr/>
         </p:nvSpPr>
         <p:spPr>
           <a:xfrm>
-            <a:off x="9272016" y="1188720"/>
-            <a:ext cx="2505456" cy="292608"/>
+            <a:off x="6272784" y="4352544"/>
+            <a:ext cx="5522976" cy="347472"/>
           </a:xfrm>
           <a:prstGeom prst="rect">
             <a:avLst/>
@@ -4560,16 +4682,14 @@
           <a:noFill/>
         </p:spPr>
         <p:txBody>
-          <a:bodyPr wrap="square">
-            <a:spAutoFit/>
-          </a:bodyPr>
+          <a:bodyPr wrap="square" anchor="t"/>
           <a:lstStyle/>
           <a:p>
             <a:pPr algn="l"/>
             <a:r>
-              <a:rPr sz="1800" b="1">
-                <a:solidFill>
-                  <a:srgbClr val="0B2545"/>
+              <a:rPr sz="2400" b="1">
+                <a:solidFill>
+                  <a:srgbClr val="003058"/>
                 </a:solidFill>
                 <a:latin typeface="Calibri"/>
               </a:rPr>
@@ -4580,14 +4700,14 @@
       </p:sp>
       <p:sp>
         <p:nvSpPr>
-          <p:cNvPr id="26" name="TextBox 25"/>
+          <p:cNvPr id="29" name="TextBox 28"/>
           <p:cNvSpPr txBox="1"/>
           <p:nvPr/>
         </p:nvSpPr>
         <p:spPr>
           <a:xfrm>
-            <a:off x="9272016" y="1481328"/>
-            <a:ext cx="2505456" cy="201168"/>
+            <a:off x="6272784" y="4736592"/>
+            <a:ext cx="5522976" cy="1371600"/>
           </a:xfrm>
           <a:prstGeom prst="rect">
             <a:avLst/>
@@ -4595,62 +4715,86 @@
           <a:noFill/>
         </p:spPr>
         <p:txBody>
-          <a:bodyPr wrap="square">
-            <a:spAutoFit/>
-          </a:bodyPr>
+          <a:bodyPr wrap="square" anchor="t"/>
           <a:lstStyle/>
           <a:p>
             <a:pPr algn="l"/>
             <a:r>
-              <a:rPr sz="1000" b="0">
-                <a:solidFill>
-                  <a:srgbClr val="5C6B73"/>
+              <a:rPr sz="1200" b="0">
+                <a:solidFill>
+                  <a:srgbClr val="1A1A1A"/>
                 </a:solidFill>
                 <a:latin typeface="Calibri"/>
               </a:rPr>
-              <a:t>Noodles R96  ·  dry ~R32–35</a:t>
-            </a:r>
-          </a:p>
-        </p:txBody>
-      </p:sp>
-      <p:sp>
-        <p:nvSpPr>
-          <p:cNvPr id="27" name="TextBox 26"/>
-          <p:cNvSpPr txBox="1"/>
-          <p:nvPr/>
-        </p:nvSpPr>
-        <p:spPr>
-          <a:xfrm>
-            <a:off x="347472" y="1847088"/>
-            <a:ext cx="5669280" cy="237744"/>
+              <a:t>Category average R58/kg. Noodles R96/kg. Dry pasta (macaroni/spaghetti) ~R32–35/kg. Two different businesses sit inside one Pasta file.</a:t>
+            </a:r>
+          </a:p>
+        </p:txBody>
+      </p:sp>
+    </p:spTree>
+  </p:cSld>
+  <p:clrMapOvr>
+    <a:masterClrMapping/>
+  </p:clrMapOvr>
+</p:sld>
+</file>
+
+<file path=ppt/slides/slide4.xml><?xml version="1.0" encoding="utf-8"?>
+<p:sld xmlns:a="http://schemas.openxmlformats.org/drawingml/2006/main" xmlns:p="http://schemas.openxmlformats.org/presentationml/2006/main" xmlns:r="http://schemas.openxmlformats.org/officeDocument/2006/relationships">
+  <p:cSld>
+    <p:spTree>
+      <p:nvGrpSpPr>
+        <p:cNvPr id="1" name=""/>
+        <p:cNvGrpSpPr/>
+        <p:nvPr/>
+      </p:nvGrpSpPr>
+      <p:grpSpPr/>
+      <p:sp>
+        <p:nvSpPr>
+          <p:cNvPr id="2" name="Rectangle 1"/>
+          <p:cNvSpPr/>
+          <p:nvPr/>
+        </p:nvSpPr>
+        <p:spPr>
+          <a:xfrm>
+            <a:off x="0" y="0"/>
+            <a:ext cx="12191695" cy="6858000"/>
           </a:xfrm>
           <a:prstGeom prst="rect">
             <a:avLst/>
           </a:prstGeom>
-          <a:noFill/>
-        </p:spPr>
-        <p:txBody>
-          <a:bodyPr wrap="square">
-            <a:spAutoFit/>
-          </a:bodyPr>
-          <a:lstStyle/>
-          <a:p>
-            <a:pPr algn="l"/>
-            <a:r>
-              <a:rPr sz="1200" b="1">
-                <a:solidFill>
-                  <a:srgbClr val="0B2545"/>
-                </a:solidFill>
-                <a:latin typeface="Calibri"/>
-              </a:rPr>
-              <a:t>Value mix by subcategory (12 months)</a:t>
-            </a:r>
+          <a:solidFill>
+            <a:srgbClr val="EEF3F6"/>
+          </a:solidFill>
+          <a:ln>
+            <a:noFill/>
+          </a:ln>
+        </p:spPr>
+        <p:style>
+          <a:lnRef idx="1">
+            <a:schemeClr val="accent1"/>
+          </a:lnRef>
+          <a:fillRef idx="3">
+            <a:schemeClr val="accent1"/>
+          </a:fillRef>
+          <a:effectRef idx="2">
+            <a:schemeClr val="accent1"/>
+          </a:effectRef>
+          <a:fontRef idx="minor">
+            <a:schemeClr val="lt1"/>
+          </a:fontRef>
+        </p:style>
+        <p:txBody>
+          <a:bodyPr rtlCol="0" anchor="ctr"/>
+          <a:lstStyle/>
+          <a:p>
+            <a:pPr algn="ctr"/>
           </a:p>
         </p:txBody>
       </p:sp>
       <p:pic>
         <p:nvPicPr>
-          <p:cNvPr id="28" name="Picture 27" descr="pasta_subcat_share.png"/>
+          <p:cNvPr id="3" name="Picture 2" descr="logo_content.png"/>
           <p:cNvPicPr>
             <a:picLocks noChangeAspect="1"/>
           </p:cNvPicPr>
@@ -4664,8 +4808,8 @@
         </p:blipFill>
         <p:spPr>
           <a:xfrm>
-            <a:off x="292608" y="2084831"/>
-            <a:ext cx="5806440" cy="2240280"/>
+            <a:off x="256032" y="146304"/>
+            <a:ext cx="1691640" cy="475488"/>
           </a:xfrm>
           <a:prstGeom prst="rect">
             <a:avLst/>
@@ -4674,14 +4818,14 @@
       </p:pic>
       <p:sp>
         <p:nvSpPr>
-          <p:cNvPr id="29" name="TextBox 28"/>
+          <p:cNvPr id="4" name="TextBox 3"/>
           <p:cNvSpPr txBox="1"/>
           <p:nvPr/>
         </p:nvSpPr>
         <p:spPr>
           <a:xfrm>
-            <a:off x="6263640" y="1847088"/>
-            <a:ext cx="5577840" cy="237744"/>
+            <a:off x="2103120" y="164592"/>
+            <a:ext cx="9784080" cy="384048"/>
           </a:xfrm>
           <a:prstGeom prst="rect">
             <a:avLst/>
@@ -4689,35 +4833,269 @@
           <a:noFill/>
         </p:spPr>
         <p:txBody>
-          <a:bodyPr wrap="square">
-            <a:spAutoFit/>
-          </a:bodyPr>
+          <a:bodyPr wrap="square" anchor="t"/>
           <a:lstStyle/>
           <a:p>
             <a:pPr algn="l"/>
             <a:r>
-              <a:rPr sz="1200" b="1">
-                <a:solidFill>
-                  <a:srgbClr val="0B2545"/>
+              <a:rPr sz="2200" b="1">
+                <a:solidFill>
+                  <a:srgbClr val="1A1A1A"/>
                 </a:solidFill>
                 <a:latin typeface="Calibri"/>
               </a:rPr>
-              <a:t>Who plays, who is winning (12-month value)</a:t>
+              <a:t>Noodles - Who plays, who is winning, what price point?</a:t>
+            </a:r>
+          </a:p>
+        </p:txBody>
+      </p:sp>
+      <p:sp>
+        <p:nvSpPr>
+          <p:cNvPr id="5" name="Rounded Rectangle 4"/>
+          <p:cNvSpPr/>
+          <p:nvPr/>
+        </p:nvSpPr>
+        <p:spPr>
+          <a:xfrm>
+            <a:off x="256032" y="713232"/>
+            <a:ext cx="11667744" cy="658368"/>
+          </a:xfrm>
+          <a:prstGeom prst="roundRect">
+            <a:avLst>
+              <a:gd name="adj" fmla="val 8000"/>
+            </a:avLst>
+          </a:prstGeom>
+          <a:solidFill>
+            <a:srgbClr val="FFFFFF"/>
+          </a:solidFill>
+          <a:ln w="12700">
+            <a:solidFill>
+              <a:srgbClr val="D5DEE6"/>
+            </a:solidFill>
+          </a:ln>
+        </p:spPr>
+        <p:style>
+          <a:lnRef idx="1">
+            <a:schemeClr val="accent1"/>
+          </a:lnRef>
+          <a:fillRef idx="3">
+            <a:schemeClr val="accent1"/>
+          </a:fillRef>
+          <a:effectRef idx="2">
+            <a:schemeClr val="accent1"/>
+          </a:effectRef>
+          <a:fontRef idx="minor">
+            <a:schemeClr val="lt1"/>
+          </a:fontRef>
+        </p:style>
+        <p:txBody>
+          <a:bodyPr rtlCol="0" anchor="ctr"/>
+          <a:lstStyle/>
+          <a:p>
+            <a:pPr algn="ctr"/>
+          </a:p>
+        </p:txBody>
+      </p:sp>
+      <p:sp>
+        <p:nvSpPr>
+          <p:cNvPr id="6" name="TextBox 5"/>
+          <p:cNvSpPr txBox="1"/>
+          <p:nvPr/>
+        </p:nvSpPr>
+        <p:spPr>
+          <a:xfrm>
+            <a:off x="384048" y="786384"/>
+            <a:ext cx="11411712" cy="512064"/>
+          </a:xfrm>
+          <a:prstGeom prst="rect">
+            <a:avLst/>
+          </a:prstGeom>
+          <a:noFill/>
+        </p:spPr>
+        <p:txBody>
+          <a:bodyPr wrap="square" anchor="t"/>
+          <a:lstStyle/>
+          <a:p>
+            <a:pPr algn="l"/>
+            <a:r>
+              <a:rPr sz="1300" b="0">
+                <a:solidFill>
+                  <a:srgbClr val="1A1A1A"/>
+                </a:solidFill>
+                <a:latin typeface="Calibri"/>
+              </a:rPr>
+              <a:t>Kellogg's is taking share from Maggi. The mass market is a R5–8 sachet. Knorr Pasta Pots entered in June at ~R49 — a different occasion, not a sachet competitor.</a:t>
+            </a:r>
+          </a:p>
+        </p:txBody>
+      </p:sp>
+      <p:sp>
+        <p:nvSpPr>
+          <p:cNvPr id="7" name="TextBox 6"/>
+          <p:cNvSpPr txBox="1"/>
+          <p:nvPr/>
+        </p:nvSpPr>
+        <p:spPr>
+          <a:xfrm>
+            <a:off x="256032" y="6601968"/>
+            <a:ext cx="4114800" cy="201168"/>
+          </a:xfrm>
+          <a:prstGeom prst="rect">
+            <a:avLst/>
+          </a:prstGeom>
+          <a:noFill/>
+        </p:spPr>
+        <p:txBody>
+          <a:bodyPr wrap="square" anchor="t"/>
+          <a:lstStyle/>
+          <a:p>
+            <a:pPr algn="l"/>
+            <a:r>
+              <a:rPr sz="900" b="0">
+                <a:solidFill>
+                  <a:srgbClr val="6A7A86"/>
+                </a:solidFill>
+                <a:latin typeface="Calibri"/>
+              </a:rPr>
+              <a:t>A SMOLLAN COMPANY</a:t>
+            </a:r>
+          </a:p>
+        </p:txBody>
+      </p:sp>
+      <p:sp>
+        <p:nvSpPr>
+          <p:cNvPr id="8" name="TextBox 7"/>
+          <p:cNvSpPr txBox="1"/>
+          <p:nvPr/>
+        </p:nvSpPr>
+        <p:spPr>
+          <a:xfrm>
+            <a:off x="4937760" y="6601968"/>
+            <a:ext cx="6995160" cy="201168"/>
+          </a:xfrm>
+          <a:prstGeom prst="rect">
+            <a:avLst/>
+          </a:prstGeom>
+          <a:noFill/>
+        </p:spPr>
+        <p:txBody>
+          <a:bodyPr wrap="square" anchor="t"/>
+          <a:lstStyle/>
+          <a:p>
+            <a:pPr algn="r"/>
+            <a:r>
+              <a:rPr sz="900" b="0">
+                <a:solidFill>
+                  <a:srgbClr val="6A7A86"/>
+                </a:solidFill>
+                <a:latin typeface="Calibri"/>
+              </a:rPr>
+              <a:t>EMPOWERING RETAIL PRECISION WITH DATA, SOFTWARE &amp; AI    4</a:t>
+            </a:r>
+          </a:p>
+        </p:txBody>
+      </p:sp>
+      <p:sp>
+        <p:nvSpPr>
+          <p:cNvPr id="9" name="TextBox 8"/>
+          <p:cNvSpPr txBox="1"/>
+          <p:nvPr/>
+        </p:nvSpPr>
+        <p:spPr>
+          <a:xfrm>
+            <a:off x="292608" y="1481328"/>
+            <a:ext cx="5669280" cy="237744"/>
+          </a:xfrm>
+          <a:prstGeom prst="rect">
+            <a:avLst/>
+          </a:prstGeom>
+          <a:noFill/>
+        </p:spPr>
+        <p:txBody>
+          <a:bodyPr wrap="square" anchor="t"/>
+          <a:lstStyle/>
+          <a:p>
+            <a:pPr algn="l"/>
+            <a:r>
+              <a:rPr sz="1200" b="1">
+                <a:solidFill>
+                  <a:srgbClr val="003058"/>
+                </a:solidFill>
+                <a:latin typeface="Calibri"/>
+              </a:rPr>
+              <a:t>12-month noodles value share</a:t>
+            </a:r>
+          </a:p>
+        </p:txBody>
+      </p:sp>
+      <p:pic>
+        <p:nvPicPr>
+          <p:cNvPr id="10" name="Picture 9" descr="sm_brands.png"/>
+          <p:cNvPicPr>
+            <a:picLocks noChangeAspect="1"/>
+          </p:cNvPicPr>
+          <p:nvPr/>
+        </p:nvPicPr>
+        <p:blipFill>
+          <a:blip r:embed="rId3"/>
+          <a:stretch>
+            <a:fillRect/>
+          </a:stretch>
+        </p:blipFill>
+        <p:spPr>
+          <a:xfrm>
+            <a:off x="256032" y="1719072"/>
+            <a:ext cx="5715000" cy="2240280"/>
+          </a:xfrm>
+          <a:prstGeom prst="rect">
+            <a:avLst/>
+          </a:prstGeom>
+        </p:spPr>
+      </p:pic>
+      <p:sp>
+        <p:nvSpPr>
+          <p:cNvPr id="11" name="TextBox 10"/>
+          <p:cNvSpPr txBox="1"/>
+          <p:nvPr/>
+        </p:nvSpPr>
+        <p:spPr>
+          <a:xfrm>
+            <a:off x="6126480" y="1481328"/>
+            <a:ext cx="5760720" cy="237744"/>
+          </a:xfrm>
+          <a:prstGeom prst="rect">
+            <a:avLst/>
+          </a:prstGeom>
+          <a:noFill/>
+        </p:spPr>
+        <p:txBody>
+          <a:bodyPr wrap="square" anchor="t"/>
+          <a:lstStyle/>
+          <a:p>
+            <a:pPr algn="l"/>
+            <a:r>
+              <a:rPr sz="1200" b="1">
+                <a:solidFill>
+                  <a:srgbClr val="003058"/>
+                </a:solidFill>
+                <a:latin typeface="Calibri"/>
+              </a:rPr>
+              <a:t>Competitive scorecard</a:t>
             </a:r>
           </a:p>
         </p:txBody>
       </p:sp>
       <p:graphicFrame>
         <p:nvGraphicFramePr>
-          <p:cNvPr id="30" name="Table 29"/>
+          <p:cNvPr id="12" name="Table 11"/>
           <p:cNvGraphicFramePr>
             <a:graphicFrameLocks noGrp="1"/>
           </p:cNvGraphicFramePr>
           <p:nvPr/>
         </p:nvGraphicFramePr>
         <p:xfrm>
-          <a:off x="6263640" y="2103120"/>
-          <a:ext cx="5577840" cy="2331720"/>
+          <a:off x="6126480" y="1737360"/>
+          <a:ext cx="5779008" cy="2331720"/>
         </p:xfrm>
         <a:graphic>
           <a:graphicData uri="http://schemas.openxmlformats.org/drawingml/2006/table">
@@ -4726,13 +5104,14 @@
                 <a:tableStyleId>{5C22544A-7EE6-4342-B048-85BDC9FD1C3A}</a:tableStyleId>
               </a:tblPr>
               <a:tblGrid>
-                <a:gridCol w="1965960"/>
-                <a:gridCol w="822960"/>
+                <a:gridCol w="1234440"/>
+                <a:gridCol w="777240"/>
                 <a:gridCol w="868680"/>
-                <a:gridCol w="914400"/>
-                <a:gridCol w="1005840"/>
+                <a:gridCol w="868680"/>
+                <a:gridCol w="960120"/>
+                <a:gridCol w="1069848"/>
               </a:tblGrid>
-              <a:tr h="291465">
+              <a:tr h="259080">
                 <a:tc>
                   <a:txBody>
                     <a:bodyPr/>
@@ -4746,13 +5125,13 @@
                           </a:solidFill>
                           <a:latin typeface="Calibri"/>
                         </a:rPr>
-                        <a:t>Manufacturer</a:t>
+                        <a:t>Brand</a:t>
                       </a:r>
                     </a:p>
                   </a:txBody>
                   <a:tcPr>
                     <a:solidFill>
-                      <a:srgbClr val="0B2545"/>
+                      <a:srgbClr val="003058"/>
                     </a:solidFill>
                   </a:tcPr>
                 </a:tc>
@@ -4769,13 +5148,36 @@
                           </a:solidFill>
                           <a:latin typeface="Calibri"/>
                         </a:rPr>
-                        <a:t>Share</a:t>
+                        <a:t>12m</a:t>
                       </a:r>
                     </a:p>
                   </a:txBody>
                   <a:tcPr>
                     <a:solidFill>
-                      <a:srgbClr val="0B2545"/>
+                      <a:srgbClr val="003058"/>
+                    </a:solidFill>
+                  </a:tcPr>
+                </a:tc>
+                <a:tc>
+                  <a:txBody>
+                    <a:bodyPr/>
+                    <a:lstStyle/>
+                    <a:p>
+                      <a:pPr algn="r"/>
+                      <a:r>
+                        <a:rPr sz="1000" b="1">
+                          <a:solidFill>
+                            <a:srgbClr val="FFFFFF"/>
+                          </a:solidFill>
+                          <a:latin typeface="Calibri"/>
+                        </a:rPr>
+                        <a:t>Jun 26</a:t>
+                      </a:r>
+                    </a:p>
+                  </a:txBody>
+                  <a:tcPr>
+                    <a:solidFill>
+                      <a:srgbClr val="003058"/>
                     </a:solidFill>
                   </a:tcPr>
                 </a:tc>
@@ -4798,7 +5200,7 @@
                   </a:txBody>
                   <a:tcPr>
                     <a:solidFill>
-                      <a:srgbClr val="0B2545"/>
+                      <a:srgbClr val="003058"/>
                     </a:solidFill>
                   </a:tcPr>
                 </a:tc>
@@ -4821,7 +5223,7 @@
                   </a:txBody>
                   <a:tcPr>
                     <a:solidFill>
-                      <a:srgbClr val="0B2545"/>
+                      <a:srgbClr val="003058"/>
                     </a:solidFill>
                   </a:tcPr>
                 </a:tc>
@@ -4844,12 +5246,12 @@
                   </a:txBody>
                   <a:tcPr>
                     <a:solidFill>
-                      <a:srgbClr val="0B2545"/>
+                      <a:srgbClr val="003058"/>
                     </a:solidFill>
                   </a:tcPr>
                 </a:tc>
               </a:tr>
-              <a:tr h="291465">
+              <a:tr h="259080">
                 <a:tc>
                   <a:txBody>
                     <a:bodyPr/>
@@ -4869,7 +5271,7 @@
                   </a:txBody>
                   <a:tcPr>
                     <a:solidFill>
-                      <a:srgbClr val="F4F6F8"/>
+                      <a:srgbClr val="E6F1F8"/>
                     </a:solidFill>
                   </a:tcPr>
                 </a:tc>
@@ -4886,13 +5288,36 @@
                           </a:solidFill>
                           <a:latin typeface="Calibri"/>
                         </a:rPr>
-                        <a:t>29.4%</a:t>
+                        <a:t>45.6%</a:t>
                       </a:r>
                     </a:p>
                   </a:txBody>
                   <a:tcPr>
                     <a:solidFill>
-                      <a:srgbClr val="F4F6F8"/>
+                      <a:srgbClr val="E6F1F8"/>
+                    </a:solidFill>
+                  </a:tcPr>
+                </a:tc>
+                <a:tc>
+                  <a:txBody>
+                    <a:bodyPr/>
+                    <a:lstStyle/>
+                    <a:p>
+                      <a:pPr algn="r"/>
+                      <a:r>
+                        <a:rPr sz="1100" b="0">
+                          <a:solidFill>
+                            <a:srgbClr val="1A1A1A"/>
+                          </a:solidFill>
+                          <a:latin typeface="Calibri"/>
+                        </a:rPr>
+                        <a:t>44.3%</a:t>
+                      </a:r>
+                    </a:p>
+                  </a:txBody>
+                  <a:tcPr>
+                    <a:solidFill>
+                      <a:srgbClr val="E6F1F8"/>
                     </a:solidFill>
                   </a:tcPr>
                 </a:tc>
@@ -4909,13 +5334,13 @@
                           </a:solidFill>
                           <a:latin typeface="Calibri"/>
                         </a:rPr>
-                        <a:t>+2.1pp</a:t>
+                        <a:t>+2.0pp</a:t>
                       </a:r>
                     </a:p>
                   </a:txBody>
                   <a:tcPr>
                     <a:solidFill>
-                      <a:srgbClr val="F4F6F8"/>
+                      <a:srgbClr val="E6F1F8"/>
                     </a:solidFill>
                   </a:tcPr>
                 </a:tc>
@@ -4938,7 +5363,7 @@
                   </a:txBody>
                   <a:tcPr>
                     <a:solidFill>
-                      <a:srgbClr val="F4F6F8"/>
+                      <a:srgbClr val="E6F1F8"/>
                     </a:solidFill>
                   </a:tcPr>
                 </a:tc>
@@ -4961,2266 +5386,12 @@
                   </a:txBody>
                   <a:tcPr>
                     <a:solidFill>
-                      <a:srgbClr val="F4F6F8"/>
+                      <a:srgbClr val="E6F1F8"/>
                     </a:solidFill>
                   </a:tcPr>
                 </a:tc>
               </a:tr>
-              <a:tr h="291465">
-                <a:tc>
-                  <a:txBody>
-                    <a:bodyPr/>
-                    <a:lstStyle/>
-                    <a:p>
-                      <a:pPr algn="l"/>
-                      <a:r>
-                        <a:rPr sz="1100" b="1">
-                          <a:solidFill>
-                            <a:srgbClr val="1A1A1A"/>
-                          </a:solidFill>
-                          <a:latin typeface="Calibri"/>
-                        </a:rPr>
-                        <a:t>Nestlé</a:t>
-                      </a:r>
-                    </a:p>
-                  </a:txBody>
-                  <a:tcPr>
-                    <a:solidFill>
-                      <a:srgbClr val="FFFFFF"/>
-                    </a:solidFill>
-                  </a:tcPr>
-                </a:tc>
-                <a:tc>
-                  <a:txBody>
-                    <a:bodyPr/>
-                    <a:lstStyle/>
-                    <a:p>
-                      <a:pPr algn="r"/>
-                      <a:r>
-                        <a:rPr sz="1100" b="0">
-                          <a:solidFill>
-                            <a:srgbClr val="1A1A1A"/>
-                          </a:solidFill>
-                          <a:latin typeface="Calibri"/>
-                        </a:rPr>
-                        <a:t>18.5%</a:t>
-                      </a:r>
-                    </a:p>
-                  </a:txBody>
-                  <a:tcPr>
-                    <a:solidFill>
-                      <a:srgbClr val="FFFFFF"/>
-                    </a:solidFill>
-                  </a:tcPr>
-                </a:tc>
-                <a:tc>
-                  <a:txBody>
-                    <a:bodyPr/>
-                    <a:lstStyle/>
-                    <a:p>
-                      <a:pPr algn="r"/>
-                      <a:r>
-                        <a:rPr sz="1100" b="0">
-                          <a:solidFill>
-                            <a:srgbClr val="9B2C2C"/>
-                          </a:solidFill>
-                          <a:latin typeface="Calibri"/>
-                        </a:rPr>
-                        <a:t>-2.7pp</a:t>
-                      </a:r>
-                    </a:p>
-                  </a:txBody>
-                  <a:tcPr>
-                    <a:solidFill>
-                      <a:srgbClr val="FFFFFF"/>
-                    </a:solidFill>
-                  </a:tcPr>
-                </a:tc>
-                <a:tc>
-                  <a:txBody>
-                    <a:bodyPr/>
-                    <a:lstStyle/>
-                    <a:p>
-                      <a:pPr algn="r"/>
-                      <a:r>
-                        <a:rPr sz="1100" b="0">
-                          <a:solidFill>
-                            <a:srgbClr val="9B2C2C"/>
-                          </a:solidFill>
-                          <a:latin typeface="Calibri"/>
-                        </a:rPr>
-                        <a:t>-8.2%</a:t>
-                      </a:r>
-                    </a:p>
-                  </a:txBody>
-                  <a:tcPr>
-                    <a:solidFill>
-                      <a:srgbClr val="FFFFFF"/>
-                    </a:solidFill>
-                  </a:tcPr>
-                </a:tc>
-                <a:tc>
-                  <a:txBody>
-                    <a:bodyPr/>
-                    <a:lstStyle/>
-                    <a:p>
-                      <a:pPr algn="r"/>
-                      <a:r>
-                        <a:rPr sz="1100" b="0">
-                          <a:solidFill>
-                            <a:srgbClr val="1A1A1A"/>
-                          </a:solidFill>
-                          <a:latin typeface="Calibri"/>
-                        </a:rPr>
-                        <a:t>R100</a:t>
-                      </a:r>
-                    </a:p>
-                  </a:txBody>
-                  <a:tcPr>
-                    <a:solidFill>
-                      <a:srgbClr val="FFFFFF"/>
-                    </a:solidFill>
-                  </a:tcPr>
-                </a:tc>
-              </a:tr>
-              <a:tr h="291465">
-                <a:tc>
-                  <a:txBody>
-                    <a:bodyPr/>
-                    <a:lstStyle/>
-                    <a:p>
-                      <a:pPr algn="l"/>
-                      <a:r>
-                        <a:rPr sz="1100" b="1">
-                          <a:solidFill>
-                            <a:srgbClr val="1A1A1A"/>
-                          </a:solidFill>
-                          <a:latin typeface="Calibri"/>
-                        </a:rPr>
-                        <a:t>Tiger Brands</a:t>
-                      </a:r>
-                    </a:p>
-                  </a:txBody>
-                  <a:tcPr>
-                    <a:solidFill>
-                      <a:srgbClr val="F4F6F8"/>
-                    </a:solidFill>
-                  </a:tcPr>
-                </a:tc>
-                <a:tc>
-                  <a:txBody>
-                    <a:bodyPr/>
-                    <a:lstStyle/>
-                    <a:p>
-                      <a:pPr algn="r"/>
-                      <a:r>
-                        <a:rPr sz="1100" b="0">
-                          <a:solidFill>
-                            <a:srgbClr val="1A1A1A"/>
-                          </a:solidFill>
-                          <a:latin typeface="Calibri"/>
-                        </a:rPr>
-                        <a:t>13.8%</a:t>
-                      </a:r>
-                    </a:p>
-                  </a:txBody>
-                  <a:tcPr>
-                    <a:solidFill>
-                      <a:srgbClr val="F4F6F8"/>
-                    </a:solidFill>
-                  </a:tcPr>
-                </a:tc>
-                <a:tc>
-                  <a:txBody>
-                    <a:bodyPr/>
-                    <a:lstStyle/>
-                    <a:p>
-                      <a:pPr algn="r"/>
-                      <a:r>
-                        <a:rPr sz="1100" b="0">
-                          <a:solidFill>
-                            <a:srgbClr val="9B2C2C"/>
-                          </a:solidFill>
-                          <a:latin typeface="Calibri"/>
-                        </a:rPr>
-                        <a:t>-1.5pp</a:t>
-                      </a:r>
-                    </a:p>
-                  </a:txBody>
-                  <a:tcPr>
-                    <a:solidFill>
-                      <a:srgbClr val="F4F6F8"/>
-                    </a:solidFill>
-                  </a:tcPr>
-                </a:tc>
-                <a:tc>
-                  <a:txBody>
-                    <a:bodyPr/>
-                    <a:lstStyle/>
-                    <a:p>
-                      <a:pPr algn="r"/>
-                      <a:r>
-                        <a:rPr sz="1100" b="0">
-                          <a:solidFill>
-                            <a:srgbClr val="9B2C2C"/>
-                          </a:solidFill>
-                          <a:latin typeface="Calibri"/>
-                        </a:rPr>
-                        <a:t>-4.8%</a:t>
-                      </a:r>
-                    </a:p>
-                  </a:txBody>
-                  <a:tcPr>
-                    <a:solidFill>
-                      <a:srgbClr val="F4F6F8"/>
-                    </a:solidFill>
-                  </a:tcPr>
-                </a:tc>
-                <a:tc>
-                  <a:txBody>
-                    <a:bodyPr/>
-                    <a:lstStyle/>
-                    <a:p>
-                      <a:pPr algn="r"/>
-                      <a:r>
-                        <a:rPr sz="1100" b="0">
-                          <a:solidFill>
-                            <a:srgbClr val="1A1A1A"/>
-                          </a:solidFill>
-                          <a:latin typeface="Calibri"/>
-                        </a:rPr>
-                        <a:t>R35</a:t>
-                      </a:r>
-                    </a:p>
-                  </a:txBody>
-                  <a:tcPr>
-                    <a:solidFill>
-                      <a:srgbClr val="F4F6F8"/>
-                    </a:solidFill>
-                  </a:tcPr>
-                </a:tc>
-              </a:tr>
-              <a:tr h="291465">
-                <a:tc>
-                  <a:txBody>
-                    <a:bodyPr/>
-                    <a:lstStyle/>
-                    <a:p>
-                      <a:pPr algn="l"/>
-                      <a:r>
-                        <a:rPr sz="1100" b="1">
-                          <a:solidFill>
-                            <a:srgbClr val="1A1A1A"/>
-                          </a:solidFill>
-                          <a:latin typeface="Calibri"/>
-                        </a:rPr>
-                        <a:t>Private Label</a:t>
-                      </a:r>
-                    </a:p>
-                  </a:txBody>
-                  <a:tcPr>
-                    <a:solidFill>
-                      <a:srgbClr val="FFFFFF"/>
-                    </a:solidFill>
-                  </a:tcPr>
-                </a:tc>
-                <a:tc>
-                  <a:txBody>
-                    <a:bodyPr/>
-                    <a:lstStyle/>
-                    <a:p>
-                      <a:pPr algn="r"/>
-                      <a:r>
-                        <a:rPr sz="1100" b="0">
-                          <a:solidFill>
-                            <a:srgbClr val="1A1A1A"/>
-                          </a:solidFill>
-                          <a:latin typeface="Calibri"/>
-                        </a:rPr>
-                        <a:t>9.1%</a:t>
-                      </a:r>
-                    </a:p>
-                  </a:txBody>
-                  <a:tcPr>
-                    <a:solidFill>
-                      <a:srgbClr val="FFFFFF"/>
-                    </a:solidFill>
-                  </a:tcPr>
-                </a:tc>
-                <a:tc>
-                  <a:txBody>
-                    <a:bodyPr/>
-                    <a:lstStyle/>
-                    <a:p>
-                      <a:pPr algn="r"/>
-                      <a:r>
-                        <a:rPr sz="1100" b="0">
-                          <a:solidFill>
-                            <a:srgbClr val="1F7A4D"/>
-                          </a:solidFill>
-                          <a:latin typeface="Calibri"/>
-                        </a:rPr>
-                        <a:t>+0.0pp</a:t>
-                      </a:r>
-                    </a:p>
-                  </a:txBody>
-                  <a:tcPr>
-                    <a:solidFill>
-                      <a:srgbClr val="FFFFFF"/>
-                    </a:solidFill>
-                  </a:tcPr>
-                </a:tc>
-                <a:tc>
-                  <a:txBody>
-                    <a:bodyPr/>
-                    <a:lstStyle/>
-                    <a:p>
-                      <a:pPr algn="r"/>
-                      <a:r>
-                        <a:rPr sz="1100" b="0">
-                          <a:solidFill>
-                            <a:srgbClr val="1F7A4D"/>
-                          </a:solidFill>
-                          <a:latin typeface="Calibri"/>
-                        </a:rPr>
-                        <a:t>+5.6%</a:t>
-                      </a:r>
-                    </a:p>
-                  </a:txBody>
-                  <a:tcPr>
-                    <a:solidFill>
-                      <a:srgbClr val="FFFFFF"/>
-                    </a:solidFill>
-                  </a:tcPr>
-                </a:tc>
-                <a:tc>
-                  <a:txBody>
-                    <a:bodyPr/>
-                    <a:lstStyle/>
-                    <a:p>
-                      <a:pPr algn="r"/>
-                      <a:r>
-                        <a:rPr sz="1100" b="0">
-                          <a:solidFill>
-                            <a:srgbClr val="1A1A1A"/>
-                          </a:solidFill>
-                          <a:latin typeface="Calibri"/>
-                        </a:rPr>
-                        <a:t>R31</a:t>
-                      </a:r>
-                    </a:p>
-                  </a:txBody>
-                  <a:tcPr>
-                    <a:solidFill>
-                      <a:srgbClr val="FFFFFF"/>
-                    </a:solidFill>
-                  </a:tcPr>
-                </a:tc>
-              </a:tr>
-              <a:tr h="291465">
-                <a:tc>
-                  <a:txBody>
-                    <a:bodyPr/>
-                    <a:lstStyle/>
-                    <a:p>
-                      <a:pPr algn="l"/>
-                      <a:r>
-                        <a:rPr sz="1100" b="1">
-                          <a:solidFill>
-                            <a:srgbClr val="1A1A1A"/>
-                          </a:solidFill>
-                          <a:latin typeface="Calibri"/>
-                        </a:rPr>
-                        <a:t>Mr Pasta</a:t>
-                      </a:r>
-                    </a:p>
-                  </a:txBody>
-                  <a:tcPr>
-                    <a:solidFill>
-                      <a:srgbClr val="F4F6F8"/>
-                    </a:solidFill>
-                  </a:tcPr>
-                </a:tc>
-                <a:tc>
-                  <a:txBody>
-                    <a:bodyPr/>
-                    <a:lstStyle/>
-                    <a:p>
-                      <a:pPr algn="r"/>
-                      <a:r>
-                        <a:rPr sz="1100" b="0">
-                          <a:solidFill>
-                            <a:srgbClr val="1A1A1A"/>
-                          </a:solidFill>
-                          <a:latin typeface="Calibri"/>
-                        </a:rPr>
-                        <a:t>5.9%</a:t>
-                      </a:r>
-                    </a:p>
-                  </a:txBody>
-                  <a:tcPr>
-                    <a:solidFill>
-                      <a:srgbClr val="F4F6F8"/>
-                    </a:solidFill>
-                  </a:tcPr>
-                </a:tc>
-                <a:tc>
-                  <a:txBody>
-                    <a:bodyPr/>
-                    <a:lstStyle/>
-                    <a:p>
-                      <a:pPr algn="r"/>
-                      <a:r>
-                        <a:rPr sz="1100" b="0">
-                          <a:solidFill>
-                            <a:srgbClr val="9B2C2C"/>
-                          </a:solidFill>
-                          <a:latin typeface="Calibri"/>
-                        </a:rPr>
-                        <a:t>-2.0pp</a:t>
-                      </a:r>
-                    </a:p>
-                  </a:txBody>
-                  <a:tcPr>
-                    <a:solidFill>
-                      <a:srgbClr val="F4F6F8"/>
-                    </a:solidFill>
-                  </a:tcPr>
-                </a:tc>
-                <a:tc>
-                  <a:txBody>
-                    <a:bodyPr/>
-                    <a:lstStyle/>
-                    <a:p>
-                      <a:pPr algn="r"/>
-                      <a:r>
-                        <a:rPr sz="1100" b="0">
-                          <a:solidFill>
-                            <a:srgbClr val="9B2C2C"/>
-                          </a:solidFill>
-                          <a:latin typeface="Calibri"/>
-                        </a:rPr>
-                        <a:t>-21.6%</a:t>
-                      </a:r>
-                    </a:p>
-                  </a:txBody>
-                  <a:tcPr>
-                    <a:solidFill>
-                      <a:srgbClr val="F4F6F8"/>
-                    </a:solidFill>
-                  </a:tcPr>
-                </a:tc>
-                <a:tc>
-                  <a:txBody>
-                    <a:bodyPr/>
-                    <a:lstStyle/>
-                    <a:p>
-                      <a:pPr algn="r"/>
-                      <a:r>
-                        <a:rPr sz="1100" b="0">
-                          <a:solidFill>
-                            <a:srgbClr val="1A1A1A"/>
-                          </a:solidFill>
-                          <a:latin typeface="Calibri"/>
-                        </a:rPr>
-                        <a:t>R36</a:t>
-                      </a:r>
-                    </a:p>
-                  </a:txBody>
-                  <a:tcPr>
-                    <a:solidFill>
-                      <a:srgbClr val="F4F6F8"/>
-                    </a:solidFill>
-                  </a:tcPr>
-                </a:tc>
-              </a:tr>
-              <a:tr h="291465">
-                <a:tc>
-                  <a:txBody>
-                    <a:bodyPr/>
-                    <a:lstStyle/>
-                    <a:p>
-                      <a:pPr algn="l"/>
-                      <a:r>
-                        <a:rPr sz="1100" b="1">
-                          <a:solidFill>
-                            <a:srgbClr val="1A1A1A"/>
-                          </a:solidFill>
-                          <a:latin typeface="Calibri"/>
-                        </a:rPr>
-                        <a:t>Indofood</a:t>
-                      </a:r>
-                    </a:p>
-                  </a:txBody>
-                  <a:tcPr>
-                    <a:solidFill>
-                      <a:srgbClr val="FFFFFF"/>
-                    </a:solidFill>
-                  </a:tcPr>
-                </a:tc>
-                <a:tc>
-                  <a:txBody>
-                    <a:bodyPr/>
-                    <a:lstStyle/>
-                    <a:p>
-                      <a:pPr algn="r"/>
-                      <a:r>
-                        <a:rPr sz="1100" b="0">
-                          <a:solidFill>
-                            <a:srgbClr val="1A1A1A"/>
-                          </a:solidFill>
-                          <a:latin typeface="Calibri"/>
-                        </a:rPr>
-                        <a:t>4.4%</a:t>
-                      </a:r>
-                    </a:p>
-                  </a:txBody>
-                  <a:tcPr>
-                    <a:solidFill>
-                      <a:srgbClr val="FFFFFF"/>
-                    </a:solidFill>
-                  </a:tcPr>
-                </a:tc>
-                <a:tc>
-                  <a:txBody>
-                    <a:bodyPr/>
-                    <a:lstStyle/>
-                    <a:p>
-                      <a:pPr algn="r"/>
-                      <a:r>
-                        <a:rPr sz="1100" b="0">
-                          <a:solidFill>
-                            <a:srgbClr val="1F7A4D"/>
-                          </a:solidFill>
-                          <a:latin typeface="Calibri"/>
-                        </a:rPr>
-                        <a:t>+1.4pp</a:t>
-                      </a:r>
-                    </a:p>
-                  </a:txBody>
-                  <a:tcPr>
-                    <a:solidFill>
-                      <a:srgbClr val="FFFFFF"/>
-                    </a:solidFill>
-                  </a:tcPr>
-                </a:tc>
-                <a:tc>
-                  <a:txBody>
-                    <a:bodyPr/>
-                    <a:lstStyle/>
-                    <a:p>
-                      <a:pPr algn="r"/>
-                      <a:r>
-                        <a:rPr sz="1100" b="0">
-                          <a:solidFill>
-                            <a:srgbClr val="1F7A4D"/>
-                          </a:solidFill>
-                          <a:latin typeface="Calibri"/>
-                        </a:rPr>
-                        <a:t>+55.7%</a:t>
-                      </a:r>
-                    </a:p>
-                  </a:txBody>
-                  <a:tcPr>
-                    <a:solidFill>
-                      <a:srgbClr val="FFFFFF"/>
-                    </a:solidFill>
-                  </a:tcPr>
-                </a:tc>
-                <a:tc>
-                  <a:txBody>
-                    <a:bodyPr/>
-                    <a:lstStyle/>
-                    <a:p>
-                      <a:pPr algn="r"/>
-                      <a:r>
-                        <a:rPr sz="1100" b="0">
-                          <a:solidFill>
-                            <a:srgbClr val="1A1A1A"/>
-                          </a:solidFill>
-                          <a:latin typeface="Calibri"/>
-                        </a:rPr>
-                        <a:t>R99</a:t>
-                      </a:r>
-                    </a:p>
-                  </a:txBody>
-                  <a:tcPr>
-                    <a:solidFill>
-                      <a:srgbClr val="FFFFFF"/>
-                    </a:solidFill>
-                  </a:tcPr>
-                </a:tc>
-              </a:tr>
-              <a:tr h="291465">
-                <a:tc>
-                  <a:txBody>
-                    <a:bodyPr/>
-                    <a:lstStyle/>
-                    <a:p>
-                      <a:pPr algn="l"/>
-                      <a:r>
-                        <a:rPr sz="1100" b="1">
-                          <a:solidFill>
-                            <a:srgbClr val="1A1A1A"/>
-                          </a:solidFill>
-                          <a:latin typeface="Calibri"/>
-                        </a:rPr>
-                        <a:t>Roka (Zhejiang)</a:t>
-                      </a:r>
-                    </a:p>
-                  </a:txBody>
-                  <a:tcPr>
-                    <a:solidFill>
-                      <a:srgbClr val="F4F6F8"/>
-                    </a:solidFill>
-                  </a:tcPr>
-                </a:tc>
-                <a:tc>
-                  <a:txBody>
-                    <a:bodyPr/>
-                    <a:lstStyle/>
-                    <a:p>
-                      <a:pPr algn="r"/>
-                      <a:r>
-                        <a:rPr sz="1100" b="0">
-                          <a:solidFill>
-                            <a:srgbClr val="1A1A1A"/>
-                          </a:solidFill>
-                          <a:latin typeface="Calibri"/>
-                        </a:rPr>
-                        <a:t>4.1%</a:t>
-                      </a:r>
-                    </a:p>
-                  </a:txBody>
-                  <a:tcPr>
-                    <a:solidFill>
-                      <a:srgbClr val="F4F6F8"/>
-                    </a:solidFill>
-                  </a:tcPr>
-                </a:tc>
-                <a:tc>
-                  <a:txBody>
-                    <a:bodyPr/>
-                    <a:lstStyle/>
-                    <a:p>
-                      <a:pPr algn="r"/>
-                      <a:r>
-                        <a:rPr sz="1100" b="0">
-                          <a:solidFill>
-                            <a:srgbClr val="9B2C2C"/>
-                          </a:solidFill>
-                          <a:latin typeface="Calibri"/>
-                        </a:rPr>
-                        <a:t>-0.2pp</a:t>
-                      </a:r>
-                    </a:p>
-                  </a:txBody>
-                  <a:tcPr>
-                    <a:solidFill>
-                      <a:srgbClr val="F4F6F8"/>
-                    </a:solidFill>
-                  </a:tcPr>
-                </a:tc>
-                <a:tc>
-                  <a:txBody>
-                    <a:bodyPr/>
-                    <a:lstStyle/>
-                    <a:p>
-                      <a:pPr algn="r"/>
-                      <a:r>
-                        <a:rPr sz="1100" b="0">
-                          <a:solidFill>
-                            <a:srgbClr val="1F7A4D"/>
-                          </a:solidFill>
-                          <a:latin typeface="Calibri"/>
-                        </a:rPr>
-                        <a:t>+1.5%</a:t>
-                      </a:r>
-                    </a:p>
-                  </a:txBody>
-                  <a:tcPr>
-                    <a:solidFill>
-                      <a:srgbClr val="F4F6F8"/>
-                    </a:solidFill>
-                  </a:tcPr>
-                </a:tc>
-                <a:tc>
-                  <a:txBody>
-                    <a:bodyPr/>
-                    <a:lstStyle/>
-                    <a:p>
-                      <a:pPr algn="r"/>
-                      <a:r>
-                        <a:rPr sz="1100" b="0">
-                          <a:solidFill>
-                            <a:srgbClr val="1A1A1A"/>
-                          </a:solidFill>
-                          <a:latin typeface="Calibri"/>
-                        </a:rPr>
-                        <a:t>R69</a:t>
-                      </a:r>
-                    </a:p>
-                  </a:txBody>
-                  <a:tcPr>
-                    <a:solidFill>
-                      <a:srgbClr val="F4F6F8"/>
-                    </a:solidFill>
-                  </a:tcPr>
-                </a:tc>
-              </a:tr>
-            </a:tbl>
-          </a:graphicData>
-        </a:graphic>
-      </p:graphicFrame>
-      <p:sp>
-        <p:nvSpPr>
-          <p:cNvPr id="31" name="Rectangle 30"/>
-          <p:cNvSpPr/>
-          <p:nvPr/>
-        </p:nvSpPr>
-        <p:spPr>
-          <a:xfrm>
-            <a:off x="347472" y="4498848"/>
-            <a:ext cx="11484864" cy="1938528"/>
-          </a:xfrm>
-          <a:prstGeom prst="rect">
-            <a:avLst/>
-          </a:prstGeom>
-          <a:solidFill>
-            <a:srgbClr val="F4F6F8"/>
-          </a:solidFill>
-          <a:ln>
-            <a:solidFill>
-              <a:srgbClr val="D5DBE0"/>
-            </a:solidFill>
-          </a:ln>
-        </p:spPr>
-        <p:style>
-          <a:lnRef idx="1">
-            <a:schemeClr val="accent1"/>
-          </a:lnRef>
-          <a:fillRef idx="3">
-            <a:schemeClr val="accent1"/>
-          </a:fillRef>
-          <a:effectRef idx="2">
-            <a:schemeClr val="accent1"/>
-          </a:effectRef>
-          <a:fontRef idx="minor">
-            <a:schemeClr val="lt1"/>
-          </a:fontRef>
-        </p:style>
-        <p:txBody>
-          <a:bodyPr rtlCol="0" anchor="ctr"/>
-          <a:lstStyle/>
-          <a:p>
-            <a:pPr algn="ctr"/>
-          </a:p>
-        </p:txBody>
-      </p:sp>
-      <p:sp>
-        <p:nvSpPr>
-          <p:cNvPr id="32" name="TextBox 31"/>
-          <p:cNvSpPr txBox="1"/>
-          <p:nvPr/>
-        </p:nvSpPr>
-        <p:spPr>
-          <a:xfrm>
-            <a:off x="502920" y="4590288"/>
-            <a:ext cx="11155680" cy="237744"/>
-          </a:xfrm>
-          <a:prstGeom prst="rect">
-            <a:avLst/>
-          </a:prstGeom>
-          <a:noFill/>
-        </p:spPr>
-        <p:txBody>
-          <a:bodyPr wrap="square">
-            <a:spAutoFit/>
-          </a:bodyPr>
-          <a:lstStyle/>
-          <a:p>
-            <a:pPr algn="l"/>
-            <a:r>
-              <a:rPr sz="1300" b="1">
-                <a:solidFill>
-                  <a:srgbClr val="0B2545"/>
-                </a:solidFill>
-                <a:latin typeface="Calibri"/>
-              </a:rPr>
-              <a:t>Takeaways</a:t>
-            </a:r>
-          </a:p>
-        </p:txBody>
-      </p:sp>
-      <p:sp>
-        <p:nvSpPr>
-          <p:cNvPr id="33" name="TextBox 32"/>
-          <p:cNvSpPr txBox="1"/>
-          <p:nvPr/>
-        </p:nvSpPr>
-        <p:spPr>
-          <a:xfrm>
-            <a:off x="502920" y="4846320"/>
-            <a:ext cx="11155680" cy="1481328"/>
-          </a:xfrm>
-          <a:prstGeom prst="rect">
-            <a:avLst/>
-          </a:prstGeom>
-          <a:noFill/>
-        </p:spPr>
-        <p:txBody>
-          <a:bodyPr wrap="square">
-            <a:spAutoFit/>
-          </a:bodyPr>
-          <a:lstStyle/>
-          <a:p>
-            <a:pPr>
-              <a:spcAft>
-                <a:spcPts val="500"/>
-              </a:spcAft>
-            </a:pPr>
-            <a:r>
-              <a:rPr sz="1300" b="0">
-                <a:solidFill>
-                  <a:srgbClr val="1A1A1A"/>
-                </a:solidFill>
-                <a:latin typeface="Calibri"/>
-              </a:rPr>
-              <a:t>•  Pasta is a R3.29bn category growing +5.2% in value, with volume -0.7% — growth is price/mix, not more tonnes.</a:t>
-            </a:r>
-          </a:p>
-          <a:p>
-            <a:pPr>
-              <a:spcAft>
-                <a:spcPts val="500"/>
-              </a:spcAft>
-            </a:pPr>
-            <a:r>
-              <a:rPr sz="1300" b="0">
-                <a:solidFill>
-                  <a:srgbClr val="1A1A1A"/>
-                </a:solidFill>
-                <a:latin typeface="Calibri"/>
-              </a:rPr>
-              <a:t>•  Noodles is the engine: 64% of Pasta value (up 1.8pp). Macaroni 21% and spaghetti 13% are the dry-pasta game, led by Tiger Brands and private label at ~R30–35/kg.</a:t>
-            </a:r>
-          </a:p>
-          <a:p>
-            <a:pPr>
-              <a:spcAft>
-                <a:spcPts val="500"/>
-              </a:spcAft>
-            </a:pPr>
-            <a:r>
-              <a:rPr sz="1300" b="0">
-                <a:solidFill>
-                  <a:srgbClr val="1A1A1A"/>
-                </a:solidFill>
-                <a:latin typeface="Calibri"/>
-              </a:rPr>
-              <a:t>•  Winners: Kellogg's (+2.1pp) and Indomie/Indofood (+1.4pp). Losers: Nestlé/Maggi (−2.7pp), Mr Pasta (−2.0pp), Tiger Brands (−1.5pp).</a:t>
-            </a:r>
-          </a:p>
-          <a:p>
-            <a:pPr>
-              <a:spcAft>
-                <a:spcPts val="500"/>
-              </a:spcAft>
-            </a:pPr>
-            <a:r>
-              <a:rPr sz="1300" b="0">
-                <a:solidFill>
-                  <a:srgbClr val="1A1A1A"/>
-                </a:solidFill>
-                <a:latin typeface="Calibri"/>
-              </a:rPr>
-              <a:t>•  Unilever is not a Pasta-category player yet. Knorr Pasta Pots appear only in Jun 26, coded in Noodles.</a:t>
-            </a:r>
-          </a:p>
-        </p:txBody>
-      </p:sp>
-    </p:spTree>
-  </p:cSld>
-  <p:clrMapOvr>
-    <a:masterClrMapping/>
-  </p:clrMapOvr>
-</p:sld>
-</file>
-
-<file path=ppt/slides/slide2.xml><?xml version="1.0" encoding="utf-8"?>
-<p:sld xmlns:a="http://schemas.openxmlformats.org/drawingml/2006/main" xmlns:p="http://schemas.openxmlformats.org/presentationml/2006/main" xmlns:r="http://schemas.openxmlformats.org/officeDocument/2006/relationships">
-  <p:cSld>
-    <p:spTree>
-      <p:nvGrpSpPr>
-        <p:cNvPr id="1" name=""/>
-        <p:cNvGrpSpPr/>
-        <p:nvPr/>
-      </p:nvGrpSpPr>
-      <p:grpSpPr/>
-      <p:sp>
-        <p:nvSpPr>
-          <p:cNvPr id="2" name="Rectangle 1"/>
-          <p:cNvSpPr/>
-          <p:nvPr/>
-        </p:nvSpPr>
-        <p:spPr>
-          <a:xfrm>
-            <a:off x="0" y="0"/>
-            <a:ext cx="12191695" cy="804672"/>
-          </a:xfrm>
-          <a:prstGeom prst="rect">
-            <a:avLst/>
-          </a:prstGeom>
-          <a:solidFill>
-            <a:srgbClr val="0B2545"/>
-          </a:solidFill>
-          <a:ln>
-            <a:noFill/>
-          </a:ln>
-        </p:spPr>
-        <p:style>
-          <a:lnRef idx="1">
-            <a:schemeClr val="accent1"/>
-          </a:lnRef>
-          <a:fillRef idx="3">
-            <a:schemeClr val="accent1"/>
-          </a:fillRef>
-          <a:effectRef idx="2">
-            <a:schemeClr val="accent1"/>
-          </a:effectRef>
-          <a:fontRef idx="minor">
-            <a:schemeClr val="lt1"/>
-          </a:fontRef>
-        </p:style>
-        <p:txBody>
-          <a:bodyPr rtlCol="0" anchor="ctr"/>
-          <a:lstStyle/>
-          <a:p>
-            <a:pPr algn="ctr"/>
-          </a:p>
-        </p:txBody>
-      </p:sp>
-      <p:sp>
-        <p:nvSpPr>
-          <p:cNvPr id="3" name="TextBox 2"/>
-          <p:cNvSpPr txBox="1"/>
-          <p:nvPr/>
-        </p:nvSpPr>
-        <p:spPr>
-          <a:xfrm>
-            <a:off x="347472" y="91440"/>
-            <a:ext cx="11430000" cy="365760"/>
-          </a:xfrm>
-          <a:prstGeom prst="rect">
-            <a:avLst/>
-          </a:prstGeom>
-          <a:noFill/>
-        </p:spPr>
-        <p:txBody>
-          <a:bodyPr wrap="square">
-            <a:spAutoFit/>
-          </a:bodyPr>
-          <a:lstStyle/>
-          <a:p>
-            <a:pPr algn="l"/>
-            <a:r>
-              <a:rPr sz="2200" b="1">
-                <a:solidFill>
-                  <a:srgbClr val="FFFFFF"/>
-                </a:solidFill>
-                <a:latin typeface="Calibri"/>
-              </a:rPr>
-              <a:t>Noodles: Kellogg's winning, Maggi losing, Unilever not in the sachet game</a:t>
-            </a:r>
-          </a:p>
-        </p:txBody>
-      </p:sp>
-      <p:sp>
-        <p:nvSpPr>
-          <p:cNvPr id="4" name="TextBox 3"/>
-          <p:cNvSpPr txBox="1"/>
-          <p:nvPr/>
-        </p:nvSpPr>
-        <p:spPr>
-          <a:xfrm>
-            <a:off x="347472" y="457200"/>
-            <a:ext cx="11430000" cy="274320"/>
-          </a:xfrm>
-          <a:prstGeom prst="rect">
-            <a:avLst/>
-          </a:prstGeom>
-          <a:noFill/>
-        </p:spPr>
-        <p:txBody>
-          <a:bodyPr wrap="square">
-            <a:spAutoFit/>
-          </a:bodyPr>
-          <a:lstStyle/>
-          <a:p>
-            <a:pPr algn="l"/>
-            <a:r>
-              <a:rPr sz="1100" b="0">
-                <a:solidFill>
-                  <a:srgbClr val="C9D6E3"/>
-                </a:solidFill>
-                <a:latin typeface="Calibri"/>
-              </a:rPr>
-              <a:t>Noodles subcategory  ·  12 months to Jun 26 and June 2026  ·  Unilever = Knorr Pasta Pots</a:t>
-            </a:r>
-          </a:p>
-        </p:txBody>
-      </p:sp>
-      <p:sp>
-        <p:nvSpPr>
-          <p:cNvPr id="5" name="Rectangle 4"/>
-          <p:cNvSpPr/>
-          <p:nvPr/>
-        </p:nvSpPr>
-        <p:spPr>
-          <a:xfrm>
-            <a:off x="0" y="6601968"/>
-            <a:ext cx="12191695" cy="256032"/>
-          </a:xfrm>
-          <a:prstGeom prst="rect">
-            <a:avLst/>
-          </a:prstGeom>
-          <a:solidFill>
-            <a:srgbClr val="0B2545"/>
-          </a:solidFill>
-          <a:ln>
-            <a:noFill/>
-          </a:ln>
-        </p:spPr>
-        <p:style>
-          <a:lnRef idx="1">
-            <a:schemeClr val="accent1"/>
-          </a:lnRef>
-          <a:fillRef idx="3">
-            <a:schemeClr val="accent1"/>
-          </a:fillRef>
-          <a:effectRef idx="2">
-            <a:schemeClr val="accent1"/>
-          </a:effectRef>
-          <a:fontRef idx="minor">
-            <a:schemeClr val="lt1"/>
-          </a:fontRef>
-        </p:style>
-        <p:txBody>
-          <a:bodyPr rtlCol="0" anchor="ctr"/>
-          <a:lstStyle/>
-          <a:p>
-            <a:pPr algn="ctr"/>
-          </a:p>
-        </p:txBody>
-      </p:sp>
-      <p:sp>
-        <p:nvSpPr>
-          <p:cNvPr id="6" name="TextBox 5"/>
-          <p:cNvSpPr txBox="1"/>
-          <p:nvPr/>
-        </p:nvSpPr>
-        <p:spPr>
-          <a:xfrm>
-            <a:off x="347472" y="6620256"/>
-            <a:ext cx="11521440" cy="201168"/>
-          </a:xfrm>
-          <a:prstGeom prst="rect">
-            <a:avLst/>
-          </a:prstGeom>
-          <a:noFill/>
-        </p:spPr>
-        <p:txBody>
-          <a:bodyPr wrap="square">
-            <a:spAutoFit/>
-          </a:bodyPr>
-          <a:lstStyle/>
-          <a:p>
-            <a:pPr algn="l"/>
-            <a:r>
-              <a:rPr sz="1000" b="0">
-                <a:solidFill>
-                  <a:srgbClr val="C9D6E3"/>
-                </a:solidFill>
-                <a:latin typeface="Calibri"/>
-              </a:rPr>
-              <a:t>Source: Monthly Trended Export, South Africa Pasta, multi-retailer  ·  12 months = Jul 25–Jun 26 vs YA Jul 24–Jun 25  ·  Price = value ÷ volume (R/kg)  ·  Latest month = Jun 26</a:t>
-            </a:r>
-          </a:p>
-        </p:txBody>
-      </p:sp>
-      <p:sp>
-        <p:nvSpPr>
-          <p:cNvPr id="7" name="Rectangle 6"/>
-          <p:cNvSpPr/>
-          <p:nvPr/>
-        </p:nvSpPr>
-        <p:spPr>
-          <a:xfrm>
-            <a:off x="347472" y="950976"/>
-            <a:ext cx="2834640" cy="804672"/>
-          </a:xfrm>
-          <a:prstGeom prst="rect">
-            <a:avLst/>
-          </a:prstGeom>
-          <a:solidFill>
-            <a:srgbClr val="F4F6F8"/>
-          </a:solidFill>
-          <a:ln>
-            <a:solidFill>
-              <a:srgbClr val="D5DBE0"/>
-            </a:solidFill>
-          </a:ln>
-        </p:spPr>
-        <p:style>
-          <a:lnRef idx="1">
-            <a:schemeClr val="accent1"/>
-          </a:lnRef>
-          <a:fillRef idx="3">
-            <a:schemeClr val="accent1"/>
-          </a:fillRef>
-          <a:effectRef idx="2">
-            <a:schemeClr val="accent1"/>
-          </a:effectRef>
-          <a:fontRef idx="minor">
-            <a:schemeClr val="lt1"/>
-          </a:fontRef>
-        </p:style>
-        <p:txBody>
-          <a:bodyPr rtlCol="0" anchor="ctr"/>
-          <a:lstStyle/>
-          <a:p>
-            <a:pPr algn="ctr"/>
-          </a:p>
-        </p:txBody>
-      </p:sp>
-      <p:sp>
-        <p:nvSpPr>
-          <p:cNvPr id="8" name="Rectangle 7"/>
-          <p:cNvSpPr/>
-          <p:nvPr/>
-        </p:nvSpPr>
-        <p:spPr>
-          <a:xfrm>
-            <a:off x="347472" y="950976"/>
-            <a:ext cx="64008" cy="804672"/>
-          </a:xfrm>
-          <a:prstGeom prst="rect">
-            <a:avLst/>
-          </a:prstGeom>
-          <a:solidFill>
-            <a:srgbClr val="1B4F8A"/>
-          </a:solidFill>
-          <a:ln>
-            <a:noFill/>
-          </a:ln>
-        </p:spPr>
-        <p:style>
-          <a:lnRef idx="1">
-            <a:schemeClr val="accent1"/>
-          </a:lnRef>
-          <a:fillRef idx="3">
-            <a:schemeClr val="accent1"/>
-          </a:fillRef>
-          <a:effectRef idx="2">
-            <a:schemeClr val="accent1"/>
-          </a:effectRef>
-          <a:fontRef idx="minor">
-            <a:schemeClr val="lt1"/>
-          </a:fontRef>
-        </p:style>
-        <p:txBody>
-          <a:bodyPr rtlCol="0" anchor="ctr"/>
-          <a:lstStyle/>
-          <a:p>
-            <a:pPr algn="ctr"/>
-          </a:p>
-        </p:txBody>
-      </p:sp>
-      <p:sp>
-        <p:nvSpPr>
-          <p:cNvPr id="9" name="TextBox 8"/>
-          <p:cNvSpPr txBox="1"/>
-          <p:nvPr/>
-        </p:nvSpPr>
-        <p:spPr>
-          <a:xfrm>
-            <a:off x="493776" y="1005840"/>
-            <a:ext cx="2633472" cy="201168"/>
-          </a:xfrm>
-          <a:prstGeom prst="rect">
-            <a:avLst/>
-          </a:prstGeom>
-          <a:noFill/>
-        </p:spPr>
-        <p:txBody>
-          <a:bodyPr wrap="square">
-            <a:spAutoFit/>
-          </a:bodyPr>
-          <a:lstStyle/>
-          <a:p>
-            <a:pPr algn="l"/>
-            <a:r>
-              <a:rPr sz="1000" b="0">
-                <a:solidFill>
-                  <a:srgbClr val="5C6B73"/>
-                </a:solidFill>
-                <a:latin typeface="Calibri"/>
-              </a:rPr>
-              <a:t>12-MONTH VALUE</a:t>
-            </a:r>
-          </a:p>
-        </p:txBody>
-      </p:sp>
-      <p:sp>
-        <p:nvSpPr>
-          <p:cNvPr id="10" name="TextBox 9"/>
-          <p:cNvSpPr txBox="1"/>
-          <p:nvPr/>
-        </p:nvSpPr>
-        <p:spPr>
-          <a:xfrm>
-            <a:off x="493776" y="1188720"/>
-            <a:ext cx="2633472" cy="292608"/>
-          </a:xfrm>
-          <a:prstGeom prst="rect">
-            <a:avLst/>
-          </a:prstGeom>
-          <a:noFill/>
-        </p:spPr>
-        <p:txBody>
-          <a:bodyPr wrap="square">
-            <a:spAutoFit/>
-          </a:bodyPr>
-          <a:lstStyle/>
-          <a:p>
-            <a:pPr algn="l"/>
-            <a:r>
-              <a:rPr sz="1800" b="1">
-                <a:solidFill>
-                  <a:srgbClr val="0B2545"/>
-                </a:solidFill>
-                <a:latin typeface="Calibri"/>
-              </a:rPr>
-              <a:t>R2.1bn</a:t>
-            </a:r>
-          </a:p>
-        </p:txBody>
-      </p:sp>
-      <p:sp>
-        <p:nvSpPr>
-          <p:cNvPr id="11" name="TextBox 10"/>
-          <p:cNvSpPr txBox="1"/>
-          <p:nvPr/>
-        </p:nvSpPr>
-        <p:spPr>
-          <a:xfrm>
-            <a:off x="493776" y="1481328"/>
-            <a:ext cx="2633472" cy="201168"/>
-          </a:xfrm>
-          <a:prstGeom prst="rect">
-            <a:avLst/>
-          </a:prstGeom>
-          <a:noFill/>
-        </p:spPr>
-        <p:txBody>
-          <a:bodyPr wrap="square">
-            <a:spAutoFit/>
-          </a:bodyPr>
-          <a:lstStyle/>
-          <a:p>
-            <a:pPr algn="l"/>
-            <a:r>
-              <a:rPr sz="1000" b="0">
-                <a:solidFill>
-                  <a:srgbClr val="5C6B73"/>
-                </a:solidFill>
-                <a:latin typeface="Calibri"/>
-              </a:rPr>
-              <a:t>+8.2%  ·  vol +5.0%</a:t>
-            </a:r>
-          </a:p>
-        </p:txBody>
-      </p:sp>
-      <p:sp>
-        <p:nvSpPr>
-          <p:cNvPr id="12" name="Rectangle 11"/>
-          <p:cNvSpPr/>
-          <p:nvPr/>
-        </p:nvSpPr>
-        <p:spPr>
-          <a:xfrm>
-            <a:off x="3273552" y="950976"/>
-            <a:ext cx="2834640" cy="804672"/>
-          </a:xfrm>
-          <a:prstGeom prst="rect">
-            <a:avLst/>
-          </a:prstGeom>
-          <a:solidFill>
-            <a:srgbClr val="F4F6F8"/>
-          </a:solidFill>
-          <a:ln>
-            <a:solidFill>
-              <a:srgbClr val="D5DBE0"/>
-            </a:solidFill>
-          </a:ln>
-        </p:spPr>
-        <p:style>
-          <a:lnRef idx="1">
-            <a:schemeClr val="accent1"/>
-          </a:lnRef>
-          <a:fillRef idx="3">
-            <a:schemeClr val="accent1"/>
-          </a:fillRef>
-          <a:effectRef idx="2">
-            <a:schemeClr val="accent1"/>
-          </a:effectRef>
-          <a:fontRef idx="minor">
-            <a:schemeClr val="lt1"/>
-          </a:fontRef>
-        </p:style>
-        <p:txBody>
-          <a:bodyPr rtlCol="0" anchor="ctr"/>
-          <a:lstStyle/>
-          <a:p>
-            <a:pPr algn="ctr"/>
-          </a:p>
-        </p:txBody>
-      </p:sp>
-      <p:sp>
-        <p:nvSpPr>
-          <p:cNvPr id="13" name="Rectangle 12"/>
-          <p:cNvSpPr/>
-          <p:nvPr/>
-        </p:nvSpPr>
-        <p:spPr>
-          <a:xfrm>
-            <a:off x="3273552" y="950976"/>
-            <a:ext cx="64008" cy="804672"/>
-          </a:xfrm>
-          <a:prstGeom prst="rect">
-            <a:avLst/>
-          </a:prstGeom>
-          <a:solidFill>
-            <a:srgbClr val="0E7C7B"/>
-          </a:solidFill>
-          <a:ln>
-            <a:noFill/>
-          </a:ln>
-        </p:spPr>
-        <p:style>
-          <a:lnRef idx="1">
-            <a:schemeClr val="accent1"/>
-          </a:lnRef>
-          <a:fillRef idx="3">
-            <a:schemeClr val="accent1"/>
-          </a:fillRef>
-          <a:effectRef idx="2">
-            <a:schemeClr val="accent1"/>
-          </a:effectRef>
-          <a:fontRef idx="minor">
-            <a:schemeClr val="lt1"/>
-          </a:fontRef>
-        </p:style>
-        <p:txBody>
-          <a:bodyPr rtlCol="0" anchor="ctr"/>
-          <a:lstStyle/>
-          <a:p>
-            <a:pPr algn="ctr"/>
-          </a:p>
-        </p:txBody>
-      </p:sp>
-      <p:sp>
-        <p:nvSpPr>
-          <p:cNvPr id="14" name="TextBox 13"/>
-          <p:cNvSpPr txBox="1"/>
-          <p:nvPr/>
-        </p:nvSpPr>
-        <p:spPr>
-          <a:xfrm>
-            <a:off x="3419856" y="1005840"/>
-            <a:ext cx="2633472" cy="201168"/>
-          </a:xfrm>
-          <a:prstGeom prst="rect">
-            <a:avLst/>
-          </a:prstGeom>
-          <a:noFill/>
-        </p:spPr>
-        <p:txBody>
-          <a:bodyPr wrap="square">
-            <a:spAutoFit/>
-          </a:bodyPr>
-          <a:lstStyle/>
-          <a:p>
-            <a:pPr algn="l"/>
-            <a:r>
-              <a:rPr sz="1000" b="0">
-                <a:solidFill>
-                  <a:srgbClr val="5C6B73"/>
-                </a:solidFill>
-                <a:latin typeface="Calibri"/>
-              </a:rPr>
-              <a:t>JUNE 2026</a:t>
-            </a:r>
-          </a:p>
-        </p:txBody>
-      </p:sp>
-      <p:sp>
-        <p:nvSpPr>
-          <p:cNvPr id="15" name="TextBox 14"/>
-          <p:cNvSpPr txBox="1"/>
-          <p:nvPr/>
-        </p:nvSpPr>
-        <p:spPr>
-          <a:xfrm>
-            <a:off x="3419856" y="1188720"/>
-            <a:ext cx="2633472" cy="292608"/>
-          </a:xfrm>
-          <a:prstGeom prst="rect">
-            <a:avLst/>
-          </a:prstGeom>
-          <a:noFill/>
-        </p:spPr>
-        <p:txBody>
-          <a:bodyPr wrap="square">
-            <a:spAutoFit/>
-          </a:bodyPr>
-          <a:lstStyle/>
-          <a:p>
-            <a:pPr algn="l"/>
-            <a:r>
-              <a:rPr sz="1800" b="1">
-                <a:solidFill>
-                  <a:srgbClr val="0B2545"/>
-                </a:solidFill>
-                <a:latin typeface="Calibri"/>
-              </a:rPr>
-              <a:t>R221.5m</a:t>
-            </a:r>
-          </a:p>
-        </p:txBody>
-      </p:sp>
-      <p:sp>
-        <p:nvSpPr>
-          <p:cNvPr id="16" name="TextBox 15"/>
-          <p:cNvSpPr txBox="1"/>
-          <p:nvPr/>
-        </p:nvSpPr>
-        <p:spPr>
-          <a:xfrm>
-            <a:off x="3419856" y="1481328"/>
-            <a:ext cx="2633472" cy="201168"/>
-          </a:xfrm>
-          <a:prstGeom prst="rect">
-            <a:avLst/>
-          </a:prstGeom>
-          <a:noFill/>
-        </p:spPr>
-        <p:txBody>
-          <a:bodyPr wrap="square">
-            <a:spAutoFit/>
-          </a:bodyPr>
-          <a:lstStyle/>
-          <a:p>
-            <a:pPr algn="l"/>
-            <a:r>
-              <a:rPr sz="1000" b="0">
-                <a:solidFill>
-                  <a:srgbClr val="5C6B73"/>
-                </a:solidFill>
-                <a:latin typeface="Calibri"/>
-              </a:rPr>
-              <a:t>+10.0% vs Jun 25</a:t>
-            </a:r>
-          </a:p>
-        </p:txBody>
-      </p:sp>
-      <p:sp>
-        <p:nvSpPr>
-          <p:cNvPr id="17" name="Rectangle 16"/>
-          <p:cNvSpPr/>
-          <p:nvPr/>
-        </p:nvSpPr>
-        <p:spPr>
-          <a:xfrm>
-            <a:off x="6199632" y="950976"/>
-            <a:ext cx="2834640" cy="804672"/>
-          </a:xfrm>
-          <a:prstGeom prst="rect">
-            <a:avLst/>
-          </a:prstGeom>
-          <a:solidFill>
-            <a:srgbClr val="F4F6F8"/>
-          </a:solidFill>
-          <a:ln>
-            <a:solidFill>
-              <a:srgbClr val="D5DBE0"/>
-            </a:solidFill>
-          </a:ln>
-        </p:spPr>
-        <p:style>
-          <a:lnRef idx="1">
-            <a:schemeClr val="accent1"/>
-          </a:lnRef>
-          <a:fillRef idx="3">
-            <a:schemeClr val="accent1"/>
-          </a:fillRef>
-          <a:effectRef idx="2">
-            <a:schemeClr val="accent1"/>
-          </a:effectRef>
-          <a:fontRef idx="minor">
-            <a:schemeClr val="lt1"/>
-          </a:fontRef>
-        </p:style>
-        <p:txBody>
-          <a:bodyPr rtlCol="0" anchor="ctr"/>
-          <a:lstStyle/>
-          <a:p>
-            <a:pPr algn="ctr"/>
-          </a:p>
-        </p:txBody>
-      </p:sp>
-      <p:sp>
-        <p:nvSpPr>
-          <p:cNvPr id="18" name="Rectangle 17"/>
-          <p:cNvSpPr/>
-          <p:nvPr/>
-        </p:nvSpPr>
-        <p:spPr>
-          <a:xfrm>
-            <a:off x="6199632" y="950976"/>
-            <a:ext cx="64008" cy="804672"/>
-          </a:xfrm>
-          <a:prstGeom prst="rect">
-            <a:avLst/>
-          </a:prstGeom>
-          <a:solidFill>
-            <a:srgbClr val="C45C26"/>
-          </a:solidFill>
-          <a:ln>
-            <a:noFill/>
-          </a:ln>
-        </p:spPr>
-        <p:style>
-          <a:lnRef idx="1">
-            <a:schemeClr val="accent1"/>
-          </a:lnRef>
-          <a:fillRef idx="3">
-            <a:schemeClr val="accent1"/>
-          </a:fillRef>
-          <a:effectRef idx="2">
-            <a:schemeClr val="accent1"/>
-          </a:effectRef>
-          <a:fontRef idx="minor">
-            <a:schemeClr val="lt1"/>
-          </a:fontRef>
-        </p:style>
-        <p:txBody>
-          <a:bodyPr rtlCol="0" anchor="ctr"/>
-          <a:lstStyle/>
-          <a:p>
-            <a:pPr algn="ctr"/>
-          </a:p>
-        </p:txBody>
-      </p:sp>
-      <p:sp>
-        <p:nvSpPr>
-          <p:cNvPr id="19" name="TextBox 18"/>
-          <p:cNvSpPr txBox="1"/>
-          <p:nvPr/>
-        </p:nvSpPr>
-        <p:spPr>
-          <a:xfrm>
-            <a:off x="6345936" y="1005840"/>
-            <a:ext cx="2633472" cy="201168"/>
-          </a:xfrm>
-          <a:prstGeom prst="rect">
-            <a:avLst/>
-          </a:prstGeom>
-          <a:noFill/>
-        </p:spPr>
-        <p:txBody>
-          <a:bodyPr wrap="square">
-            <a:spAutoFit/>
-          </a:bodyPr>
-          <a:lstStyle/>
-          <a:p>
-            <a:pPr algn="l"/>
-            <a:r>
-              <a:rPr sz="1000" b="0">
-                <a:solidFill>
-                  <a:srgbClr val="5C6B73"/>
-                </a:solidFill>
-                <a:latin typeface="Calibri"/>
-              </a:rPr>
-              <a:t>PRICE POINT</a:t>
-            </a:r>
-          </a:p>
-        </p:txBody>
-      </p:sp>
-      <p:sp>
-        <p:nvSpPr>
-          <p:cNvPr id="20" name="TextBox 19"/>
-          <p:cNvSpPr txBox="1"/>
-          <p:nvPr/>
-        </p:nvSpPr>
-        <p:spPr>
-          <a:xfrm>
-            <a:off x="6345936" y="1188720"/>
-            <a:ext cx="2633472" cy="292608"/>
-          </a:xfrm>
-          <a:prstGeom prst="rect">
-            <a:avLst/>
-          </a:prstGeom>
-          <a:noFill/>
-        </p:spPr>
-        <p:txBody>
-          <a:bodyPr wrap="square">
-            <a:spAutoFit/>
-          </a:bodyPr>
-          <a:lstStyle/>
-          <a:p>
-            <a:pPr algn="l"/>
-            <a:r>
-              <a:rPr sz="1800" b="1">
-                <a:solidFill>
-                  <a:srgbClr val="0B2545"/>
-                </a:solidFill>
-                <a:latin typeface="Calibri"/>
-              </a:rPr>
-              <a:t>R96/kg</a:t>
-            </a:r>
-          </a:p>
-        </p:txBody>
-      </p:sp>
-      <p:sp>
-        <p:nvSpPr>
-          <p:cNvPr id="21" name="TextBox 20"/>
-          <p:cNvSpPr txBox="1"/>
-          <p:nvPr/>
-        </p:nvSpPr>
-        <p:spPr>
-          <a:xfrm>
-            <a:off x="6345936" y="1481328"/>
-            <a:ext cx="2633472" cy="201168"/>
-          </a:xfrm>
-          <a:prstGeom prst="rect">
-            <a:avLst/>
-          </a:prstGeom>
-          <a:noFill/>
-        </p:spPr>
-        <p:txBody>
-          <a:bodyPr wrap="square">
-            <a:spAutoFit/>
-          </a:bodyPr>
-          <a:lstStyle/>
-          <a:p>
-            <a:pPr algn="l"/>
-            <a:r>
-              <a:rPr sz="1000" b="0">
-                <a:solidFill>
-                  <a:srgbClr val="5C6B73"/>
-                </a:solidFill>
-                <a:latin typeface="Calibri"/>
-              </a:rPr>
-              <a:t>86% of value is R5–8 a sachet</a:t>
-            </a:r>
-          </a:p>
-        </p:txBody>
-      </p:sp>
-      <p:sp>
-        <p:nvSpPr>
-          <p:cNvPr id="22" name="Rectangle 21"/>
-          <p:cNvSpPr/>
-          <p:nvPr/>
-        </p:nvSpPr>
-        <p:spPr>
-          <a:xfrm>
-            <a:off x="9125712" y="950976"/>
-            <a:ext cx="2706624" cy="804672"/>
-          </a:xfrm>
-          <a:prstGeom prst="rect">
-            <a:avLst/>
-          </a:prstGeom>
-          <a:solidFill>
-            <a:srgbClr val="F4F6F8"/>
-          </a:solidFill>
-          <a:ln>
-            <a:solidFill>
-              <a:srgbClr val="D5DBE0"/>
-            </a:solidFill>
-          </a:ln>
-        </p:spPr>
-        <p:style>
-          <a:lnRef idx="1">
-            <a:schemeClr val="accent1"/>
-          </a:lnRef>
-          <a:fillRef idx="3">
-            <a:schemeClr val="accent1"/>
-          </a:fillRef>
-          <a:effectRef idx="2">
-            <a:schemeClr val="accent1"/>
-          </a:effectRef>
-          <a:fontRef idx="minor">
-            <a:schemeClr val="lt1"/>
-          </a:fontRef>
-        </p:style>
-        <p:txBody>
-          <a:bodyPr rtlCol="0" anchor="ctr"/>
-          <a:lstStyle/>
-          <a:p>
-            <a:pPr algn="ctr"/>
-          </a:p>
-        </p:txBody>
-      </p:sp>
-      <p:sp>
-        <p:nvSpPr>
-          <p:cNvPr id="23" name="Rectangle 22"/>
-          <p:cNvSpPr/>
-          <p:nvPr/>
-        </p:nvSpPr>
-        <p:spPr>
-          <a:xfrm>
-            <a:off x="9125712" y="950976"/>
-            <a:ext cx="64008" cy="804672"/>
-          </a:xfrm>
-          <a:prstGeom prst="rect">
-            <a:avLst/>
-          </a:prstGeom>
-          <a:solidFill>
-            <a:srgbClr val="9B2C2C"/>
-          </a:solidFill>
-          <a:ln>
-            <a:noFill/>
-          </a:ln>
-        </p:spPr>
-        <p:style>
-          <a:lnRef idx="1">
-            <a:schemeClr val="accent1"/>
-          </a:lnRef>
-          <a:fillRef idx="3">
-            <a:schemeClr val="accent1"/>
-          </a:fillRef>
-          <a:effectRef idx="2">
-            <a:schemeClr val="accent1"/>
-          </a:effectRef>
-          <a:fontRef idx="minor">
-            <a:schemeClr val="lt1"/>
-          </a:fontRef>
-        </p:style>
-        <p:txBody>
-          <a:bodyPr rtlCol="0" anchor="ctr"/>
-          <a:lstStyle/>
-          <a:p>
-            <a:pPr algn="ctr"/>
-          </a:p>
-        </p:txBody>
-      </p:sp>
-      <p:sp>
-        <p:nvSpPr>
-          <p:cNvPr id="24" name="TextBox 23"/>
-          <p:cNvSpPr txBox="1"/>
-          <p:nvPr/>
-        </p:nvSpPr>
-        <p:spPr>
-          <a:xfrm>
-            <a:off x="9272016" y="1005840"/>
-            <a:ext cx="2505456" cy="201168"/>
-          </a:xfrm>
-          <a:prstGeom prst="rect">
-            <a:avLst/>
-          </a:prstGeom>
-          <a:noFill/>
-        </p:spPr>
-        <p:txBody>
-          <a:bodyPr wrap="square">
-            <a:spAutoFit/>
-          </a:bodyPr>
-          <a:lstStyle/>
-          <a:p>
-            <a:pPr algn="l"/>
-            <a:r>
-              <a:rPr sz="1000" b="0">
-                <a:solidFill>
-                  <a:srgbClr val="5C6B73"/>
-                </a:solidFill>
-                <a:latin typeface="Calibri"/>
-              </a:rPr>
-              <a:t>UNILEVER (JUN)</a:t>
-            </a:r>
-          </a:p>
-        </p:txBody>
-      </p:sp>
-      <p:sp>
-        <p:nvSpPr>
-          <p:cNvPr id="25" name="TextBox 24"/>
-          <p:cNvSpPr txBox="1"/>
-          <p:nvPr/>
-        </p:nvSpPr>
-        <p:spPr>
-          <a:xfrm>
-            <a:off x="9272016" y="1188720"/>
-            <a:ext cx="2505456" cy="292608"/>
-          </a:xfrm>
-          <a:prstGeom prst="rect">
-            <a:avLst/>
-          </a:prstGeom>
-          <a:noFill/>
-        </p:spPr>
-        <p:txBody>
-          <a:bodyPr wrap="square">
-            <a:spAutoFit/>
-          </a:bodyPr>
-          <a:lstStyle/>
-          <a:p>
-            <a:pPr algn="l"/>
-            <a:r>
-              <a:rPr sz="1800" b="1">
-                <a:solidFill>
-                  <a:srgbClr val="0B2545"/>
-                </a:solidFill>
-                <a:latin typeface="Calibri"/>
-              </a:rPr>
-              <a:t>0.56% share</a:t>
-            </a:r>
-          </a:p>
-        </p:txBody>
-      </p:sp>
-      <p:sp>
-        <p:nvSpPr>
-          <p:cNvPr id="26" name="TextBox 25"/>
-          <p:cNvSpPr txBox="1"/>
-          <p:nvPr/>
-        </p:nvSpPr>
-        <p:spPr>
-          <a:xfrm>
-            <a:off x="9272016" y="1481328"/>
-            <a:ext cx="2505456" cy="201168"/>
-          </a:xfrm>
-          <a:prstGeom prst="rect">
-            <a:avLst/>
-          </a:prstGeom>
-          <a:noFill/>
-        </p:spPr>
-        <p:txBody>
-          <a:bodyPr wrap="square">
-            <a:spAutoFit/>
-          </a:bodyPr>
-          <a:lstStyle/>
-          <a:p>
-            <a:pPr algn="l"/>
-            <a:r>
-              <a:rPr sz="1000" b="0">
-                <a:solidFill>
-                  <a:srgbClr val="5C6B73"/>
-                </a:solidFill>
-                <a:latin typeface="Calibri"/>
-              </a:rPr>
-              <a:t>R1.2m  ·  3 Pasta Pots</a:t>
-            </a:r>
-          </a:p>
-        </p:txBody>
-      </p:sp>
-      <p:sp>
-        <p:nvSpPr>
-          <p:cNvPr id="27" name="TextBox 26"/>
-          <p:cNvSpPr txBox="1"/>
-          <p:nvPr/>
-        </p:nvSpPr>
-        <p:spPr>
-          <a:xfrm>
-            <a:off x="347472" y="1847088"/>
-            <a:ext cx="5760720" cy="219456"/>
-          </a:xfrm>
-          <a:prstGeom prst="rect">
-            <a:avLst/>
-          </a:prstGeom>
-          <a:noFill/>
-        </p:spPr>
-        <p:txBody>
-          <a:bodyPr wrap="square">
-            <a:spAutoFit/>
-          </a:bodyPr>
-          <a:lstStyle/>
-          <a:p>
-            <a:pPr algn="l"/>
-            <a:r>
-              <a:rPr sz="1200" b="1">
-                <a:solidFill>
-                  <a:srgbClr val="0B2545"/>
-                </a:solidFill>
-                <a:latin typeface="Calibri"/>
-              </a:rPr>
-              <a:t>Key players — 12-month value share and change</a:t>
-            </a:r>
-          </a:p>
-        </p:txBody>
-      </p:sp>
-      <p:pic>
-        <p:nvPicPr>
-          <p:cNvPr id="28" name="Picture 27" descr="noodles_brand_share.png"/>
-          <p:cNvPicPr>
-            <a:picLocks noChangeAspect="1"/>
-          </p:cNvPicPr>
-          <p:nvPr/>
-        </p:nvPicPr>
-        <p:blipFill>
-          <a:blip r:embed="rId2"/>
-          <a:stretch>
-            <a:fillRect/>
-          </a:stretch>
-        </p:blipFill>
-        <p:spPr>
-          <a:xfrm>
-            <a:off x="256032" y="2048256"/>
-            <a:ext cx="5897880" cy="2331720"/>
-          </a:xfrm>
-          <a:prstGeom prst="rect">
-            <a:avLst/>
-          </a:prstGeom>
-        </p:spPr>
-      </p:pic>
-      <p:sp>
-        <p:nvSpPr>
-          <p:cNvPr id="29" name="TextBox 28"/>
-          <p:cNvSpPr txBox="1"/>
-          <p:nvPr/>
-        </p:nvSpPr>
-        <p:spPr>
-          <a:xfrm>
-            <a:off x="6263640" y="1847088"/>
-            <a:ext cx="5577840" cy="219456"/>
-          </a:xfrm>
-          <a:prstGeom prst="rect">
-            <a:avLst/>
-          </a:prstGeom>
-          <a:noFill/>
-        </p:spPr>
-        <p:txBody>
-          <a:bodyPr wrap="square">
-            <a:spAutoFit/>
-          </a:bodyPr>
-          <a:lstStyle/>
-          <a:p>
-            <a:pPr algn="l"/>
-            <a:r>
-              <a:rPr sz="1200" b="1">
-                <a:solidFill>
-                  <a:srgbClr val="0B2545"/>
-                </a:solidFill>
-                <a:latin typeface="Calibri"/>
-              </a:rPr>
-              <a:t>Share, June pulse, price</a:t>
-            </a:r>
-          </a:p>
-        </p:txBody>
-      </p:sp>
-      <p:graphicFrame>
-        <p:nvGraphicFramePr>
-          <p:cNvPr id="30" name="Table 29"/>
-          <p:cNvGraphicFramePr>
-            <a:graphicFrameLocks noGrp="1"/>
-          </p:cNvGraphicFramePr>
-          <p:nvPr/>
-        </p:nvGraphicFramePr>
-        <p:xfrm>
-          <a:off x="6263640" y="2084831"/>
-          <a:ext cx="5577840" cy="2468880"/>
-        </p:xfrm>
-        <a:graphic>
-          <a:graphicData uri="http://schemas.openxmlformats.org/drawingml/2006/table">
-            <a:tbl>
-              <a:tblPr firstRow="1" bandRow="1">
-                <a:tableStyleId>{5C22544A-7EE6-4342-B048-85BDC9FD1C3A}</a:tableStyleId>
-              </a:tblPr>
-              <a:tblGrid>
-                <a:gridCol w="1234440"/>
-                <a:gridCol w="777240"/>
-                <a:gridCol w="731520"/>
-                <a:gridCol w="822960"/>
-                <a:gridCol w="960120"/>
-                <a:gridCol w="1051560"/>
-              </a:tblGrid>
-              <a:tr h="274320">
-                <a:tc>
-                  <a:txBody>
-                    <a:bodyPr/>
-                    <a:lstStyle/>
-                    <a:p>
-                      <a:pPr algn="l"/>
-                      <a:r>
-                        <a:rPr sz="1000" b="1">
-                          <a:solidFill>
-                            <a:srgbClr val="FFFFFF"/>
-                          </a:solidFill>
-                          <a:latin typeface="Calibri"/>
-                        </a:rPr>
-                        <a:t>Brand</a:t>
-                      </a:r>
-                    </a:p>
-                  </a:txBody>
-                  <a:tcPr>
-                    <a:solidFill>
-                      <a:srgbClr val="0B2545"/>
-                    </a:solidFill>
-                  </a:tcPr>
-                </a:tc>
-                <a:tc>
-                  <a:txBody>
-                    <a:bodyPr/>
-                    <a:lstStyle/>
-                    <a:p>
-                      <a:pPr algn="r"/>
-                      <a:r>
-                        <a:rPr sz="1000" b="1">
-                          <a:solidFill>
-                            <a:srgbClr val="FFFFFF"/>
-                          </a:solidFill>
-                          <a:latin typeface="Calibri"/>
-                        </a:rPr>
-                        <a:t>12m</a:t>
-                      </a:r>
-                    </a:p>
-                  </a:txBody>
-                  <a:tcPr>
-                    <a:solidFill>
-                      <a:srgbClr val="0B2545"/>
-                    </a:solidFill>
-                  </a:tcPr>
-                </a:tc>
-                <a:tc>
-                  <a:txBody>
-                    <a:bodyPr/>
-                    <a:lstStyle/>
-                    <a:p>
-                      <a:pPr algn="r"/>
-                      <a:r>
-                        <a:rPr sz="1000" b="1">
-                          <a:solidFill>
-                            <a:srgbClr val="FFFFFF"/>
-                          </a:solidFill>
-                          <a:latin typeface="Calibri"/>
-                        </a:rPr>
-                        <a:t>Jun</a:t>
-                      </a:r>
-                    </a:p>
-                  </a:txBody>
-                  <a:tcPr>
-                    <a:solidFill>
-                      <a:srgbClr val="0B2545"/>
-                    </a:solidFill>
-                  </a:tcPr>
-                </a:tc>
-                <a:tc>
-                  <a:txBody>
-                    <a:bodyPr/>
-                    <a:lstStyle/>
-                    <a:p>
-                      <a:pPr algn="r"/>
-                      <a:r>
-                        <a:rPr sz="1000" b="1">
-                          <a:solidFill>
-                            <a:srgbClr val="FFFFFF"/>
-                          </a:solidFill>
-                          <a:latin typeface="Calibri"/>
-                        </a:rPr>
-                        <a:t>vs YA</a:t>
-                      </a:r>
-                    </a:p>
-                  </a:txBody>
-                  <a:tcPr>
-                    <a:solidFill>
-                      <a:srgbClr val="0B2545"/>
-                    </a:solidFill>
-                  </a:tcPr>
-                </a:tc>
-                <a:tc>
-                  <a:txBody>
-                    <a:bodyPr/>
-                    <a:lstStyle/>
-                    <a:p>
-                      <a:pPr algn="r"/>
-                      <a:r>
-                        <a:rPr sz="1000" b="1">
-                          <a:solidFill>
-                            <a:srgbClr val="FFFFFF"/>
-                          </a:solidFill>
-                          <a:latin typeface="Calibri"/>
-                        </a:rPr>
-                        <a:t>Value</a:t>
-                      </a:r>
-                    </a:p>
-                  </a:txBody>
-                  <a:tcPr>
-                    <a:solidFill>
-                      <a:srgbClr val="0B2545"/>
-                    </a:solidFill>
-                  </a:tcPr>
-                </a:tc>
-                <a:tc>
-                  <a:txBody>
-                    <a:bodyPr/>
-                    <a:lstStyle/>
-                    <a:p>
-                      <a:pPr algn="r"/>
-                      <a:r>
-                        <a:rPr sz="1000" b="1">
-                          <a:solidFill>
-                            <a:srgbClr val="FFFFFF"/>
-                          </a:solidFill>
-                          <a:latin typeface="Calibri"/>
-                        </a:rPr>
-                        <a:t>R/kg</a:t>
-                      </a:r>
-                    </a:p>
-                  </a:txBody>
-                  <a:tcPr>
-                    <a:solidFill>
-                      <a:srgbClr val="0B2545"/>
-                    </a:solidFill>
-                  </a:tcPr>
-                </a:tc>
-              </a:tr>
-              <a:tr h="274320">
-                <a:tc>
-                  <a:txBody>
-                    <a:bodyPr/>
-                    <a:lstStyle/>
-                    <a:p>
-                      <a:pPr algn="l"/>
-                      <a:r>
-                        <a:rPr sz="1100" b="1">
-                          <a:solidFill>
-                            <a:srgbClr val="1A1A1A"/>
-                          </a:solidFill>
-                          <a:latin typeface="Calibri"/>
-                        </a:rPr>
-                        <a:t>Kellogg's</a:t>
-                      </a:r>
-                    </a:p>
-                  </a:txBody>
-                  <a:tcPr>
-                    <a:solidFill>
-                      <a:srgbClr val="F4F6F8"/>
-                    </a:solidFill>
-                  </a:tcPr>
-                </a:tc>
-                <a:tc>
-                  <a:txBody>
-                    <a:bodyPr/>
-                    <a:lstStyle/>
-                    <a:p>
-                      <a:pPr algn="r"/>
-                      <a:r>
-                        <a:rPr sz="1100" b="0">
-                          <a:solidFill>
-                            <a:srgbClr val="1A1A1A"/>
-                          </a:solidFill>
-                          <a:latin typeface="Calibri"/>
-                        </a:rPr>
-                        <a:t>45.6%</a:t>
-                      </a:r>
-                    </a:p>
-                  </a:txBody>
-                  <a:tcPr>
-                    <a:solidFill>
-                      <a:srgbClr val="F4F6F8"/>
-                    </a:solidFill>
-                  </a:tcPr>
-                </a:tc>
-                <a:tc>
-                  <a:txBody>
-                    <a:bodyPr/>
-                    <a:lstStyle/>
-                    <a:p>
-                      <a:pPr algn="r"/>
-                      <a:r>
-                        <a:rPr sz="1100" b="0">
-                          <a:solidFill>
-                            <a:srgbClr val="1A1A1A"/>
-                          </a:solidFill>
-                          <a:latin typeface="Calibri"/>
-                        </a:rPr>
-                        <a:t>44.3%</a:t>
-                      </a:r>
-                    </a:p>
-                  </a:txBody>
-                  <a:tcPr>
-                    <a:solidFill>
-                      <a:srgbClr val="F4F6F8"/>
-                    </a:solidFill>
-                  </a:tcPr>
-                </a:tc>
-                <a:tc>
-                  <a:txBody>
-                    <a:bodyPr/>
-                    <a:lstStyle/>
-                    <a:p>
-                      <a:pPr algn="r"/>
-                      <a:r>
-                        <a:rPr sz="1100" b="0">
-                          <a:solidFill>
-                            <a:srgbClr val="1F7A4D"/>
-                          </a:solidFill>
-                          <a:latin typeface="Calibri"/>
-                        </a:rPr>
-                        <a:t>+2.0pp</a:t>
-                      </a:r>
-                    </a:p>
-                  </a:txBody>
-                  <a:tcPr>
-                    <a:solidFill>
-                      <a:srgbClr val="F4F6F8"/>
-                    </a:solidFill>
-                  </a:tcPr>
-                </a:tc>
-                <a:tc>
-                  <a:txBody>
-                    <a:bodyPr/>
-                    <a:lstStyle/>
-                    <a:p>
-                      <a:pPr algn="r"/>
-                      <a:r>
-                        <a:rPr sz="1100" b="0">
-                          <a:solidFill>
-                            <a:srgbClr val="1F7A4D"/>
-                          </a:solidFill>
-                          <a:latin typeface="Calibri"/>
-                        </a:rPr>
-                        <a:t>+13.1%</a:t>
-                      </a:r>
-                    </a:p>
-                  </a:txBody>
-                  <a:tcPr>
-                    <a:solidFill>
-                      <a:srgbClr val="F4F6F8"/>
-                    </a:solidFill>
-                  </a:tcPr>
-                </a:tc>
-                <a:tc>
-                  <a:txBody>
-                    <a:bodyPr/>
-                    <a:lstStyle/>
-                    <a:p>
-                      <a:pPr algn="r"/>
-                      <a:r>
-                        <a:rPr sz="1100" b="0">
-                          <a:solidFill>
-                            <a:srgbClr val="1A1A1A"/>
-                          </a:solidFill>
-                          <a:latin typeface="Calibri"/>
-                        </a:rPr>
-                        <a:t>R87</a:t>
-                      </a:r>
-                    </a:p>
-                  </a:txBody>
-                  <a:tcPr>
-                    <a:solidFill>
-                      <a:srgbClr val="F4F6F8"/>
-                    </a:solidFill>
-                  </a:tcPr>
-                </a:tc>
-              </a:tr>
-              <a:tr h="274320">
+              <a:tr h="259080">
                 <a:tc>
                   <a:txBody>
                     <a:bodyPr/>
@@ -7299,7 +5470,7 @@
                       <a:r>
                         <a:rPr sz="1100" b="0">
                           <a:solidFill>
-                            <a:srgbClr val="9B2C2C"/>
+                            <a:srgbClr val="C0392B"/>
                           </a:solidFill>
                           <a:latin typeface="Calibri"/>
                         </a:rPr>
@@ -7322,7 +5493,7 @@
                       <a:r>
                         <a:rPr sz="1100" b="0">
                           <a:solidFill>
-                            <a:srgbClr val="9B2C2C"/>
+                            <a:srgbClr val="C0392B"/>
                           </a:solidFill>
                           <a:latin typeface="Calibri"/>
                         </a:rPr>
@@ -7360,7 +5531,7 @@
                   </a:tcPr>
                 </a:tc>
               </a:tr>
-              <a:tr h="274320">
+              <a:tr h="259080">
                 <a:tc>
                   <a:txBody>
                     <a:bodyPr/>
@@ -7380,7 +5551,7 @@
                   </a:txBody>
                   <a:tcPr>
                     <a:solidFill>
-                      <a:srgbClr val="F4F6F8"/>
+                      <a:srgbClr val="E6F1F8"/>
                     </a:solidFill>
                   </a:tcPr>
                 </a:tc>
@@ -7403,7 +5574,7 @@
                   </a:txBody>
                   <a:tcPr>
                     <a:solidFill>
-                      <a:srgbClr val="F4F6F8"/>
+                      <a:srgbClr val="E6F1F8"/>
                     </a:solidFill>
                   </a:tcPr>
                 </a:tc>
@@ -7426,7 +5597,7 @@
                   </a:txBody>
                   <a:tcPr>
                     <a:solidFill>
-                      <a:srgbClr val="F4F6F8"/>
+                      <a:srgbClr val="E6F1F8"/>
                     </a:solidFill>
                   </a:tcPr>
                 </a:tc>
@@ -7449,7 +5620,7 @@
                   </a:txBody>
                   <a:tcPr>
                     <a:solidFill>
-                      <a:srgbClr val="F4F6F8"/>
+                      <a:srgbClr val="E6F1F8"/>
                     </a:solidFill>
                   </a:tcPr>
                 </a:tc>
@@ -7472,7 +5643,7 @@
                   </a:txBody>
                   <a:tcPr>
                     <a:solidFill>
-                      <a:srgbClr val="F4F6F8"/>
+                      <a:srgbClr val="E6F1F8"/>
                     </a:solidFill>
                   </a:tcPr>
                 </a:tc>
@@ -7495,12 +5666,12 @@
                   </a:txBody>
                   <a:tcPr>
                     <a:solidFill>
-                      <a:srgbClr val="F4F6F8"/>
+                      <a:srgbClr val="E6F1F8"/>
                     </a:solidFill>
                   </a:tcPr>
                 </a:tc>
               </a:tr>
-              <a:tr h="274320">
+              <a:tr h="259080">
                 <a:tc>
                   <a:txBody>
                     <a:bodyPr/>
@@ -7579,7 +5750,7 @@
                       <a:r>
                         <a:rPr sz="1100" b="0">
                           <a:solidFill>
-                            <a:srgbClr val="9B2C2C"/>
+                            <a:srgbClr val="C0392B"/>
                           </a:solidFill>
                           <a:latin typeface="Calibri"/>
                         </a:rPr>
@@ -7640,7 +5811,7 @@
                   </a:tcPr>
                 </a:tc>
               </a:tr>
-              <a:tr h="274320">
+              <a:tr h="259080">
                 <a:tc>
                   <a:txBody>
                     <a:bodyPr/>
@@ -7660,7 +5831,7 @@
                   </a:txBody>
                   <a:tcPr>
                     <a:solidFill>
-                      <a:srgbClr val="F4F6F8"/>
+                      <a:srgbClr val="E6F1F8"/>
                     </a:solidFill>
                   </a:tcPr>
                 </a:tc>
@@ -7683,7 +5854,7 @@
                   </a:txBody>
                   <a:tcPr>
                     <a:solidFill>
-                      <a:srgbClr val="F4F6F8"/>
+                      <a:srgbClr val="E6F1F8"/>
                     </a:solidFill>
                   </a:tcPr>
                 </a:tc>
@@ -7706,7 +5877,7 @@
                   </a:txBody>
                   <a:tcPr>
                     <a:solidFill>
-                      <a:srgbClr val="F4F6F8"/>
+                      <a:srgbClr val="E6F1F8"/>
                     </a:solidFill>
                   </a:tcPr>
                 </a:tc>
@@ -7729,7 +5900,7 @@
                   </a:txBody>
                   <a:tcPr>
                     <a:solidFill>
-                      <a:srgbClr val="F4F6F8"/>
+                      <a:srgbClr val="E6F1F8"/>
                     </a:solidFill>
                   </a:tcPr>
                 </a:tc>
@@ -7752,7 +5923,7 @@
                   </a:txBody>
                   <a:tcPr>
                     <a:solidFill>
-                      <a:srgbClr val="F4F6F8"/>
+                      <a:srgbClr val="E6F1F8"/>
                     </a:solidFill>
                   </a:tcPr>
                 </a:tc>
@@ -7775,12 +5946,12 @@
                   </a:txBody>
                   <a:tcPr>
                     <a:solidFill>
-                      <a:srgbClr val="F4F6F8"/>
+                      <a:srgbClr val="E6F1F8"/>
                     </a:solidFill>
                   </a:tcPr>
                 </a:tc>
               </a:tr>
-              <a:tr h="274320">
+              <a:tr h="259080">
                 <a:tc>
                   <a:txBody>
                     <a:bodyPr/>
@@ -7920,7 +6091,7 @@
                   </a:tcPr>
                 </a:tc>
               </a:tr>
-              <a:tr h="274320">
+              <a:tr h="259080">
                 <a:tc>
                   <a:txBody>
                     <a:bodyPr/>
@@ -7940,7 +6111,7 @@
                   </a:txBody>
                   <a:tcPr>
                     <a:solidFill>
-                      <a:srgbClr val="F4F6F8"/>
+                      <a:srgbClr val="E6F1F8"/>
                     </a:solidFill>
                   </a:tcPr>
                 </a:tc>
@@ -7963,7 +6134,7 @@
                   </a:txBody>
                   <a:tcPr>
                     <a:solidFill>
-                      <a:srgbClr val="F4F6F8"/>
+                      <a:srgbClr val="E6F1F8"/>
                     </a:solidFill>
                   </a:tcPr>
                 </a:tc>
@@ -7986,7 +6157,7 @@
                   </a:txBody>
                   <a:tcPr>
                     <a:solidFill>
-                      <a:srgbClr val="F4F6F8"/>
+                      <a:srgbClr val="E6F1F8"/>
                     </a:solidFill>
                   </a:tcPr>
                 </a:tc>
@@ -7999,7 +6170,7 @@
                       <a:r>
                         <a:rPr sz="1100" b="0">
                           <a:solidFill>
-                            <a:srgbClr val="9B2C2C"/>
+                            <a:srgbClr val="C0392B"/>
                           </a:solidFill>
                           <a:latin typeface="Calibri"/>
                         </a:rPr>
@@ -8009,7 +6180,7 @@
                   </a:txBody>
                   <a:tcPr>
                     <a:solidFill>
-                      <a:srgbClr val="F4F6F8"/>
+                      <a:srgbClr val="E6F1F8"/>
                     </a:solidFill>
                   </a:tcPr>
                 </a:tc>
@@ -8022,7 +6193,7 @@
                       <a:r>
                         <a:rPr sz="1100" b="0">
                           <a:solidFill>
-                            <a:srgbClr val="9B2C2C"/>
+                            <a:srgbClr val="C0392B"/>
                           </a:solidFill>
                           <a:latin typeface="Calibri"/>
                         </a:rPr>
@@ -8032,7 +6203,7 @@
                   </a:txBody>
                   <a:tcPr>
                     <a:solidFill>
-                      <a:srgbClr val="F4F6F8"/>
+                      <a:srgbClr val="E6F1F8"/>
                     </a:solidFill>
                   </a:tcPr>
                 </a:tc>
@@ -8055,12 +6226,12 @@
                   </a:txBody>
                   <a:tcPr>
                     <a:solidFill>
-                      <a:srgbClr val="F4F6F8"/>
+                      <a:srgbClr val="E6F1F8"/>
                     </a:solidFill>
                   </a:tcPr>
                 </a:tc>
               </a:tr>
-              <a:tr h="274320">
+              <a:tr h="259080">
                 <a:tc>
                   <a:txBody>
                     <a:bodyPr/>
@@ -8206,14 +6377,14 @@
       </p:graphicFrame>
       <p:sp>
         <p:nvSpPr>
-          <p:cNvPr id="31" name="TextBox 30"/>
+          <p:cNvPr id="13" name="TextBox 12"/>
           <p:cNvSpPr txBox="1"/>
           <p:nvPr/>
         </p:nvSpPr>
         <p:spPr>
           <a:xfrm>
-            <a:off x="347472" y="4480560"/>
-            <a:ext cx="5760720" cy="219456"/>
+            <a:off x="292608" y="4041648"/>
+            <a:ext cx="5669280" cy="219456"/>
           </a:xfrm>
           <a:prstGeom prst="rect">
             <a:avLst/>
@@ -8221,16 +6392,14 @@
           <a:noFill/>
         </p:spPr>
         <p:txBody>
-          <a:bodyPr wrap="square">
-            <a:spAutoFit/>
-          </a:bodyPr>
+          <a:bodyPr wrap="square" anchor="t"/>
           <a:lstStyle/>
           <a:p>
             <a:pPr algn="l"/>
             <a:r>
               <a:rPr sz="1200" b="1">
                 <a:solidFill>
-                  <a:srgbClr val="0B2545"/>
+                  <a:srgbClr val="003058"/>
                 </a:solidFill>
                 <a:latin typeface="Calibri"/>
               </a:rPr>
@@ -8241,22 +6410,22 @@
       </p:sp>
       <p:pic>
         <p:nvPicPr>
-          <p:cNvPr id="32" name="Picture 31" descr="noodles_price_ladder.png"/>
+          <p:cNvPr id="14" name="Picture 13" descr="sm_price.png"/>
           <p:cNvPicPr>
             <a:picLocks noChangeAspect="1"/>
           </p:cNvPicPr>
           <p:nvPr/>
         </p:nvPicPr>
         <p:blipFill>
-          <a:blip r:embed="rId3"/>
+          <a:blip r:embed="rId4"/>
           <a:stretch>
             <a:fillRect/>
           </a:stretch>
         </p:blipFill>
         <p:spPr>
           <a:xfrm>
-            <a:off x="256032" y="4663440"/>
-            <a:ext cx="5943600" cy="1783080"/>
+            <a:off x="201168" y="4242816"/>
+            <a:ext cx="5806440" cy="2148840"/>
           </a:xfrm>
           <a:prstGeom prst="rect">
             <a:avLst/>
@@ -8265,24 +6434,26 @@
       </p:pic>
       <p:sp>
         <p:nvSpPr>
-          <p:cNvPr id="33" name="Rectangle 32"/>
+          <p:cNvPr id="15" name="Rounded Rectangle 14"/>
           <p:cNvSpPr/>
           <p:nvPr/>
         </p:nvSpPr>
         <p:spPr>
           <a:xfrm>
-            <a:off x="6263640" y="4645152"/>
-            <a:ext cx="5577840" cy="1810512"/>
-          </a:xfrm>
-          <a:prstGeom prst="rect">
-            <a:avLst/>
+            <a:off x="6126480" y="4160520"/>
+            <a:ext cx="5779008" cy="2267712"/>
+          </a:xfrm>
+          <a:prstGeom prst="roundRect">
+            <a:avLst>
+              <a:gd name="adj" fmla="val 8000"/>
+            </a:avLst>
           </a:prstGeom>
           <a:solidFill>
-            <a:srgbClr val="F4F6F8"/>
+            <a:srgbClr val="FFFFFF"/>
           </a:solidFill>
-          <a:ln>
+          <a:ln w="12700">
             <a:solidFill>
-              <a:srgbClr val="D5DBE0"/>
+              <a:srgbClr val="D5DEE6"/>
             </a:solidFill>
           </a:ln>
         </p:spPr>
@@ -8310,50 +6481,91 @@
       </p:sp>
       <p:sp>
         <p:nvSpPr>
-          <p:cNvPr id="34" name="TextBox 33"/>
-          <p:cNvSpPr txBox="1"/>
-          <p:nvPr/>
-        </p:nvSpPr>
-        <p:spPr>
-          <a:xfrm>
-            <a:off x="6400800" y="4718304"/>
-            <a:ext cx="5303520" cy="219456"/>
+          <p:cNvPr id="16" name="Rectangle 15"/>
+          <p:cNvSpPr/>
+          <p:nvPr/>
+        </p:nvSpPr>
+        <p:spPr>
+          <a:xfrm>
+            <a:off x="6126480" y="4160520"/>
+            <a:ext cx="5779008" cy="310896"/>
           </a:xfrm>
           <a:prstGeom prst="rect">
             <a:avLst/>
           </a:prstGeom>
+          <a:solidFill>
+            <a:srgbClr val="003058"/>
+          </a:solidFill>
+          <a:ln>
+            <a:noFill/>
+          </a:ln>
+        </p:spPr>
+        <p:style>
+          <a:lnRef idx="1">
+            <a:schemeClr val="accent1"/>
+          </a:lnRef>
+          <a:fillRef idx="3">
+            <a:schemeClr val="accent1"/>
+          </a:fillRef>
+          <a:effectRef idx="2">
+            <a:schemeClr val="accent1"/>
+          </a:effectRef>
+          <a:fontRef idx="minor">
+            <a:schemeClr val="lt1"/>
+          </a:fontRef>
+        </p:style>
+        <p:txBody>
+          <a:bodyPr rtlCol="0" anchor="ctr"/>
+          <a:lstStyle/>
+          <a:p>
+            <a:pPr algn="ctr"/>
+          </a:p>
+        </p:txBody>
+      </p:sp>
+      <p:sp>
+        <p:nvSpPr>
+          <p:cNvPr id="17" name="TextBox 16"/>
+          <p:cNvSpPr txBox="1"/>
+          <p:nvPr/>
+        </p:nvSpPr>
+        <p:spPr>
+          <a:xfrm>
+            <a:off x="6254496" y="4187952"/>
+            <a:ext cx="5486400" cy="256032"/>
+          </a:xfrm>
+          <a:prstGeom prst="rect">
+            <a:avLst/>
+          </a:prstGeom>
           <a:noFill/>
         </p:spPr>
         <p:txBody>
-          <a:bodyPr wrap="square">
-            <a:spAutoFit/>
-          </a:bodyPr>
+          <a:bodyPr wrap="square" anchor="t"/>
           <a:lstStyle/>
           <a:p>
             <a:pPr algn="l"/>
             <a:r>
               <a:rPr sz="1200" b="1">
                 <a:solidFill>
-                  <a:srgbClr val="0B2545"/>
+                  <a:srgbClr val="FFFFFF"/>
                 </a:solidFill>
                 <a:latin typeface="Calibri"/>
               </a:rPr>
-              <a:t>Unilever competing SKUs (Jun 26 only)</a:t>
+              <a:t>Unilever competing SKUs — June 2026 only</a:t>
             </a:r>
           </a:p>
         </p:txBody>
       </p:sp>
       <p:graphicFrame>
         <p:nvGraphicFramePr>
-          <p:cNvPr id="35" name="Table 34"/>
+          <p:cNvPr id="18" name="Table 17"/>
           <p:cNvGraphicFramePr>
             <a:graphicFrameLocks noGrp="1"/>
           </p:cNvGraphicFramePr>
           <p:nvPr/>
         </p:nvGraphicFramePr>
         <p:xfrm>
-          <a:off x="6400800" y="4956048"/>
-          <a:ext cx="5303520" cy="1389888"/>
+          <a:off x="6236208" y="4535424"/>
+          <a:ext cx="5559551" cy="1783080"/>
         </p:xfrm>
         <a:graphic>
           <a:graphicData uri="http://schemas.openxmlformats.org/drawingml/2006/table">
@@ -8362,12 +6574,13 @@
                 <a:tableStyleId>{5C22544A-7EE6-4342-B048-85BDC9FD1C3A}</a:tableStyleId>
               </a:tblPr>
               <a:tblGrid>
-                <a:gridCol w="2148840"/>
-                <a:gridCol w="1005840"/>
-                <a:gridCol w="914400"/>
-                <a:gridCol w="1234440"/>
+                <a:gridCol w="1874519"/>
+                <a:gridCol w="868680"/>
+                <a:gridCol w="731520"/>
+                <a:gridCol w="960120"/>
+                <a:gridCol w="1124712"/>
               </a:tblGrid>
-              <a:tr h="347472">
+              <a:tr h="445770">
                 <a:tc>
                   <a:txBody>
                     <a:bodyPr/>
@@ -8387,7 +6600,7 @@
                   </a:txBody>
                   <a:tcPr>
                     <a:solidFill>
-                      <a:srgbClr val="0B2545"/>
+                      <a:srgbClr val="003058"/>
                     </a:solidFill>
                   </a:tcPr>
                 </a:tc>
@@ -8410,7 +6623,7 @@
                   </a:txBody>
                   <a:tcPr>
                     <a:solidFill>
-                      <a:srgbClr val="0B2545"/>
+                      <a:srgbClr val="003058"/>
                     </a:solidFill>
                   </a:tcPr>
                 </a:tc>
@@ -8433,7 +6646,7 @@
                   </a:txBody>
                   <a:tcPr>
                     <a:solidFill>
-                      <a:srgbClr val="0B2545"/>
+                      <a:srgbClr val="003058"/>
                     </a:solidFill>
                   </a:tcPr>
                 </a:tc>
@@ -8456,12 +6669,35 @@
                   </a:txBody>
                   <a:tcPr>
                     <a:solidFill>
-                      <a:srgbClr val="0B2545"/>
+                      <a:srgbClr val="003058"/>
+                    </a:solidFill>
+                  </a:tcPr>
+                </a:tc>
+                <a:tc>
+                  <a:txBody>
+                    <a:bodyPr/>
+                    <a:lstStyle/>
+                    <a:p>
+                      <a:pPr algn="r"/>
+                      <a:r>
+                        <a:rPr sz="1000" b="1">
+                          <a:solidFill>
+                            <a:srgbClr val="FFFFFF"/>
+                          </a:solidFill>
+                          <a:latin typeface="Calibri"/>
+                        </a:rPr>
+                        <a:t>R/kg</a:t>
+                      </a:r>
+                    </a:p>
+                  </a:txBody>
+                  <a:tcPr>
+                    <a:solidFill>
+                      <a:srgbClr val="003058"/>
                     </a:solidFill>
                   </a:tcPr>
                 </a:tc>
               </a:tr>
-              <a:tr h="347472">
+              <a:tr h="445770">
                 <a:tc>
                   <a:txBody>
                     <a:bodyPr/>
@@ -8481,7 +6717,7 @@
                   </a:txBody>
                   <a:tcPr>
                     <a:solidFill>
-                      <a:srgbClr val="F4F6F8"/>
+                      <a:srgbClr val="E6F1F8"/>
                     </a:solidFill>
                   </a:tcPr>
                 </a:tc>
@@ -8504,7 +6740,7 @@
                   </a:txBody>
                   <a:tcPr>
                     <a:solidFill>
-                      <a:srgbClr val="F4F6F8"/>
+                      <a:srgbClr val="E6F1F8"/>
                     </a:solidFill>
                   </a:tcPr>
                 </a:tc>
@@ -8527,7 +6763,7 @@
                   </a:txBody>
                   <a:tcPr>
                     <a:solidFill>
-                      <a:srgbClr val="F4F6F8"/>
+                      <a:srgbClr val="E6F1F8"/>
                     </a:solidFill>
                   </a:tcPr>
                 </a:tc>
@@ -8550,12 +6786,35 @@
                   </a:txBody>
                   <a:tcPr>
                     <a:solidFill>
-                      <a:srgbClr val="F4F6F8"/>
+                      <a:srgbClr val="E6F1F8"/>
+                    </a:solidFill>
+                  </a:tcPr>
+                </a:tc>
+                <a:tc>
+                  <a:txBody>
+                    <a:bodyPr/>
+                    <a:lstStyle/>
+                    <a:p>
+                      <a:pPr algn="r"/>
+                      <a:r>
+                        <a:rPr sz="1100" b="0">
+                          <a:solidFill>
+                            <a:srgbClr val="1A1A1A"/>
+                          </a:solidFill>
+                          <a:latin typeface="Calibri"/>
+                        </a:rPr>
+                        <a:t>R779/kg</a:t>
+                      </a:r>
+                    </a:p>
+                  </a:txBody>
+                  <a:tcPr>
+                    <a:solidFill>
+                      <a:srgbClr val="E6F1F8"/>
                     </a:solidFill>
                   </a:tcPr>
                 </a:tc>
               </a:tr>
-              <a:tr h="347472">
+              <a:tr h="445770">
                 <a:tc>
                   <a:txBody>
                     <a:bodyPr/>
@@ -8648,8 +6907,31 @@
                     </a:solidFill>
                   </a:tcPr>
                 </a:tc>
+                <a:tc>
+                  <a:txBody>
+                    <a:bodyPr/>
+                    <a:lstStyle/>
+                    <a:p>
+                      <a:pPr algn="r"/>
+                      <a:r>
+                        <a:rPr sz="1100" b="0">
+                          <a:solidFill>
+                            <a:srgbClr val="1A1A1A"/>
+                          </a:solidFill>
+                          <a:latin typeface="Calibri"/>
+                        </a:rPr>
+                        <a:t>R781/kg</a:t>
+                      </a:r>
+                    </a:p>
+                  </a:txBody>
+                  <a:tcPr>
+                    <a:solidFill>
+                      <a:srgbClr val="FFFFFF"/>
+                    </a:solidFill>
+                  </a:tcPr>
+                </a:tc>
               </a:tr>
-              <a:tr h="347472">
+              <a:tr h="445770">
                 <a:tc>
                   <a:txBody>
                     <a:bodyPr/>
@@ -8669,7 +6951,7 @@
                   </a:txBody>
                   <a:tcPr>
                     <a:solidFill>
-                      <a:srgbClr val="F4F6F8"/>
+                      <a:srgbClr val="E6F1F8"/>
                     </a:solidFill>
                   </a:tcPr>
                 </a:tc>
@@ -8692,7 +6974,7 @@
                   </a:txBody>
                   <a:tcPr>
                     <a:solidFill>
-                      <a:srgbClr val="F4F6F8"/>
+                      <a:srgbClr val="E6F1F8"/>
                     </a:solidFill>
                   </a:tcPr>
                 </a:tc>
@@ -8715,7 +6997,7 @@
                   </a:txBody>
                   <a:tcPr>
                     <a:solidFill>
-                      <a:srgbClr val="F4F6F8"/>
+                      <a:srgbClr val="E6F1F8"/>
                     </a:solidFill>
                   </a:tcPr>
                 </a:tc>
@@ -8738,7 +7020,30 @@
                   </a:txBody>
                   <a:tcPr>
                     <a:solidFill>
-                      <a:srgbClr val="F4F6F8"/>
+                      <a:srgbClr val="E6F1F8"/>
+                    </a:solidFill>
+                  </a:tcPr>
+                </a:tc>
+                <a:tc>
+                  <a:txBody>
+                    <a:bodyPr/>
+                    <a:lstStyle/>
+                    <a:p>
+                      <a:pPr algn="r"/>
+                      <a:r>
+                        <a:rPr sz="1100" b="0">
+                          <a:solidFill>
+                            <a:srgbClr val="1A1A1A"/>
+                          </a:solidFill>
+                          <a:latin typeface="Calibri"/>
+                        </a:rPr>
+                        <a:t>R832/kg</a:t>
+                      </a:r>
+                    </a:p>
+                  </a:txBody>
+                  <a:tcPr>
+                    <a:solidFill>
+                      <a:srgbClr val="E6F1F8"/>
                     </a:solidFill>
                   </a:tcPr>
                 </a:tc>
@@ -8755,7 +7060,7 @@
 </p:sld>
 </file>
 
-<file path=ppt/slides/slide3.xml><?xml version="1.0" encoding="utf-8"?>
+<file path=ppt/slides/slide5.xml><?xml version="1.0" encoding="utf-8"?>
 <p:sld xmlns:a="http://schemas.openxmlformats.org/drawingml/2006/main" xmlns:p="http://schemas.openxmlformats.org/presentationml/2006/main" xmlns:r="http://schemas.openxmlformats.org/officeDocument/2006/relationships">
   <p:cSld>
     <p:spTree>
@@ -8774,13 +7079,13 @@
         <p:spPr>
           <a:xfrm>
             <a:off x="0" y="0"/>
-            <a:ext cx="12191695" cy="804672"/>
+            <a:ext cx="12191695" cy="6858000"/>
           </a:xfrm>
           <a:prstGeom prst="rect">
             <a:avLst/>
           </a:prstGeom>
           <a:solidFill>
-            <a:srgbClr val="0B2545"/>
+            <a:srgbClr val="EEF3F6"/>
           </a:solidFill>
           <a:ln>
             <a:noFill/>
@@ -8808,95 +7113,86 @@
           </a:p>
         </p:txBody>
       </p:sp>
-      <p:sp>
-        <p:nvSpPr>
-          <p:cNvPr id="3" name="TextBox 2"/>
-          <p:cNvSpPr txBox="1"/>
-          <p:nvPr/>
-        </p:nvSpPr>
-        <p:spPr>
-          <a:xfrm>
-            <a:off x="347472" y="91440"/>
-            <a:ext cx="11430000" cy="365760"/>
+      <p:pic>
+        <p:nvPicPr>
+          <p:cNvPr id="3" name="Picture 2" descr="logo_content.png"/>
+          <p:cNvPicPr>
+            <a:picLocks noChangeAspect="1"/>
+          </p:cNvPicPr>
+          <p:nvPr/>
+        </p:nvPicPr>
+        <p:blipFill>
+          <a:blip r:embed="rId2"/>
+          <a:stretch>
+            <a:fillRect/>
+          </a:stretch>
+        </p:blipFill>
+        <p:spPr>
+          <a:xfrm>
+            <a:off x="256032" y="146304"/>
+            <a:ext cx="1691640" cy="475488"/>
           </a:xfrm>
           <a:prstGeom prst="rect">
             <a:avLst/>
           </a:prstGeom>
+        </p:spPr>
+      </p:pic>
+      <p:sp>
+        <p:nvSpPr>
+          <p:cNvPr id="4" name="TextBox 3"/>
+          <p:cNvSpPr txBox="1"/>
+          <p:nvPr/>
+        </p:nvSpPr>
+        <p:spPr>
+          <a:xfrm>
+            <a:off x="2103120" y="164592"/>
+            <a:ext cx="9784080" cy="384048"/>
+          </a:xfrm>
+          <a:prstGeom prst="rect">
+            <a:avLst/>
+          </a:prstGeom>
           <a:noFill/>
         </p:spPr>
         <p:txBody>
-          <a:bodyPr wrap="square">
-            <a:spAutoFit/>
-          </a:bodyPr>
+          <a:bodyPr wrap="square" anchor="t"/>
           <a:lstStyle/>
           <a:p>
             <a:pPr algn="l"/>
             <a:r>
               <a:rPr sz="2200" b="1">
                 <a:solidFill>
-                  <a:srgbClr val="FFFFFF"/>
+                  <a:srgbClr val="1A1A1A"/>
                 </a:solidFill>
                 <a:latin typeface="Calibri"/>
               </a:rPr>
-              <a:t>So what for Unilever</a:t>
-            </a:r>
-          </a:p>
-        </p:txBody>
-      </p:sp>
-      <p:sp>
-        <p:nvSpPr>
-          <p:cNvPr id="4" name="TextBox 3"/>
-          <p:cNvSpPr txBox="1"/>
-          <p:nvPr/>
-        </p:nvSpPr>
-        <p:spPr>
-          <a:xfrm>
-            <a:off x="347472" y="457200"/>
-            <a:ext cx="11430000" cy="274320"/>
-          </a:xfrm>
-          <a:prstGeom prst="rect">
-            <a:avLst/>
-          </a:prstGeom>
-          <a:noFill/>
-        </p:spPr>
-        <p:txBody>
-          <a:bodyPr wrap="square">
-            <a:spAutoFit/>
-          </a:bodyPr>
-          <a:lstStyle/>
-          <a:p>
-            <a:pPr algn="l"/>
-            <a:r>
-              <a:rPr sz="1100" b="0">
-                <a:solidFill>
-                  <a:srgbClr val="C9D6E3"/>
-                </a:solidFill>
-                <a:latin typeface="Calibri"/>
-              </a:rPr>
-              <a:t>Pasta Pots are a different product and price tier, not a head-to-head with Maggi or Kellogg's sachets</a:t>
-            </a:r>
-          </a:p>
-        </p:txBody>
-      </p:sp>
-      <p:sp>
-        <p:nvSpPr>
-          <p:cNvPr id="5" name="Rectangle 4"/>
+              <a:t>Noodles - How Unilever should read this category</a:t>
+            </a:r>
+          </a:p>
+        </p:txBody>
+      </p:sp>
+      <p:sp>
+        <p:nvSpPr>
+          <p:cNvPr id="5" name="Rounded Rectangle 4"/>
           <p:cNvSpPr/>
           <p:nvPr/>
         </p:nvSpPr>
         <p:spPr>
           <a:xfrm>
-            <a:off x="0" y="6601968"/>
-            <a:ext cx="12191695" cy="256032"/>
-          </a:xfrm>
-          <a:prstGeom prst="rect">
-            <a:avLst/>
+            <a:off x="256032" y="713232"/>
+            <a:ext cx="11667744" cy="658368"/>
+          </a:xfrm>
+          <a:prstGeom prst="roundRect">
+            <a:avLst>
+              <a:gd name="adj" fmla="val 8000"/>
+            </a:avLst>
           </a:prstGeom>
           <a:solidFill>
-            <a:srgbClr val="0B2545"/>
+            <a:srgbClr val="FFFFFF"/>
           </a:solidFill>
-          <a:ln>
-            <a:noFill/>
+          <a:ln w="12700">
+            <a:solidFill>
+              <a:srgbClr val="D5DEE6"/>
+            </a:solidFill>
           </a:ln>
         </p:spPr>
         <p:style>
@@ -8929,8 +7225,8 @@
         </p:nvSpPr>
         <p:spPr>
           <a:xfrm>
-            <a:off x="347472" y="6620256"/>
-            <a:ext cx="11521440" cy="201168"/>
+            <a:off x="384048" y="786384"/>
+            <a:ext cx="11411712" cy="512064"/>
           </a:xfrm>
           <a:prstGeom prst="rect">
             <a:avLst/>
@@ -8938,44 +7234,110 @@
           <a:noFill/>
         </p:spPr>
         <p:txBody>
-          <a:bodyPr wrap="square">
-            <a:spAutoFit/>
-          </a:bodyPr>
+          <a:bodyPr wrap="square" anchor="t"/>
           <a:lstStyle/>
           <a:p>
             <a:pPr algn="l"/>
             <a:r>
-              <a:rPr sz="1000" b="0">
-                <a:solidFill>
-                  <a:srgbClr val="C9D6E3"/>
+              <a:rPr sz="1300" b="0">
+                <a:solidFill>
+                  <a:srgbClr val="1A1A1A"/>
                 </a:solidFill>
                 <a:latin typeface="Calibri"/>
               </a:rPr>
-              <a:t>Source: Monthly Trended Export, South Africa Pasta, multi-retailer  ·  12 months = Jul 25–Jun 26 vs YA Jul 24–Jun 25  ·  Price = value ÷ volume (R/kg)  ·  Latest month = Jun 26</a:t>
-            </a:r>
-          </a:p>
-        </p:txBody>
-      </p:sp>
-      <p:sp>
-        <p:nvSpPr>
-          <p:cNvPr id="7" name="Rectangle 6"/>
-          <p:cNvSpPr/>
-          <p:nvPr/>
-        </p:nvSpPr>
-        <p:spPr>
-          <a:xfrm>
-            <a:off x="347472" y="987552"/>
-            <a:ext cx="5669280" cy="5413248"/>
+              <a:t>Knorr Pasta Pots are a R1.24m June entry (0.56% of Noodles). They do not compete in the R6 sachet game that is 86% of noodles value. Treat them as a cup/meal occasion and keep the three SKUs from fragmenting.</a:t>
+            </a:r>
+          </a:p>
+        </p:txBody>
+      </p:sp>
+      <p:sp>
+        <p:nvSpPr>
+          <p:cNvPr id="7" name="TextBox 6"/>
+          <p:cNvSpPr txBox="1"/>
+          <p:nvPr/>
+        </p:nvSpPr>
+        <p:spPr>
+          <a:xfrm>
+            <a:off x="256032" y="6601968"/>
+            <a:ext cx="4114800" cy="201168"/>
           </a:xfrm>
           <a:prstGeom prst="rect">
             <a:avLst/>
           </a:prstGeom>
+          <a:noFill/>
+        </p:spPr>
+        <p:txBody>
+          <a:bodyPr wrap="square" anchor="t"/>
+          <a:lstStyle/>
+          <a:p>
+            <a:pPr algn="l"/>
+            <a:r>
+              <a:rPr sz="900" b="0">
+                <a:solidFill>
+                  <a:srgbClr val="6A7A86"/>
+                </a:solidFill>
+                <a:latin typeface="Calibri"/>
+              </a:rPr>
+              <a:t>A SMOLLAN COMPANY</a:t>
+            </a:r>
+          </a:p>
+        </p:txBody>
+      </p:sp>
+      <p:sp>
+        <p:nvSpPr>
+          <p:cNvPr id="8" name="TextBox 7"/>
+          <p:cNvSpPr txBox="1"/>
+          <p:nvPr/>
+        </p:nvSpPr>
+        <p:spPr>
+          <a:xfrm>
+            <a:off x="4937760" y="6601968"/>
+            <a:ext cx="6995160" cy="201168"/>
+          </a:xfrm>
+          <a:prstGeom prst="rect">
+            <a:avLst/>
+          </a:prstGeom>
+          <a:noFill/>
+        </p:spPr>
+        <p:txBody>
+          <a:bodyPr wrap="square" anchor="t"/>
+          <a:lstStyle/>
+          <a:p>
+            <a:pPr algn="r"/>
+            <a:r>
+              <a:rPr sz="900" b="0">
+                <a:solidFill>
+                  <a:srgbClr val="6A7A86"/>
+                </a:solidFill>
+                <a:latin typeface="Calibri"/>
+              </a:rPr>
+              <a:t>EMPOWERING RETAIL PRECISION WITH DATA, SOFTWARE &amp; AI    5</a:t>
+            </a:r>
+          </a:p>
+        </p:txBody>
+      </p:sp>
+      <p:sp>
+        <p:nvSpPr>
+          <p:cNvPr id="9" name="Rounded Rectangle 8"/>
+          <p:cNvSpPr/>
+          <p:nvPr/>
+        </p:nvSpPr>
+        <p:spPr>
+          <a:xfrm>
+            <a:off x="256032" y="1481328"/>
+            <a:ext cx="2852928" cy="4937760"/>
+          </a:xfrm>
+          <a:prstGeom prst="roundRect">
+            <a:avLst>
+              <a:gd name="adj" fmla="val 8000"/>
+            </a:avLst>
+          </a:prstGeom>
           <a:solidFill>
-            <a:srgbClr val="F4F6F8"/>
+            <a:srgbClr val="FFFFFF"/>
           </a:solidFill>
-          <a:ln>
+          <a:ln w="12700">
             <a:solidFill>
-              <a:srgbClr val="D5DBE0"/>
+              <a:srgbClr val="D5DEE6"/>
             </a:solidFill>
           </a:ln>
         </p:spPr>
@@ -9003,14 +7365,80 @@
       </p:sp>
       <p:sp>
         <p:nvSpPr>
-          <p:cNvPr id="8" name="TextBox 7"/>
+          <p:cNvPr id="10" name="TextBox 9"/>
           <p:cNvSpPr txBox="1"/>
           <p:nvPr/>
         </p:nvSpPr>
         <p:spPr>
           <a:xfrm>
-            <a:off x="502920" y="1097280"/>
-            <a:ext cx="5349240" cy="274320"/>
+            <a:off x="365760" y="1554480"/>
+            <a:ext cx="2651760" cy="502920"/>
+          </a:xfrm>
+          <a:prstGeom prst="rect">
+            <a:avLst/>
+          </a:prstGeom>
+          <a:noFill/>
+        </p:spPr>
+        <p:txBody>
+          <a:bodyPr wrap="square" anchor="t"/>
+          <a:lstStyle/>
+          <a:p>
+            <a:pPr algn="l"/>
+            <a:r>
+              <a:rPr sz="1400" b="1">
+                <a:solidFill>
+                  <a:srgbClr val="0078C0"/>
+                </a:solidFill>
+                <a:latin typeface="Calibri"/>
+              </a:rPr>
+              <a:t>Protect the read</a:t>
+            </a:r>
+          </a:p>
+        </p:txBody>
+      </p:sp>
+      <p:sp>
+        <p:nvSpPr>
+          <p:cNvPr id="11" name="TextBox 10"/>
+          <p:cNvSpPr txBox="1"/>
+          <p:nvPr/>
+        </p:nvSpPr>
+        <p:spPr>
+          <a:xfrm>
+            <a:off x="365760" y="2029968"/>
+            <a:ext cx="2651760" cy="219456"/>
+          </a:xfrm>
+          <a:prstGeom prst="rect">
+            <a:avLst/>
+          </a:prstGeom>
+          <a:noFill/>
+        </p:spPr>
+        <p:txBody>
+          <a:bodyPr wrap="square" anchor="t"/>
+          <a:lstStyle/>
+          <a:p>
+            <a:pPr algn="l"/>
+            <a:r>
+              <a:rPr sz="1100" b="1">
+                <a:solidFill>
+                  <a:srgbClr val="003058"/>
+                </a:solidFill>
+                <a:latin typeface="Calibri"/>
+              </a:rPr>
+              <a:t>Why?</a:t>
+            </a:r>
+          </a:p>
+        </p:txBody>
+      </p:sp>
+      <p:sp>
+        <p:nvSpPr>
+          <p:cNvPr id="12" name="TextBox 11"/>
+          <p:cNvSpPr txBox="1"/>
+          <p:nvPr/>
+        </p:nvSpPr>
+        <p:spPr>
+          <a:xfrm>
+            <a:off x="365760" y="2249424"/>
+            <a:ext cx="2651760" cy="2240280"/>
           </a:xfrm>
           <a:prstGeom prst="rect">
             <a:avLst/>
@@ -9023,122 +7451,73 @@
           </a:bodyPr>
           <a:lstStyle/>
           <a:p>
-            <a:pPr algn="l"/>
-            <a:r>
-              <a:rPr sz="1600" b="1">
-                <a:solidFill>
-                  <a:srgbClr val="0B2545"/>
+            <a:pPr>
+              <a:spcAft>
+                <a:spcPts val="800"/>
+              </a:spcAft>
+            </a:pPr>
+            <a:r>
+              <a:rPr sz="1100" b="0">
+                <a:solidFill>
+                  <a:srgbClr val="1A1A1A"/>
                 </a:solidFill>
                 <a:latin typeface="Calibri"/>
               </a:rPr>
-              <a:t>What the category is doing</a:t>
-            </a:r>
-          </a:p>
-        </p:txBody>
-      </p:sp>
-      <p:sp>
-        <p:nvSpPr>
-          <p:cNvPr id="9" name="TextBox 8"/>
-          <p:cNvSpPr txBox="1"/>
-          <p:nvPr/>
-        </p:nvSpPr>
-        <p:spPr>
-          <a:xfrm>
-            <a:off x="502920" y="1444752"/>
-            <a:ext cx="5349240" cy="4754880"/>
-          </a:xfrm>
-          <a:prstGeom prst="rect">
-            <a:avLst/>
-          </a:prstGeom>
-          <a:noFill/>
-        </p:spPr>
-        <p:txBody>
-          <a:bodyPr wrap="square">
-            <a:spAutoFit/>
-          </a:bodyPr>
-          <a:lstStyle/>
+              <a:t>•  Noodles is the Pasta category (64% of value, +8.2%).</a:t>
+            </a:r>
+          </a:p>
           <a:p>
             <a:pPr>
               <a:spcAft>
-                <a:spcPts val="500"/>
+                <a:spcPts val="800"/>
               </a:spcAft>
             </a:pPr>
             <a:r>
-              <a:rPr sz="1400" b="0">
+              <a:rPr sz="1100" b="0">
                 <a:solidFill>
                   <a:srgbClr val="1A1A1A"/>
                 </a:solidFill>
                 <a:latin typeface="Calibri"/>
               </a:rPr>
-              <a:t>•  Noodles is the Pasta category. 64% of value, growing faster than dry pasta, and the only segment Unilever is in.</a:t>
+              <a:t>•  Kellogg's 46% and Maggi 29% set the competitive frame.</a:t>
             </a:r>
           </a:p>
           <a:p>
             <a:pPr>
               <a:spcAft>
-                <a:spcPts val="500"/>
+                <a:spcPts val="800"/>
               </a:spcAft>
             </a:pPr>
             <a:r>
-              <a:rPr sz="1400" b="0">
+              <a:rPr sz="1100" b="0">
                 <a:solidFill>
                   <a:srgbClr val="1A1A1A"/>
                 </a:solidFill>
                 <a:latin typeface="Calibri"/>
               </a:rPr>
-              <a:t>•  The mass market is a R6 sachet: Kellogg's (~R87/kg) and Maggi (~R100/kg). Roka undercuts at ~R69/kg. That band is ~87% of noodles value.</a:t>
-            </a:r>
-          </a:p>
-          <a:p>
-            <a:pPr>
-              <a:spcAft>
-                <a:spcPts val="500"/>
-              </a:spcAft>
-            </a:pPr>
-            <a:r>
-              <a:rPr sz="1400" b="0">
-                <a:solidFill>
-                  <a:srgbClr val="1A1A1A"/>
-                </a:solidFill>
-                <a:latin typeface="Calibri"/>
-              </a:rPr>
-              <a:t>•  Kellogg's is taking Maggi's lunch. Maggi −5.1pp over 12 months; Kellogg's +2.0pp. Indomie and Samyang are the other gainers.</a:t>
-            </a:r>
-          </a:p>
-          <a:p>
-            <a:pPr>
-              <a:spcAft>
-                <a:spcPts val="500"/>
-              </a:spcAft>
-            </a:pPr>
-            <a:r>
-              <a:rPr sz="1400" b="0">
-                <a:solidFill>
-                  <a:srgbClr val="1A1A1A"/>
-                </a:solidFill>
-                <a:latin typeface="Calibri"/>
-              </a:rPr>
-              <a:t>•  Dry pasta is a separate fight (Tiger, private label, Mr Pasta at R30–35/kg). Unilever is absent there.</a:t>
-            </a:r>
-          </a:p>
-        </p:txBody>
-      </p:sp>
-      <p:sp>
-        <p:nvSpPr>
-          <p:cNvPr id="10" name="Rectangle 9"/>
+              <a:t>•  Dry pasta is Tiger / private label at R32–35/kg — Unilever is absent.</a:t>
+            </a:r>
+          </a:p>
+        </p:txBody>
+      </p:sp>
+      <p:sp>
+        <p:nvSpPr>
+          <p:cNvPr id="13" name="Rounded Rectangle 12"/>
           <p:cNvSpPr/>
           <p:nvPr/>
         </p:nvSpPr>
         <p:spPr>
           <a:xfrm>
-            <a:off x="6199632" y="987552"/>
-            <a:ext cx="5632704" cy="5413248"/>
-          </a:xfrm>
-          <a:prstGeom prst="rect">
-            <a:avLst/>
+            <a:off x="347472" y="4828032"/>
+            <a:ext cx="2670048" cy="1444752"/>
+          </a:xfrm>
+          <a:prstGeom prst="roundRect">
+            <a:avLst>
+              <a:gd name="adj" fmla="val 8000"/>
+            </a:avLst>
           </a:prstGeom>
           <a:solidFill>
-            <a:srgbClr val="0B2545"/>
+            <a:srgbClr val="D6EBF6"/>
           </a:solidFill>
           <a:ln>
             <a:noFill/>
@@ -9168,14 +7547,193 @@
       </p:sp>
       <p:sp>
         <p:nvSpPr>
-          <p:cNvPr id="11" name="TextBox 10"/>
+          <p:cNvPr id="14" name="TextBox 13"/>
           <p:cNvSpPr txBox="1"/>
           <p:nvPr/>
         </p:nvSpPr>
         <p:spPr>
           <a:xfrm>
-            <a:off x="6364224" y="1097280"/>
-            <a:ext cx="5303520" cy="274320"/>
+            <a:off x="438912" y="4882896"/>
+            <a:ext cx="2505456" cy="201168"/>
+          </a:xfrm>
+          <a:prstGeom prst="rect">
+            <a:avLst/>
+          </a:prstGeom>
+          <a:noFill/>
+        </p:spPr>
+        <p:txBody>
+          <a:bodyPr wrap="square" anchor="t"/>
+          <a:lstStyle/>
+          <a:p>
+            <a:pPr algn="l"/>
+            <a:r>
+              <a:rPr sz="1100" b="1">
+                <a:solidFill>
+                  <a:srgbClr val="003058"/>
+                </a:solidFill>
+                <a:latin typeface="Calibri"/>
+              </a:rPr>
+              <a:t>Action</a:t>
+            </a:r>
+          </a:p>
+        </p:txBody>
+      </p:sp>
+      <p:sp>
+        <p:nvSpPr>
+          <p:cNvPr id="15" name="TextBox 14"/>
+          <p:cNvSpPr txBox="1"/>
+          <p:nvPr/>
+        </p:nvSpPr>
+        <p:spPr>
+          <a:xfrm>
+            <a:off x="438912" y="5084064"/>
+            <a:ext cx="2505456" cy="1115568"/>
+          </a:xfrm>
+          <a:prstGeom prst="rect">
+            <a:avLst/>
+          </a:prstGeom>
+          <a:noFill/>
+        </p:spPr>
+        <p:txBody>
+          <a:bodyPr wrap="square" anchor="t"/>
+          <a:lstStyle/>
+          <a:p>
+            <a:pPr algn="l"/>
+            <a:r>
+              <a:rPr sz="1100" b="0">
+                <a:solidFill>
+                  <a:srgbClr val="1A1A1A"/>
+                </a:solidFill>
+                <a:latin typeface="Calibri"/>
+              </a:rPr>
+              <a:t>Do not brief Pasta Pots as a Maggi 2-minute sachet competitor.</a:t>
+            </a:r>
+          </a:p>
+        </p:txBody>
+      </p:sp>
+      <p:sp>
+        <p:nvSpPr>
+          <p:cNvPr id="16" name="Rounded Rectangle 15"/>
+          <p:cNvSpPr/>
+          <p:nvPr/>
+        </p:nvSpPr>
+        <p:spPr>
+          <a:xfrm>
+            <a:off x="3236976" y="1481328"/>
+            <a:ext cx="2852928" cy="4937760"/>
+          </a:xfrm>
+          <a:prstGeom prst="roundRect">
+            <a:avLst>
+              <a:gd name="adj" fmla="val 8000"/>
+            </a:avLst>
+          </a:prstGeom>
+          <a:solidFill>
+            <a:srgbClr val="FFFFFF"/>
+          </a:solidFill>
+          <a:ln w="12700">
+            <a:solidFill>
+              <a:srgbClr val="D5DEE6"/>
+            </a:solidFill>
+          </a:ln>
+        </p:spPr>
+        <p:style>
+          <a:lnRef idx="1">
+            <a:schemeClr val="accent1"/>
+          </a:lnRef>
+          <a:fillRef idx="3">
+            <a:schemeClr val="accent1"/>
+          </a:fillRef>
+          <a:effectRef idx="2">
+            <a:schemeClr val="accent1"/>
+          </a:effectRef>
+          <a:fontRef idx="minor">
+            <a:schemeClr val="lt1"/>
+          </a:fontRef>
+        </p:style>
+        <p:txBody>
+          <a:bodyPr rtlCol="0" anchor="ctr"/>
+          <a:lstStyle/>
+          <a:p>
+            <a:pPr algn="ctr"/>
+          </a:p>
+        </p:txBody>
+      </p:sp>
+      <p:sp>
+        <p:nvSpPr>
+          <p:cNvPr id="17" name="TextBox 16"/>
+          <p:cNvSpPr txBox="1"/>
+          <p:nvPr/>
+        </p:nvSpPr>
+        <p:spPr>
+          <a:xfrm>
+            <a:off x="3346704" y="1554480"/>
+            <a:ext cx="2651760" cy="502920"/>
+          </a:xfrm>
+          <a:prstGeom prst="rect">
+            <a:avLst/>
+          </a:prstGeom>
+          <a:noFill/>
+        </p:spPr>
+        <p:txBody>
+          <a:bodyPr wrap="square" anchor="t"/>
+          <a:lstStyle/>
+          <a:p>
+            <a:pPr algn="l"/>
+            <a:r>
+              <a:rPr sz="1400" b="1">
+                <a:solidFill>
+                  <a:srgbClr val="0078C0"/>
+                </a:solidFill>
+                <a:latin typeface="Calibri"/>
+              </a:rPr>
+              <a:t>Watch Maggi's loss</a:t>
+            </a:r>
+          </a:p>
+        </p:txBody>
+      </p:sp>
+      <p:sp>
+        <p:nvSpPr>
+          <p:cNvPr id="18" name="TextBox 17"/>
+          <p:cNvSpPr txBox="1"/>
+          <p:nvPr/>
+        </p:nvSpPr>
+        <p:spPr>
+          <a:xfrm>
+            <a:off x="3346704" y="2029968"/>
+            <a:ext cx="2651760" cy="219456"/>
+          </a:xfrm>
+          <a:prstGeom prst="rect">
+            <a:avLst/>
+          </a:prstGeom>
+          <a:noFill/>
+        </p:spPr>
+        <p:txBody>
+          <a:bodyPr wrap="square" anchor="t"/>
+          <a:lstStyle/>
+          <a:p>
+            <a:pPr algn="l"/>
+            <a:r>
+              <a:rPr sz="1100" b="1">
+                <a:solidFill>
+                  <a:srgbClr val="003058"/>
+                </a:solidFill>
+                <a:latin typeface="Calibri"/>
+              </a:rPr>
+              <a:t>Why?</a:t>
+            </a:r>
+          </a:p>
+        </p:txBody>
+      </p:sp>
+      <p:sp>
+        <p:nvSpPr>
+          <p:cNvPr id="19" name="TextBox 18"/>
+          <p:cNvSpPr txBox="1"/>
+          <p:nvPr/>
+        </p:nvSpPr>
+        <p:spPr>
+          <a:xfrm>
+            <a:off x="3346704" y="2249424"/>
+            <a:ext cx="2651760" cy="2240280"/>
           </a:xfrm>
           <a:prstGeom prst="rect">
             <a:avLst/>
@@ -9188,29 +7746,289 @@
           </a:bodyPr>
           <a:lstStyle/>
           <a:p>
-            <a:pPr algn="l"/>
-            <a:r>
-              <a:rPr sz="1600" b="1">
-                <a:solidFill>
-                  <a:srgbClr val="FFFFFF"/>
+            <a:pPr>
+              <a:spcAft>
+                <a:spcPts val="800"/>
+              </a:spcAft>
+            </a:pPr>
+            <a:r>
+              <a:rPr sz="1100" b="0">
+                <a:solidFill>
+                  <a:srgbClr val="1A1A1A"/>
                 </a:solidFill>
                 <a:latin typeface="Calibri"/>
               </a:rPr>
-              <a:t>Where Unilever sits</a:t>
-            </a:r>
-          </a:p>
-        </p:txBody>
-      </p:sp>
-      <p:sp>
-        <p:nvSpPr>
-          <p:cNvPr id="12" name="TextBox 11"/>
+              <a:t>•  Maggi −5.1pp over 12 months; Kellogg's +2.0pp.</a:t>
+            </a:r>
+          </a:p>
+          <a:p>
+            <a:pPr>
+              <a:spcAft>
+                <a:spcPts val="800"/>
+              </a:spcAft>
+            </a:pPr>
+            <a:r>
+              <a:rPr sz="1100" b="0">
+                <a:solidFill>
+                  <a:srgbClr val="1A1A1A"/>
+                </a:solidFill>
+                <a:latin typeface="Calibri"/>
+              </a:rPr>
+              <a:t>•  Indomie +2.1pp and Samyang +1.8pp are the other gainers.</a:t>
+            </a:r>
+          </a:p>
+          <a:p>
+            <a:pPr>
+              <a:spcAft>
+                <a:spcPts val="800"/>
+              </a:spcAft>
+            </a:pPr>
+            <a:r>
+              <a:rPr sz="1100" b="0">
+                <a:solidFill>
+                  <a:srgbClr val="1A1A1A"/>
+                </a:solidFill>
+                <a:latin typeface="Calibri"/>
+              </a:rPr>
+              <a:t>•  Mr Pasta −2.3pp — value/mid is under pressure.</a:t>
+            </a:r>
+          </a:p>
+        </p:txBody>
+      </p:sp>
+      <p:sp>
+        <p:nvSpPr>
+          <p:cNvPr id="20" name="Rounded Rectangle 19"/>
+          <p:cNvSpPr/>
+          <p:nvPr/>
+        </p:nvSpPr>
+        <p:spPr>
+          <a:xfrm>
+            <a:off x="3328416" y="4828032"/>
+            <a:ext cx="2670048" cy="1444752"/>
+          </a:xfrm>
+          <a:prstGeom prst="roundRect">
+            <a:avLst>
+              <a:gd name="adj" fmla="val 8000"/>
+            </a:avLst>
+          </a:prstGeom>
+          <a:solidFill>
+            <a:srgbClr val="D6EBF6"/>
+          </a:solidFill>
+          <a:ln>
+            <a:noFill/>
+          </a:ln>
+        </p:spPr>
+        <p:style>
+          <a:lnRef idx="1">
+            <a:schemeClr val="accent1"/>
+          </a:lnRef>
+          <a:fillRef idx="3">
+            <a:schemeClr val="accent1"/>
+          </a:fillRef>
+          <a:effectRef idx="2">
+            <a:schemeClr val="accent1"/>
+          </a:effectRef>
+          <a:fontRef idx="minor">
+            <a:schemeClr val="lt1"/>
+          </a:fontRef>
+        </p:style>
+        <p:txBody>
+          <a:bodyPr rtlCol="0" anchor="ctr"/>
+          <a:lstStyle/>
+          <a:p>
+            <a:pPr algn="ctr"/>
+          </a:p>
+        </p:txBody>
+      </p:sp>
+      <p:sp>
+        <p:nvSpPr>
+          <p:cNvPr id="21" name="TextBox 20"/>
           <p:cNvSpPr txBox="1"/>
           <p:nvPr/>
         </p:nvSpPr>
         <p:spPr>
           <a:xfrm>
-            <a:off x="6364224" y="1444752"/>
-            <a:ext cx="5303520" cy="4754880"/>
+            <a:off x="3419856" y="4882896"/>
+            <a:ext cx="2505456" cy="201168"/>
+          </a:xfrm>
+          <a:prstGeom prst="rect">
+            <a:avLst/>
+          </a:prstGeom>
+          <a:noFill/>
+        </p:spPr>
+        <p:txBody>
+          <a:bodyPr wrap="square" anchor="t"/>
+          <a:lstStyle/>
+          <a:p>
+            <a:pPr algn="l"/>
+            <a:r>
+              <a:rPr sz="1100" b="1">
+                <a:solidFill>
+                  <a:srgbClr val="003058"/>
+                </a:solidFill>
+                <a:latin typeface="Calibri"/>
+              </a:rPr>
+              <a:t>Action</a:t>
+            </a:r>
+          </a:p>
+        </p:txBody>
+      </p:sp>
+      <p:sp>
+        <p:nvSpPr>
+          <p:cNvPr id="22" name="TextBox 21"/>
+          <p:cNvSpPr txBox="1"/>
+          <p:nvPr/>
+        </p:nvSpPr>
+        <p:spPr>
+          <a:xfrm>
+            <a:off x="3419856" y="5084064"/>
+            <a:ext cx="2505456" cy="1115568"/>
+          </a:xfrm>
+          <a:prstGeom prst="rect">
+            <a:avLst/>
+          </a:prstGeom>
+          <a:noFill/>
+        </p:spPr>
+        <p:txBody>
+          <a:bodyPr wrap="square" anchor="t"/>
+          <a:lstStyle/>
+          <a:p>
+            <a:pPr algn="l"/>
+            <a:r>
+              <a:rPr sz="1100" b="0">
+                <a:solidFill>
+                  <a:srgbClr val="1A1A1A"/>
+                </a:solidFill>
+                <a:latin typeface="Calibri"/>
+              </a:rPr>
+              <a:t>Use Maggi's share loss as the main competitive opening to watch, not to copy on price.</a:t>
+            </a:r>
+          </a:p>
+        </p:txBody>
+      </p:sp>
+      <p:sp>
+        <p:nvSpPr>
+          <p:cNvPr id="23" name="Rounded Rectangle 22"/>
+          <p:cNvSpPr/>
+          <p:nvPr/>
+        </p:nvSpPr>
+        <p:spPr>
+          <a:xfrm>
+            <a:off x="6217920" y="1481328"/>
+            <a:ext cx="2852928" cy="4937760"/>
+          </a:xfrm>
+          <a:prstGeom prst="roundRect">
+            <a:avLst>
+              <a:gd name="adj" fmla="val 8000"/>
+            </a:avLst>
+          </a:prstGeom>
+          <a:solidFill>
+            <a:srgbClr val="FFFFFF"/>
+          </a:solidFill>
+          <a:ln w="12700">
+            <a:solidFill>
+              <a:srgbClr val="D5DEE6"/>
+            </a:solidFill>
+          </a:ln>
+        </p:spPr>
+        <p:style>
+          <a:lnRef idx="1">
+            <a:schemeClr val="accent1"/>
+          </a:lnRef>
+          <a:fillRef idx="3">
+            <a:schemeClr val="accent1"/>
+          </a:fillRef>
+          <a:effectRef idx="2">
+            <a:schemeClr val="accent1"/>
+          </a:effectRef>
+          <a:fontRef idx="minor">
+            <a:schemeClr val="lt1"/>
+          </a:fontRef>
+        </p:style>
+        <p:txBody>
+          <a:bodyPr rtlCol="0" anchor="ctr"/>
+          <a:lstStyle/>
+          <a:p>
+            <a:pPr algn="ctr"/>
+          </a:p>
+        </p:txBody>
+      </p:sp>
+      <p:sp>
+        <p:nvSpPr>
+          <p:cNvPr id="24" name="TextBox 23"/>
+          <p:cNvSpPr txBox="1"/>
+          <p:nvPr/>
+        </p:nvSpPr>
+        <p:spPr>
+          <a:xfrm>
+            <a:off x="6327648" y="1554480"/>
+            <a:ext cx="2651760" cy="502920"/>
+          </a:xfrm>
+          <a:prstGeom prst="rect">
+            <a:avLst/>
+          </a:prstGeom>
+          <a:noFill/>
+        </p:spPr>
+        <p:txBody>
+          <a:bodyPr wrap="square" anchor="t"/>
+          <a:lstStyle/>
+          <a:p>
+            <a:pPr algn="l"/>
+            <a:r>
+              <a:rPr sz="1400" b="1">
+                <a:solidFill>
+                  <a:srgbClr val="C45C26"/>
+                </a:solidFill>
+                <a:latin typeface="Calibri"/>
+              </a:rPr>
+              <a:t>Price architecture</a:t>
+            </a:r>
+          </a:p>
+        </p:txBody>
+      </p:sp>
+      <p:sp>
+        <p:nvSpPr>
+          <p:cNvPr id="25" name="TextBox 24"/>
+          <p:cNvSpPr txBox="1"/>
+          <p:nvPr/>
+        </p:nvSpPr>
+        <p:spPr>
+          <a:xfrm>
+            <a:off x="6327648" y="2029968"/>
+            <a:ext cx="2651760" cy="219456"/>
+          </a:xfrm>
+          <a:prstGeom prst="rect">
+            <a:avLst/>
+          </a:prstGeom>
+          <a:noFill/>
+        </p:spPr>
+        <p:txBody>
+          <a:bodyPr wrap="square" anchor="t"/>
+          <a:lstStyle/>
+          <a:p>
+            <a:pPr algn="l"/>
+            <a:r>
+              <a:rPr sz="1100" b="1">
+                <a:solidFill>
+                  <a:srgbClr val="003058"/>
+                </a:solidFill>
+                <a:latin typeface="Calibri"/>
+              </a:rPr>
+              <a:t>Why?</a:t>
+            </a:r>
+          </a:p>
+        </p:txBody>
+      </p:sp>
+      <p:sp>
+        <p:nvSpPr>
+          <p:cNvPr id="26" name="TextBox 25"/>
+          <p:cNvSpPr txBox="1"/>
+          <p:nvPr/>
+        </p:nvSpPr>
+        <p:spPr>
+          <a:xfrm>
+            <a:off x="6327648" y="2249424"/>
+            <a:ext cx="2651760" cy="2240280"/>
           </a:xfrm>
           <a:prstGeom prst="rect">
             <a:avLst/>
@@ -9225,81 +8043,663 @@
           <a:p>
             <a:pPr>
               <a:spcAft>
-                <a:spcPts val="1100"/>
+                <a:spcPts val="800"/>
               </a:spcAft>
             </a:pPr>
             <a:r>
-              <a:rPr sz="1400" b="0">
-                <a:solidFill>
-                  <a:srgbClr val="FFFFFF"/>
+              <a:rPr sz="1100" b="0">
+                <a:solidFill>
+                  <a:srgbClr val="1A1A1A"/>
                 </a:solidFill>
                 <a:latin typeface="Calibri"/>
               </a:rPr>
-              <a:t>•  Knorr Pasta Pots launched into the file in June only: R1.2m, 0.56% of Noodles, 0.37% of Pasta.</a:t>
+              <a:t>•  Roka ~R5.88  ·  Kellogg's ~R6.09  ·  Maggi ~R6.79.</a:t>
             </a:r>
           </a:p>
           <a:p>
             <a:pPr>
               <a:spcAft>
-                <a:spcPts val="1100"/>
+                <a:spcPts val="800"/>
               </a:spcAft>
             </a:pPr>
             <a:r>
-              <a:rPr sz="1400" b="0">
-                <a:solidFill>
-                  <a:srgbClr val="FFFFFF"/>
+              <a:rPr sz="1100" b="0">
+                <a:solidFill>
+                  <a:srgbClr val="1A1A1A"/>
                 </a:solidFill>
                 <a:latin typeface="Calibri"/>
               </a:rPr>
-              <a:t>•  One range, one price: ~R49 a pot / ~R790/kg — about 8× the mainstream sachet and 8× category noodles R/kg.</a:t>
+              <a:t>•  Indomie ~R7.90. Samyang ~R39 (ramen/cup).</a:t>
             </a:r>
           </a:p>
           <a:p>
             <a:pPr>
               <a:spcAft>
-                <a:spcPts val="1100"/>
+                <a:spcPts val="800"/>
               </a:spcAft>
             </a:pPr>
             <a:r>
-              <a:rPr sz="1400" b="0">
-                <a:solidFill>
-                  <a:srgbClr val="FFFFFF"/>
+              <a:rPr sz="1100" b="0">
+                <a:solidFill>
+                  <a:srgbClr val="1A1A1A"/>
                 </a:solidFill>
                 <a:latin typeface="Calibri"/>
               </a:rPr>
-              <a:t>•  Carbonara is the lead SKU (49%). This is a cup/meal occasion, closer to Samyang/ramen than to Maggi 2-minute sachets.</a:t>
-            </a:r>
-          </a:p>
+              <a:t>•  Knorr Pasta Pots ~R49 / ~R790/kg — ~8× sachet.</a:t>
+            </a:r>
+          </a:p>
+        </p:txBody>
+      </p:sp>
+      <p:sp>
+        <p:nvSpPr>
+          <p:cNvPr id="27" name="Rounded Rectangle 26"/>
+          <p:cNvSpPr/>
+          <p:nvPr/>
+        </p:nvSpPr>
+        <p:spPr>
+          <a:xfrm>
+            <a:off x="6309360" y="4828032"/>
+            <a:ext cx="2670048" cy="1444752"/>
+          </a:xfrm>
+          <a:prstGeom prst="roundRect">
+            <a:avLst>
+              <a:gd name="adj" fmla="val 8000"/>
+            </a:avLst>
+          </a:prstGeom>
+          <a:solidFill>
+            <a:srgbClr val="D6EBF6"/>
+          </a:solidFill>
+          <a:ln>
+            <a:noFill/>
+          </a:ln>
+        </p:spPr>
+        <p:style>
+          <a:lnRef idx="1">
+            <a:schemeClr val="accent1"/>
+          </a:lnRef>
+          <a:fillRef idx="3">
+            <a:schemeClr val="accent1"/>
+          </a:fillRef>
+          <a:effectRef idx="2">
+            <a:schemeClr val="accent1"/>
+          </a:effectRef>
+          <a:fontRef idx="minor">
+            <a:schemeClr val="lt1"/>
+          </a:fontRef>
+        </p:style>
+        <p:txBody>
+          <a:bodyPr rtlCol="0" anchor="ctr"/>
+          <a:lstStyle/>
+          <a:p>
+            <a:pPr algn="ctr"/>
+          </a:p>
+        </p:txBody>
+      </p:sp>
+      <p:sp>
+        <p:nvSpPr>
+          <p:cNvPr id="28" name="TextBox 27"/>
+          <p:cNvSpPr txBox="1"/>
+          <p:nvPr/>
+        </p:nvSpPr>
+        <p:spPr>
+          <a:xfrm>
+            <a:off x="6400800" y="4882896"/>
+            <a:ext cx="2505456" cy="201168"/>
+          </a:xfrm>
+          <a:prstGeom prst="rect">
+            <a:avLst/>
+          </a:prstGeom>
+          <a:noFill/>
+        </p:spPr>
+        <p:txBody>
+          <a:bodyPr wrap="square" anchor="t"/>
+          <a:lstStyle/>
+          <a:p>
+            <a:pPr algn="l"/>
+            <a:r>
+              <a:rPr sz="1100" b="1">
+                <a:solidFill>
+                  <a:srgbClr val="003058"/>
+                </a:solidFill>
+                <a:latin typeface="Calibri"/>
+              </a:rPr>
+              <a:t>Action</a:t>
+            </a:r>
+          </a:p>
+        </p:txBody>
+      </p:sp>
+      <p:sp>
+        <p:nvSpPr>
+          <p:cNvPr id="29" name="TextBox 28"/>
+          <p:cNvSpPr txBox="1"/>
+          <p:nvPr/>
+        </p:nvSpPr>
+        <p:spPr>
+          <a:xfrm>
+            <a:off x="6400800" y="5084064"/>
+            <a:ext cx="2505456" cy="1115568"/>
+          </a:xfrm>
+          <a:prstGeom prst="rect">
+            <a:avLst/>
+          </a:prstGeom>
+          <a:noFill/>
+        </p:spPr>
+        <p:txBody>
+          <a:bodyPr wrap="square" anchor="t"/>
+          <a:lstStyle/>
+          <a:p>
+            <a:pPr algn="l"/>
+            <a:r>
+              <a:rPr sz="1100" b="0">
+                <a:solidFill>
+                  <a:srgbClr val="1A1A1A"/>
+                </a:solidFill>
+                <a:latin typeface="Calibri"/>
+              </a:rPr>
+              <a:t>Hold ~R49. Promo into the R6 band would destroy the proposition.</a:t>
+            </a:r>
+          </a:p>
+        </p:txBody>
+      </p:sp>
+      <p:sp>
+        <p:nvSpPr>
+          <p:cNvPr id="30" name="Rounded Rectangle 29"/>
+          <p:cNvSpPr/>
+          <p:nvPr/>
+        </p:nvSpPr>
+        <p:spPr>
+          <a:xfrm>
+            <a:off x="9198864" y="1481328"/>
+            <a:ext cx="2852928" cy="4937760"/>
+          </a:xfrm>
+          <a:prstGeom prst="roundRect">
+            <a:avLst>
+              <a:gd name="adj" fmla="val 8000"/>
+            </a:avLst>
+          </a:prstGeom>
+          <a:solidFill>
+            <a:srgbClr val="FFFFFF"/>
+          </a:solidFill>
+          <a:ln w="12700">
+            <a:solidFill>
+              <a:srgbClr val="D5DEE6"/>
+            </a:solidFill>
+          </a:ln>
+        </p:spPr>
+        <p:style>
+          <a:lnRef idx="1">
+            <a:schemeClr val="accent1"/>
+          </a:lnRef>
+          <a:fillRef idx="3">
+            <a:schemeClr val="accent1"/>
+          </a:fillRef>
+          <a:effectRef idx="2">
+            <a:schemeClr val="accent1"/>
+          </a:effectRef>
+          <a:fontRef idx="minor">
+            <a:schemeClr val="lt1"/>
+          </a:fontRef>
+        </p:style>
+        <p:txBody>
+          <a:bodyPr rtlCol="0" anchor="ctr"/>
+          <a:lstStyle/>
+          <a:p>
+            <a:pPr algn="ctr"/>
+          </a:p>
+        </p:txBody>
+      </p:sp>
+      <p:sp>
+        <p:nvSpPr>
+          <p:cNvPr id="31" name="TextBox 30"/>
+          <p:cNvSpPr txBox="1"/>
+          <p:nvPr/>
+        </p:nvSpPr>
+        <p:spPr>
+          <a:xfrm>
+            <a:off x="9308592" y="1554480"/>
+            <a:ext cx="2651760" cy="502920"/>
+          </a:xfrm>
+          <a:prstGeom prst="rect">
+            <a:avLst/>
+          </a:prstGeom>
+          <a:noFill/>
+        </p:spPr>
+        <p:txBody>
+          <a:bodyPr wrap="square" anchor="t"/>
+          <a:lstStyle/>
+          <a:p>
+            <a:pPr algn="l"/>
+            <a:r>
+              <a:rPr sz="1400" b="1">
+                <a:solidFill>
+                  <a:srgbClr val="0078C0"/>
+                </a:solidFill>
+                <a:latin typeface="Calibri"/>
+              </a:rPr>
+              <a:t>Test the range</a:t>
+            </a:r>
+          </a:p>
+        </p:txBody>
+      </p:sp>
+      <p:sp>
+        <p:nvSpPr>
+          <p:cNvPr id="32" name="TextBox 31"/>
+          <p:cNvSpPr txBox="1"/>
+          <p:nvPr/>
+        </p:nvSpPr>
+        <p:spPr>
+          <a:xfrm>
+            <a:off x="9308592" y="2029968"/>
+            <a:ext cx="2651760" cy="219456"/>
+          </a:xfrm>
+          <a:prstGeom prst="rect">
+            <a:avLst/>
+          </a:prstGeom>
+          <a:noFill/>
+        </p:spPr>
+        <p:txBody>
+          <a:bodyPr wrap="square" anchor="t"/>
+          <a:lstStyle/>
+          <a:p>
+            <a:pPr algn="l"/>
+            <a:r>
+              <a:rPr sz="1100" b="1">
+                <a:solidFill>
+                  <a:srgbClr val="003058"/>
+                </a:solidFill>
+                <a:latin typeface="Calibri"/>
+              </a:rPr>
+              <a:t>Why?</a:t>
+            </a:r>
+          </a:p>
+        </p:txBody>
+      </p:sp>
+      <p:sp>
+        <p:nvSpPr>
+          <p:cNvPr id="33" name="TextBox 32"/>
+          <p:cNvSpPr txBox="1"/>
+          <p:nvPr/>
+        </p:nvSpPr>
+        <p:spPr>
+          <a:xfrm>
+            <a:off x="9308592" y="2249424"/>
+            <a:ext cx="2651760" cy="2240280"/>
+          </a:xfrm>
+          <a:prstGeom prst="rect">
+            <a:avLst/>
+          </a:prstGeom>
+          <a:noFill/>
+        </p:spPr>
+        <p:txBody>
+          <a:bodyPr wrap="square">
+            <a:spAutoFit/>
+          </a:bodyPr>
+          <a:lstStyle/>
           <a:p>
             <a:pPr>
               <a:spcAft>
-                <a:spcPts val="1100"/>
+                <a:spcPts val="800"/>
               </a:spcAft>
             </a:pPr>
             <a:r>
-              <a:rPr sz="1400" b="0">
-                <a:solidFill>
-                  <a:srgbClr val="FFFFFF"/>
+              <a:rPr sz="1100" b="0">
+                <a:solidFill>
+                  <a:srgbClr val="1A1A1A"/>
                 </a:solidFill>
                 <a:latin typeface="Calibri"/>
               </a:rPr>
-              <a:t>•  The three SKUs compete with each other more than with Kellogg's. Scale is still a rounding error.</a:t>
+              <a:t>•  Carbonara is 49% of the line; Mushroom is the smallest.</a:t>
             </a:r>
           </a:p>
           <a:p>
             <a:pPr>
               <a:spcAft>
-                <a:spcPts val="1100"/>
+                <a:spcPts val="800"/>
               </a:spcAft>
             </a:pPr>
             <a:r>
-              <a:rPr sz="1400" b="0">
-                <a:solidFill>
-                  <a:srgbClr val="FFFFFF"/>
+              <a:rPr sz="1100" b="0">
+                <a:solidFill>
+                  <a:srgbClr val="1A1A1A"/>
                 </a:solidFill>
                 <a:latin typeface="Calibri"/>
               </a:rPr>
-              <a:t>•  Watch: Maggi's share loss (room if Nestlé stumbles on occasion), Indomie (flavour/heat), and whether Pasta Pots can hold R49 without promo.</a:t>
+              <a:t>•  Three SKUs at one price compete with each other first.</a:t>
+            </a:r>
+          </a:p>
+          <a:p>
+            <a:pPr>
+              <a:spcAft>
+                <a:spcPts val="800"/>
+              </a:spcAft>
+            </a:pPr>
+            <a:r>
+              <a:rPr sz="1100" b="0">
+                <a:solidFill>
+                  <a:srgbClr val="1A1A1A"/>
+                </a:solidFill>
+                <a:latin typeface="Calibri"/>
+              </a:rPr>
+              <a:t>•  June only — no 12-month Unilever trend yet.</a:t>
+            </a:r>
+          </a:p>
+        </p:txBody>
+      </p:sp>
+      <p:sp>
+        <p:nvSpPr>
+          <p:cNvPr id="34" name="Rounded Rectangle 33"/>
+          <p:cNvSpPr/>
+          <p:nvPr/>
+        </p:nvSpPr>
+        <p:spPr>
+          <a:xfrm>
+            <a:off x="9290304" y="4828032"/>
+            <a:ext cx="2670048" cy="1444752"/>
+          </a:xfrm>
+          <a:prstGeom prst="roundRect">
+            <a:avLst>
+              <a:gd name="adj" fmla="val 8000"/>
+            </a:avLst>
+          </a:prstGeom>
+          <a:solidFill>
+            <a:srgbClr val="D9EFC7"/>
+          </a:solidFill>
+          <a:ln>
+            <a:noFill/>
+          </a:ln>
+        </p:spPr>
+        <p:style>
+          <a:lnRef idx="1">
+            <a:schemeClr val="accent1"/>
+          </a:lnRef>
+          <a:fillRef idx="3">
+            <a:schemeClr val="accent1"/>
+          </a:fillRef>
+          <a:effectRef idx="2">
+            <a:schemeClr val="accent1"/>
+          </a:effectRef>
+          <a:fontRef idx="minor">
+            <a:schemeClr val="lt1"/>
+          </a:fontRef>
+        </p:style>
+        <p:txBody>
+          <a:bodyPr rtlCol="0" anchor="ctr"/>
+          <a:lstStyle/>
+          <a:p>
+            <a:pPr algn="ctr"/>
+          </a:p>
+        </p:txBody>
+      </p:sp>
+      <p:sp>
+        <p:nvSpPr>
+          <p:cNvPr id="35" name="TextBox 34"/>
+          <p:cNvSpPr txBox="1"/>
+          <p:nvPr/>
+        </p:nvSpPr>
+        <p:spPr>
+          <a:xfrm>
+            <a:off x="9381744" y="4882896"/>
+            <a:ext cx="2505456" cy="201168"/>
+          </a:xfrm>
+          <a:prstGeom prst="rect">
+            <a:avLst/>
+          </a:prstGeom>
+          <a:noFill/>
+        </p:spPr>
+        <p:txBody>
+          <a:bodyPr wrap="square" anchor="t"/>
+          <a:lstStyle/>
+          <a:p>
+            <a:pPr algn="l"/>
+            <a:r>
+              <a:rPr sz="1100" b="1">
+                <a:solidFill>
+                  <a:srgbClr val="003058"/>
+                </a:solidFill>
+                <a:latin typeface="Calibri"/>
+              </a:rPr>
+              <a:t>Action</a:t>
+            </a:r>
+          </a:p>
+        </p:txBody>
+      </p:sp>
+      <p:sp>
+        <p:nvSpPr>
+          <p:cNvPr id="36" name="TextBox 35"/>
+          <p:cNvSpPr txBox="1"/>
+          <p:nvPr/>
+        </p:nvSpPr>
+        <p:spPr>
+          <a:xfrm>
+            <a:off x="9381744" y="5084064"/>
+            <a:ext cx="2505456" cy="1115568"/>
+          </a:xfrm>
+          <a:prstGeom prst="rect">
+            <a:avLst/>
+          </a:prstGeom>
+          <a:noFill/>
+        </p:spPr>
+        <p:txBody>
+          <a:bodyPr wrap="square" anchor="t"/>
+          <a:lstStyle/>
+          <a:p>
+            <a:pPr algn="l"/>
+            <a:r>
+              <a:rPr sz="1100" b="0">
+                <a:solidFill>
+                  <a:srgbClr val="1A1A1A"/>
+                </a:solidFill>
+                <a:latin typeface="Calibri"/>
+              </a:rPr>
+              <a:t>Keep distribution and visibility on Carbonara; measure incrementality vs cannibalisation across the three pots.</a:t>
+            </a:r>
+          </a:p>
+        </p:txBody>
+      </p:sp>
+    </p:spTree>
+  </p:cSld>
+  <p:clrMapOvr>
+    <a:masterClrMapping/>
+  </p:clrMapOvr>
+</p:sld>
+</file>
+
+<file path=ppt/slides/slide6.xml><?xml version="1.0" encoding="utf-8"?>
+<p:sld xmlns:a="http://schemas.openxmlformats.org/drawingml/2006/main" xmlns:p="http://schemas.openxmlformats.org/presentationml/2006/main" xmlns:r="http://schemas.openxmlformats.org/officeDocument/2006/relationships">
+  <p:cSld>
+    <p:spTree>
+      <p:nvGrpSpPr>
+        <p:cNvPr id="1" name=""/>
+        <p:cNvGrpSpPr/>
+        <p:nvPr/>
+      </p:nvGrpSpPr>
+      <p:grpSpPr/>
+      <p:pic>
+        <p:nvPicPr>
+          <p:cNvPr id="2" name="Picture 1" descr="thanks_bg.png"/>
+          <p:cNvPicPr>
+            <a:picLocks noChangeAspect="1"/>
+          </p:cNvPicPr>
+          <p:nvPr/>
+        </p:nvPicPr>
+        <p:blipFill>
+          <a:blip r:embed="rId2"/>
+          <a:stretch>
+            <a:fillRect/>
+          </a:stretch>
+        </p:blipFill>
+        <p:spPr>
+          <a:xfrm>
+            <a:off x="0" y="0"/>
+            <a:ext cx="12191695" cy="6858000"/>
+          </a:xfrm>
+          <a:prstGeom prst="rect">
+            <a:avLst/>
+          </a:prstGeom>
+        </p:spPr>
+      </p:pic>
+      <p:pic>
+        <p:nvPicPr>
+          <p:cNvPr id="3" name="Picture 2" descr="logo_white.png"/>
+          <p:cNvPicPr>
+            <a:picLocks noChangeAspect="1"/>
+          </p:cNvPicPr>
+          <p:nvPr/>
+        </p:nvPicPr>
+        <p:blipFill>
+          <a:blip r:embed="rId3"/>
+          <a:stretch>
+            <a:fillRect/>
+          </a:stretch>
+        </p:blipFill>
+        <p:spPr>
+          <a:xfrm>
+            <a:off x="347472" y="256032"/>
+            <a:ext cx="1874519" cy="566928"/>
+          </a:xfrm>
+          <a:prstGeom prst="rect">
+            <a:avLst/>
+          </a:prstGeom>
+        </p:spPr>
+      </p:pic>
+      <p:sp>
+        <p:nvSpPr>
+          <p:cNvPr id="4" name="TextBox 3"/>
+          <p:cNvSpPr txBox="1"/>
+          <p:nvPr/>
+        </p:nvSpPr>
+        <p:spPr>
+          <a:xfrm>
+            <a:off x="6537960" y="2606040"/>
+            <a:ext cx="5120640" cy="640080"/>
+          </a:xfrm>
+          <a:prstGeom prst="rect">
+            <a:avLst/>
+          </a:prstGeom>
+          <a:noFill/>
+        </p:spPr>
+        <p:txBody>
+          <a:bodyPr wrap="square" anchor="t"/>
+          <a:lstStyle/>
+          <a:p>
+            <a:pPr algn="l"/>
+            <a:r>
+              <a:rPr sz="4000" b="1">
+                <a:solidFill>
+                  <a:srgbClr val="FFFFFF"/>
+                </a:solidFill>
+                <a:latin typeface="Calibri"/>
+              </a:rPr>
+              <a:t>Thank You!</a:t>
+            </a:r>
+          </a:p>
+        </p:txBody>
+      </p:sp>
+      <p:sp>
+        <p:nvSpPr>
+          <p:cNvPr id="5" name="Rectangle 4"/>
+          <p:cNvSpPr/>
+          <p:nvPr/>
+        </p:nvSpPr>
+        <p:spPr>
+          <a:xfrm>
+            <a:off x="6537960" y="3273552"/>
+            <a:ext cx="2560320" cy="27432"/>
+          </a:xfrm>
+          <a:prstGeom prst="rect">
+            <a:avLst/>
+          </a:prstGeom>
+          <a:solidFill>
+            <a:srgbClr val="7A9AB8"/>
+          </a:solidFill>
+          <a:ln>
+            <a:noFill/>
+          </a:ln>
+        </p:spPr>
+        <p:style>
+          <a:lnRef idx="1">
+            <a:schemeClr val="accent1"/>
+          </a:lnRef>
+          <a:fillRef idx="3">
+            <a:schemeClr val="accent1"/>
+          </a:fillRef>
+          <a:effectRef idx="2">
+            <a:schemeClr val="accent1"/>
+          </a:effectRef>
+          <a:fontRef idx="minor">
+            <a:schemeClr val="lt1"/>
+          </a:fontRef>
+        </p:style>
+        <p:txBody>
+          <a:bodyPr rtlCol="0" anchor="ctr"/>
+          <a:lstStyle/>
+          <a:p>
+            <a:pPr algn="ctr"/>
+          </a:p>
+        </p:txBody>
+      </p:sp>
+      <p:sp>
+        <p:nvSpPr>
+          <p:cNvPr id="6" name="TextBox 5"/>
+          <p:cNvSpPr txBox="1"/>
+          <p:nvPr/>
+        </p:nvSpPr>
+        <p:spPr>
+          <a:xfrm>
+            <a:off x="6537960" y="3401568"/>
+            <a:ext cx="5120640" cy="365760"/>
+          </a:xfrm>
+          <a:prstGeom prst="rect">
+            <a:avLst/>
+          </a:prstGeom>
+          <a:noFill/>
+        </p:spPr>
+        <p:txBody>
+          <a:bodyPr wrap="square" anchor="t"/>
+          <a:lstStyle/>
+          <a:p>
+            <a:pPr algn="l"/>
+            <a:r>
+              <a:rPr sz="1800" b="1">
+                <a:solidFill>
+                  <a:srgbClr val="88C040"/>
+                </a:solidFill>
+                <a:latin typeface="Calibri"/>
+              </a:rPr>
+              <a:t>Joseph Hlongwane</a:t>
+            </a:r>
+          </a:p>
+        </p:txBody>
+      </p:sp>
+      <p:sp>
+        <p:nvSpPr>
+          <p:cNvPr id="7" name="TextBox 6"/>
+          <p:cNvSpPr txBox="1"/>
+          <p:nvPr/>
+        </p:nvSpPr>
+        <p:spPr>
+          <a:xfrm>
+            <a:off x="365760" y="6510528"/>
+            <a:ext cx="5029200" cy="201168"/>
+          </a:xfrm>
+          <a:prstGeom prst="rect">
+            <a:avLst/>
+          </a:prstGeom>
+          <a:noFill/>
+        </p:spPr>
+        <p:txBody>
+          <a:bodyPr wrap="square" anchor="t"/>
+          <a:lstStyle/>
+          <a:p>
+            <a:pPr algn="l"/>
+            <a:r>
+              <a:rPr sz="1000" b="0">
+                <a:solidFill>
+                  <a:srgbClr val="FFFFFF"/>
+                </a:solidFill>
+                <a:latin typeface="Calibri"/>
+              </a:rPr>
+              <a:t>A SMOLLAN COMPANY</a:t>
             </a:r>
           </a:p>
         </p:txBody>
@@ -9630,324 +9030,4 @@
   </a:objectDefaults>
   <a:extraClrSchemeLst/>
 </a:theme>
-</file>
-
-<file path=ppt/theme/theme2.xml><?xml version="1.0" encoding="utf-8"?>
-<a:theme xmlns:a="http://schemas.openxmlformats.org/drawingml/2006/main" name="Office Theme">
-  <a:themeElements>
-    <a:clrScheme name="Office">
-      <a:dk1>
-        <a:sysClr val="windowText" lastClr="000000"/>
-      </a:dk1>
-      <a:lt1>
-        <a:sysClr val="window" lastClr="FFFFFF"/>
-      </a:lt1>
-      <a:dk2>
-        <a:srgbClr val="1F497D"/>
-      </a:dk2>
-      <a:lt2>
-        <a:srgbClr val="EEECE1"/>
-      </a:lt2>
-      <a:accent1>
-        <a:srgbClr val="4F81BD"/>
-      </a:accent1>
-      <a:accent2>
-        <a:srgbClr val="C0504D"/>
-      </a:accent2>
-      <a:accent3>
-        <a:srgbClr val="9BBB59"/>
-      </a:accent3>
-      <a:accent4>
-        <a:srgbClr val="8064A2"/>
-      </a:accent4>
-      <a:accent5>
-        <a:srgbClr val="4BACC6"/>
-      </a:accent5>
-      <a:accent6>
-        <a:srgbClr val="F79646"/>
-      </a:accent6>
-      <a:hlink>
-        <a:srgbClr val="0000FF"/>
-      </a:hlink>
-      <a:folHlink>
-        <a:srgbClr val="800080"/>
-      </a:folHlink>
-    </a:clrScheme>
-    <a:fontScheme name="Office">
-      <a:majorFont>
-        <a:latin typeface="Calibri"/>
-        <a:ea typeface=""/>
-        <a:cs typeface=""/>
-        <a:font script="Jpan" typeface="ＭＳ Ｐゴシック"/>
-        <a:font script="Hang" typeface="맑은 고딕"/>
-        <a:font script="Hans" typeface="宋体"/>
-        <a:font script="Hant" typeface="新細明體"/>
-        <a:font script="Arab" typeface="Times New Roman"/>
-        <a:font script="Hebr" typeface="Times New Roman"/>
-        <a:font script="Thai" typeface="Angsana New"/>
-        <a:font script="Ethi" typeface="Nyala"/>
-        <a:font script="Beng" typeface="Vrinda"/>
-        <a:font script="Gujr" typeface="Shruti"/>
-        <a:font script="Khmr" typeface="MoolBoran"/>
-        <a:font script="Knda" typeface="Tunga"/>
-        <a:font script="Guru" typeface="Raavi"/>
-        <a:font script="Cans" typeface="Euphemia"/>
-        <a:font script="Cher" typeface="Plantagenet Cherokee"/>
-        <a:font script="Yiii" typeface="Microsoft Yi Baiti"/>
-        <a:font script="Tibt" typeface="Microsoft Himalaya"/>
-        <a:font script="Thaa" typeface="MV Boli"/>
-        <a:font script="Deva" typeface="Mangal"/>
-        <a:font script="Telu" typeface="Gautami"/>
-        <a:font script="Taml" typeface="Latha"/>
-        <a:font script="Syrc" typeface="Estrangelo Edessa"/>
-        <a:font script="Orya" typeface="Kalinga"/>
-        <a:font script="Mlym" typeface="Kartika"/>
-        <a:font script="Laoo" typeface="DokChampa"/>
-        <a:font script="Sinh" typeface="Iskoola Pota"/>
-        <a:font script="Mong" typeface="Mongolian Baiti"/>
-        <a:font script="Viet" typeface="Times New Roman"/>
-        <a:font script="Uigh" typeface="Microsoft Uighur"/>
-        <a:font script="Geor" typeface="Sylfaen"/>
-      </a:majorFont>
-      <a:minorFont>
-        <a:latin typeface="Calibri"/>
-        <a:ea typeface=""/>
-        <a:cs typeface=""/>
-        <a:font script="Jpan" typeface="ＭＳ Ｐゴシック"/>
-        <a:font script="Hang" typeface="맑은 고딕"/>
-        <a:font script="Hans" typeface="宋体"/>
-        <a:font script="Hant" typeface="新細明體"/>
-        <a:font script="Arab" typeface="Arial"/>
-        <a:font script="Hebr" typeface="Arial"/>
-        <a:font script="Thai" typeface="Cordia New"/>
-        <a:font script="Ethi" typeface="Nyala"/>
-        <a:font script="Beng" typeface="Vrinda"/>
-        <a:font script="Gujr" typeface="Shruti"/>
-        <a:font script="Khmr" typeface="DaunPenh"/>
-        <a:font script="Knda" typeface="Tunga"/>
-        <a:font script="Guru" typeface="Raavi"/>
-        <a:font script="Cans" typeface="Euphemia"/>
-        <a:font script="Cher" typeface="Plantagenet Cherokee"/>
-        <a:font script="Yiii" typeface="Microsoft Yi Baiti"/>
-        <a:font script="Tibt" typeface="Microsoft Himalaya"/>
-        <a:font script="Thaa" typeface="MV Boli"/>
-        <a:font script="Deva" typeface="Mangal"/>
-        <a:font script="Telu" typeface="Gautami"/>
-        <a:font script="Taml" typeface="Latha"/>
-        <a:font script="Syrc" typeface="Estrangelo Edessa"/>
-        <a:font script="Orya" typeface="Kalinga"/>
-        <a:font script="Mlym" typeface="Kartika"/>
-        <a:font script="Laoo" typeface="DokChampa"/>
-        <a:font script="Sinh" typeface="Iskoola Pota"/>
-        <a:font script="Mong" typeface="Mongolian Baiti"/>
-        <a:font script="Viet" typeface="Arial"/>
-        <a:font script="Uigh" typeface="Microsoft Uighur"/>
-        <a:font script="Geor" typeface="Sylfaen"/>
-      </a:minorFont>
-    </a:fontScheme>
-    <a:fmtScheme name="Office">
-      <a:fillStyleLst>
-        <a:solidFill>
-          <a:schemeClr val="phClr"/>
-        </a:solidFill>
-        <a:gradFill rotWithShape="1">
-          <a:gsLst>
-            <a:gs pos="0">
-              <a:schemeClr val="phClr">
-                <a:tint val="50000"/>
-                <a:satMod val="300000"/>
-              </a:schemeClr>
-            </a:gs>
-            <a:gs pos="35000">
-              <a:schemeClr val="phClr">
-                <a:tint val="37000"/>
-                <a:satMod val="300000"/>
-              </a:schemeClr>
-            </a:gs>
-            <a:gs pos="100000">
-              <a:schemeClr val="phClr">
-                <a:tint val="15000"/>
-                <a:satMod val="350000"/>
-              </a:schemeClr>
-            </a:gs>
-          </a:gsLst>
-          <a:lin ang="16200000" scaled="1"/>
-        </a:gradFill>
-        <a:gradFill rotWithShape="1">
-          <a:gsLst>
-            <a:gs pos="0">
-              <a:schemeClr val="phClr">
-                <a:tint val="100000"/>
-                <a:shade val="100000"/>
-                <a:satMod val="130000"/>
-              </a:schemeClr>
-            </a:gs>
-            <a:gs pos="100000">
-              <a:schemeClr val="phClr">
-                <a:tint val="50000"/>
-                <a:shade val="100000"/>
-                <a:satMod val="350000"/>
-              </a:schemeClr>
-            </a:gs>
-          </a:gsLst>
-          <a:lin ang="16200000" scaled="0"/>
-        </a:gradFill>
-      </a:fillStyleLst>
-      <a:lnStyleLst>
-        <a:ln w="9525" cap="flat" cmpd="sng" algn="ctr">
-          <a:solidFill>
-            <a:schemeClr val="phClr">
-              <a:shade val="95000"/>
-              <a:satMod val="105000"/>
-            </a:schemeClr>
-          </a:solidFill>
-          <a:prstDash val="solid"/>
-        </a:ln>
-        <a:ln w="25400" cap="flat" cmpd="sng" algn="ctr">
-          <a:solidFill>
-            <a:schemeClr val="phClr"/>
-          </a:solidFill>
-          <a:prstDash val="solid"/>
-        </a:ln>
-        <a:ln w="38100" cap="flat" cmpd="sng" algn="ctr">
-          <a:solidFill>
-            <a:schemeClr val="phClr"/>
-          </a:solidFill>
-          <a:prstDash val="solid"/>
-        </a:ln>
-      </a:lnStyleLst>
-      <a:effectStyleLst>
-        <a:effectStyle>
-          <a:effectLst>
-            <a:outerShdw blurRad="40000" dist="20000" dir="5400000" rotWithShape="0">
-              <a:srgbClr val="000000">
-                <a:alpha val="38000"/>
-              </a:srgbClr>
-            </a:outerShdw>
-          </a:effectLst>
-        </a:effectStyle>
-        <a:effectStyle>
-          <a:effectLst>
-            <a:outerShdw blurRad="40000" dist="23000" dir="5400000" rotWithShape="0">
-              <a:srgbClr val="000000">
-                <a:alpha val="35000"/>
-              </a:srgbClr>
-            </a:outerShdw>
-          </a:effectLst>
-        </a:effectStyle>
-        <a:effectStyle>
-          <a:effectLst>
-            <a:outerShdw blurRad="40000" dist="23000" dir="5400000" rotWithShape="0">
-              <a:srgbClr val="000000">
-                <a:alpha val="35000"/>
-              </a:srgbClr>
-            </a:outerShdw>
-          </a:effectLst>
-          <a:scene3d>
-            <a:camera prst="orthographicFront">
-              <a:rot lat="0" lon="0" rev="0"/>
-            </a:camera>
-            <a:lightRig rig="threePt" dir="t">
-              <a:rot lat="0" lon="0" rev="1200000"/>
-            </a:lightRig>
-          </a:scene3d>
-          <a:sp3d>
-            <a:bevelT w="63500" h="25400"/>
-          </a:sp3d>
-        </a:effectStyle>
-      </a:effectStyleLst>
-      <a:bgFillStyleLst>
-        <a:solidFill>
-          <a:schemeClr val="phClr"/>
-        </a:solidFill>
-        <a:gradFill rotWithShape="1">
-          <a:gsLst>
-            <a:gs pos="0">
-              <a:schemeClr val="phClr">
-                <a:tint val="40000"/>
-                <a:satMod val="350000"/>
-              </a:schemeClr>
-            </a:gs>
-            <a:gs pos="40000">
-              <a:schemeClr val="phClr">
-                <a:tint val="45000"/>
-                <a:shade val="99000"/>
-                <a:satMod val="350000"/>
-              </a:schemeClr>
-            </a:gs>
-            <a:gs pos="100000">
-              <a:schemeClr val="phClr">
-                <a:shade val="20000"/>
-                <a:satMod val="255000"/>
-              </a:schemeClr>
-            </a:gs>
-          </a:gsLst>
-          <a:path path="circle">
-            <a:fillToRect l="50000" t="-80000" r="50000" b="180000"/>
-          </a:path>
-        </a:gradFill>
-        <a:gradFill rotWithShape="1">
-          <a:gsLst>
-            <a:gs pos="0">
-              <a:schemeClr val="phClr">
-                <a:tint val="80000"/>
-                <a:satMod val="300000"/>
-              </a:schemeClr>
-            </a:gs>
-            <a:gs pos="100000">
-              <a:schemeClr val="phClr">
-                <a:shade val="30000"/>
-                <a:satMod val="200000"/>
-              </a:schemeClr>
-            </a:gs>
-          </a:gsLst>
-          <a:path path="circle">
-            <a:fillToRect l="50000" t="50000" r="50000" b="50000"/>
-          </a:path>
-        </a:gradFill>
-      </a:bgFillStyleLst>
-    </a:fmtScheme>
-  </a:themeElements>
-  <a:objectDefaults>
-    <a:spDef>
-      <a:spPr/>
-      <a:bodyPr/>
-      <a:lstStyle/>
-      <a:style>
-        <a:lnRef idx="1">
-          <a:schemeClr val="accent1"/>
-        </a:lnRef>
-        <a:fillRef idx="3">
-          <a:schemeClr val="accent1"/>
-        </a:fillRef>
-        <a:effectRef idx="2">
-          <a:schemeClr val="accent1"/>
-        </a:effectRef>
-        <a:fontRef idx="minor">
-          <a:schemeClr val="lt1"/>
-        </a:fontRef>
-      </a:style>
-    </a:spDef>
-    <a:lnDef>
-      <a:spPr/>
-      <a:bodyPr/>
-      <a:lstStyle/>
-      <a:style>
-        <a:lnRef idx="2">
-          <a:schemeClr val="accent1"/>
-        </a:lnRef>
-        <a:fillRef idx="0">
-          <a:schemeClr val="accent1"/>
-        </a:fillRef>
-        <a:effectRef idx="1">
-          <a:schemeClr val="accent1"/>
-        </a:effectRef>
-        <a:fontRef idx="minor">
-          <a:schemeClr val="tx1"/>
-        </a:fontRef>
-      </a:style>
-    </a:lnDef>
-  </a:objectDefaults>
-  <a:extraClrSchemeLst/>
-</a:theme>
 </file>
--- a/output/Unilever_Pasta_Noodles_Jun2026.pptx
+++ b/output/Unilever_Pasta_Noodles_Jun2026.pptx
@@ -3471,7 +3471,7 @@
         <p:spPr>
           <a:xfrm>
             <a:off x="347472" y="164592"/>
-            <a:ext cx="11338560" cy="420624"/>
+            <a:ext cx="9509760" cy="420624"/>
           </a:xfrm>
           <a:prstGeom prst="rect">
             <a:avLst/>
@@ -3486,7 +3486,7 @@
           <a:p>
             <a:pPr algn="l"/>
             <a:r>
-              <a:rPr sz="2600" b="1">
+              <a:rPr sz="2400" b="1">
                 <a:solidFill>
                   <a:srgbClr val="122A4A"/>
                 </a:solidFill>
@@ -3540,9 +3540,33 @@
           </a:p>
         </p:txBody>
       </p:sp>
-      <p:sp>
-        <p:nvSpPr>
-          <p:cNvPr id="7" name="Rectangle 6"/>
+      <p:pic>
+        <p:nvPicPr>
+          <p:cNvPr id="7" name="Picture 6" descr="smollan_logo_content.png"/>
+          <p:cNvPicPr>
+            <a:picLocks noChangeAspect="1"/>
+          </p:cNvPicPr>
+          <p:nvPr/>
+        </p:nvPicPr>
+        <p:blipFill>
+          <a:blip r:embed="rId2"/>
+          <a:stretch>
+            <a:fillRect/>
+          </a:stretch>
+        </p:blipFill>
+        <p:spPr>
+          <a:xfrm>
+            <a:off x="10104120" y="128016"/>
+            <a:ext cx="1783080" cy="384048"/>
+          </a:xfrm>
+          <a:prstGeom prst="rect">
+            <a:avLst/>
+          </a:prstGeom>
+        </p:spPr>
+      </p:pic>
+      <p:sp>
+        <p:nvSpPr>
+          <p:cNvPr id="8" name="Rectangle 7"/>
           <p:cNvSpPr/>
           <p:nvPr/>
         </p:nvSpPr>
@@ -3585,7 +3609,7 @@
       </p:sp>
       <p:sp>
         <p:nvSpPr>
-          <p:cNvPr id="8" name="TextBox 7"/>
+          <p:cNvPr id="9" name="TextBox 8"/>
           <p:cNvSpPr txBox="1"/>
           <p:nvPr/>
         </p:nvSpPr>
@@ -3620,7 +3644,7 @@
       </p:sp>
       <p:sp>
         <p:nvSpPr>
-          <p:cNvPr id="9" name="TextBox 8"/>
+          <p:cNvPr id="10" name="TextBox 9"/>
           <p:cNvSpPr txBox="1"/>
           <p:nvPr/>
         </p:nvSpPr>
@@ -3655,7 +3679,7 @@
       </p:sp>
       <p:sp>
         <p:nvSpPr>
-          <p:cNvPr id="10" name="Rectangle 9"/>
+          <p:cNvPr id="11" name="Rectangle 10"/>
           <p:cNvSpPr/>
           <p:nvPr/>
         </p:nvSpPr>
@@ -3700,7 +3724,7 @@
       </p:sp>
       <p:sp>
         <p:nvSpPr>
-          <p:cNvPr id="11" name="Rectangle 10"/>
+          <p:cNvPr id="12" name="Rectangle 11"/>
           <p:cNvSpPr/>
           <p:nvPr/>
         </p:nvSpPr>
@@ -3743,7 +3767,7 @@
       </p:sp>
       <p:sp>
         <p:nvSpPr>
-          <p:cNvPr id="12" name="TextBox 11"/>
+          <p:cNvPr id="13" name="TextBox 12"/>
           <p:cNvSpPr txBox="1"/>
           <p:nvPr/>
         </p:nvSpPr>
@@ -3778,7 +3802,7 @@
       </p:sp>
       <p:sp>
         <p:nvSpPr>
-          <p:cNvPr id="13" name="TextBox 12"/>
+          <p:cNvPr id="14" name="TextBox 13"/>
           <p:cNvSpPr txBox="1"/>
           <p:nvPr/>
         </p:nvSpPr>
@@ -3813,7 +3837,7 @@
       </p:sp>
       <p:sp>
         <p:nvSpPr>
-          <p:cNvPr id="14" name="TextBox 13"/>
+          <p:cNvPr id="15" name="TextBox 14"/>
           <p:cNvSpPr txBox="1"/>
           <p:nvPr/>
         </p:nvSpPr>
@@ -3848,7 +3872,7 @@
       </p:sp>
       <p:sp>
         <p:nvSpPr>
-          <p:cNvPr id="15" name="Rectangle 14"/>
+          <p:cNvPr id="16" name="Rectangle 15"/>
           <p:cNvSpPr/>
           <p:nvPr/>
         </p:nvSpPr>
@@ -3893,7 +3917,7 @@
       </p:sp>
       <p:sp>
         <p:nvSpPr>
-          <p:cNvPr id="16" name="Rectangle 15"/>
+          <p:cNvPr id="17" name="Rectangle 16"/>
           <p:cNvSpPr/>
           <p:nvPr/>
         </p:nvSpPr>
@@ -3936,7 +3960,7 @@
       </p:sp>
       <p:sp>
         <p:nvSpPr>
-          <p:cNvPr id="17" name="TextBox 16"/>
+          <p:cNvPr id="18" name="TextBox 17"/>
           <p:cNvSpPr txBox="1"/>
           <p:nvPr/>
         </p:nvSpPr>
@@ -3971,7 +3995,7 @@
       </p:sp>
       <p:sp>
         <p:nvSpPr>
-          <p:cNvPr id="18" name="TextBox 17"/>
+          <p:cNvPr id="19" name="TextBox 18"/>
           <p:cNvSpPr txBox="1"/>
           <p:nvPr/>
         </p:nvSpPr>
@@ -4006,7 +4030,7 @@
       </p:sp>
       <p:sp>
         <p:nvSpPr>
-          <p:cNvPr id="19" name="TextBox 18"/>
+          <p:cNvPr id="20" name="TextBox 19"/>
           <p:cNvSpPr txBox="1"/>
           <p:nvPr/>
         </p:nvSpPr>
@@ -4041,7 +4065,7 @@
       </p:sp>
       <p:sp>
         <p:nvSpPr>
-          <p:cNvPr id="20" name="Rectangle 19"/>
+          <p:cNvPr id="21" name="Rectangle 20"/>
           <p:cNvSpPr/>
           <p:nvPr/>
         </p:nvSpPr>
@@ -4086,7 +4110,7 @@
       </p:sp>
       <p:sp>
         <p:nvSpPr>
-          <p:cNvPr id="21" name="Rectangle 20"/>
+          <p:cNvPr id="22" name="Rectangle 21"/>
           <p:cNvSpPr/>
           <p:nvPr/>
         </p:nvSpPr>
@@ -4129,7 +4153,7 @@
       </p:sp>
       <p:sp>
         <p:nvSpPr>
-          <p:cNvPr id="22" name="TextBox 21"/>
+          <p:cNvPr id="23" name="TextBox 22"/>
           <p:cNvSpPr txBox="1"/>
           <p:nvPr/>
         </p:nvSpPr>
@@ -4164,7 +4188,7 @@
       </p:sp>
       <p:sp>
         <p:nvSpPr>
-          <p:cNvPr id="23" name="TextBox 22"/>
+          <p:cNvPr id="24" name="TextBox 23"/>
           <p:cNvSpPr txBox="1"/>
           <p:nvPr/>
         </p:nvSpPr>
@@ -4199,7 +4223,7 @@
       </p:sp>
       <p:sp>
         <p:nvSpPr>
-          <p:cNvPr id="24" name="TextBox 23"/>
+          <p:cNvPr id="25" name="TextBox 24"/>
           <p:cNvSpPr txBox="1"/>
           <p:nvPr/>
         </p:nvSpPr>
@@ -4234,7 +4258,7 @@
       </p:sp>
       <p:sp>
         <p:nvSpPr>
-          <p:cNvPr id="25" name="Rectangle 24"/>
+          <p:cNvPr id="26" name="Rectangle 25"/>
           <p:cNvSpPr/>
           <p:nvPr/>
         </p:nvSpPr>
@@ -4279,7 +4303,7 @@
       </p:sp>
       <p:sp>
         <p:nvSpPr>
-          <p:cNvPr id="26" name="Rectangle 25"/>
+          <p:cNvPr id="27" name="Rectangle 26"/>
           <p:cNvSpPr/>
           <p:nvPr/>
         </p:nvSpPr>
@@ -4322,7 +4346,7 @@
       </p:sp>
       <p:sp>
         <p:nvSpPr>
-          <p:cNvPr id="27" name="TextBox 26"/>
+          <p:cNvPr id="28" name="TextBox 27"/>
           <p:cNvSpPr txBox="1"/>
           <p:nvPr/>
         </p:nvSpPr>
@@ -4357,7 +4381,7 @@
       </p:sp>
       <p:sp>
         <p:nvSpPr>
-          <p:cNvPr id="28" name="TextBox 27"/>
+          <p:cNvPr id="29" name="TextBox 28"/>
           <p:cNvSpPr txBox="1"/>
           <p:nvPr/>
         </p:nvSpPr>
@@ -4392,7 +4416,7 @@
       </p:sp>
       <p:sp>
         <p:nvSpPr>
-          <p:cNvPr id="29" name="TextBox 28"/>
+          <p:cNvPr id="30" name="TextBox 29"/>
           <p:cNvSpPr txBox="1"/>
           <p:nvPr/>
         </p:nvSpPr>
@@ -4427,7 +4451,7 @@
       </p:sp>
       <p:sp>
         <p:nvSpPr>
-          <p:cNvPr id="30" name="TextBox 29"/>
+          <p:cNvPr id="31" name="TextBox 30"/>
           <p:cNvSpPr txBox="1"/>
           <p:nvPr/>
         </p:nvSpPr>
@@ -4462,22 +4486,22 @@
       </p:sp>
       <p:pic>
         <p:nvPicPr>
-          <p:cNvPr id="31" name="Picture 30" descr="data_subcat.png"/>
+          <p:cNvPr id="32" name="Picture 31" descr="data_subcat.png"/>
           <p:cNvPicPr>
             <a:picLocks noChangeAspect="1"/>
           </p:cNvPicPr>
           <p:nvPr/>
         </p:nvPicPr>
         <p:blipFill>
-          <a:blip r:embed="rId2"/>
+          <a:blip r:embed="rId3"/>
           <a:stretch>
             <a:fillRect/>
           </a:stretch>
         </p:blipFill>
         <p:spPr>
           <a:xfrm>
-            <a:off x="256032" y="2231136"/>
-            <a:ext cx="5897880" cy="2926080"/>
+            <a:off x="256032" y="2359152"/>
+            <a:ext cx="5852160" cy="2527069"/>
           </a:xfrm>
           <a:prstGeom prst="rect">
             <a:avLst/>
@@ -4486,7 +4510,7 @@
       </p:pic>
       <p:sp>
         <p:nvSpPr>
-          <p:cNvPr id="32" name="TextBox 31"/>
+          <p:cNvPr id="33" name="TextBox 32"/>
           <p:cNvSpPr txBox="1"/>
           <p:nvPr/>
         </p:nvSpPr>
@@ -4521,14 +4545,14 @@
       </p:sp>
       <p:graphicFrame>
         <p:nvGraphicFramePr>
-          <p:cNvPr id="33" name="Table 32"/>
+          <p:cNvPr id="34" name="Table 33"/>
           <p:cNvGraphicFramePr>
             <a:graphicFrameLocks noGrp="1"/>
           </p:cNvGraphicFramePr>
           <p:nvPr/>
         </p:nvGraphicFramePr>
         <p:xfrm>
-          <a:off x="6309360" y="2267712"/>
+          <a:off x="6309360" y="2359152"/>
           <a:ext cx="5532120" cy="2880360"/>
         </p:xfrm>
         <a:graphic>
@@ -5486,14 +5510,14 @@
       </p:graphicFrame>
       <p:sp>
         <p:nvSpPr>
-          <p:cNvPr id="34" name="TextBox 33"/>
+          <p:cNvPr id="35" name="TextBox 34"/>
           <p:cNvSpPr txBox="1"/>
           <p:nvPr/>
         </p:nvSpPr>
         <p:spPr>
           <a:xfrm>
-            <a:off x="347472" y="5285232"/>
-            <a:ext cx="11475720" cy="1115568"/>
+            <a:off x="347472" y="5074920"/>
+            <a:ext cx="11475720" cy="1325880"/>
           </a:xfrm>
           <a:prstGeom prst="rect">
             <a:avLst/>
@@ -5675,7 +5699,7 @@
         <p:spPr>
           <a:xfrm>
             <a:off x="347472" y="164592"/>
-            <a:ext cx="11338560" cy="420624"/>
+            <a:ext cx="9509760" cy="420624"/>
           </a:xfrm>
           <a:prstGeom prst="rect">
             <a:avLst/>
@@ -5690,7 +5714,7 @@
           <a:p>
             <a:pPr algn="l"/>
             <a:r>
-              <a:rPr sz="2600" b="1">
+              <a:rPr sz="2400" b="1">
                 <a:solidFill>
                   <a:srgbClr val="122A4A"/>
                 </a:solidFill>
@@ -5744,9 +5768,33 @@
           </a:p>
         </p:txBody>
       </p:sp>
-      <p:sp>
-        <p:nvSpPr>
-          <p:cNvPr id="7" name="Rectangle 6"/>
+      <p:pic>
+        <p:nvPicPr>
+          <p:cNvPr id="7" name="Picture 6" descr="smollan_logo_content.png"/>
+          <p:cNvPicPr>
+            <a:picLocks noChangeAspect="1"/>
+          </p:cNvPicPr>
+          <p:nvPr/>
+        </p:nvPicPr>
+        <p:blipFill>
+          <a:blip r:embed="rId2"/>
+          <a:stretch>
+            <a:fillRect/>
+          </a:stretch>
+        </p:blipFill>
+        <p:spPr>
+          <a:xfrm>
+            <a:off x="10104120" y="128016"/>
+            <a:ext cx="1783080" cy="384048"/>
+          </a:xfrm>
+          <a:prstGeom prst="rect">
+            <a:avLst/>
+          </a:prstGeom>
+        </p:spPr>
+      </p:pic>
+      <p:sp>
+        <p:nvSpPr>
+          <p:cNvPr id="8" name="Rectangle 7"/>
           <p:cNvSpPr/>
           <p:nvPr/>
         </p:nvSpPr>
@@ -5789,7 +5837,7 @@
       </p:sp>
       <p:sp>
         <p:nvSpPr>
-          <p:cNvPr id="8" name="TextBox 7"/>
+          <p:cNvPr id="9" name="TextBox 8"/>
           <p:cNvSpPr txBox="1"/>
           <p:nvPr/>
         </p:nvSpPr>
@@ -5824,7 +5872,7 @@
       </p:sp>
       <p:sp>
         <p:nvSpPr>
-          <p:cNvPr id="9" name="TextBox 8"/>
+          <p:cNvPr id="10" name="TextBox 9"/>
           <p:cNvSpPr txBox="1"/>
           <p:nvPr/>
         </p:nvSpPr>
@@ -5859,14 +5907,14 @@
       </p:sp>
       <p:sp>
         <p:nvSpPr>
-          <p:cNvPr id="10" name="Rectangle 9"/>
+          <p:cNvPr id="11" name="Rectangle 10"/>
           <p:cNvSpPr/>
           <p:nvPr/>
         </p:nvSpPr>
         <p:spPr>
           <a:xfrm>
-            <a:off x="347472" y="804672"/>
-            <a:ext cx="2834640" cy="987552"/>
+            <a:off x="347472" y="786384"/>
+            <a:ext cx="2834640" cy="877824"/>
           </a:xfrm>
           <a:prstGeom prst="rect">
             <a:avLst/>
@@ -5904,14 +5952,14 @@
       </p:sp>
       <p:sp>
         <p:nvSpPr>
-          <p:cNvPr id="11" name="Rectangle 10"/>
+          <p:cNvPr id="12" name="Rectangle 11"/>
           <p:cNvSpPr/>
           <p:nvPr/>
         </p:nvSpPr>
         <p:spPr>
           <a:xfrm>
-            <a:off x="347472" y="804672"/>
-            <a:ext cx="82296" cy="987552"/>
+            <a:off x="347472" y="786384"/>
+            <a:ext cx="82296" cy="877824"/>
           </a:xfrm>
           <a:prstGeom prst="rect">
             <a:avLst/>
@@ -5947,13 +5995,13 @@
       </p:sp>
       <p:sp>
         <p:nvSpPr>
-          <p:cNvPr id="12" name="TextBox 11"/>
+          <p:cNvPr id="13" name="TextBox 12"/>
           <p:cNvSpPr txBox="1"/>
           <p:nvPr/>
         </p:nvSpPr>
         <p:spPr>
           <a:xfrm>
-            <a:off x="530352" y="877824"/>
+            <a:off x="530352" y="859536"/>
             <a:ext cx="2578608" cy="219456"/>
           </a:xfrm>
           <a:prstGeom prst="rect">
@@ -5982,13 +6030,13 @@
       </p:sp>
       <p:sp>
         <p:nvSpPr>
-          <p:cNvPr id="13" name="TextBox 12"/>
+          <p:cNvPr id="14" name="TextBox 13"/>
           <p:cNvSpPr txBox="1"/>
           <p:nvPr/>
         </p:nvSpPr>
         <p:spPr>
           <a:xfrm>
-            <a:off x="530352" y="1097280"/>
+            <a:off x="530352" y="1078992"/>
             <a:ext cx="2578608" cy="365760"/>
           </a:xfrm>
           <a:prstGeom prst="rect">
@@ -6017,13 +6065,13 @@
       </p:sp>
       <p:sp>
         <p:nvSpPr>
-          <p:cNvPr id="14" name="TextBox 13"/>
+          <p:cNvPr id="15" name="TextBox 14"/>
           <p:cNvSpPr txBox="1"/>
           <p:nvPr/>
         </p:nvSpPr>
         <p:spPr>
           <a:xfrm>
-            <a:off x="530352" y="1463040"/>
+            <a:off x="530352" y="1444752"/>
             <a:ext cx="2578608" cy="256032"/>
           </a:xfrm>
           <a:prstGeom prst="rect">
@@ -6052,14 +6100,14 @@
       </p:sp>
       <p:sp>
         <p:nvSpPr>
-          <p:cNvPr id="15" name="Rectangle 14"/>
+          <p:cNvPr id="16" name="Rectangle 15"/>
           <p:cNvSpPr/>
           <p:nvPr/>
         </p:nvSpPr>
         <p:spPr>
           <a:xfrm>
-            <a:off x="3273552" y="804672"/>
-            <a:ext cx="2834640" cy="987552"/>
+            <a:off x="3273552" y="786384"/>
+            <a:ext cx="2834640" cy="877824"/>
           </a:xfrm>
           <a:prstGeom prst="rect">
             <a:avLst/>
@@ -6097,14 +6145,14 @@
       </p:sp>
       <p:sp>
         <p:nvSpPr>
-          <p:cNvPr id="16" name="Rectangle 15"/>
+          <p:cNvPr id="17" name="Rectangle 16"/>
           <p:cNvSpPr/>
           <p:nvPr/>
         </p:nvSpPr>
         <p:spPr>
           <a:xfrm>
-            <a:off x="3273552" y="804672"/>
-            <a:ext cx="82296" cy="987552"/>
+            <a:off x="3273552" y="786384"/>
+            <a:ext cx="82296" cy="877824"/>
           </a:xfrm>
           <a:prstGeom prst="rect">
             <a:avLst/>
@@ -6140,13 +6188,13 @@
       </p:sp>
       <p:sp>
         <p:nvSpPr>
-          <p:cNvPr id="17" name="TextBox 16"/>
+          <p:cNvPr id="18" name="TextBox 17"/>
           <p:cNvSpPr txBox="1"/>
           <p:nvPr/>
         </p:nvSpPr>
         <p:spPr>
           <a:xfrm>
-            <a:off x="3456432" y="877824"/>
+            <a:off x="3456432" y="859536"/>
             <a:ext cx="2578608" cy="219456"/>
           </a:xfrm>
           <a:prstGeom prst="rect">
@@ -6175,13 +6223,13 @@
       </p:sp>
       <p:sp>
         <p:nvSpPr>
-          <p:cNvPr id="18" name="TextBox 17"/>
+          <p:cNvPr id="19" name="TextBox 18"/>
           <p:cNvSpPr txBox="1"/>
           <p:nvPr/>
         </p:nvSpPr>
         <p:spPr>
           <a:xfrm>
-            <a:off x="3456432" y="1097280"/>
+            <a:off x="3456432" y="1078992"/>
             <a:ext cx="2578608" cy="365760"/>
           </a:xfrm>
           <a:prstGeom prst="rect">
@@ -6210,13 +6258,13 @@
       </p:sp>
       <p:sp>
         <p:nvSpPr>
-          <p:cNvPr id="19" name="TextBox 18"/>
+          <p:cNvPr id="20" name="TextBox 19"/>
           <p:cNvSpPr txBox="1"/>
           <p:nvPr/>
         </p:nvSpPr>
         <p:spPr>
           <a:xfrm>
-            <a:off x="3456432" y="1463040"/>
+            <a:off x="3456432" y="1444752"/>
             <a:ext cx="2578608" cy="256032"/>
           </a:xfrm>
           <a:prstGeom prst="rect">
@@ -6245,14 +6293,14 @@
       </p:sp>
       <p:sp>
         <p:nvSpPr>
-          <p:cNvPr id="20" name="Rectangle 19"/>
+          <p:cNvPr id="21" name="Rectangle 20"/>
           <p:cNvSpPr/>
           <p:nvPr/>
         </p:nvSpPr>
         <p:spPr>
           <a:xfrm>
-            <a:off x="6199632" y="804672"/>
-            <a:ext cx="2834640" cy="987552"/>
+            <a:off x="6199632" y="786384"/>
+            <a:ext cx="2834640" cy="877824"/>
           </a:xfrm>
           <a:prstGeom prst="rect">
             <a:avLst/>
@@ -6290,14 +6338,14 @@
       </p:sp>
       <p:sp>
         <p:nvSpPr>
-          <p:cNvPr id="21" name="Rectangle 20"/>
+          <p:cNvPr id="22" name="Rectangle 21"/>
           <p:cNvSpPr/>
           <p:nvPr/>
         </p:nvSpPr>
         <p:spPr>
           <a:xfrm>
-            <a:off x="6199632" y="804672"/>
-            <a:ext cx="82296" cy="987552"/>
+            <a:off x="6199632" y="786384"/>
+            <a:ext cx="82296" cy="877824"/>
           </a:xfrm>
           <a:prstGeom prst="rect">
             <a:avLst/>
@@ -6333,13 +6381,13 @@
       </p:sp>
       <p:sp>
         <p:nvSpPr>
-          <p:cNvPr id="22" name="TextBox 21"/>
+          <p:cNvPr id="23" name="TextBox 22"/>
           <p:cNvSpPr txBox="1"/>
           <p:nvPr/>
         </p:nvSpPr>
         <p:spPr>
           <a:xfrm>
-            <a:off x="6382512" y="877824"/>
+            <a:off x="6382512" y="859536"/>
             <a:ext cx="2578608" cy="219456"/>
           </a:xfrm>
           <a:prstGeom prst="rect">
@@ -6368,13 +6416,13 @@
       </p:sp>
       <p:sp>
         <p:nvSpPr>
-          <p:cNvPr id="23" name="TextBox 22"/>
+          <p:cNvPr id="24" name="TextBox 23"/>
           <p:cNvSpPr txBox="1"/>
           <p:nvPr/>
         </p:nvSpPr>
         <p:spPr>
           <a:xfrm>
-            <a:off x="6382512" y="1097280"/>
+            <a:off x="6382512" y="1078992"/>
             <a:ext cx="2578608" cy="365760"/>
           </a:xfrm>
           <a:prstGeom prst="rect">
@@ -6403,13 +6451,13 @@
       </p:sp>
       <p:sp>
         <p:nvSpPr>
-          <p:cNvPr id="24" name="TextBox 23"/>
+          <p:cNvPr id="25" name="TextBox 24"/>
           <p:cNvSpPr txBox="1"/>
           <p:nvPr/>
         </p:nvSpPr>
         <p:spPr>
           <a:xfrm>
-            <a:off x="6382512" y="1463040"/>
+            <a:off x="6382512" y="1444752"/>
             <a:ext cx="2578608" cy="256032"/>
           </a:xfrm>
           <a:prstGeom prst="rect">
@@ -6438,14 +6486,14 @@
       </p:sp>
       <p:sp>
         <p:nvSpPr>
-          <p:cNvPr id="25" name="Rectangle 24"/>
+          <p:cNvPr id="26" name="Rectangle 25"/>
           <p:cNvSpPr/>
           <p:nvPr/>
         </p:nvSpPr>
         <p:spPr>
           <a:xfrm>
-            <a:off x="9125712" y="804672"/>
-            <a:ext cx="2706624" cy="987552"/>
+            <a:off x="9125712" y="786384"/>
+            <a:ext cx="2706624" cy="877824"/>
           </a:xfrm>
           <a:prstGeom prst="rect">
             <a:avLst/>
@@ -6483,14 +6531,14 @@
       </p:sp>
       <p:sp>
         <p:nvSpPr>
-          <p:cNvPr id="26" name="Rectangle 25"/>
+          <p:cNvPr id="27" name="Rectangle 26"/>
           <p:cNvSpPr/>
           <p:nvPr/>
         </p:nvSpPr>
         <p:spPr>
           <a:xfrm>
-            <a:off x="9125712" y="804672"/>
-            <a:ext cx="82296" cy="987552"/>
+            <a:off x="9125712" y="786384"/>
+            <a:ext cx="82296" cy="877824"/>
           </a:xfrm>
           <a:prstGeom prst="rect">
             <a:avLst/>
@@ -6526,13 +6574,13 @@
       </p:sp>
       <p:sp>
         <p:nvSpPr>
-          <p:cNvPr id="27" name="TextBox 26"/>
+          <p:cNvPr id="28" name="TextBox 27"/>
           <p:cNvSpPr txBox="1"/>
           <p:nvPr/>
         </p:nvSpPr>
         <p:spPr>
           <a:xfrm>
-            <a:off x="9308592" y="877824"/>
+            <a:off x="9308592" y="859536"/>
             <a:ext cx="2450592" cy="219456"/>
           </a:xfrm>
           <a:prstGeom prst="rect">
@@ -6561,13 +6609,13 @@
       </p:sp>
       <p:sp>
         <p:nvSpPr>
-          <p:cNvPr id="28" name="TextBox 27"/>
+          <p:cNvPr id="29" name="TextBox 28"/>
           <p:cNvSpPr txBox="1"/>
           <p:nvPr/>
         </p:nvSpPr>
         <p:spPr>
           <a:xfrm>
-            <a:off x="9308592" y="1097280"/>
+            <a:off x="9308592" y="1078992"/>
             <a:ext cx="2450592" cy="365760"/>
           </a:xfrm>
           <a:prstGeom prst="rect">
@@ -6596,13 +6644,13 @@
       </p:sp>
       <p:sp>
         <p:nvSpPr>
-          <p:cNvPr id="29" name="TextBox 28"/>
+          <p:cNvPr id="30" name="TextBox 29"/>
           <p:cNvSpPr txBox="1"/>
           <p:nvPr/>
         </p:nvSpPr>
         <p:spPr>
           <a:xfrm>
-            <a:off x="9308592" y="1463040"/>
+            <a:off x="9308592" y="1444752"/>
             <a:ext cx="2450592" cy="256032"/>
           </a:xfrm>
           <a:prstGeom prst="rect">
@@ -6631,14 +6679,14 @@
       </p:sp>
       <p:sp>
         <p:nvSpPr>
-          <p:cNvPr id="30" name="TextBox 29"/>
+          <p:cNvPr id="31" name="TextBox 30"/>
           <p:cNvSpPr txBox="1"/>
           <p:nvPr/>
         </p:nvSpPr>
         <p:spPr>
           <a:xfrm>
-            <a:off x="347472" y="1920240"/>
-            <a:ext cx="5760720" cy="274320"/>
+            <a:off x="347472" y="1792224"/>
+            <a:ext cx="5760720" cy="292608"/>
           </a:xfrm>
           <a:prstGeom prst="rect">
             <a:avLst/>
@@ -6666,22 +6714,22 @@
       </p:sp>
       <p:pic>
         <p:nvPicPr>
-          <p:cNvPr id="31" name="Picture 30" descr="data_brands.png"/>
+          <p:cNvPr id="32" name="Picture 31" descr="data_brands.png"/>
           <p:cNvPicPr>
             <a:picLocks noChangeAspect="1"/>
           </p:cNvPicPr>
           <p:nvPr/>
         </p:nvPicPr>
         <p:blipFill>
-          <a:blip r:embed="rId2"/>
+          <a:blip r:embed="rId3"/>
           <a:stretch>
             <a:fillRect/>
           </a:stretch>
         </p:blipFill>
         <p:spPr>
           <a:xfrm>
-            <a:off x="201168" y="2176272"/>
-            <a:ext cx="5852160" cy="2331720"/>
+            <a:off x="201168" y="2395728"/>
+            <a:ext cx="5852160" cy="1995055"/>
           </a:xfrm>
           <a:prstGeom prst="rect">
             <a:avLst/>
@@ -6690,14 +6738,14 @@
       </p:pic>
       <p:sp>
         <p:nvSpPr>
-          <p:cNvPr id="32" name="TextBox 31"/>
+          <p:cNvPr id="33" name="TextBox 32"/>
           <p:cNvSpPr txBox="1"/>
           <p:nvPr/>
         </p:nvSpPr>
         <p:spPr>
           <a:xfrm>
-            <a:off x="6217920" y="1920240"/>
-            <a:ext cx="5577840" cy="274320"/>
+            <a:off x="6217920" y="1792224"/>
+            <a:ext cx="5577840" cy="292608"/>
           </a:xfrm>
           <a:prstGeom prst="rect">
             <a:avLst/>
@@ -6725,15 +6773,15 @@
       </p:sp>
       <p:graphicFrame>
         <p:nvGraphicFramePr>
-          <p:cNvPr id="33" name="Table 32"/>
+          <p:cNvPr id="34" name="Table 33"/>
           <p:cNvGraphicFramePr>
             <a:graphicFrameLocks noGrp="1"/>
           </p:cNvGraphicFramePr>
           <p:nvPr/>
         </p:nvGraphicFramePr>
         <p:xfrm>
-          <a:off x="6217920" y="2212848"/>
-          <a:ext cx="5623560" cy="2331720"/>
+          <a:off x="6217920" y="2395728"/>
+          <a:ext cx="5623560" cy="1874519"/>
         </p:xfrm>
         <a:graphic>
           <a:graphicData uri="http://schemas.openxmlformats.org/drawingml/2006/table">
@@ -6749,7 +6797,7 @@
                 <a:gridCol w="960120"/>
                 <a:gridCol w="1005840"/>
               </a:tblGrid>
-              <a:tr h="291465">
+              <a:tr h="267788">
                 <a:tc>
                   <a:txBody>
                     <a:bodyPr/>
@@ -6889,7 +6937,7 @@
                   </a:tcPr>
                 </a:tc>
               </a:tr>
-              <a:tr h="291465">
+              <a:tr h="267788">
                 <a:tc>
                   <a:txBody>
                     <a:bodyPr/>
@@ -7029,7 +7077,7 @@
                   </a:tcPr>
                 </a:tc>
               </a:tr>
-              <a:tr h="291465">
+              <a:tr h="267788">
                 <a:tc>
                   <a:txBody>
                     <a:bodyPr/>
@@ -7169,7 +7217,7 @@
                   </a:tcPr>
                 </a:tc>
               </a:tr>
-              <a:tr h="291465">
+              <a:tr h="267788">
                 <a:tc>
                   <a:txBody>
                     <a:bodyPr/>
@@ -7309,7 +7357,7 @@
                   </a:tcPr>
                 </a:tc>
               </a:tr>
-              <a:tr h="291465">
+              <a:tr h="267788">
                 <a:tc>
                   <a:txBody>
                     <a:bodyPr/>
@@ -7449,7 +7497,7 @@
                   </a:tcPr>
                 </a:tc>
               </a:tr>
-              <a:tr h="291465">
+              <a:tr h="267788">
                 <a:tc>
                   <a:txBody>
                     <a:bodyPr/>
@@ -7589,7 +7637,7 @@
                   </a:tcPr>
                 </a:tc>
               </a:tr>
-              <a:tr h="291465">
+              <a:tr h="267791">
                 <a:tc>
                   <a:txBody>
                     <a:bodyPr/>
@@ -7603,7 +7651,7 @@
                           </a:solidFill>
                           <a:latin typeface="Calibri"/>
                         </a:rPr>
-                        <a:t>Mr Pasta</a:t>
+                        <a:t>Knorr</a:t>
                       </a:r>
                     </a:p>
                   </a:txBody>
@@ -7626,7 +7674,7 @@
                           </a:solidFill>
                           <a:latin typeface="Calibri"/>
                         </a:rPr>
-                        <a:t>1.9%</a:t>
+                        <a:t>0.1%</a:t>
                       </a:r>
                     </a:p>
                   </a:txBody>
@@ -7649,7 +7697,7 @@
                           </a:solidFill>
                           <a:latin typeface="Calibri"/>
                         </a:rPr>
-                        <a:t>1.5%</a:t>
+                        <a:t>0.6%</a:t>
                       </a:r>
                     </a:p>
                   </a:txBody>
@@ -7668,34 +7716,11 @@
                       <a:r>
                         <a:rPr sz="1300" b="0">
                           <a:solidFill>
-                            <a:srgbClr val="B02828"/>
+                            <a:srgbClr val="1B7A3A"/>
                           </a:solidFill>
                           <a:latin typeface="Calibri"/>
                         </a:rPr>
-                        <a:t>-2.3pp</a:t>
-                      </a:r>
-                    </a:p>
-                  </a:txBody>
-                  <a:tcPr>
-                    <a:solidFill>
-                      <a:srgbClr val="FFFFFF"/>
-                    </a:solidFill>
-                  </a:tcPr>
-                </a:tc>
-                <a:tc>
-                  <a:txBody>
-                    <a:bodyPr/>
-                    <a:lstStyle/>
-                    <a:p>
-                      <a:pPr algn="r"/>
-                      <a:r>
-                        <a:rPr sz="1300" b="0">
-                          <a:solidFill>
-                            <a:srgbClr val="B02828"/>
-                          </a:solidFill>
-                          <a:latin typeface="Calibri"/>
-                        </a:rPr>
-                        <a:t>-50.7%</a:t>
+                        <a:t>+0.1pp</a:t>
                       </a:r>
                     </a:p>
                   </a:txBody>
@@ -7718,130 +7743,13 @@
                           </a:solidFill>
                           <a:latin typeface="Calibri"/>
                         </a:rPr>
-                        <a:t>R147</a:t>
+                        <a:t>n/a</a:t>
                       </a:r>
                     </a:p>
                   </a:txBody>
                   <a:tcPr>
                     <a:solidFill>
                       <a:srgbClr val="FFFFFF"/>
-                    </a:solidFill>
-                  </a:tcPr>
-                </a:tc>
-              </a:tr>
-              <a:tr h="291465">
-                <a:tc>
-                  <a:txBody>
-                    <a:bodyPr/>
-                    <a:lstStyle/>
-                    <a:p>
-                      <a:pPr algn="l"/>
-                      <a:r>
-                        <a:rPr sz="1300" b="1">
-                          <a:solidFill>
-                            <a:srgbClr val="111111"/>
-                          </a:solidFill>
-                          <a:latin typeface="Calibri"/>
-                        </a:rPr>
-                        <a:t>Knorr</a:t>
-                      </a:r>
-                    </a:p>
-                  </a:txBody>
-                  <a:tcPr>
-                    <a:solidFill>
-                      <a:srgbClr val="EEF2F6"/>
-                    </a:solidFill>
-                  </a:tcPr>
-                </a:tc>
-                <a:tc>
-                  <a:txBody>
-                    <a:bodyPr/>
-                    <a:lstStyle/>
-                    <a:p>
-                      <a:pPr algn="r"/>
-                      <a:r>
-                        <a:rPr sz="1300" b="0">
-                          <a:solidFill>
-                            <a:srgbClr val="111111"/>
-                          </a:solidFill>
-                          <a:latin typeface="Calibri"/>
-                        </a:rPr>
-                        <a:t>0.1%</a:t>
-                      </a:r>
-                    </a:p>
-                  </a:txBody>
-                  <a:tcPr>
-                    <a:solidFill>
-                      <a:srgbClr val="EEF2F6"/>
-                    </a:solidFill>
-                  </a:tcPr>
-                </a:tc>
-                <a:tc>
-                  <a:txBody>
-                    <a:bodyPr/>
-                    <a:lstStyle/>
-                    <a:p>
-                      <a:pPr algn="r"/>
-                      <a:r>
-                        <a:rPr sz="1300" b="0">
-                          <a:solidFill>
-                            <a:srgbClr val="111111"/>
-                          </a:solidFill>
-                          <a:latin typeface="Calibri"/>
-                        </a:rPr>
-                        <a:t>0.6%</a:t>
-                      </a:r>
-                    </a:p>
-                  </a:txBody>
-                  <a:tcPr>
-                    <a:solidFill>
-                      <a:srgbClr val="EEF2F6"/>
-                    </a:solidFill>
-                  </a:tcPr>
-                </a:tc>
-                <a:tc>
-                  <a:txBody>
-                    <a:bodyPr/>
-                    <a:lstStyle/>
-                    <a:p>
-                      <a:pPr algn="r"/>
-                      <a:r>
-                        <a:rPr sz="1300" b="0">
-                          <a:solidFill>
-                            <a:srgbClr val="1B7A3A"/>
-                          </a:solidFill>
-                          <a:latin typeface="Calibri"/>
-                        </a:rPr>
-                        <a:t>+0.1pp</a:t>
-                      </a:r>
-                    </a:p>
-                  </a:txBody>
-                  <a:tcPr>
-                    <a:solidFill>
-                      <a:srgbClr val="EEF2F6"/>
-                    </a:solidFill>
-                  </a:tcPr>
-                </a:tc>
-                <a:tc>
-                  <a:txBody>
-                    <a:bodyPr/>
-                    <a:lstStyle/>
-                    <a:p>
-                      <a:pPr algn="r"/>
-                      <a:r>
-                        <a:rPr sz="1300" b="0">
-                          <a:solidFill>
-                            <a:srgbClr val="111111"/>
-                          </a:solidFill>
-                          <a:latin typeface="Calibri"/>
-                        </a:rPr>
-                        <a:t>n/a</a:t>
-                      </a:r>
-                    </a:p>
-                  </a:txBody>
-                  <a:tcPr>
-                    <a:solidFill>
-                      <a:srgbClr val="EEF2F6"/>
                     </a:solidFill>
                   </a:tcPr>
                 </a:tc>
@@ -7864,7 +7772,7 @@
                   </a:txBody>
                   <a:tcPr>
                     <a:solidFill>
-                      <a:srgbClr val="EEF2F6"/>
+                      <a:srgbClr val="FFFFFF"/>
                     </a:solidFill>
                   </a:tcPr>
                 </a:tc>
@@ -7875,14 +7783,14 @@
       </p:graphicFrame>
       <p:sp>
         <p:nvSpPr>
-          <p:cNvPr id="34" name="TextBox 33"/>
+          <p:cNvPr id="35" name="TextBox 34"/>
           <p:cNvSpPr txBox="1"/>
           <p:nvPr/>
         </p:nvSpPr>
         <p:spPr>
           <a:xfrm>
-            <a:off x="347472" y="4590288"/>
-            <a:ext cx="5760720" cy="256032"/>
+            <a:off x="347472" y="4572000"/>
+            <a:ext cx="5760720" cy="292608"/>
           </a:xfrm>
           <a:prstGeom prst="rect">
             <a:avLst/>
@@ -7908,40 +7816,788 @@
           </a:p>
         </p:txBody>
       </p:sp>
-      <p:pic>
-        <p:nvPicPr>
-          <p:cNvPr id="35" name="Picture 34" descr="data_price.png"/>
-          <p:cNvPicPr>
-            <a:picLocks noChangeAspect="1"/>
-          </p:cNvPicPr>
-          <p:nvPr/>
-        </p:nvPicPr>
-        <p:blipFill>
-          <a:blip r:embed="rId3"/>
-          <a:stretch>
-            <a:fillRect/>
-          </a:stretch>
-        </p:blipFill>
-        <p:spPr>
-          <a:xfrm>
-            <a:off x="182880" y="4828032"/>
-            <a:ext cx="5852160" cy="1627632"/>
-          </a:xfrm>
-          <a:prstGeom prst="rect">
-            <a:avLst/>
-          </a:prstGeom>
-        </p:spPr>
-      </p:pic>
-      <p:sp>
-        <p:nvSpPr>
-          <p:cNvPr id="36" name="TextBox 35"/>
+      <p:sp>
+        <p:nvSpPr>
+          <p:cNvPr id="36" name="Rectangle 35"/>
+          <p:cNvSpPr/>
+          <p:nvPr/>
+        </p:nvSpPr>
+        <p:spPr>
+          <a:xfrm>
+            <a:off x="347472" y="4974336"/>
+            <a:ext cx="2788920" cy="676656"/>
+          </a:xfrm>
+          <a:prstGeom prst="rect">
+            <a:avLst/>
+          </a:prstGeom>
+          <a:solidFill>
+            <a:srgbClr val="F3F5F7"/>
+          </a:solidFill>
+          <a:ln w="12700">
+            <a:solidFill>
+              <a:srgbClr val="C8D0D8"/>
+            </a:solidFill>
+          </a:ln>
+        </p:spPr>
+        <p:style>
+          <a:lnRef idx="1">
+            <a:schemeClr val="accent1"/>
+          </a:lnRef>
+          <a:fillRef idx="3">
+            <a:schemeClr val="accent1"/>
+          </a:fillRef>
+          <a:effectRef idx="2">
+            <a:schemeClr val="accent1"/>
+          </a:effectRef>
+          <a:fontRef idx="minor">
+            <a:schemeClr val="lt1"/>
+          </a:fontRef>
+        </p:style>
+        <p:txBody>
+          <a:bodyPr rtlCol="0" anchor="ctr"/>
+          <a:lstStyle/>
+          <a:p>
+            <a:pPr algn="ctr"/>
+          </a:p>
+        </p:txBody>
+      </p:sp>
+      <p:sp>
+        <p:nvSpPr>
+          <p:cNvPr id="37" name="Rectangle 36"/>
+          <p:cNvSpPr/>
+          <p:nvPr/>
+        </p:nvSpPr>
+        <p:spPr>
+          <a:xfrm>
+            <a:off x="347472" y="4974336"/>
+            <a:ext cx="82296" cy="676656"/>
+          </a:xfrm>
+          <a:prstGeom prst="rect">
+            <a:avLst/>
+          </a:prstGeom>
+          <a:solidFill>
+            <a:srgbClr val="1F5FA8"/>
+          </a:solidFill>
+          <a:ln>
+            <a:noFill/>
+          </a:ln>
+        </p:spPr>
+        <p:style>
+          <a:lnRef idx="1">
+            <a:schemeClr val="accent1"/>
+          </a:lnRef>
+          <a:fillRef idx="3">
+            <a:schemeClr val="accent1"/>
+          </a:fillRef>
+          <a:effectRef idx="2">
+            <a:schemeClr val="accent1"/>
+          </a:effectRef>
+          <a:fontRef idx="minor">
+            <a:schemeClr val="lt1"/>
+          </a:fontRef>
+        </p:style>
+        <p:txBody>
+          <a:bodyPr rtlCol="0" anchor="ctr"/>
+          <a:lstStyle/>
+          <a:p>
+            <a:pPr algn="ctr"/>
+          </a:p>
+        </p:txBody>
+      </p:sp>
+      <p:sp>
+        <p:nvSpPr>
+          <p:cNvPr id="38" name="TextBox 37"/>
           <p:cNvSpPr txBox="1"/>
           <p:nvPr/>
         </p:nvSpPr>
         <p:spPr>
           <a:xfrm>
-            <a:off x="6217920" y="4590288"/>
-            <a:ext cx="5577840" cy="256032"/>
+            <a:off x="530352" y="5020056"/>
+            <a:ext cx="2487168" cy="182880"/>
+          </a:xfrm>
+          <a:prstGeom prst="rect">
+            <a:avLst/>
+          </a:prstGeom>
+          <a:noFill/>
+        </p:spPr>
+        <p:txBody>
+          <a:bodyPr wrap="square">
+            <a:spAutoFit/>
+          </a:bodyPr>
+          <a:lstStyle/>
+          <a:p>
+            <a:pPr algn="l"/>
+            <a:r>
+              <a:rPr sz="1100" b="1">
+                <a:solidFill>
+                  <a:srgbClr val="3D4A55"/>
+                </a:solidFill>
+                <a:latin typeface="Calibri"/>
+              </a:rPr>
+              <a:t>ROKA</a:t>
+            </a:r>
+          </a:p>
+        </p:txBody>
+      </p:sp>
+      <p:sp>
+        <p:nvSpPr>
+          <p:cNvPr id="39" name="TextBox 38"/>
+          <p:cNvSpPr txBox="1"/>
+          <p:nvPr/>
+        </p:nvSpPr>
+        <p:spPr>
+          <a:xfrm>
+            <a:off x="530352" y="5193792"/>
+            <a:ext cx="2487168" cy="237744"/>
+          </a:xfrm>
+          <a:prstGeom prst="rect">
+            <a:avLst/>
+          </a:prstGeom>
+          <a:noFill/>
+        </p:spPr>
+        <p:txBody>
+          <a:bodyPr wrap="square">
+            <a:spAutoFit/>
+          </a:bodyPr>
+          <a:lstStyle/>
+          <a:p>
+            <a:pPr algn="l"/>
+            <a:r>
+              <a:rPr sz="2000" b="1">
+                <a:solidFill>
+                  <a:srgbClr val="122A4A"/>
+                </a:solidFill>
+                <a:latin typeface="Calibri"/>
+              </a:rPr>
+              <a:t>R5.88</a:t>
+            </a:r>
+          </a:p>
+        </p:txBody>
+      </p:sp>
+      <p:sp>
+        <p:nvSpPr>
+          <p:cNvPr id="40" name="TextBox 39"/>
+          <p:cNvSpPr txBox="1"/>
+          <p:nvPr/>
+        </p:nvSpPr>
+        <p:spPr>
+          <a:xfrm>
+            <a:off x="530352" y="5431536"/>
+            <a:ext cx="2487168" cy="182880"/>
+          </a:xfrm>
+          <a:prstGeom prst="rect">
+            <a:avLst/>
+          </a:prstGeom>
+          <a:noFill/>
+        </p:spPr>
+        <p:txBody>
+          <a:bodyPr wrap="square">
+            <a:spAutoFit/>
+          </a:bodyPr>
+          <a:lstStyle/>
+          <a:p>
+            <a:pPr algn="l"/>
+            <a:r>
+              <a:rPr sz="1200" b="0">
+                <a:solidFill>
+                  <a:srgbClr val="111111"/>
+                </a:solidFill>
+                <a:latin typeface="Calibri"/>
+              </a:rPr>
+              <a:t>Value sachet</a:t>
+            </a:r>
+          </a:p>
+        </p:txBody>
+      </p:sp>
+      <p:sp>
+        <p:nvSpPr>
+          <p:cNvPr id="41" name="Rectangle 40"/>
+          <p:cNvSpPr/>
+          <p:nvPr/>
+        </p:nvSpPr>
+        <p:spPr>
+          <a:xfrm>
+            <a:off x="3273552" y="4974336"/>
+            <a:ext cx="2788920" cy="676656"/>
+          </a:xfrm>
+          <a:prstGeom prst="rect">
+            <a:avLst/>
+          </a:prstGeom>
+          <a:solidFill>
+            <a:srgbClr val="F3F5F7"/>
+          </a:solidFill>
+          <a:ln w="12700">
+            <a:solidFill>
+              <a:srgbClr val="C8D0D8"/>
+            </a:solidFill>
+          </a:ln>
+        </p:spPr>
+        <p:style>
+          <a:lnRef idx="1">
+            <a:schemeClr val="accent1"/>
+          </a:lnRef>
+          <a:fillRef idx="3">
+            <a:schemeClr val="accent1"/>
+          </a:fillRef>
+          <a:effectRef idx="2">
+            <a:schemeClr val="accent1"/>
+          </a:effectRef>
+          <a:fontRef idx="minor">
+            <a:schemeClr val="lt1"/>
+          </a:fontRef>
+        </p:style>
+        <p:txBody>
+          <a:bodyPr rtlCol="0" anchor="ctr"/>
+          <a:lstStyle/>
+          <a:p>
+            <a:pPr algn="ctr"/>
+          </a:p>
+        </p:txBody>
+      </p:sp>
+      <p:sp>
+        <p:nvSpPr>
+          <p:cNvPr id="42" name="Rectangle 41"/>
+          <p:cNvSpPr/>
+          <p:nvPr/>
+        </p:nvSpPr>
+        <p:spPr>
+          <a:xfrm>
+            <a:off x="3273552" y="4974336"/>
+            <a:ext cx="82296" cy="676656"/>
+          </a:xfrm>
+          <a:prstGeom prst="rect">
+            <a:avLst/>
+          </a:prstGeom>
+          <a:solidFill>
+            <a:srgbClr val="1F5FA8"/>
+          </a:solidFill>
+          <a:ln>
+            <a:noFill/>
+          </a:ln>
+        </p:spPr>
+        <p:style>
+          <a:lnRef idx="1">
+            <a:schemeClr val="accent1"/>
+          </a:lnRef>
+          <a:fillRef idx="3">
+            <a:schemeClr val="accent1"/>
+          </a:fillRef>
+          <a:effectRef idx="2">
+            <a:schemeClr val="accent1"/>
+          </a:effectRef>
+          <a:fontRef idx="minor">
+            <a:schemeClr val="lt1"/>
+          </a:fontRef>
+        </p:style>
+        <p:txBody>
+          <a:bodyPr rtlCol="0" anchor="ctr"/>
+          <a:lstStyle/>
+          <a:p>
+            <a:pPr algn="ctr"/>
+          </a:p>
+        </p:txBody>
+      </p:sp>
+      <p:sp>
+        <p:nvSpPr>
+          <p:cNvPr id="43" name="TextBox 42"/>
+          <p:cNvSpPr txBox="1"/>
+          <p:nvPr/>
+        </p:nvSpPr>
+        <p:spPr>
+          <a:xfrm>
+            <a:off x="3456432" y="5020056"/>
+            <a:ext cx="2487168" cy="182880"/>
+          </a:xfrm>
+          <a:prstGeom prst="rect">
+            <a:avLst/>
+          </a:prstGeom>
+          <a:noFill/>
+        </p:spPr>
+        <p:txBody>
+          <a:bodyPr wrap="square">
+            <a:spAutoFit/>
+          </a:bodyPr>
+          <a:lstStyle/>
+          <a:p>
+            <a:pPr algn="l"/>
+            <a:r>
+              <a:rPr sz="1100" b="1">
+                <a:solidFill>
+                  <a:srgbClr val="3D4A55"/>
+                </a:solidFill>
+                <a:latin typeface="Calibri"/>
+              </a:rPr>
+              <a:t>KELLOGG'S</a:t>
+            </a:r>
+          </a:p>
+        </p:txBody>
+      </p:sp>
+      <p:sp>
+        <p:nvSpPr>
+          <p:cNvPr id="44" name="TextBox 43"/>
+          <p:cNvSpPr txBox="1"/>
+          <p:nvPr/>
+        </p:nvSpPr>
+        <p:spPr>
+          <a:xfrm>
+            <a:off x="3456432" y="5193792"/>
+            <a:ext cx="2487168" cy="237744"/>
+          </a:xfrm>
+          <a:prstGeom prst="rect">
+            <a:avLst/>
+          </a:prstGeom>
+          <a:noFill/>
+        </p:spPr>
+        <p:txBody>
+          <a:bodyPr wrap="square">
+            <a:spAutoFit/>
+          </a:bodyPr>
+          <a:lstStyle/>
+          <a:p>
+            <a:pPr algn="l"/>
+            <a:r>
+              <a:rPr sz="2000" b="1">
+                <a:solidFill>
+                  <a:srgbClr val="122A4A"/>
+                </a:solidFill>
+                <a:latin typeface="Calibri"/>
+              </a:rPr>
+              <a:t>R6.09</a:t>
+            </a:r>
+          </a:p>
+        </p:txBody>
+      </p:sp>
+      <p:sp>
+        <p:nvSpPr>
+          <p:cNvPr id="45" name="TextBox 44"/>
+          <p:cNvSpPr txBox="1"/>
+          <p:nvPr/>
+        </p:nvSpPr>
+        <p:spPr>
+          <a:xfrm>
+            <a:off x="3456432" y="5431536"/>
+            <a:ext cx="2487168" cy="182880"/>
+          </a:xfrm>
+          <a:prstGeom prst="rect">
+            <a:avLst/>
+          </a:prstGeom>
+          <a:noFill/>
+        </p:spPr>
+        <p:txBody>
+          <a:bodyPr wrap="square">
+            <a:spAutoFit/>
+          </a:bodyPr>
+          <a:lstStyle/>
+          <a:p>
+            <a:pPr algn="l"/>
+            <a:r>
+              <a:rPr sz="1200" b="0">
+                <a:solidFill>
+                  <a:srgbClr val="111111"/>
+                </a:solidFill>
+                <a:latin typeface="Calibri"/>
+              </a:rPr>
+              <a:t>Maggi R6.79  ·  Indomie R7.90</a:t>
+            </a:r>
+          </a:p>
+        </p:txBody>
+      </p:sp>
+      <p:sp>
+        <p:nvSpPr>
+          <p:cNvPr id="46" name="Rectangle 45"/>
+          <p:cNvSpPr/>
+          <p:nvPr/>
+        </p:nvSpPr>
+        <p:spPr>
+          <a:xfrm>
+            <a:off x="347472" y="5724144"/>
+            <a:ext cx="2788920" cy="676656"/>
+          </a:xfrm>
+          <a:prstGeom prst="rect">
+            <a:avLst/>
+          </a:prstGeom>
+          <a:solidFill>
+            <a:srgbClr val="F3F5F7"/>
+          </a:solidFill>
+          <a:ln w="12700">
+            <a:solidFill>
+              <a:srgbClr val="C8D0D8"/>
+            </a:solidFill>
+          </a:ln>
+        </p:spPr>
+        <p:style>
+          <a:lnRef idx="1">
+            <a:schemeClr val="accent1"/>
+          </a:lnRef>
+          <a:fillRef idx="3">
+            <a:schemeClr val="accent1"/>
+          </a:fillRef>
+          <a:effectRef idx="2">
+            <a:schemeClr val="accent1"/>
+          </a:effectRef>
+          <a:fontRef idx="minor">
+            <a:schemeClr val="lt1"/>
+          </a:fontRef>
+        </p:style>
+        <p:txBody>
+          <a:bodyPr rtlCol="0" anchor="ctr"/>
+          <a:lstStyle/>
+          <a:p>
+            <a:pPr algn="ctr"/>
+          </a:p>
+        </p:txBody>
+      </p:sp>
+      <p:sp>
+        <p:nvSpPr>
+          <p:cNvPr id="47" name="Rectangle 46"/>
+          <p:cNvSpPr/>
+          <p:nvPr/>
+        </p:nvSpPr>
+        <p:spPr>
+          <a:xfrm>
+            <a:off x="347472" y="5724144"/>
+            <a:ext cx="82296" cy="676656"/>
+          </a:xfrm>
+          <a:prstGeom prst="rect">
+            <a:avLst/>
+          </a:prstGeom>
+          <a:solidFill>
+            <a:srgbClr val="0E7C7B"/>
+          </a:solidFill>
+          <a:ln>
+            <a:noFill/>
+          </a:ln>
+        </p:spPr>
+        <p:style>
+          <a:lnRef idx="1">
+            <a:schemeClr val="accent1"/>
+          </a:lnRef>
+          <a:fillRef idx="3">
+            <a:schemeClr val="accent1"/>
+          </a:fillRef>
+          <a:effectRef idx="2">
+            <a:schemeClr val="accent1"/>
+          </a:effectRef>
+          <a:fontRef idx="minor">
+            <a:schemeClr val="lt1"/>
+          </a:fontRef>
+        </p:style>
+        <p:txBody>
+          <a:bodyPr rtlCol="0" anchor="ctr"/>
+          <a:lstStyle/>
+          <a:p>
+            <a:pPr algn="ctr"/>
+          </a:p>
+        </p:txBody>
+      </p:sp>
+      <p:sp>
+        <p:nvSpPr>
+          <p:cNvPr id="48" name="TextBox 47"/>
+          <p:cNvSpPr txBox="1"/>
+          <p:nvPr/>
+        </p:nvSpPr>
+        <p:spPr>
+          <a:xfrm>
+            <a:off x="530352" y="5769864"/>
+            <a:ext cx="2487168" cy="182880"/>
+          </a:xfrm>
+          <a:prstGeom prst="rect">
+            <a:avLst/>
+          </a:prstGeom>
+          <a:noFill/>
+        </p:spPr>
+        <p:txBody>
+          <a:bodyPr wrap="square">
+            <a:spAutoFit/>
+          </a:bodyPr>
+          <a:lstStyle/>
+          <a:p>
+            <a:pPr algn="l"/>
+            <a:r>
+              <a:rPr sz="1100" b="1">
+                <a:solidFill>
+                  <a:srgbClr val="3D4A55"/>
+                </a:solidFill>
+                <a:latin typeface="Calibri"/>
+              </a:rPr>
+              <a:t>SAMYANG</a:t>
+            </a:r>
+          </a:p>
+        </p:txBody>
+      </p:sp>
+      <p:sp>
+        <p:nvSpPr>
+          <p:cNvPr id="49" name="TextBox 48"/>
+          <p:cNvSpPr txBox="1"/>
+          <p:nvPr/>
+        </p:nvSpPr>
+        <p:spPr>
+          <a:xfrm>
+            <a:off x="530352" y="5943600"/>
+            <a:ext cx="2487168" cy="237744"/>
+          </a:xfrm>
+          <a:prstGeom prst="rect">
+            <a:avLst/>
+          </a:prstGeom>
+          <a:noFill/>
+        </p:spPr>
+        <p:txBody>
+          <a:bodyPr wrap="square">
+            <a:spAutoFit/>
+          </a:bodyPr>
+          <a:lstStyle/>
+          <a:p>
+            <a:pPr algn="l"/>
+            <a:r>
+              <a:rPr sz="2000" b="1">
+                <a:solidFill>
+                  <a:srgbClr val="122A4A"/>
+                </a:solidFill>
+                <a:latin typeface="Calibri"/>
+              </a:rPr>
+              <a:t>R39.24</a:t>
+            </a:r>
+          </a:p>
+        </p:txBody>
+      </p:sp>
+      <p:sp>
+        <p:nvSpPr>
+          <p:cNvPr id="50" name="TextBox 49"/>
+          <p:cNvSpPr txBox="1"/>
+          <p:nvPr/>
+        </p:nvSpPr>
+        <p:spPr>
+          <a:xfrm>
+            <a:off x="530352" y="6181344"/>
+            <a:ext cx="2487168" cy="182880"/>
+          </a:xfrm>
+          <a:prstGeom prst="rect">
+            <a:avLst/>
+          </a:prstGeom>
+          <a:noFill/>
+        </p:spPr>
+        <p:txBody>
+          <a:bodyPr wrap="square">
+            <a:spAutoFit/>
+          </a:bodyPr>
+          <a:lstStyle/>
+          <a:p>
+            <a:pPr algn="l"/>
+            <a:r>
+              <a:rPr sz="1200" b="0">
+                <a:solidFill>
+                  <a:srgbClr val="111111"/>
+                </a:solidFill>
+                <a:latin typeface="Calibri"/>
+              </a:rPr>
+              <a:t>Ramen / cup</a:t>
+            </a:r>
+          </a:p>
+        </p:txBody>
+      </p:sp>
+      <p:sp>
+        <p:nvSpPr>
+          <p:cNvPr id="51" name="Rectangle 50"/>
+          <p:cNvSpPr/>
+          <p:nvPr/>
+        </p:nvSpPr>
+        <p:spPr>
+          <a:xfrm>
+            <a:off x="3273552" y="5724144"/>
+            <a:ext cx="2788920" cy="676656"/>
+          </a:xfrm>
+          <a:prstGeom prst="rect">
+            <a:avLst/>
+          </a:prstGeom>
+          <a:solidFill>
+            <a:srgbClr val="F3F5F7"/>
+          </a:solidFill>
+          <a:ln w="12700">
+            <a:solidFill>
+              <a:srgbClr val="C8D0D8"/>
+            </a:solidFill>
+          </a:ln>
+        </p:spPr>
+        <p:style>
+          <a:lnRef idx="1">
+            <a:schemeClr val="accent1"/>
+          </a:lnRef>
+          <a:fillRef idx="3">
+            <a:schemeClr val="accent1"/>
+          </a:fillRef>
+          <a:effectRef idx="2">
+            <a:schemeClr val="accent1"/>
+          </a:effectRef>
+          <a:fontRef idx="minor">
+            <a:schemeClr val="lt1"/>
+          </a:fontRef>
+        </p:style>
+        <p:txBody>
+          <a:bodyPr rtlCol="0" anchor="ctr"/>
+          <a:lstStyle/>
+          <a:p>
+            <a:pPr algn="ctr"/>
+          </a:p>
+        </p:txBody>
+      </p:sp>
+      <p:sp>
+        <p:nvSpPr>
+          <p:cNvPr id="52" name="Rectangle 51"/>
+          <p:cNvSpPr/>
+          <p:nvPr/>
+        </p:nvSpPr>
+        <p:spPr>
+          <a:xfrm>
+            <a:off x="3273552" y="5724144"/>
+            <a:ext cx="82296" cy="676656"/>
+          </a:xfrm>
+          <a:prstGeom prst="rect">
+            <a:avLst/>
+          </a:prstGeom>
+          <a:solidFill>
+            <a:srgbClr val="D05A1A"/>
+          </a:solidFill>
+          <a:ln>
+            <a:noFill/>
+          </a:ln>
+        </p:spPr>
+        <p:style>
+          <a:lnRef idx="1">
+            <a:schemeClr val="accent1"/>
+          </a:lnRef>
+          <a:fillRef idx="3">
+            <a:schemeClr val="accent1"/>
+          </a:fillRef>
+          <a:effectRef idx="2">
+            <a:schemeClr val="accent1"/>
+          </a:effectRef>
+          <a:fontRef idx="minor">
+            <a:schemeClr val="lt1"/>
+          </a:fontRef>
+        </p:style>
+        <p:txBody>
+          <a:bodyPr rtlCol="0" anchor="ctr"/>
+          <a:lstStyle/>
+          <a:p>
+            <a:pPr algn="ctr"/>
+          </a:p>
+        </p:txBody>
+      </p:sp>
+      <p:sp>
+        <p:nvSpPr>
+          <p:cNvPr id="53" name="TextBox 52"/>
+          <p:cNvSpPr txBox="1"/>
+          <p:nvPr/>
+        </p:nvSpPr>
+        <p:spPr>
+          <a:xfrm>
+            <a:off x="3456432" y="5769864"/>
+            <a:ext cx="2487168" cy="182880"/>
+          </a:xfrm>
+          <a:prstGeom prst="rect">
+            <a:avLst/>
+          </a:prstGeom>
+          <a:noFill/>
+        </p:spPr>
+        <p:txBody>
+          <a:bodyPr wrap="square">
+            <a:spAutoFit/>
+          </a:bodyPr>
+          <a:lstStyle/>
+          <a:p>
+            <a:pPr algn="l"/>
+            <a:r>
+              <a:rPr sz="1100" b="1">
+                <a:solidFill>
+                  <a:srgbClr val="3D4A55"/>
+                </a:solidFill>
+                <a:latin typeface="Calibri"/>
+              </a:rPr>
+              <a:t>KNORR</a:t>
+            </a:r>
+          </a:p>
+        </p:txBody>
+      </p:sp>
+      <p:sp>
+        <p:nvSpPr>
+          <p:cNvPr id="54" name="TextBox 53"/>
+          <p:cNvSpPr txBox="1"/>
+          <p:nvPr/>
+        </p:nvSpPr>
+        <p:spPr>
+          <a:xfrm>
+            <a:off x="3456432" y="5943600"/>
+            <a:ext cx="2487168" cy="237744"/>
+          </a:xfrm>
+          <a:prstGeom prst="rect">
+            <a:avLst/>
+          </a:prstGeom>
+          <a:noFill/>
+        </p:spPr>
+        <p:txBody>
+          <a:bodyPr wrap="square">
+            <a:spAutoFit/>
+          </a:bodyPr>
+          <a:lstStyle/>
+          <a:p>
+            <a:pPr algn="l"/>
+            <a:r>
+              <a:rPr sz="2000" b="1">
+                <a:solidFill>
+                  <a:srgbClr val="122A4A"/>
+                </a:solidFill>
+                <a:latin typeface="Calibri"/>
+              </a:rPr>
+              <a:t>R49.11</a:t>
+            </a:r>
+          </a:p>
+        </p:txBody>
+      </p:sp>
+      <p:sp>
+        <p:nvSpPr>
+          <p:cNvPr id="55" name="TextBox 54"/>
+          <p:cNvSpPr txBox="1"/>
+          <p:nvPr/>
+        </p:nvSpPr>
+        <p:spPr>
+          <a:xfrm>
+            <a:off x="3456432" y="6181344"/>
+            <a:ext cx="2487168" cy="182880"/>
+          </a:xfrm>
+          <a:prstGeom prst="rect">
+            <a:avLst/>
+          </a:prstGeom>
+          <a:noFill/>
+        </p:spPr>
+        <p:txBody>
+          <a:bodyPr wrap="square">
+            <a:spAutoFit/>
+          </a:bodyPr>
+          <a:lstStyle/>
+          <a:p>
+            <a:pPr algn="l"/>
+            <a:r>
+              <a:rPr sz="1200" b="0">
+                <a:solidFill>
+                  <a:srgbClr val="111111"/>
+                </a:solidFill>
+                <a:latin typeface="Calibri"/>
+              </a:rPr>
+              <a:t>Pasta Pots  ·  ~8× sachet</a:t>
+            </a:r>
+          </a:p>
+        </p:txBody>
+      </p:sp>
+      <p:sp>
+        <p:nvSpPr>
+          <p:cNvPr id="56" name="TextBox 55"/>
+          <p:cNvSpPr txBox="1"/>
+          <p:nvPr/>
+        </p:nvSpPr>
+        <p:spPr>
+          <a:xfrm>
+            <a:off x="6217920" y="4572000"/>
+            <a:ext cx="5577840" cy="292608"/>
           </a:xfrm>
           <a:prstGeom prst="rect">
             <a:avLst/>
@@ -7969,14 +8625,14 @@
       </p:sp>
       <p:graphicFrame>
         <p:nvGraphicFramePr>
-          <p:cNvPr id="37" name="Table 36"/>
+          <p:cNvPr id="57" name="Table 56"/>
           <p:cNvGraphicFramePr>
             <a:graphicFrameLocks noGrp="1"/>
           </p:cNvGraphicFramePr>
           <p:nvPr/>
         </p:nvGraphicFramePr>
         <p:xfrm>
-          <a:off x="6217920" y="4864608"/>
+          <a:off x="6217920" y="5047488"/>
           <a:ext cx="5623560" cy="1417320"/>
         </p:xfrm>
         <a:graphic>
@@ -8527,7 +9183,7 @@
         <p:spPr>
           <a:xfrm>
             <a:off x="347472" y="164592"/>
-            <a:ext cx="11338560" cy="420624"/>
+            <a:ext cx="9509760" cy="420624"/>
           </a:xfrm>
           <a:prstGeom prst="rect">
             <a:avLst/>
@@ -8542,7 +9198,7 @@
           <a:p>
             <a:pPr algn="l"/>
             <a:r>
-              <a:rPr sz="2600" b="1">
+              <a:rPr sz="2400" b="1">
                 <a:solidFill>
                   <a:srgbClr val="122A4A"/>
                 </a:solidFill>
@@ -8596,9 +9252,33 @@
           </a:p>
         </p:txBody>
       </p:sp>
-      <p:sp>
-        <p:nvSpPr>
-          <p:cNvPr id="7" name="Rectangle 6"/>
+      <p:pic>
+        <p:nvPicPr>
+          <p:cNvPr id="7" name="Picture 6" descr="smollan_logo_content.png"/>
+          <p:cNvPicPr>
+            <a:picLocks noChangeAspect="1"/>
+          </p:cNvPicPr>
+          <p:nvPr/>
+        </p:nvPicPr>
+        <p:blipFill>
+          <a:blip r:embed="rId2"/>
+          <a:stretch>
+            <a:fillRect/>
+          </a:stretch>
+        </p:blipFill>
+        <p:spPr>
+          <a:xfrm>
+            <a:off x="10104120" y="128016"/>
+            <a:ext cx="1783080" cy="384048"/>
+          </a:xfrm>
+          <a:prstGeom prst="rect">
+            <a:avLst/>
+          </a:prstGeom>
+        </p:spPr>
+      </p:pic>
+      <p:sp>
+        <p:nvSpPr>
+          <p:cNvPr id="8" name="Rectangle 7"/>
           <p:cNvSpPr/>
           <p:nvPr/>
         </p:nvSpPr>
@@ -8641,7 +9321,7 @@
       </p:sp>
       <p:sp>
         <p:nvSpPr>
-          <p:cNvPr id="8" name="TextBox 7"/>
+          <p:cNvPr id="9" name="TextBox 8"/>
           <p:cNvSpPr txBox="1"/>
           <p:nvPr/>
         </p:nvSpPr>
@@ -8676,7 +9356,7 @@
       </p:sp>
       <p:sp>
         <p:nvSpPr>
-          <p:cNvPr id="9" name="TextBox 8"/>
+          <p:cNvPr id="10" name="TextBox 9"/>
           <p:cNvSpPr txBox="1"/>
           <p:nvPr/>
         </p:nvSpPr>
@@ -8711,7 +9391,7 @@
       </p:sp>
       <p:sp>
         <p:nvSpPr>
-          <p:cNvPr id="10" name="Rectangle 9"/>
+          <p:cNvPr id="11" name="Rectangle 10"/>
           <p:cNvSpPr/>
           <p:nvPr/>
         </p:nvSpPr>
@@ -8756,7 +9436,7 @@
       </p:sp>
       <p:sp>
         <p:nvSpPr>
-          <p:cNvPr id="11" name="Rectangle 10"/>
+          <p:cNvPr id="12" name="Rectangle 11"/>
           <p:cNvSpPr/>
           <p:nvPr/>
         </p:nvSpPr>
@@ -8799,7 +9479,7 @@
       </p:sp>
       <p:sp>
         <p:nvSpPr>
-          <p:cNvPr id="12" name="TextBox 11"/>
+          <p:cNvPr id="13" name="TextBox 12"/>
           <p:cNvSpPr txBox="1"/>
           <p:nvPr/>
         </p:nvSpPr>
@@ -8834,7 +9514,7 @@
       </p:sp>
       <p:sp>
         <p:nvSpPr>
-          <p:cNvPr id="13" name="TextBox 12"/>
+          <p:cNvPr id="14" name="TextBox 13"/>
           <p:cNvSpPr txBox="1"/>
           <p:nvPr/>
         </p:nvSpPr>
@@ -8869,7 +9549,7 @@
       </p:sp>
       <p:sp>
         <p:nvSpPr>
-          <p:cNvPr id="14" name="TextBox 13"/>
+          <p:cNvPr id="15" name="TextBox 14"/>
           <p:cNvSpPr txBox="1"/>
           <p:nvPr/>
         </p:nvSpPr>
@@ -8904,7 +9584,7 @@
       </p:sp>
       <p:sp>
         <p:nvSpPr>
-          <p:cNvPr id="15" name="Rectangle 14"/>
+          <p:cNvPr id="16" name="Rectangle 15"/>
           <p:cNvSpPr/>
           <p:nvPr/>
         </p:nvSpPr>
@@ -8949,7 +9629,7 @@
       </p:sp>
       <p:sp>
         <p:nvSpPr>
-          <p:cNvPr id="16" name="Rectangle 15"/>
+          <p:cNvPr id="17" name="Rectangle 16"/>
           <p:cNvSpPr/>
           <p:nvPr/>
         </p:nvSpPr>
@@ -8992,7 +9672,7 @@
       </p:sp>
       <p:sp>
         <p:nvSpPr>
-          <p:cNvPr id="17" name="TextBox 16"/>
+          <p:cNvPr id="18" name="TextBox 17"/>
           <p:cNvSpPr txBox="1"/>
           <p:nvPr/>
         </p:nvSpPr>
@@ -9027,7 +9707,7 @@
       </p:sp>
       <p:sp>
         <p:nvSpPr>
-          <p:cNvPr id="18" name="TextBox 17"/>
+          <p:cNvPr id="19" name="TextBox 18"/>
           <p:cNvSpPr txBox="1"/>
           <p:nvPr/>
         </p:nvSpPr>
@@ -9062,7 +9742,7 @@
       </p:sp>
       <p:sp>
         <p:nvSpPr>
-          <p:cNvPr id="19" name="TextBox 18"/>
+          <p:cNvPr id="20" name="TextBox 19"/>
           <p:cNvSpPr txBox="1"/>
           <p:nvPr/>
         </p:nvSpPr>
@@ -9097,7 +9777,7 @@
       </p:sp>
       <p:sp>
         <p:nvSpPr>
-          <p:cNvPr id="20" name="Rectangle 19"/>
+          <p:cNvPr id="21" name="Rectangle 20"/>
           <p:cNvSpPr/>
           <p:nvPr/>
         </p:nvSpPr>
@@ -9142,7 +9822,7 @@
       </p:sp>
       <p:sp>
         <p:nvSpPr>
-          <p:cNvPr id="21" name="Rectangle 20"/>
+          <p:cNvPr id="22" name="Rectangle 21"/>
           <p:cNvSpPr/>
           <p:nvPr/>
         </p:nvSpPr>
@@ -9185,7 +9865,7 @@
       </p:sp>
       <p:sp>
         <p:nvSpPr>
-          <p:cNvPr id="22" name="TextBox 21"/>
+          <p:cNvPr id="23" name="TextBox 22"/>
           <p:cNvSpPr txBox="1"/>
           <p:nvPr/>
         </p:nvSpPr>
@@ -9220,7 +9900,7 @@
       </p:sp>
       <p:sp>
         <p:nvSpPr>
-          <p:cNvPr id="23" name="TextBox 22"/>
+          <p:cNvPr id="24" name="TextBox 23"/>
           <p:cNvSpPr txBox="1"/>
           <p:nvPr/>
         </p:nvSpPr>
@@ -9255,7 +9935,7 @@
       </p:sp>
       <p:sp>
         <p:nvSpPr>
-          <p:cNvPr id="24" name="TextBox 23"/>
+          <p:cNvPr id="25" name="TextBox 24"/>
           <p:cNvSpPr txBox="1"/>
           <p:nvPr/>
         </p:nvSpPr>
@@ -9290,7 +9970,7 @@
       </p:sp>
       <p:sp>
         <p:nvSpPr>
-          <p:cNvPr id="25" name="Rectangle 24"/>
+          <p:cNvPr id="26" name="Rectangle 25"/>
           <p:cNvSpPr/>
           <p:nvPr/>
         </p:nvSpPr>
@@ -9335,7 +10015,7 @@
       </p:sp>
       <p:sp>
         <p:nvSpPr>
-          <p:cNvPr id="26" name="Rectangle 25"/>
+          <p:cNvPr id="27" name="Rectangle 26"/>
           <p:cNvSpPr/>
           <p:nvPr/>
         </p:nvSpPr>
@@ -9378,7 +10058,7 @@
       </p:sp>
       <p:sp>
         <p:nvSpPr>
-          <p:cNvPr id="27" name="TextBox 26"/>
+          <p:cNvPr id="28" name="TextBox 27"/>
           <p:cNvSpPr txBox="1"/>
           <p:nvPr/>
         </p:nvSpPr>
@@ -9413,7 +10093,7 @@
       </p:sp>
       <p:sp>
         <p:nvSpPr>
-          <p:cNvPr id="28" name="TextBox 27"/>
+          <p:cNvPr id="29" name="TextBox 28"/>
           <p:cNvSpPr txBox="1"/>
           <p:nvPr/>
         </p:nvSpPr>
@@ -9448,7 +10128,7 @@
       </p:sp>
       <p:sp>
         <p:nvSpPr>
-          <p:cNvPr id="29" name="TextBox 28"/>
+          <p:cNvPr id="30" name="TextBox 29"/>
           <p:cNvSpPr txBox="1"/>
           <p:nvPr/>
         </p:nvSpPr>

--- a/output/Unilever_Pasta_Noodles_Jun2026.pptx
+++ b/output/Unilever_Pasta_Noodles_Jun2026.pptx
@@ -10,6 +10,7 @@
     <p:sldId id="258" r:id="rId9"/>
     <p:sldId id="259" r:id="rId10"/>
     <p:sldId id="260" r:id="rId11"/>
+    <p:sldId id="261" r:id="rId12"/>
   </p:sldIdLst>
   <p:sldSz cx="12191695" cy="6858000" type="screen4x3"/>
   <p:notesSz cx="6858000" cy="9144000"/>
@@ -3672,7 +3673,7 @@
                 </a:solidFill>
                 <a:latin typeface="Calibri"/>
               </a:rPr>
-              <a:t>2 / 5</a:t>
+              <a:t>2 / 6</a:t>
             </a:r>
           </a:p>
         </p:txBody>
@@ -4458,7 +4459,7 @@
         <p:spPr>
           <a:xfrm>
             <a:off x="347472" y="1938528"/>
-            <a:ext cx="5760720" cy="292608"/>
+            <a:ext cx="5760720" cy="256032"/>
           </a:xfrm>
           <a:prstGeom prst="rect">
             <a:avLst/>
@@ -4500,8 +4501,8 @@
         </p:blipFill>
         <p:spPr>
           <a:xfrm>
-            <a:off x="256032" y="2359152"/>
-            <a:ext cx="5852160" cy="2527069"/>
+            <a:off x="256032" y="2212848"/>
+            <a:ext cx="5852160" cy="2895600"/>
           </a:xfrm>
           <a:prstGeom prst="rect">
             <a:avLst/>
@@ -4517,7 +4518,7 @@
         <p:spPr>
           <a:xfrm>
             <a:off x="6309360" y="1938528"/>
-            <a:ext cx="5486400" cy="292608"/>
+            <a:ext cx="5486400" cy="256032"/>
           </a:xfrm>
           <a:prstGeom prst="rect">
             <a:avLst/>
@@ -4552,8 +4553,8 @@
           <p:nvPr/>
         </p:nvGraphicFramePr>
         <p:xfrm>
-          <a:off x="6309360" y="2359152"/>
-          <a:ext cx="5532120" cy="2880360"/>
+          <a:off x="6309360" y="2212848"/>
+          <a:ext cx="5532120" cy="3063240"/>
         </p:xfrm>
         <a:graphic>
           <a:graphicData uri="http://schemas.openxmlformats.org/drawingml/2006/table">
@@ -4568,7 +4569,7 @@
                 <a:gridCol w="1005840"/>
                 <a:gridCol w="1005840"/>
               </a:tblGrid>
-              <a:tr h="360045">
+              <a:tr h="382905">
                 <a:tc>
                   <a:txBody>
                     <a:bodyPr/>
@@ -4685,7 +4686,7 @@
                   </a:tcPr>
                 </a:tc>
               </a:tr>
-              <a:tr h="360045">
+              <a:tr h="382905">
                 <a:tc>
                   <a:txBody>
                     <a:bodyPr/>
@@ -4802,7 +4803,7 @@
                   </a:tcPr>
                 </a:tc>
               </a:tr>
-              <a:tr h="360045">
+              <a:tr h="382905">
                 <a:tc>
                   <a:txBody>
                     <a:bodyPr/>
@@ -4919,7 +4920,7 @@
                   </a:tcPr>
                 </a:tc>
               </a:tr>
-              <a:tr h="360045">
+              <a:tr h="382905">
                 <a:tc>
                   <a:txBody>
                     <a:bodyPr/>
@@ -5036,7 +5037,7 @@
                   </a:tcPr>
                 </a:tc>
               </a:tr>
-              <a:tr h="360045">
+              <a:tr h="382905">
                 <a:tc>
                   <a:txBody>
                     <a:bodyPr/>
@@ -5153,7 +5154,7 @@
                   </a:tcPr>
                 </a:tc>
               </a:tr>
-              <a:tr h="360045">
+              <a:tr h="382905">
                 <a:tc>
                   <a:txBody>
                     <a:bodyPr/>
@@ -5270,7 +5271,7 @@
                   </a:tcPr>
                 </a:tc>
               </a:tr>
-              <a:tr h="360045">
+              <a:tr h="382905">
                 <a:tc>
                   <a:txBody>
                     <a:bodyPr/>
@@ -5387,7 +5388,7 @@
                   </a:tcPr>
                 </a:tc>
               </a:tr>
-              <a:tr h="360045">
+              <a:tr h="382905">
                 <a:tc>
                   <a:txBody>
                     <a:bodyPr/>
@@ -5516,8 +5517,8 @@
         </p:nvSpPr>
         <p:spPr>
           <a:xfrm>
-            <a:off x="347472" y="5074920"/>
-            <a:ext cx="11475720" cy="1325880"/>
+            <a:off x="347472" y="5577840"/>
+            <a:ext cx="11475720" cy="868680"/>
           </a:xfrm>
           <a:prstGeom prst="rect">
             <a:avLst/>
@@ -5720,7 +5721,7 @@
                 </a:solidFill>
                 <a:latin typeface="Calibri"/>
               </a:rPr>
-              <a:t>Noodles: players, winners, price — and where Unilever sits</a:t>
+              <a:t>Noodles: who is winning and losing</a:t>
             </a:r>
           </a:p>
         </p:txBody>
@@ -5900,7 +5901,7 @@
                 </a:solidFill>
                 <a:latin typeface="Calibri"/>
               </a:rPr>
-              <a:t>3 / 5</a:t>
+              <a:t>3 / 6</a:t>
             </a:r>
           </a:p>
         </p:txBody>
@@ -6686,7 +6687,7 @@
         <p:spPr>
           <a:xfrm>
             <a:off x="347472" y="1792224"/>
-            <a:ext cx="5760720" cy="292608"/>
+            <a:ext cx="5760720" cy="237744"/>
           </a:xfrm>
           <a:prstGeom prst="rect">
             <a:avLst/>
@@ -6707,7 +6708,7 @@
                 </a:solidFill>
                 <a:latin typeface="Calibri"/>
               </a:rPr>
-              <a:t>Who is winning and losing</a:t>
+              <a:t>12-month Noodles value share</a:t>
             </a:r>
           </a:p>
         </p:txBody>
@@ -6728,8 +6729,8 @@
         </p:blipFill>
         <p:spPr>
           <a:xfrm>
-            <a:off x="201168" y="2395728"/>
-            <a:ext cx="5852160" cy="1995055"/>
+            <a:off x="201168" y="2048256"/>
+            <a:ext cx="5943600" cy="3838575"/>
           </a:xfrm>
           <a:prstGeom prst="rect">
             <a:avLst/>
@@ -6745,7 +6746,7 @@
         <p:spPr>
           <a:xfrm>
             <a:off x="6217920" y="1792224"/>
-            <a:ext cx="5577840" cy="292608"/>
+            <a:ext cx="5577840" cy="237744"/>
           </a:xfrm>
           <a:prstGeom prst="rect">
             <a:avLst/>
@@ -6780,8 +6781,8 @@
           <p:nvPr/>
         </p:nvGraphicFramePr>
         <p:xfrm>
-          <a:off x="6217920" y="2395728"/>
-          <a:ext cx="5623560" cy="1874519"/>
+          <a:off x="6217920" y="2048256"/>
+          <a:ext cx="5623560" cy="4160520"/>
         </p:xfrm>
         <a:graphic>
           <a:graphicData uri="http://schemas.openxmlformats.org/drawingml/2006/table">
@@ -6797,7 +6798,7 @@
                 <a:gridCol w="960120"/>
                 <a:gridCol w="1005840"/>
               </a:tblGrid>
-              <a:tr h="267788">
+              <a:tr h="594360">
                 <a:tc>
                   <a:txBody>
                     <a:bodyPr/>
@@ -6937,7 +6938,7 @@
                   </a:tcPr>
                 </a:tc>
               </a:tr>
-              <a:tr h="267788">
+              <a:tr h="594360">
                 <a:tc>
                   <a:txBody>
                     <a:bodyPr/>
@@ -7077,7 +7078,7 @@
                   </a:tcPr>
                 </a:tc>
               </a:tr>
-              <a:tr h="267788">
+              <a:tr h="594360">
                 <a:tc>
                   <a:txBody>
                     <a:bodyPr/>
@@ -7217,7 +7218,7 @@
                   </a:tcPr>
                 </a:tc>
               </a:tr>
-              <a:tr h="267788">
+              <a:tr h="594360">
                 <a:tc>
                   <a:txBody>
                     <a:bodyPr/>
@@ -7357,7 +7358,7 @@
                   </a:tcPr>
                 </a:tc>
               </a:tr>
-              <a:tr h="267788">
+              <a:tr h="594360">
                 <a:tc>
                   <a:txBody>
                     <a:bodyPr/>
@@ -7497,7 +7498,7 @@
                   </a:tcPr>
                 </a:tc>
               </a:tr>
-              <a:tr h="267788">
+              <a:tr h="594360">
                 <a:tc>
                   <a:txBody>
                     <a:bodyPr/>
@@ -7637,7 +7638,7 @@
                   </a:tcPr>
                 </a:tc>
               </a:tr>
-              <a:tr h="267791">
+              <a:tr h="594360">
                 <a:tc>
                   <a:txBody>
                     <a:bodyPr/>
@@ -7781,16 +7782,378 @@
           </a:graphicData>
         </a:graphic>
       </p:graphicFrame>
-      <p:sp>
-        <p:nvSpPr>
-          <p:cNvPr id="35" name="TextBox 34"/>
+    </p:spTree>
+  </p:cSld>
+  <p:clrMapOvr>
+    <a:masterClrMapping/>
+  </p:clrMapOvr>
+</p:sld>
+</file>
+
+<file path=ppt/slides/slide4.xml><?xml version="1.0" encoding="utf-8"?>
+<p:sld xmlns:a="http://schemas.openxmlformats.org/drawingml/2006/main" xmlns:p="http://schemas.openxmlformats.org/presentationml/2006/main" xmlns:r="http://schemas.openxmlformats.org/officeDocument/2006/relationships">
+  <p:cSld>
+    <p:spTree>
+      <p:nvGrpSpPr>
+        <p:cNvPr id="1" name=""/>
+        <p:cNvGrpSpPr/>
+        <p:nvPr/>
+      </p:nvGrpSpPr>
+      <p:grpSpPr/>
+      <p:sp>
+        <p:nvSpPr>
+          <p:cNvPr id="2" name="Rectangle 1"/>
+          <p:cNvSpPr/>
+          <p:nvPr/>
+        </p:nvSpPr>
+        <p:spPr>
+          <a:xfrm>
+            <a:off x="0" y="0"/>
+            <a:ext cx="12191695" cy="6858000"/>
+          </a:xfrm>
+          <a:prstGeom prst="rect">
+            <a:avLst/>
+          </a:prstGeom>
+          <a:solidFill>
+            <a:srgbClr val="FFFFFF"/>
+          </a:solidFill>
+          <a:ln>
+            <a:noFill/>
+          </a:ln>
+        </p:spPr>
+        <p:style>
+          <a:lnRef idx="1">
+            <a:schemeClr val="accent1"/>
+          </a:lnRef>
+          <a:fillRef idx="3">
+            <a:schemeClr val="accent1"/>
+          </a:fillRef>
+          <a:effectRef idx="2">
+            <a:schemeClr val="accent1"/>
+          </a:effectRef>
+          <a:fontRef idx="minor">
+            <a:schemeClr val="lt1"/>
+          </a:fontRef>
+        </p:style>
+        <p:txBody>
+          <a:bodyPr rtlCol="0" anchor="ctr"/>
+          <a:lstStyle/>
+          <a:p>
+            <a:pPr algn="ctr"/>
+          </a:p>
+        </p:txBody>
+      </p:sp>
+      <p:sp>
+        <p:nvSpPr>
+          <p:cNvPr id="3" name="Rectangle 2"/>
+          <p:cNvSpPr/>
+          <p:nvPr/>
+        </p:nvSpPr>
+        <p:spPr>
+          <a:xfrm>
+            <a:off x="0" y="0"/>
+            <a:ext cx="109728" cy="6858000"/>
+          </a:xfrm>
+          <a:prstGeom prst="rect">
+            <a:avLst/>
+          </a:prstGeom>
+          <a:solidFill>
+            <a:srgbClr val="122A4A"/>
+          </a:solidFill>
+          <a:ln>
+            <a:noFill/>
+          </a:ln>
+        </p:spPr>
+        <p:style>
+          <a:lnRef idx="1">
+            <a:schemeClr val="accent1"/>
+          </a:lnRef>
+          <a:fillRef idx="3">
+            <a:schemeClr val="accent1"/>
+          </a:fillRef>
+          <a:effectRef idx="2">
+            <a:schemeClr val="accent1"/>
+          </a:effectRef>
+          <a:fontRef idx="minor">
+            <a:schemeClr val="lt1"/>
+          </a:fontRef>
+        </p:style>
+        <p:txBody>
+          <a:bodyPr rtlCol="0" anchor="ctr"/>
+          <a:lstStyle/>
+          <a:p>
+            <a:pPr algn="ctr"/>
+          </a:p>
+        </p:txBody>
+      </p:sp>
+      <p:sp>
+        <p:nvSpPr>
+          <p:cNvPr id="4" name="Rectangle 3"/>
+          <p:cNvSpPr/>
+          <p:nvPr/>
+        </p:nvSpPr>
+        <p:spPr>
+          <a:xfrm>
+            <a:off x="0" y="0"/>
+            <a:ext cx="12191695" cy="73152"/>
+          </a:xfrm>
+          <a:prstGeom prst="rect">
+            <a:avLst/>
+          </a:prstGeom>
+          <a:solidFill>
+            <a:srgbClr val="122A4A"/>
+          </a:solidFill>
+          <a:ln>
+            <a:noFill/>
+          </a:ln>
+        </p:spPr>
+        <p:style>
+          <a:lnRef idx="1">
+            <a:schemeClr val="accent1"/>
+          </a:lnRef>
+          <a:fillRef idx="3">
+            <a:schemeClr val="accent1"/>
+          </a:fillRef>
+          <a:effectRef idx="2">
+            <a:schemeClr val="accent1"/>
+          </a:effectRef>
+          <a:fontRef idx="minor">
+            <a:schemeClr val="lt1"/>
+          </a:fontRef>
+        </p:style>
+        <p:txBody>
+          <a:bodyPr rtlCol="0" anchor="ctr"/>
+          <a:lstStyle/>
+          <a:p>
+            <a:pPr algn="ctr"/>
+          </a:p>
+        </p:txBody>
+      </p:sp>
+      <p:sp>
+        <p:nvSpPr>
+          <p:cNvPr id="5" name="TextBox 4"/>
           <p:cNvSpPr txBox="1"/>
           <p:nvPr/>
         </p:nvSpPr>
         <p:spPr>
           <a:xfrm>
-            <a:off x="347472" y="4572000"/>
-            <a:ext cx="5760720" cy="292608"/>
+            <a:off x="347472" y="164592"/>
+            <a:ext cx="9509760" cy="420624"/>
+          </a:xfrm>
+          <a:prstGeom prst="rect">
+            <a:avLst/>
+          </a:prstGeom>
+          <a:noFill/>
+        </p:spPr>
+        <p:txBody>
+          <a:bodyPr wrap="square">
+            <a:spAutoFit/>
+          </a:bodyPr>
+          <a:lstStyle/>
+          <a:p>
+            <a:pPr algn="l"/>
+            <a:r>
+              <a:rPr sz="2400" b="1">
+                <a:solidFill>
+                  <a:srgbClr val="122A4A"/>
+                </a:solidFill>
+                <a:latin typeface="Calibri"/>
+              </a:rPr>
+              <a:t>Noodles price point — and where Unilever sits</a:t>
+            </a:r>
+          </a:p>
+        </p:txBody>
+      </p:sp>
+      <p:sp>
+        <p:nvSpPr>
+          <p:cNvPr id="6" name="Rectangle 5"/>
+          <p:cNvSpPr/>
+          <p:nvPr/>
+        </p:nvSpPr>
+        <p:spPr>
+          <a:xfrm>
+            <a:off x="347472" y="603504"/>
+            <a:ext cx="2011680" cy="54864"/>
+          </a:xfrm>
+          <a:prstGeom prst="rect">
+            <a:avLst/>
+          </a:prstGeom>
+          <a:solidFill>
+            <a:srgbClr val="D05A1A"/>
+          </a:solidFill>
+          <a:ln>
+            <a:noFill/>
+          </a:ln>
+        </p:spPr>
+        <p:style>
+          <a:lnRef idx="1">
+            <a:schemeClr val="accent1"/>
+          </a:lnRef>
+          <a:fillRef idx="3">
+            <a:schemeClr val="accent1"/>
+          </a:fillRef>
+          <a:effectRef idx="2">
+            <a:schemeClr val="accent1"/>
+          </a:effectRef>
+          <a:fontRef idx="minor">
+            <a:schemeClr val="lt1"/>
+          </a:fontRef>
+        </p:style>
+        <p:txBody>
+          <a:bodyPr rtlCol="0" anchor="ctr"/>
+          <a:lstStyle/>
+          <a:p>
+            <a:pPr algn="ctr"/>
+          </a:p>
+        </p:txBody>
+      </p:sp>
+      <p:pic>
+        <p:nvPicPr>
+          <p:cNvPr id="7" name="Picture 6" descr="smollan_logo_content.png"/>
+          <p:cNvPicPr>
+            <a:picLocks noChangeAspect="1"/>
+          </p:cNvPicPr>
+          <p:nvPr/>
+        </p:nvPicPr>
+        <p:blipFill>
+          <a:blip r:embed="rId2"/>
+          <a:stretch>
+            <a:fillRect/>
+          </a:stretch>
+        </p:blipFill>
+        <p:spPr>
+          <a:xfrm>
+            <a:off x="10104120" y="128016"/>
+            <a:ext cx="1783080" cy="384048"/>
+          </a:xfrm>
+          <a:prstGeom prst="rect">
+            <a:avLst/>
+          </a:prstGeom>
+        </p:spPr>
+      </p:pic>
+      <p:sp>
+        <p:nvSpPr>
+          <p:cNvPr id="8" name="Rectangle 7"/>
+          <p:cNvSpPr/>
+          <p:nvPr/>
+        </p:nvSpPr>
+        <p:spPr>
+          <a:xfrm>
+            <a:off x="0" y="6565392"/>
+            <a:ext cx="12191695" cy="292608"/>
+          </a:xfrm>
+          <a:prstGeom prst="rect">
+            <a:avLst/>
+          </a:prstGeom>
+          <a:solidFill>
+            <a:srgbClr val="F3F5F7"/>
+          </a:solidFill>
+          <a:ln>
+            <a:noFill/>
+          </a:ln>
+        </p:spPr>
+        <p:style>
+          <a:lnRef idx="1">
+            <a:schemeClr val="accent1"/>
+          </a:lnRef>
+          <a:fillRef idx="3">
+            <a:schemeClr val="accent1"/>
+          </a:fillRef>
+          <a:effectRef idx="2">
+            <a:schemeClr val="accent1"/>
+          </a:effectRef>
+          <a:fontRef idx="minor">
+            <a:schemeClr val="lt1"/>
+          </a:fontRef>
+        </p:style>
+        <p:txBody>
+          <a:bodyPr rtlCol="0" anchor="ctr"/>
+          <a:lstStyle/>
+          <a:p>
+            <a:pPr algn="ctr"/>
+          </a:p>
+        </p:txBody>
+      </p:sp>
+      <p:sp>
+        <p:nvSpPr>
+          <p:cNvPr id="9" name="TextBox 8"/>
+          <p:cNvSpPr txBox="1"/>
+          <p:nvPr/>
+        </p:nvSpPr>
+        <p:spPr>
+          <a:xfrm>
+            <a:off x="347472" y="6601968"/>
+            <a:ext cx="8412480" cy="201168"/>
+          </a:xfrm>
+          <a:prstGeom prst="rect">
+            <a:avLst/>
+          </a:prstGeom>
+          <a:noFill/>
+        </p:spPr>
+        <p:txBody>
+          <a:bodyPr wrap="square">
+            <a:spAutoFit/>
+          </a:bodyPr>
+          <a:lstStyle/>
+          <a:p>
+            <a:pPr algn="l"/>
+            <a:r>
+              <a:rPr sz="1100" b="0">
+                <a:solidFill>
+                  <a:srgbClr val="3D4A55"/>
+                </a:solidFill>
+                <a:latin typeface="Calibri"/>
+              </a:rPr>
+              <a:t>South Africa Pasta  ·  12 months Jul 25–Jun 26 vs YA  ·  latest month Jun 26  ·  price = value ÷ volume</a:t>
+            </a:r>
+          </a:p>
+        </p:txBody>
+      </p:sp>
+      <p:sp>
+        <p:nvSpPr>
+          <p:cNvPr id="10" name="TextBox 9"/>
+          <p:cNvSpPr txBox="1"/>
+          <p:nvPr/>
+        </p:nvSpPr>
+        <p:spPr>
+          <a:xfrm>
+            <a:off x="10424160" y="6601968"/>
+            <a:ext cx="1417320" cy="201168"/>
+          </a:xfrm>
+          <a:prstGeom prst="rect">
+            <a:avLst/>
+          </a:prstGeom>
+          <a:noFill/>
+        </p:spPr>
+        <p:txBody>
+          <a:bodyPr wrap="square">
+            <a:spAutoFit/>
+          </a:bodyPr>
+          <a:lstStyle/>
+          <a:p>
+            <a:pPr algn="r"/>
+            <a:r>
+              <a:rPr sz="1100" b="1">
+                <a:solidFill>
+                  <a:srgbClr val="122A4A"/>
+                </a:solidFill>
+                <a:latin typeface="Calibri"/>
+              </a:rPr>
+              <a:t>4 / 6</a:t>
+            </a:r>
+          </a:p>
+        </p:txBody>
+      </p:sp>
+      <p:sp>
+        <p:nvSpPr>
+          <p:cNvPr id="11" name="TextBox 10"/>
+          <p:cNvSpPr txBox="1"/>
+          <p:nvPr/>
+        </p:nvSpPr>
+        <p:spPr>
+          <a:xfrm>
+            <a:off x="347472" y="786384"/>
+            <a:ext cx="5852160" cy="256032"/>
           </a:xfrm>
           <a:prstGeom prst="rect">
             <a:avLst/>
@@ -7811,21 +8174,115 @@
                 </a:solidFill>
                 <a:latin typeface="Calibri"/>
               </a:rPr>
-              <a:t>Price ladder (typical unit)</a:t>
-            </a:r>
-          </a:p>
-        </p:txBody>
-      </p:sp>
-      <p:sp>
-        <p:nvSpPr>
-          <p:cNvPr id="36" name="Rectangle 35"/>
+              <a:t>Typical unit pack price</a:t>
+            </a:r>
+          </a:p>
+        </p:txBody>
+      </p:sp>
+      <p:pic>
+        <p:nvPicPr>
+          <p:cNvPr id="12" name="Picture 11" descr="data_price.png"/>
+          <p:cNvPicPr>
+            <a:picLocks noChangeAspect="1"/>
+          </p:cNvPicPr>
+          <p:nvPr/>
+        </p:nvPicPr>
+        <p:blipFill>
+          <a:blip r:embed="rId3"/>
+          <a:stretch>
+            <a:fillRect/>
+          </a:stretch>
+        </p:blipFill>
+        <p:spPr>
+          <a:xfrm>
+            <a:off x="201168" y="1060704"/>
+            <a:ext cx="5989320" cy="3868102"/>
+          </a:xfrm>
+          <a:prstGeom prst="rect">
+            <a:avLst/>
+          </a:prstGeom>
+        </p:spPr>
+      </p:pic>
+      <p:sp>
+        <p:nvSpPr>
+          <p:cNvPr id="13" name="TextBox 12"/>
+          <p:cNvSpPr txBox="1"/>
+          <p:nvPr/>
+        </p:nvSpPr>
+        <p:spPr>
+          <a:xfrm>
+            <a:off x="347472" y="5047488"/>
+            <a:ext cx="5852160" cy="502920"/>
+          </a:xfrm>
+          <a:prstGeom prst="rect">
+            <a:avLst/>
+          </a:prstGeom>
+          <a:noFill/>
+        </p:spPr>
+        <p:txBody>
+          <a:bodyPr wrap="square">
+            <a:spAutoFit/>
+          </a:bodyPr>
+          <a:lstStyle/>
+          <a:p>
+            <a:pPr algn="l"/>
+            <a:r>
+              <a:rPr sz="1300" b="0">
+                <a:solidFill>
+                  <a:srgbClr val="111111"/>
+                </a:solidFill>
+                <a:latin typeface="Calibri"/>
+              </a:rPr>
+              <a:t>Typical unit = volume-weighted R/kg × pack size. Sachets sit at R5.88–R7.90. Knorr is ~8× that.</a:t>
+            </a:r>
+          </a:p>
+        </p:txBody>
+      </p:sp>
+      <p:sp>
+        <p:nvSpPr>
+          <p:cNvPr id="14" name="TextBox 13"/>
+          <p:cNvSpPr txBox="1"/>
+          <p:nvPr/>
+        </p:nvSpPr>
+        <p:spPr>
+          <a:xfrm>
+            <a:off x="6309360" y="786384"/>
+            <a:ext cx="5532120" cy="256032"/>
+          </a:xfrm>
+          <a:prstGeom prst="rect">
+            <a:avLst/>
+          </a:prstGeom>
+          <a:noFill/>
+        </p:spPr>
+        <p:txBody>
+          <a:bodyPr wrap="square">
+            <a:spAutoFit/>
+          </a:bodyPr>
+          <a:lstStyle/>
+          <a:p>
+            <a:pPr algn="l"/>
+            <a:r>
+              <a:rPr sz="1600" b="1">
+                <a:solidFill>
+                  <a:srgbClr val="122A4A"/>
+                </a:solidFill>
+                <a:latin typeface="Calibri"/>
+              </a:rPr>
+              <a:t>Unilever SKUs — June 2026 only</a:t>
+            </a:r>
+          </a:p>
+        </p:txBody>
+      </p:sp>
+      <p:sp>
+        <p:nvSpPr>
+          <p:cNvPr id="15" name="Rectangle 14"/>
           <p:cNvSpPr/>
           <p:nvPr/>
         </p:nvSpPr>
         <p:spPr>
           <a:xfrm>
-            <a:off x="347472" y="4974336"/>
-            <a:ext cx="2788920" cy="676656"/>
+            <a:off x="6309360" y="1097280"/>
+            <a:ext cx="5532120" cy="1417320"/>
           </a:xfrm>
           <a:prstGeom prst="rect">
             <a:avLst/>
@@ -7863,593 +8320,14 @@
       </p:sp>
       <p:sp>
         <p:nvSpPr>
-          <p:cNvPr id="37" name="Rectangle 36"/>
+          <p:cNvPr id="16" name="Rectangle 15"/>
           <p:cNvSpPr/>
           <p:nvPr/>
         </p:nvSpPr>
         <p:spPr>
           <a:xfrm>
-            <a:off x="347472" y="4974336"/>
-            <a:ext cx="82296" cy="676656"/>
-          </a:xfrm>
-          <a:prstGeom prst="rect">
-            <a:avLst/>
-          </a:prstGeom>
-          <a:solidFill>
-            <a:srgbClr val="1F5FA8"/>
-          </a:solidFill>
-          <a:ln>
-            <a:noFill/>
-          </a:ln>
-        </p:spPr>
-        <p:style>
-          <a:lnRef idx="1">
-            <a:schemeClr val="accent1"/>
-          </a:lnRef>
-          <a:fillRef idx="3">
-            <a:schemeClr val="accent1"/>
-          </a:fillRef>
-          <a:effectRef idx="2">
-            <a:schemeClr val="accent1"/>
-          </a:effectRef>
-          <a:fontRef idx="minor">
-            <a:schemeClr val="lt1"/>
-          </a:fontRef>
-        </p:style>
-        <p:txBody>
-          <a:bodyPr rtlCol="0" anchor="ctr"/>
-          <a:lstStyle/>
-          <a:p>
-            <a:pPr algn="ctr"/>
-          </a:p>
-        </p:txBody>
-      </p:sp>
-      <p:sp>
-        <p:nvSpPr>
-          <p:cNvPr id="38" name="TextBox 37"/>
-          <p:cNvSpPr txBox="1"/>
-          <p:nvPr/>
-        </p:nvSpPr>
-        <p:spPr>
-          <a:xfrm>
-            <a:off x="530352" y="5020056"/>
-            <a:ext cx="2487168" cy="182880"/>
-          </a:xfrm>
-          <a:prstGeom prst="rect">
-            <a:avLst/>
-          </a:prstGeom>
-          <a:noFill/>
-        </p:spPr>
-        <p:txBody>
-          <a:bodyPr wrap="square">
-            <a:spAutoFit/>
-          </a:bodyPr>
-          <a:lstStyle/>
-          <a:p>
-            <a:pPr algn="l"/>
-            <a:r>
-              <a:rPr sz="1100" b="1">
-                <a:solidFill>
-                  <a:srgbClr val="3D4A55"/>
-                </a:solidFill>
-                <a:latin typeface="Calibri"/>
-              </a:rPr>
-              <a:t>ROKA</a:t>
-            </a:r>
-          </a:p>
-        </p:txBody>
-      </p:sp>
-      <p:sp>
-        <p:nvSpPr>
-          <p:cNvPr id="39" name="TextBox 38"/>
-          <p:cNvSpPr txBox="1"/>
-          <p:nvPr/>
-        </p:nvSpPr>
-        <p:spPr>
-          <a:xfrm>
-            <a:off x="530352" y="5193792"/>
-            <a:ext cx="2487168" cy="237744"/>
-          </a:xfrm>
-          <a:prstGeom prst="rect">
-            <a:avLst/>
-          </a:prstGeom>
-          <a:noFill/>
-        </p:spPr>
-        <p:txBody>
-          <a:bodyPr wrap="square">
-            <a:spAutoFit/>
-          </a:bodyPr>
-          <a:lstStyle/>
-          <a:p>
-            <a:pPr algn="l"/>
-            <a:r>
-              <a:rPr sz="2000" b="1">
-                <a:solidFill>
-                  <a:srgbClr val="122A4A"/>
-                </a:solidFill>
-                <a:latin typeface="Calibri"/>
-              </a:rPr>
-              <a:t>R5.88</a:t>
-            </a:r>
-          </a:p>
-        </p:txBody>
-      </p:sp>
-      <p:sp>
-        <p:nvSpPr>
-          <p:cNvPr id="40" name="TextBox 39"/>
-          <p:cNvSpPr txBox="1"/>
-          <p:nvPr/>
-        </p:nvSpPr>
-        <p:spPr>
-          <a:xfrm>
-            <a:off x="530352" y="5431536"/>
-            <a:ext cx="2487168" cy="182880"/>
-          </a:xfrm>
-          <a:prstGeom prst="rect">
-            <a:avLst/>
-          </a:prstGeom>
-          <a:noFill/>
-        </p:spPr>
-        <p:txBody>
-          <a:bodyPr wrap="square">
-            <a:spAutoFit/>
-          </a:bodyPr>
-          <a:lstStyle/>
-          <a:p>
-            <a:pPr algn="l"/>
-            <a:r>
-              <a:rPr sz="1200" b="0">
-                <a:solidFill>
-                  <a:srgbClr val="111111"/>
-                </a:solidFill>
-                <a:latin typeface="Calibri"/>
-              </a:rPr>
-              <a:t>Value sachet</a:t>
-            </a:r>
-          </a:p>
-        </p:txBody>
-      </p:sp>
-      <p:sp>
-        <p:nvSpPr>
-          <p:cNvPr id="41" name="Rectangle 40"/>
-          <p:cNvSpPr/>
-          <p:nvPr/>
-        </p:nvSpPr>
-        <p:spPr>
-          <a:xfrm>
-            <a:off x="3273552" y="4974336"/>
-            <a:ext cx="2788920" cy="676656"/>
-          </a:xfrm>
-          <a:prstGeom prst="rect">
-            <a:avLst/>
-          </a:prstGeom>
-          <a:solidFill>
-            <a:srgbClr val="F3F5F7"/>
-          </a:solidFill>
-          <a:ln w="12700">
-            <a:solidFill>
-              <a:srgbClr val="C8D0D8"/>
-            </a:solidFill>
-          </a:ln>
-        </p:spPr>
-        <p:style>
-          <a:lnRef idx="1">
-            <a:schemeClr val="accent1"/>
-          </a:lnRef>
-          <a:fillRef idx="3">
-            <a:schemeClr val="accent1"/>
-          </a:fillRef>
-          <a:effectRef idx="2">
-            <a:schemeClr val="accent1"/>
-          </a:effectRef>
-          <a:fontRef idx="minor">
-            <a:schemeClr val="lt1"/>
-          </a:fontRef>
-        </p:style>
-        <p:txBody>
-          <a:bodyPr rtlCol="0" anchor="ctr"/>
-          <a:lstStyle/>
-          <a:p>
-            <a:pPr algn="ctr"/>
-          </a:p>
-        </p:txBody>
-      </p:sp>
-      <p:sp>
-        <p:nvSpPr>
-          <p:cNvPr id="42" name="Rectangle 41"/>
-          <p:cNvSpPr/>
-          <p:nvPr/>
-        </p:nvSpPr>
-        <p:spPr>
-          <a:xfrm>
-            <a:off x="3273552" y="4974336"/>
-            <a:ext cx="82296" cy="676656"/>
-          </a:xfrm>
-          <a:prstGeom prst="rect">
-            <a:avLst/>
-          </a:prstGeom>
-          <a:solidFill>
-            <a:srgbClr val="1F5FA8"/>
-          </a:solidFill>
-          <a:ln>
-            <a:noFill/>
-          </a:ln>
-        </p:spPr>
-        <p:style>
-          <a:lnRef idx="1">
-            <a:schemeClr val="accent1"/>
-          </a:lnRef>
-          <a:fillRef idx="3">
-            <a:schemeClr val="accent1"/>
-          </a:fillRef>
-          <a:effectRef idx="2">
-            <a:schemeClr val="accent1"/>
-          </a:effectRef>
-          <a:fontRef idx="minor">
-            <a:schemeClr val="lt1"/>
-          </a:fontRef>
-        </p:style>
-        <p:txBody>
-          <a:bodyPr rtlCol="0" anchor="ctr"/>
-          <a:lstStyle/>
-          <a:p>
-            <a:pPr algn="ctr"/>
-          </a:p>
-        </p:txBody>
-      </p:sp>
-      <p:sp>
-        <p:nvSpPr>
-          <p:cNvPr id="43" name="TextBox 42"/>
-          <p:cNvSpPr txBox="1"/>
-          <p:nvPr/>
-        </p:nvSpPr>
-        <p:spPr>
-          <a:xfrm>
-            <a:off x="3456432" y="5020056"/>
-            <a:ext cx="2487168" cy="182880"/>
-          </a:xfrm>
-          <a:prstGeom prst="rect">
-            <a:avLst/>
-          </a:prstGeom>
-          <a:noFill/>
-        </p:spPr>
-        <p:txBody>
-          <a:bodyPr wrap="square">
-            <a:spAutoFit/>
-          </a:bodyPr>
-          <a:lstStyle/>
-          <a:p>
-            <a:pPr algn="l"/>
-            <a:r>
-              <a:rPr sz="1100" b="1">
-                <a:solidFill>
-                  <a:srgbClr val="3D4A55"/>
-                </a:solidFill>
-                <a:latin typeface="Calibri"/>
-              </a:rPr>
-              <a:t>KELLOGG'S</a:t>
-            </a:r>
-          </a:p>
-        </p:txBody>
-      </p:sp>
-      <p:sp>
-        <p:nvSpPr>
-          <p:cNvPr id="44" name="TextBox 43"/>
-          <p:cNvSpPr txBox="1"/>
-          <p:nvPr/>
-        </p:nvSpPr>
-        <p:spPr>
-          <a:xfrm>
-            <a:off x="3456432" y="5193792"/>
-            <a:ext cx="2487168" cy="237744"/>
-          </a:xfrm>
-          <a:prstGeom prst="rect">
-            <a:avLst/>
-          </a:prstGeom>
-          <a:noFill/>
-        </p:spPr>
-        <p:txBody>
-          <a:bodyPr wrap="square">
-            <a:spAutoFit/>
-          </a:bodyPr>
-          <a:lstStyle/>
-          <a:p>
-            <a:pPr algn="l"/>
-            <a:r>
-              <a:rPr sz="2000" b="1">
-                <a:solidFill>
-                  <a:srgbClr val="122A4A"/>
-                </a:solidFill>
-                <a:latin typeface="Calibri"/>
-              </a:rPr>
-              <a:t>R6.09</a:t>
-            </a:r>
-          </a:p>
-        </p:txBody>
-      </p:sp>
-      <p:sp>
-        <p:nvSpPr>
-          <p:cNvPr id="45" name="TextBox 44"/>
-          <p:cNvSpPr txBox="1"/>
-          <p:nvPr/>
-        </p:nvSpPr>
-        <p:spPr>
-          <a:xfrm>
-            <a:off x="3456432" y="5431536"/>
-            <a:ext cx="2487168" cy="182880"/>
-          </a:xfrm>
-          <a:prstGeom prst="rect">
-            <a:avLst/>
-          </a:prstGeom>
-          <a:noFill/>
-        </p:spPr>
-        <p:txBody>
-          <a:bodyPr wrap="square">
-            <a:spAutoFit/>
-          </a:bodyPr>
-          <a:lstStyle/>
-          <a:p>
-            <a:pPr algn="l"/>
-            <a:r>
-              <a:rPr sz="1200" b="0">
-                <a:solidFill>
-                  <a:srgbClr val="111111"/>
-                </a:solidFill>
-                <a:latin typeface="Calibri"/>
-              </a:rPr>
-              <a:t>Maggi R6.79  ·  Indomie R7.90</a:t>
-            </a:r>
-          </a:p>
-        </p:txBody>
-      </p:sp>
-      <p:sp>
-        <p:nvSpPr>
-          <p:cNvPr id="46" name="Rectangle 45"/>
-          <p:cNvSpPr/>
-          <p:nvPr/>
-        </p:nvSpPr>
-        <p:spPr>
-          <a:xfrm>
-            <a:off x="347472" y="5724144"/>
-            <a:ext cx="2788920" cy="676656"/>
-          </a:xfrm>
-          <a:prstGeom prst="rect">
-            <a:avLst/>
-          </a:prstGeom>
-          <a:solidFill>
-            <a:srgbClr val="F3F5F7"/>
-          </a:solidFill>
-          <a:ln w="12700">
-            <a:solidFill>
-              <a:srgbClr val="C8D0D8"/>
-            </a:solidFill>
-          </a:ln>
-        </p:spPr>
-        <p:style>
-          <a:lnRef idx="1">
-            <a:schemeClr val="accent1"/>
-          </a:lnRef>
-          <a:fillRef idx="3">
-            <a:schemeClr val="accent1"/>
-          </a:fillRef>
-          <a:effectRef idx="2">
-            <a:schemeClr val="accent1"/>
-          </a:effectRef>
-          <a:fontRef idx="minor">
-            <a:schemeClr val="lt1"/>
-          </a:fontRef>
-        </p:style>
-        <p:txBody>
-          <a:bodyPr rtlCol="0" anchor="ctr"/>
-          <a:lstStyle/>
-          <a:p>
-            <a:pPr algn="ctr"/>
-          </a:p>
-        </p:txBody>
-      </p:sp>
-      <p:sp>
-        <p:nvSpPr>
-          <p:cNvPr id="47" name="Rectangle 46"/>
-          <p:cNvSpPr/>
-          <p:nvPr/>
-        </p:nvSpPr>
-        <p:spPr>
-          <a:xfrm>
-            <a:off x="347472" y="5724144"/>
-            <a:ext cx="82296" cy="676656"/>
-          </a:xfrm>
-          <a:prstGeom prst="rect">
-            <a:avLst/>
-          </a:prstGeom>
-          <a:solidFill>
-            <a:srgbClr val="0E7C7B"/>
-          </a:solidFill>
-          <a:ln>
-            <a:noFill/>
-          </a:ln>
-        </p:spPr>
-        <p:style>
-          <a:lnRef idx="1">
-            <a:schemeClr val="accent1"/>
-          </a:lnRef>
-          <a:fillRef idx="3">
-            <a:schemeClr val="accent1"/>
-          </a:fillRef>
-          <a:effectRef idx="2">
-            <a:schemeClr val="accent1"/>
-          </a:effectRef>
-          <a:fontRef idx="minor">
-            <a:schemeClr val="lt1"/>
-          </a:fontRef>
-        </p:style>
-        <p:txBody>
-          <a:bodyPr rtlCol="0" anchor="ctr"/>
-          <a:lstStyle/>
-          <a:p>
-            <a:pPr algn="ctr"/>
-          </a:p>
-        </p:txBody>
-      </p:sp>
-      <p:sp>
-        <p:nvSpPr>
-          <p:cNvPr id="48" name="TextBox 47"/>
-          <p:cNvSpPr txBox="1"/>
-          <p:nvPr/>
-        </p:nvSpPr>
-        <p:spPr>
-          <a:xfrm>
-            <a:off x="530352" y="5769864"/>
-            <a:ext cx="2487168" cy="182880"/>
-          </a:xfrm>
-          <a:prstGeom prst="rect">
-            <a:avLst/>
-          </a:prstGeom>
-          <a:noFill/>
-        </p:spPr>
-        <p:txBody>
-          <a:bodyPr wrap="square">
-            <a:spAutoFit/>
-          </a:bodyPr>
-          <a:lstStyle/>
-          <a:p>
-            <a:pPr algn="l"/>
-            <a:r>
-              <a:rPr sz="1100" b="1">
-                <a:solidFill>
-                  <a:srgbClr val="3D4A55"/>
-                </a:solidFill>
-                <a:latin typeface="Calibri"/>
-              </a:rPr>
-              <a:t>SAMYANG</a:t>
-            </a:r>
-          </a:p>
-        </p:txBody>
-      </p:sp>
-      <p:sp>
-        <p:nvSpPr>
-          <p:cNvPr id="49" name="TextBox 48"/>
-          <p:cNvSpPr txBox="1"/>
-          <p:nvPr/>
-        </p:nvSpPr>
-        <p:spPr>
-          <a:xfrm>
-            <a:off x="530352" y="5943600"/>
-            <a:ext cx="2487168" cy="237744"/>
-          </a:xfrm>
-          <a:prstGeom prst="rect">
-            <a:avLst/>
-          </a:prstGeom>
-          <a:noFill/>
-        </p:spPr>
-        <p:txBody>
-          <a:bodyPr wrap="square">
-            <a:spAutoFit/>
-          </a:bodyPr>
-          <a:lstStyle/>
-          <a:p>
-            <a:pPr algn="l"/>
-            <a:r>
-              <a:rPr sz="2000" b="1">
-                <a:solidFill>
-                  <a:srgbClr val="122A4A"/>
-                </a:solidFill>
-                <a:latin typeface="Calibri"/>
-              </a:rPr>
-              <a:t>R39.24</a:t>
-            </a:r>
-          </a:p>
-        </p:txBody>
-      </p:sp>
-      <p:sp>
-        <p:nvSpPr>
-          <p:cNvPr id="50" name="TextBox 49"/>
-          <p:cNvSpPr txBox="1"/>
-          <p:nvPr/>
-        </p:nvSpPr>
-        <p:spPr>
-          <a:xfrm>
-            <a:off x="530352" y="6181344"/>
-            <a:ext cx="2487168" cy="182880"/>
-          </a:xfrm>
-          <a:prstGeom prst="rect">
-            <a:avLst/>
-          </a:prstGeom>
-          <a:noFill/>
-        </p:spPr>
-        <p:txBody>
-          <a:bodyPr wrap="square">
-            <a:spAutoFit/>
-          </a:bodyPr>
-          <a:lstStyle/>
-          <a:p>
-            <a:pPr algn="l"/>
-            <a:r>
-              <a:rPr sz="1200" b="0">
-                <a:solidFill>
-                  <a:srgbClr val="111111"/>
-                </a:solidFill>
-                <a:latin typeface="Calibri"/>
-              </a:rPr>
-              <a:t>Ramen / cup</a:t>
-            </a:r>
-          </a:p>
-        </p:txBody>
-      </p:sp>
-      <p:sp>
-        <p:nvSpPr>
-          <p:cNvPr id="51" name="Rectangle 50"/>
-          <p:cNvSpPr/>
-          <p:nvPr/>
-        </p:nvSpPr>
-        <p:spPr>
-          <a:xfrm>
-            <a:off x="3273552" y="5724144"/>
-            <a:ext cx="2788920" cy="676656"/>
-          </a:xfrm>
-          <a:prstGeom prst="rect">
-            <a:avLst/>
-          </a:prstGeom>
-          <a:solidFill>
-            <a:srgbClr val="F3F5F7"/>
-          </a:solidFill>
-          <a:ln w="12700">
-            <a:solidFill>
-              <a:srgbClr val="C8D0D8"/>
-            </a:solidFill>
-          </a:ln>
-        </p:spPr>
-        <p:style>
-          <a:lnRef idx="1">
-            <a:schemeClr val="accent1"/>
-          </a:lnRef>
-          <a:fillRef idx="3">
-            <a:schemeClr val="accent1"/>
-          </a:fillRef>
-          <a:effectRef idx="2">
-            <a:schemeClr val="accent1"/>
-          </a:effectRef>
-          <a:fontRef idx="minor">
-            <a:schemeClr val="lt1"/>
-          </a:fontRef>
-        </p:style>
-        <p:txBody>
-          <a:bodyPr rtlCol="0" anchor="ctr"/>
-          <a:lstStyle/>
-          <a:p>
-            <a:pPr algn="ctr"/>
-          </a:p>
-        </p:txBody>
-      </p:sp>
-      <p:sp>
-        <p:nvSpPr>
-          <p:cNvPr id="52" name="Rectangle 51"/>
-          <p:cNvSpPr/>
-          <p:nvPr/>
-        </p:nvSpPr>
-        <p:spPr>
-          <a:xfrm>
-            <a:off x="3273552" y="5724144"/>
-            <a:ext cx="82296" cy="676656"/>
+            <a:off x="6309360" y="1097280"/>
+            <a:ext cx="82296" cy="1417320"/>
           </a:xfrm>
           <a:prstGeom prst="rect">
             <a:avLst/>
@@ -8485,119 +8363,14 @@
       </p:sp>
       <p:sp>
         <p:nvSpPr>
-          <p:cNvPr id="53" name="TextBox 52"/>
+          <p:cNvPr id="17" name="TextBox 16"/>
           <p:cNvSpPr txBox="1"/>
           <p:nvPr/>
         </p:nvSpPr>
         <p:spPr>
           <a:xfrm>
-            <a:off x="3456432" y="5769864"/>
-            <a:ext cx="2487168" cy="182880"/>
-          </a:xfrm>
-          <a:prstGeom prst="rect">
-            <a:avLst/>
-          </a:prstGeom>
-          <a:noFill/>
-        </p:spPr>
-        <p:txBody>
-          <a:bodyPr wrap="square">
-            <a:spAutoFit/>
-          </a:bodyPr>
-          <a:lstStyle/>
-          <a:p>
-            <a:pPr algn="l"/>
-            <a:r>
-              <a:rPr sz="1100" b="1">
-                <a:solidFill>
-                  <a:srgbClr val="3D4A55"/>
-                </a:solidFill>
-                <a:latin typeface="Calibri"/>
-              </a:rPr>
-              <a:t>KNORR</a:t>
-            </a:r>
-          </a:p>
-        </p:txBody>
-      </p:sp>
-      <p:sp>
-        <p:nvSpPr>
-          <p:cNvPr id="54" name="TextBox 53"/>
-          <p:cNvSpPr txBox="1"/>
-          <p:nvPr/>
-        </p:nvSpPr>
-        <p:spPr>
-          <a:xfrm>
-            <a:off x="3456432" y="5943600"/>
-            <a:ext cx="2487168" cy="237744"/>
-          </a:xfrm>
-          <a:prstGeom prst="rect">
-            <a:avLst/>
-          </a:prstGeom>
-          <a:noFill/>
-        </p:spPr>
-        <p:txBody>
-          <a:bodyPr wrap="square">
-            <a:spAutoFit/>
-          </a:bodyPr>
-          <a:lstStyle/>
-          <a:p>
-            <a:pPr algn="l"/>
-            <a:r>
-              <a:rPr sz="2000" b="1">
-                <a:solidFill>
-                  <a:srgbClr val="122A4A"/>
-                </a:solidFill>
-                <a:latin typeface="Calibri"/>
-              </a:rPr>
-              <a:t>R49.11</a:t>
-            </a:r>
-          </a:p>
-        </p:txBody>
-      </p:sp>
-      <p:sp>
-        <p:nvSpPr>
-          <p:cNvPr id="55" name="TextBox 54"/>
-          <p:cNvSpPr txBox="1"/>
-          <p:nvPr/>
-        </p:nvSpPr>
-        <p:spPr>
-          <a:xfrm>
-            <a:off x="3456432" y="6181344"/>
-            <a:ext cx="2487168" cy="182880"/>
-          </a:xfrm>
-          <a:prstGeom prst="rect">
-            <a:avLst/>
-          </a:prstGeom>
-          <a:noFill/>
-        </p:spPr>
-        <p:txBody>
-          <a:bodyPr wrap="square">
-            <a:spAutoFit/>
-          </a:bodyPr>
-          <a:lstStyle/>
-          <a:p>
-            <a:pPr algn="l"/>
-            <a:r>
-              <a:rPr sz="1200" b="0">
-                <a:solidFill>
-                  <a:srgbClr val="111111"/>
-                </a:solidFill>
-                <a:latin typeface="Calibri"/>
-              </a:rPr>
-              <a:t>Pasta Pots  ·  ~8× sachet</a:t>
-            </a:r>
-          </a:p>
-        </p:txBody>
-      </p:sp>
-      <p:sp>
-        <p:nvSpPr>
-          <p:cNvPr id="56" name="TextBox 55"/>
-          <p:cNvSpPr txBox="1"/>
-          <p:nvPr/>
-        </p:nvSpPr>
-        <p:spPr>
-          <a:xfrm>
-            <a:off x="6217920" y="4572000"/>
-            <a:ext cx="5577840" cy="292608"/>
+            <a:off x="6547104" y="1188720"/>
+            <a:ext cx="5120640" cy="292608"/>
           </a:xfrm>
           <a:prstGeom prst="rect">
             <a:avLst/>
@@ -8618,22 +8391,57 @@
                 </a:solidFill>
                 <a:latin typeface="Calibri"/>
               </a:rPr>
-              <a:t>Unilever SKUs — June 2026 only</a:t>
+              <a:t>Pasta Pots are not a sachet</a:t>
+            </a:r>
+          </a:p>
+        </p:txBody>
+      </p:sp>
+      <p:sp>
+        <p:nvSpPr>
+          <p:cNvPr id="18" name="TextBox 17"/>
+          <p:cNvSpPr txBox="1"/>
+          <p:nvPr/>
+        </p:nvSpPr>
+        <p:spPr>
+          <a:xfrm>
+            <a:off x="6547104" y="1499616"/>
+            <a:ext cx="5120640" cy="896112"/>
+          </a:xfrm>
+          <a:prstGeom prst="rect">
+            <a:avLst/>
+          </a:prstGeom>
+          <a:noFill/>
+        </p:spPr>
+        <p:txBody>
+          <a:bodyPr wrap="square">
+            <a:spAutoFit/>
+          </a:bodyPr>
+          <a:lstStyle/>
+          <a:p>
+            <a:pPr algn="l"/>
+            <a:r>
+              <a:rPr sz="1400" b="0">
+                <a:solidFill>
+                  <a:srgbClr val="111111"/>
+                </a:solidFill>
+                <a:latin typeface="Calibri"/>
+              </a:rPr>
+              <a:t>86% of noodles value is R5–8 a pack. Knorr Pasta Pots are R49 a pot / ~R790/kg, 0.56% of Noodles in June (R1.24m). Hold R49; do not promo into the R6 band.</a:t>
             </a:r>
           </a:p>
         </p:txBody>
       </p:sp>
       <p:graphicFrame>
         <p:nvGraphicFramePr>
-          <p:cNvPr id="57" name="Table 56"/>
+          <p:cNvPr id="19" name="Table 18"/>
           <p:cNvGraphicFramePr>
             <a:graphicFrameLocks noGrp="1"/>
           </p:cNvGraphicFramePr>
           <p:nvPr/>
         </p:nvGraphicFramePr>
         <p:xfrm>
-          <a:off x="6217920" y="5047488"/>
-          <a:ext cx="5623560" cy="1417320"/>
+          <a:off x="6309360" y="2670048"/>
+          <a:ext cx="5532120" cy="1965960"/>
         </p:xfrm>
         <a:graphic>
           <a:graphicData uri="http://schemas.openxmlformats.org/drawingml/2006/table">
@@ -8642,12 +8450,12 @@
                 <a:tableStyleId>{5C22544A-7EE6-4342-B048-85BDC9FD1C3A}</a:tableStyleId>
               </a:tblPr>
               <a:tblGrid>
-                <a:gridCol w="2194560"/>
-                <a:gridCol w="1097280"/>
+                <a:gridCol w="2148840"/>
+                <a:gridCol w="1051560"/>
                 <a:gridCol w="1051560"/>
                 <a:gridCol w="1280160"/>
               </a:tblGrid>
-              <a:tr h="354330">
+              <a:tr h="491490">
                 <a:tc>
                   <a:txBody>
                     <a:bodyPr/>
@@ -8741,7 +8549,7 @@
                   </a:tcPr>
                 </a:tc>
               </a:tr>
-              <a:tr h="354330">
+              <a:tr h="491490">
                 <a:tc>
                   <a:txBody>
                     <a:bodyPr/>
@@ -8835,7 +8643,7 @@
                   </a:tcPr>
                 </a:tc>
               </a:tr>
-              <a:tr h="354330">
+              <a:tr h="491490">
                 <a:tc>
                   <a:txBody>
                     <a:bodyPr/>
@@ -8929,7 +8737,7 @@
                   </a:tcPr>
                 </a:tc>
               </a:tr>
-              <a:tr h="354330">
+              <a:tr h="491490">
                 <a:tc>
                   <a:txBody>
                     <a:bodyPr/>
@@ -9027,6 +8835,41 @@
           </a:graphicData>
         </a:graphic>
       </p:graphicFrame>
+      <p:sp>
+        <p:nvSpPr>
+          <p:cNvPr id="20" name="TextBox 19"/>
+          <p:cNvSpPr txBox="1"/>
+          <p:nvPr/>
+        </p:nvSpPr>
+        <p:spPr>
+          <a:xfrm>
+            <a:off x="6309360" y="4773168"/>
+            <a:ext cx="5532120" cy="1554480"/>
+          </a:xfrm>
+          <a:prstGeom prst="rect">
+            <a:avLst/>
+          </a:prstGeom>
+          <a:noFill/>
+        </p:spPr>
+        <p:txBody>
+          <a:bodyPr wrap="square">
+            <a:spAutoFit/>
+          </a:bodyPr>
+          <a:lstStyle/>
+          <a:p>
+            <a:pPr algn="l"/>
+            <a:r>
+              <a:rPr sz="1400" b="0">
+                <a:solidFill>
+                  <a:srgbClr val="111111"/>
+                </a:solidFill>
+                <a:latin typeface="Calibri"/>
+              </a:rPr>
+              <a:t>Not in the file before June. Carbonara is 49% of the line. The three SKUs compete with each other first. Samyang (~R39) is the nearer competitor, not Maggi or Kellogg's.</a:t>
+            </a:r>
+          </a:p>
+        </p:txBody>
+      </p:sp>
     </p:spTree>
   </p:cSld>
   <p:clrMapOvr>
@@ -9035,7 +8878,7 @@
 </p:sld>
 </file>
 
-<file path=ppt/slides/slide4.xml><?xml version="1.0" encoding="utf-8"?>
+<file path=ppt/slides/slide5.xml><?xml version="1.0" encoding="utf-8"?>
 <p:sld xmlns:a="http://schemas.openxmlformats.org/drawingml/2006/main" xmlns:p="http://schemas.openxmlformats.org/presentationml/2006/main" xmlns:r="http://schemas.openxmlformats.org/officeDocument/2006/relationships">
   <p:cSld>
     <p:spTree>
@@ -9384,7 +9227,7 @@
                 </a:solidFill>
                 <a:latin typeface="Calibri"/>
               </a:rPr>
-              <a:t>4 / 5</a:t>
+              <a:t>5 / 6</a:t>
             </a:r>
           </a:p>
         </p:txBody>
@@ -10169,7 +10012,7 @@
 </p:sld>
 </file>
 
-<file path=ppt/slides/slide5.xml><?xml version="1.0" encoding="utf-8"?>
+<file path=ppt/slides/slide6.xml><?xml version="1.0" encoding="utf-8"?>
 <p:sld xmlns:a="http://schemas.openxmlformats.org/drawingml/2006/main" xmlns:p="http://schemas.openxmlformats.org/presentationml/2006/main" xmlns:r="http://schemas.openxmlformats.org/officeDocument/2006/relationships">
   <p:cSld>
     <p:spTree>
